--- a/presentation/rag_obsidian_deck.pptx
+++ b/presentation/rag_obsidian_deck.pptx
@@ -6305,7 +6305,7 @@
                 <a:ea typeface="Pretendard"/>
                 <a:cs typeface="Pretendard"/>
               </a:rPr>
-              <a:t>v0.3.0 · github.com/grotyx/rag-obsidian</a:t>
+              <a:t>v0.4.0 · github.com/grotyx/rag-obsidian</a:t>
             </a:r>
           </a:p>
         </p:txBody>
@@ -7924,7 +7924,7 @@
                 <a:ea typeface="Pretendard"/>
                 <a:cs typeface="Pretendard"/>
               </a:rPr>
-              <a:t>현재 v0.3.0 · 개발 빌드로 사용 중 · 공개 배포 예정</a:t>
+              <a:t>현재 v0.4.0 · 개발 빌드로 사용 중 · 공개 배포 예정</a:t>
             </a:r>
           </a:p>
         </p:txBody>

--- a/presentation/rag_obsidian_deck.pptx
+++ b/presentation/rag_obsidian_deck.pptx
@@ -21,6 +21,7 @@
     <p:sldId id="269" r:id="rId20"/>
     <p:sldId id="270" r:id="rId21"/>
     <p:sldId id="271" r:id="rId22"/>
+    <p:sldId id="272" r:id="rId23"/>
   </p:sldIdLst>
   <p:sldSz cx="12191695" cy="6858000" type="screen4x3"/>
   <p:notesSz cx="6858000" cy="9144000"/>
@@ -8106,7 +8107,7 @@
                 <a:ea typeface="Pretendard"/>
                 <a:cs typeface="Pretendard"/>
               </a:rPr>
-              <a:t>CONCLUSION</a:t>
+              <a:t>HOW TO USE</a:t>
             </a:r>
           </a:p>
         </p:txBody>
@@ -8147,7 +8148,7 @@
                 <a:ea typeface="Pretendard"/>
                 <a:cs typeface="Pretendard"/>
               </a:rPr>
-              <a:t>Zotero 없이, 서버 없이, 늘 출처와 함께</a:t>
+              <a:t>쓰는 법은 다섯 동작이 전부다</a:t>
             </a:r>
           </a:p>
         </p:txBody>
@@ -8264,18 +8265,1793 @@
       </p:sp>
       <p:sp>
         <p:nvSpPr>
-          <p:cNvPr id="8" name="Rounded Rectangle 7"/>
+          <p:cNvPr id="8" name="TextBox 7"/>
+          <p:cNvSpPr txBox="1"/>
+          <p:nvPr/>
+        </p:nvSpPr>
+        <p:spPr>
+          <a:xfrm>
+            <a:off x="6567403" y="6617421"/>
+            <a:ext cx="5486400" cy="228600"/>
+          </a:xfrm>
+          <a:prstGeom prst="rect">
+            <a:avLst/>
+          </a:prstGeom>
+          <a:noFill/>
+        </p:spPr>
+        <p:txBody>
+          <a:bodyPr wrap="square" anchor="t" lIns="0" rIns="0" tIns="0" bIns="0">
+            <a:spAutoFit/>
+          </a:bodyPr>
+          <a:lstStyle/>
+          <a:p>
+            <a:pPr algn="r"/>
+            <a:r>
+              <a:rPr sz="800" b="0" i="0" spc="-8">
+                <a:solidFill>
+                  <a:srgbClr val="8E8E93"/>
+                </a:solidFill>
+                <a:latin typeface="Pretendard"/>
+                <a:ea typeface="Pretendard"/>
+                <a:cs typeface="Pretendard"/>
+              </a:rPr>
+              <a:t>명령 팔레트 = Cmd/Ctrl+P · 'RAG'만 쳐도 전부 검색됨</a:t>
+            </a:r>
+          </a:p>
+        </p:txBody>
+      </p:sp>
+      <p:sp>
+        <p:nvSpPr>
+          <p:cNvPr id="9" name="Rounded Rectangle 8"/>
           <p:cNvSpPr/>
           <p:nvPr/>
         </p:nvSpPr>
         <p:spPr>
           <a:xfrm>
-            <a:off x="663122" y="1747509"/>
-            <a:ext cx="3491362" cy="3200400"/>
+            <a:off x="663122" y="1701789"/>
+            <a:ext cx="10876422" cy="676656"/>
           </a:xfrm>
           <a:prstGeom prst="roundRect">
             <a:avLst>
-              <a:gd name="adj" fmla="val 6000"/>
+              <a:gd name="adj" fmla="val 8000"/>
+            </a:avLst>
+          </a:prstGeom>
+          <a:solidFill>
+            <a:srgbClr val="FFFFFF"/>
+          </a:solidFill>
+          <a:ln w="11430">
+            <a:solidFill>
+              <a:srgbClr val="D9D9D9"/>
+            </a:solidFill>
+          </a:ln>
+          <a:effectLst/>
+        </p:spPr>
+        <p:style>
+          <a:lnRef idx="1">
+            <a:schemeClr val="accent1"/>
+          </a:lnRef>
+          <a:fillRef idx="3">
+            <a:schemeClr val="accent1"/>
+          </a:fillRef>
+          <a:effectRef idx="2">
+            <a:schemeClr val="accent1"/>
+          </a:effectRef>
+          <a:fontRef idx="minor">
+            <a:schemeClr val="lt1"/>
+          </a:fontRef>
+        </p:style>
+        <p:txBody>
+          <a:bodyPr rtlCol="0" anchor="ctr"/>
+          <a:lstStyle/>
+          <a:p>
+            <a:pPr algn="ctr"/>
+          </a:p>
+        </p:txBody>
+      </p:sp>
+      <p:sp>
+        <p:nvSpPr>
+          <p:cNvPr id="10" name="Oval 9"/>
+          <p:cNvSpPr/>
+          <p:nvPr/>
+        </p:nvSpPr>
+        <p:spPr>
+          <a:xfrm>
+            <a:off x="864290" y="1857237"/>
+            <a:ext cx="365760" cy="365760"/>
+          </a:xfrm>
+          <a:prstGeom prst="ellipse">
+            <a:avLst/>
+          </a:prstGeom>
+          <a:solidFill>
+            <a:srgbClr val="00754A"/>
+          </a:solidFill>
+          <a:ln>
+            <a:noFill/>
+          </a:ln>
+          <a:effectLst/>
+        </p:spPr>
+        <p:style>
+          <a:lnRef idx="1">
+            <a:schemeClr val="accent1"/>
+          </a:lnRef>
+          <a:fillRef idx="3">
+            <a:schemeClr val="accent1"/>
+          </a:fillRef>
+          <a:effectRef idx="2">
+            <a:schemeClr val="accent1"/>
+          </a:effectRef>
+          <a:fontRef idx="minor">
+            <a:schemeClr val="lt1"/>
+          </a:fontRef>
+        </p:style>
+        <p:txBody>
+          <a:bodyPr rtlCol="0" anchor="ctr"/>
+          <a:lstStyle/>
+          <a:p>
+            <a:pPr algn="ctr"/>
+          </a:p>
+        </p:txBody>
+      </p:sp>
+      <p:sp>
+        <p:nvSpPr>
+          <p:cNvPr id="11" name="TextBox 10"/>
+          <p:cNvSpPr txBox="1"/>
+          <p:nvPr/>
+        </p:nvSpPr>
+        <p:spPr>
+          <a:xfrm>
+            <a:off x="864290" y="1857237"/>
+            <a:ext cx="365760" cy="365760"/>
+          </a:xfrm>
+          <a:prstGeom prst="rect">
+            <a:avLst/>
+          </a:prstGeom>
+          <a:noFill/>
+        </p:spPr>
+        <p:txBody>
+          <a:bodyPr wrap="square" anchor="ctr" lIns="0" rIns="0" tIns="0" bIns="0">
+            <a:spAutoFit/>
+          </a:bodyPr>
+          <a:lstStyle/>
+          <a:p>
+            <a:pPr algn="ctr"/>
+            <a:r>
+              <a:rPr sz="1500" b="1" i="0" spc="-15">
+                <a:solidFill>
+                  <a:srgbClr val="FFFFFF"/>
+                </a:solidFill>
+                <a:latin typeface="Pretendard"/>
+                <a:ea typeface="Pretendard"/>
+                <a:cs typeface="Pretendard"/>
+              </a:rPr>
+              <a:t>1</a:t>
+            </a:r>
+          </a:p>
+        </p:txBody>
+      </p:sp>
+      <p:sp>
+        <p:nvSpPr>
+          <p:cNvPr id="12" name="TextBox 11"/>
+          <p:cNvSpPr txBox="1"/>
+          <p:nvPr/>
+        </p:nvSpPr>
+        <p:spPr>
+          <a:xfrm>
+            <a:off x="1348922" y="1701789"/>
+            <a:ext cx="1783080" cy="676656"/>
+          </a:xfrm>
+          <a:prstGeom prst="rect">
+            <a:avLst/>
+          </a:prstGeom>
+          <a:noFill/>
+        </p:spPr>
+        <p:txBody>
+          <a:bodyPr wrap="square" anchor="ctr" lIns="0" rIns="0" tIns="0" bIns="0">
+            <a:spAutoFit/>
+          </a:bodyPr>
+          <a:lstStyle/>
+          <a:p>
+            <a:pPr algn="l">
+              <a:lnSpc>
+                <a:spcPts val="1800"/>
+              </a:lnSpc>
+            </a:pPr>
+            <a:r>
+              <a:rPr sz="1500" b="1" i="0" spc="-15">
+                <a:solidFill>
+                  <a:srgbClr val="006241"/>
+                </a:solidFill>
+                <a:latin typeface="Pretendard"/>
+                <a:ea typeface="Pretendard"/>
+                <a:cs typeface="Pretendard"/>
+              </a:rPr>
+              <a:t>논문 추가</a:t>
+            </a:r>
+          </a:p>
+        </p:txBody>
+      </p:sp>
+      <p:sp>
+        <p:nvSpPr>
+          <p:cNvPr id="13" name="Rounded Rectangle 12"/>
+          <p:cNvSpPr/>
+          <p:nvPr/>
+        </p:nvSpPr>
+        <p:spPr>
+          <a:xfrm>
+            <a:off x="3177722" y="1820661"/>
+            <a:ext cx="4526280" cy="438912"/>
+          </a:xfrm>
+          <a:prstGeom prst="roundRect">
+            <a:avLst>
+              <a:gd name="adj" fmla="val 12000"/>
+            </a:avLst>
+          </a:prstGeom>
+          <a:solidFill>
+            <a:srgbClr val="F2F0EB"/>
+          </a:solidFill>
+          <a:ln>
+            <a:noFill/>
+          </a:ln>
+          <a:effectLst/>
+        </p:spPr>
+        <p:style>
+          <a:lnRef idx="1">
+            <a:schemeClr val="accent1"/>
+          </a:lnRef>
+          <a:fillRef idx="3">
+            <a:schemeClr val="accent1"/>
+          </a:fillRef>
+          <a:effectRef idx="2">
+            <a:schemeClr val="accent1"/>
+          </a:effectRef>
+          <a:fontRef idx="minor">
+            <a:schemeClr val="lt1"/>
+          </a:fontRef>
+        </p:style>
+        <p:txBody>
+          <a:bodyPr rtlCol="0" anchor="ctr"/>
+          <a:lstStyle/>
+          <a:p>
+            <a:pPr algn="ctr"/>
+          </a:p>
+        </p:txBody>
+      </p:sp>
+      <p:sp>
+        <p:nvSpPr>
+          <p:cNvPr id="14" name="TextBox 13"/>
+          <p:cNvSpPr txBox="1"/>
+          <p:nvPr/>
+        </p:nvSpPr>
+        <p:spPr>
+          <a:xfrm>
+            <a:off x="3314882" y="1820661"/>
+            <a:ext cx="4251960" cy="438912"/>
+          </a:xfrm>
+          <a:prstGeom prst="rect">
+            <a:avLst/>
+          </a:prstGeom>
+          <a:noFill/>
+        </p:spPr>
+        <p:txBody>
+          <a:bodyPr wrap="square" anchor="ctr" lIns="0" rIns="0" tIns="0" bIns="0">
+            <a:spAutoFit/>
+          </a:bodyPr>
+          <a:lstStyle/>
+          <a:p>
+            <a:pPr algn="l">
+              <a:lnSpc>
+                <a:spcPts val="1500"/>
+              </a:lnSpc>
+            </a:pPr>
+            <a:r>
+              <a:rPr sz="1200" b="1" i="0" spc="-12">
+                <a:solidFill>
+                  <a:srgbClr val="00754A"/>
+                </a:solidFill>
+                <a:latin typeface="Pretendard"/>
+                <a:ea typeface="Pretendard"/>
+                <a:cs typeface="Pretendard"/>
+              </a:rPr>
+              <a:t>Cmd+P → “Add reference by DOI / PMID / arXiv”</a:t>
+            </a:r>
+          </a:p>
+        </p:txBody>
+      </p:sp>
+      <p:sp>
+        <p:nvSpPr>
+          <p:cNvPr id="15" name="TextBox 14"/>
+          <p:cNvSpPr txBox="1"/>
+          <p:nvPr/>
+        </p:nvSpPr>
+        <p:spPr>
+          <a:xfrm>
+            <a:off x="7932602" y="1701789"/>
+            <a:ext cx="3469782" cy="676656"/>
+          </a:xfrm>
+          <a:prstGeom prst="rect">
+            <a:avLst/>
+          </a:prstGeom>
+          <a:noFill/>
+        </p:spPr>
+        <p:txBody>
+          <a:bodyPr wrap="square" anchor="ctr" lIns="0" rIns="0" tIns="0" bIns="0">
+            <a:spAutoFit/>
+          </a:bodyPr>
+          <a:lstStyle/>
+          <a:p>
+            <a:pPr algn="l">
+              <a:lnSpc>
+                <a:spcPts val="1600"/>
+              </a:lnSpc>
+            </a:pPr>
+            <a:r>
+              <a:rPr sz="1250" b="0" i="0" spc="-12">
+                <a:solidFill>
+                  <a:srgbClr val="6B6B6B"/>
+                </a:solidFill>
+                <a:latin typeface="Pretendard"/>
+                <a:ea typeface="Pretendard"/>
+                <a:cs typeface="Pretendard"/>
+              </a:rPr>
+              <a:t>DOI·PMID 붙여넣기 → References/에 노트 자동 생성</a:t>
+            </a:r>
+          </a:p>
+        </p:txBody>
+      </p:sp>
+      <p:sp>
+        <p:nvSpPr>
+          <p:cNvPr id="16" name="Rounded Rectangle 15"/>
+          <p:cNvSpPr/>
+          <p:nvPr/>
+        </p:nvSpPr>
+        <p:spPr>
+          <a:xfrm>
+            <a:off x="663122" y="2479029"/>
+            <a:ext cx="10876422" cy="676656"/>
+          </a:xfrm>
+          <a:prstGeom prst="roundRect">
+            <a:avLst>
+              <a:gd name="adj" fmla="val 8000"/>
+            </a:avLst>
+          </a:prstGeom>
+          <a:solidFill>
+            <a:srgbClr val="FFFFFF"/>
+          </a:solidFill>
+          <a:ln w="11430">
+            <a:solidFill>
+              <a:srgbClr val="D9D9D9"/>
+            </a:solidFill>
+          </a:ln>
+          <a:effectLst/>
+        </p:spPr>
+        <p:style>
+          <a:lnRef idx="1">
+            <a:schemeClr val="accent1"/>
+          </a:lnRef>
+          <a:fillRef idx="3">
+            <a:schemeClr val="accent1"/>
+          </a:fillRef>
+          <a:effectRef idx="2">
+            <a:schemeClr val="accent1"/>
+          </a:effectRef>
+          <a:fontRef idx="minor">
+            <a:schemeClr val="lt1"/>
+          </a:fontRef>
+        </p:style>
+        <p:txBody>
+          <a:bodyPr rtlCol="0" anchor="ctr"/>
+          <a:lstStyle/>
+          <a:p>
+            <a:pPr algn="ctr"/>
+          </a:p>
+        </p:txBody>
+      </p:sp>
+      <p:sp>
+        <p:nvSpPr>
+          <p:cNvPr id="17" name="Oval 16"/>
+          <p:cNvSpPr/>
+          <p:nvPr/>
+        </p:nvSpPr>
+        <p:spPr>
+          <a:xfrm>
+            <a:off x="864290" y="2634477"/>
+            <a:ext cx="365760" cy="365760"/>
+          </a:xfrm>
+          <a:prstGeom prst="ellipse">
+            <a:avLst/>
+          </a:prstGeom>
+          <a:solidFill>
+            <a:srgbClr val="00754A"/>
+          </a:solidFill>
+          <a:ln>
+            <a:noFill/>
+          </a:ln>
+          <a:effectLst/>
+        </p:spPr>
+        <p:style>
+          <a:lnRef idx="1">
+            <a:schemeClr val="accent1"/>
+          </a:lnRef>
+          <a:fillRef idx="3">
+            <a:schemeClr val="accent1"/>
+          </a:fillRef>
+          <a:effectRef idx="2">
+            <a:schemeClr val="accent1"/>
+          </a:effectRef>
+          <a:fontRef idx="minor">
+            <a:schemeClr val="lt1"/>
+          </a:fontRef>
+        </p:style>
+        <p:txBody>
+          <a:bodyPr rtlCol="0" anchor="ctr"/>
+          <a:lstStyle/>
+          <a:p>
+            <a:pPr algn="ctr"/>
+          </a:p>
+        </p:txBody>
+      </p:sp>
+      <p:sp>
+        <p:nvSpPr>
+          <p:cNvPr id="18" name="TextBox 17"/>
+          <p:cNvSpPr txBox="1"/>
+          <p:nvPr/>
+        </p:nvSpPr>
+        <p:spPr>
+          <a:xfrm>
+            <a:off x="864290" y="2634477"/>
+            <a:ext cx="365760" cy="365760"/>
+          </a:xfrm>
+          <a:prstGeom prst="rect">
+            <a:avLst/>
+          </a:prstGeom>
+          <a:noFill/>
+        </p:spPr>
+        <p:txBody>
+          <a:bodyPr wrap="square" anchor="ctr" lIns="0" rIns="0" tIns="0" bIns="0">
+            <a:spAutoFit/>
+          </a:bodyPr>
+          <a:lstStyle/>
+          <a:p>
+            <a:pPr algn="ctr"/>
+            <a:r>
+              <a:rPr sz="1500" b="1" i="0" spc="-15">
+                <a:solidFill>
+                  <a:srgbClr val="FFFFFF"/>
+                </a:solidFill>
+                <a:latin typeface="Pretendard"/>
+                <a:ea typeface="Pretendard"/>
+                <a:cs typeface="Pretendard"/>
+              </a:rPr>
+              <a:t>2</a:t>
+            </a:r>
+          </a:p>
+        </p:txBody>
+      </p:sp>
+      <p:sp>
+        <p:nvSpPr>
+          <p:cNvPr id="19" name="TextBox 18"/>
+          <p:cNvSpPr txBox="1"/>
+          <p:nvPr/>
+        </p:nvSpPr>
+        <p:spPr>
+          <a:xfrm>
+            <a:off x="1348922" y="2479029"/>
+            <a:ext cx="1783080" cy="676656"/>
+          </a:xfrm>
+          <a:prstGeom prst="rect">
+            <a:avLst/>
+          </a:prstGeom>
+          <a:noFill/>
+        </p:spPr>
+        <p:txBody>
+          <a:bodyPr wrap="square" anchor="ctr" lIns="0" rIns="0" tIns="0" bIns="0">
+            <a:spAutoFit/>
+          </a:bodyPr>
+          <a:lstStyle/>
+          <a:p>
+            <a:pPr algn="l">
+              <a:lnSpc>
+                <a:spcPts val="1800"/>
+              </a:lnSpc>
+            </a:pPr>
+            <a:r>
+              <a:rPr sz="1500" b="1" i="0" spc="-15">
+                <a:solidFill>
+                  <a:srgbClr val="006241"/>
+                </a:solidFill>
+                <a:latin typeface="Pretendard"/>
+                <a:ea typeface="Pretendard"/>
+                <a:cs typeface="Pretendard"/>
+              </a:rPr>
+              <a:t>뜻으로 검색</a:t>
+            </a:r>
+          </a:p>
+        </p:txBody>
+      </p:sp>
+      <p:sp>
+        <p:nvSpPr>
+          <p:cNvPr id="20" name="Rounded Rectangle 19"/>
+          <p:cNvSpPr/>
+          <p:nvPr/>
+        </p:nvSpPr>
+        <p:spPr>
+          <a:xfrm>
+            <a:off x="3177722" y="2597901"/>
+            <a:ext cx="4526280" cy="438912"/>
+          </a:xfrm>
+          <a:prstGeom prst="roundRect">
+            <a:avLst>
+              <a:gd name="adj" fmla="val 12000"/>
+            </a:avLst>
+          </a:prstGeom>
+          <a:solidFill>
+            <a:srgbClr val="F2F0EB"/>
+          </a:solidFill>
+          <a:ln>
+            <a:noFill/>
+          </a:ln>
+          <a:effectLst/>
+        </p:spPr>
+        <p:style>
+          <a:lnRef idx="1">
+            <a:schemeClr val="accent1"/>
+          </a:lnRef>
+          <a:fillRef idx="3">
+            <a:schemeClr val="accent1"/>
+          </a:fillRef>
+          <a:effectRef idx="2">
+            <a:schemeClr val="accent1"/>
+          </a:effectRef>
+          <a:fontRef idx="minor">
+            <a:schemeClr val="lt1"/>
+          </a:fontRef>
+        </p:style>
+        <p:txBody>
+          <a:bodyPr rtlCol="0" anchor="ctr"/>
+          <a:lstStyle/>
+          <a:p>
+            <a:pPr algn="ctr"/>
+          </a:p>
+        </p:txBody>
+      </p:sp>
+      <p:sp>
+        <p:nvSpPr>
+          <p:cNvPr id="21" name="TextBox 20"/>
+          <p:cNvSpPr txBox="1"/>
+          <p:nvPr/>
+        </p:nvSpPr>
+        <p:spPr>
+          <a:xfrm>
+            <a:off x="3314882" y="2597901"/>
+            <a:ext cx="4251960" cy="438912"/>
+          </a:xfrm>
+          <a:prstGeom prst="rect">
+            <a:avLst/>
+          </a:prstGeom>
+          <a:noFill/>
+        </p:spPr>
+        <p:txBody>
+          <a:bodyPr wrap="square" anchor="ctr" lIns="0" rIns="0" tIns="0" bIns="0">
+            <a:spAutoFit/>
+          </a:bodyPr>
+          <a:lstStyle/>
+          <a:p>
+            <a:pPr algn="l">
+              <a:lnSpc>
+                <a:spcPts val="1500"/>
+              </a:lnSpc>
+            </a:pPr>
+            <a:r>
+              <a:rPr sz="1200" b="1" i="0" spc="-12">
+                <a:solidFill>
+                  <a:srgbClr val="00754A"/>
+                </a:solidFill>
+                <a:latin typeface="Pretendard"/>
+                <a:ea typeface="Pretendard"/>
+                <a:cs typeface="Pretendard"/>
+              </a:rPr>
+              <a:t>“Search library (semantic)”  (리본: 돋보기)</a:t>
+            </a:r>
+          </a:p>
+        </p:txBody>
+      </p:sp>
+      <p:sp>
+        <p:nvSpPr>
+          <p:cNvPr id="22" name="TextBox 21"/>
+          <p:cNvSpPr txBox="1"/>
+          <p:nvPr/>
+        </p:nvSpPr>
+        <p:spPr>
+          <a:xfrm>
+            <a:off x="7932602" y="2479029"/>
+            <a:ext cx="3469782" cy="676656"/>
+          </a:xfrm>
+          <a:prstGeom prst="rect">
+            <a:avLst/>
+          </a:prstGeom>
+          <a:noFill/>
+        </p:spPr>
+        <p:txBody>
+          <a:bodyPr wrap="square" anchor="ctr" lIns="0" rIns="0" tIns="0" bIns="0">
+            <a:spAutoFit/>
+          </a:bodyPr>
+          <a:lstStyle/>
+          <a:p>
+            <a:pPr algn="l">
+              <a:lnSpc>
+                <a:spcPts val="1600"/>
+              </a:lnSpc>
+            </a:pPr>
+            <a:r>
+              <a:rPr sz="1250" b="0" i="0" spc="-12">
+                <a:solidFill>
+                  <a:srgbClr val="6B6B6B"/>
+                </a:solidFill>
+                <a:latin typeface="Pretendard"/>
+                <a:ea typeface="Pretendard"/>
+                <a:cs typeface="Pretendard"/>
+              </a:rPr>
+              <a:t>단어+뜻 하이브리드 검색, 저자·연도로 좁히기</a:t>
+            </a:r>
+          </a:p>
+        </p:txBody>
+      </p:sp>
+      <p:sp>
+        <p:nvSpPr>
+          <p:cNvPr id="23" name="Rounded Rectangle 22"/>
+          <p:cNvSpPr/>
+          <p:nvPr/>
+        </p:nvSpPr>
+        <p:spPr>
+          <a:xfrm>
+            <a:off x="663122" y="3256269"/>
+            <a:ext cx="10876422" cy="676656"/>
+          </a:xfrm>
+          <a:prstGeom prst="roundRect">
+            <a:avLst>
+              <a:gd name="adj" fmla="val 8000"/>
+            </a:avLst>
+          </a:prstGeom>
+          <a:solidFill>
+            <a:srgbClr val="FFFFFF"/>
+          </a:solidFill>
+          <a:ln w="11430">
+            <a:solidFill>
+              <a:srgbClr val="D9D9D9"/>
+            </a:solidFill>
+          </a:ln>
+          <a:effectLst/>
+        </p:spPr>
+        <p:style>
+          <a:lnRef idx="1">
+            <a:schemeClr val="accent1"/>
+          </a:lnRef>
+          <a:fillRef idx="3">
+            <a:schemeClr val="accent1"/>
+          </a:fillRef>
+          <a:effectRef idx="2">
+            <a:schemeClr val="accent1"/>
+          </a:effectRef>
+          <a:fontRef idx="minor">
+            <a:schemeClr val="lt1"/>
+          </a:fontRef>
+        </p:style>
+        <p:txBody>
+          <a:bodyPr rtlCol="0" anchor="ctr"/>
+          <a:lstStyle/>
+          <a:p>
+            <a:pPr algn="ctr"/>
+          </a:p>
+        </p:txBody>
+      </p:sp>
+      <p:sp>
+        <p:nvSpPr>
+          <p:cNvPr id="24" name="Oval 23"/>
+          <p:cNvSpPr/>
+          <p:nvPr/>
+        </p:nvSpPr>
+        <p:spPr>
+          <a:xfrm>
+            <a:off x="864290" y="3411717"/>
+            <a:ext cx="365760" cy="365760"/>
+          </a:xfrm>
+          <a:prstGeom prst="ellipse">
+            <a:avLst/>
+          </a:prstGeom>
+          <a:solidFill>
+            <a:srgbClr val="00754A"/>
+          </a:solidFill>
+          <a:ln>
+            <a:noFill/>
+          </a:ln>
+          <a:effectLst/>
+        </p:spPr>
+        <p:style>
+          <a:lnRef idx="1">
+            <a:schemeClr val="accent1"/>
+          </a:lnRef>
+          <a:fillRef idx="3">
+            <a:schemeClr val="accent1"/>
+          </a:fillRef>
+          <a:effectRef idx="2">
+            <a:schemeClr val="accent1"/>
+          </a:effectRef>
+          <a:fontRef idx="minor">
+            <a:schemeClr val="lt1"/>
+          </a:fontRef>
+        </p:style>
+        <p:txBody>
+          <a:bodyPr rtlCol="0" anchor="ctr"/>
+          <a:lstStyle/>
+          <a:p>
+            <a:pPr algn="ctr"/>
+          </a:p>
+        </p:txBody>
+      </p:sp>
+      <p:sp>
+        <p:nvSpPr>
+          <p:cNvPr id="25" name="TextBox 24"/>
+          <p:cNvSpPr txBox="1"/>
+          <p:nvPr/>
+        </p:nvSpPr>
+        <p:spPr>
+          <a:xfrm>
+            <a:off x="864290" y="3411717"/>
+            <a:ext cx="365760" cy="365760"/>
+          </a:xfrm>
+          <a:prstGeom prst="rect">
+            <a:avLst/>
+          </a:prstGeom>
+          <a:noFill/>
+        </p:spPr>
+        <p:txBody>
+          <a:bodyPr wrap="square" anchor="ctr" lIns="0" rIns="0" tIns="0" bIns="0">
+            <a:spAutoFit/>
+          </a:bodyPr>
+          <a:lstStyle/>
+          <a:p>
+            <a:pPr algn="ctr"/>
+            <a:r>
+              <a:rPr sz="1500" b="1" i="0" spc="-15">
+                <a:solidFill>
+                  <a:srgbClr val="FFFFFF"/>
+                </a:solidFill>
+                <a:latin typeface="Pretendard"/>
+                <a:ea typeface="Pretendard"/>
+                <a:cs typeface="Pretendard"/>
+              </a:rPr>
+              <a:t>3</a:t>
+            </a:r>
+          </a:p>
+        </p:txBody>
+      </p:sp>
+      <p:sp>
+        <p:nvSpPr>
+          <p:cNvPr id="26" name="TextBox 25"/>
+          <p:cNvSpPr txBox="1"/>
+          <p:nvPr/>
+        </p:nvSpPr>
+        <p:spPr>
+          <a:xfrm>
+            <a:off x="1348922" y="3256269"/>
+            <a:ext cx="1783080" cy="676656"/>
+          </a:xfrm>
+          <a:prstGeom prst="rect">
+            <a:avLst/>
+          </a:prstGeom>
+          <a:noFill/>
+        </p:spPr>
+        <p:txBody>
+          <a:bodyPr wrap="square" anchor="ctr" lIns="0" rIns="0" tIns="0" bIns="0">
+            <a:spAutoFit/>
+          </a:bodyPr>
+          <a:lstStyle/>
+          <a:p>
+            <a:pPr algn="l">
+              <a:lnSpc>
+                <a:spcPts val="1800"/>
+              </a:lnSpc>
+            </a:pPr>
+            <a:r>
+              <a:rPr sz="1500" b="1" i="0" spc="-15">
+                <a:solidFill>
+                  <a:srgbClr val="006241"/>
+                </a:solidFill>
+                <a:latin typeface="Pretendard"/>
+                <a:ea typeface="Pretendard"/>
+                <a:cs typeface="Pretendard"/>
+              </a:rPr>
+              <a:t>서재에 질문</a:t>
+            </a:r>
+          </a:p>
+        </p:txBody>
+      </p:sp>
+      <p:sp>
+        <p:nvSpPr>
+          <p:cNvPr id="27" name="Rounded Rectangle 26"/>
+          <p:cNvSpPr/>
+          <p:nvPr/>
+        </p:nvSpPr>
+        <p:spPr>
+          <a:xfrm>
+            <a:off x="3177722" y="3375141"/>
+            <a:ext cx="4526280" cy="438912"/>
+          </a:xfrm>
+          <a:prstGeom prst="roundRect">
+            <a:avLst>
+              <a:gd name="adj" fmla="val 12000"/>
+            </a:avLst>
+          </a:prstGeom>
+          <a:solidFill>
+            <a:srgbClr val="F2F0EB"/>
+          </a:solidFill>
+          <a:ln>
+            <a:noFill/>
+          </a:ln>
+          <a:effectLst/>
+        </p:spPr>
+        <p:style>
+          <a:lnRef idx="1">
+            <a:schemeClr val="accent1"/>
+          </a:lnRef>
+          <a:fillRef idx="3">
+            <a:schemeClr val="accent1"/>
+          </a:fillRef>
+          <a:effectRef idx="2">
+            <a:schemeClr val="accent1"/>
+          </a:effectRef>
+          <a:fontRef idx="minor">
+            <a:schemeClr val="lt1"/>
+          </a:fontRef>
+        </p:style>
+        <p:txBody>
+          <a:bodyPr rtlCol="0" anchor="ctr"/>
+          <a:lstStyle/>
+          <a:p>
+            <a:pPr algn="ctr"/>
+          </a:p>
+        </p:txBody>
+      </p:sp>
+      <p:sp>
+        <p:nvSpPr>
+          <p:cNvPr id="28" name="TextBox 27"/>
+          <p:cNvSpPr txBox="1"/>
+          <p:nvPr/>
+        </p:nvSpPr>
+        <p:spPr>
+          <a:xfrm>
+            <a:off x="3314882" y="3375141"/>
+            <a:ext cx="4251960" cy="438912"/>
+          </a:xfrm>
+          <a:prstGeom prst="rect">
+            <a:avLst/>
+          </a:prstGeom>
+          <a:noFill/>
+        </p:spPr>
+        <p:txBody>
+          <a:bodyPr wrap="square" anchor="ctr" lIns="0" rIns="0" tIns="0" bIns="0">
+            <a:spAutoFit/>
+          </a:bodyPr>
+          <a:lstStyle/>
+          <a:p>
+            <a:pPr algn="l">
+              <a:lnSpc>
+                <a:spcPts val="1500"/>
+              </a:lnSpc>
+            </a:pPr>
+            <a:r>
+              <a:rPr sz="1200" b="1" i="0" spc="-12">
+                <a:solidFill>
+                  <a:srgbClr val="00754A"/>
+                </a:solidFill>
+                <a:latin typeface="Pretendard"/>
+                <a:ea typeface="Pretendard"/>
+                <a:cs typeface="Pretendard"/>
+              </a:rPr>
+              <a:t>“Chat with library”  (리본: 말풍선)</a:t>
+            </a:r>
+          </a:p>
+        </p:txBody>
+      </p:sp>
+      <p:sp>
+        <p:nvSpPr>
+          <p:cNvPr id="29" name="TextBox 28"/>
+          <p:cNvSpPr txBox="1"/>
+          <p:nvPr/>
+        </p:nvSpPr>
+        <p:spPr>
+          <a:xfrm>
+            <a:off x="7932602" y="3256269"/>
+            <a:ext cx="3469782" cy="676656"/>
+          </a:xfrm>
+          <a:prstGeom prst="rect">
+            <a:avLst/>
+          </a:prstGeom>
+          <a:noFill/>
+        </p:spPr>
+        <p:txBody>
+          <a:bodyPr wrap="square" anchor="ctr" lIns="0" rIns="0" tIns="0" bIns="0">
+            <a:spAutoFit/>
+          </a:bodyPr>
+          <a:lstStyle/>
+          <a:p>
+            <a:pPr algn="l">
+              <a:lnSpc>
+                <a:spcPts val="1600"/>
+              </a:lnSpc>
+            </a:pPr>
+            <a:r>
+              <a:rPr sz="1250" b="0" i="0" spc="-12">
+                <a:solidFill>
+                  <a:srgbClr val="6B6B6B"/>
+                </a:solidFill>
+                <a:latin typeface="Pretendard"/>
+                <a:ea typeface="Pretendard"/>
+                <a:cs typeface="Pretendard"/>
+              </a:rPr>
+              <a:t>출처 [n] 달린 답 — [n] 클릭하면 원문 노트로</a:t>
+            </a:r>
+          </a:p>
+        </p:txBody>
+      </p:sp>
+      <p:sp>
+        <p:nvSpPr>
+          <p:cNvPr id="30" name="Rounded Rectangle 29"/>
+          <p:cNvSpPr/>
+          <p:nvPr/>
+        </p:nvSpPr>
+        <p:spPr>
+          <a:xfrm>
+            <a:off x="663122" y="4033509"/>
+            <a:ext cx="10876422" cy="676656"/>
+          </a:xfrm>
+          <a:prstGeom prst="roundRect">
+            <a:avLst>
+              <a:gd name="adj" fmla="val 8000"/>
+            </a:avLst>
+          </a:prstGeom>
+          <a:solidFill>
+            <a:srgbClr val="FFFFFF"/>
+          </a:solidFill>
+          <a:ln w="11430">
+            <a:solidFill>
+              <a:srgbClr val="D9D9D9"/>
+            </a:solidFill>
+          </a:ln>
+          <a:effectLst/>
+        </p:spPr>
+        <p:style>
+          <a:lnRef idx="1">
+            <a:schemeClr val="accent1"/>
+          </a:lnRef>
+          <a:fillRef idx="3">
+            <a:schemeClr val="accent1"/>
+          </a:fillRef>
+          <a:effectRef idx="2">
+            <a:schemeClr val="accent1"/>
+          </a:effectRef>
+          <a:fontRef idx="minor">
+            <a:schemeClr val="lt1"/>
+          </a:fontRef>
+        </p:style>
+        <p:txBody>
+          <a:bodyPr rtlCol="0" anchor="ctr"/>
+          <a:lstStyle/>
+          <a:p>
+            <a:pPr algn="ctr"/>
+          </a:p>
+        </p:txBody>
+      </p:sp>
+      <p:sp>
+        <p:nvSpPr>
+          <p:cNvPr id="31" name="Oval 30"/>
+          <p:cNvSpPr/>
+          <p:nvPr/>
+        </p:nvSpPr>
+        <p:spPr>
+          <a:xfrm>
+            <a:off x="864290" y="4188957"/>
+            <a:ext cx="365760" cy="365760"/>
+          </a:xfrm>
+          <a:prstGeom prst="ellipse">
+            <a:avLst/>
+          </a:prstGeom>
+          <a:solidFill>
+            <a:srgbClr val="00754A"/>
+          </a:solidFill>
+          <a:ln>
+            <a:noFill/>
+          </a:ln>
+          <a:effectLst/>
+        </p:spPr>
+        <p:style>
+          <a:lnRef idx="1">
+            <a:schemeClr val="accent1"/>
+          </a:lnRef>
+          <a:fillRef idx="3">
+            <a:schemeClr val="accent1"/>
+          </a:fillRef>
+          <a:effectRef idx="2">
+            <a:schemeClr val="accent1"/>
+          </a:effectRef>
+          <a:fontRef idx="minor">
+            <a:schemeClr val="lt1"/>
+          </a:fontRef>
+        </p:style>
+        <p:txBody>
+          <a:bodyPr rtlCol="0" anchor="ctr"/>
+          <a:lstStyle/>
+          <a:p>
+            <a:pPr algn="ctr"/>
+          </a:p>
+        </p:txBody>
+      </p:sp>
+      <p:sp>
+        <p:nvSpPr>
+          <p:cNvPr id="32" name="TextBox 31"/>
+          <p:cNvSpPr txBox="1"/>
+          <p:nvPr/>
+        </p:nvSpPr>
+        <p:spPr>
+          <a:xfrm>
+            <a:off x="864290" y="4188957"/>
+            <a:ext cx="365760" cy="365760"/>
+          </a:xfrm>
+          <a:prstGeom prst="rect">
+            <a:avLst/>
+          </a:prstGeom>
+          <a:noFill/>
+        </p:spPr>
+        <p:txBody>
+          <a:bodyPr wrap="square" anchor="ctr" lIns="0" rIns="0" tIns="0" bIns="0">
+            <a:spAutoFit/>
+          </a:bodyPr>
+          <a:lstStyle/>
+          <a:p>
+            <a:pPr algn="ctr"/>
+            <a:r>
+              <a:rPr sz="1500" b="1" i="0" spc="-15">
+                <a:solidFill>
+                  <a:srgbClr val="FFFFFF"/>
+                </a:solidFill>
+                <a:latin typeface="Pretendard"/>
+                <a:ea typeface="Pretendard"/>
+                <a:cs typeface="Pretendard"/>
+              </a:rPr>
+              <a:t>4</a:t>
+            </a:r>
+          </a:p>
+        </p:txBody>
+      </p:sp>
+      <p:sp>
+        <p:nvSpPr>
+          <p:cNvPr id="33" name="TextBox 32"/>
+          <p:cNvSpPr txBox="1"/>
+          <p:nvPr/>
+        </p:nvSpPr>
+        <p:spPr>
+          <a:xfrm>
+            <a:off x="1348922" y="4033509"/>
+            <a:ext cx="1783080" cy="676656"/>
+          </a:xfrm>
+          <a:prstGeom prst="rect">
+            <a:avLst/>
+          </a:prstGeom>
+          <a:noFill/>
+        </p:spPr>
+        <p:txBody>
+          <a:bodyPr wrap="square" anchor="ctr" lIns="0" rIns="0" tIns="0" bIns="0">
+            <a:spAutoFit/>
+          </a:bodyPr>
+          <a:lstStyle/>
+          <a:p>
+            <a:pPr algn="l">
+              <a:lnSpc>
+                <a:spcPts val="1800"/>
+              </a:lnSpc>
+            </a:pPr>
+            <a:r>
+              <a:rPr sz="1500" b="1" i="0" spc="-15">
+                <a:solidFill>
+                  <a:srgbClr val="006241"/>
+                </a:solidFill>
+                <a:latin typeface="Pretendard"/>
+                <a:ea typeface="Pretendard"/>
+                <a:cs typeface="Pretendard"/>
+              </a:rPr>
+              <a:t>글 쓰며 인용</a:t>
+            </a:r>
+          </a:p>
+        </p:txBody>
+      </p:sp>
+      <p:sp>
+        <p:nvSpPr>
+          <p:cNvPr id="34" name="Rounded Rectangle 33"/>
+          <p:cNvSpPr/>
+          <p:nvPr/>
+        </p:nvSpPr>
+        <p:spPr>
+          <a:xfrm>
+            <a:off x="3177722" y="4152381"/>
+            <a:ext cx="4526280" cy="438912"/>
+          </a:xfrm>
+          <a:prstGeom prst="roundRect">
+            <a:avLst>
+              <a:gd name="adj" fmla="val 12000"/>
+            </a:avLst>
+          </a:prstGeom>
+          <a:solidFill>
+            <a:srgbClr val="F2F0EB"/>
+          </a:solidFill>
+          <a:ln>
+            <a:noFill/>
+          </a:ln>
+          <a:effectLst/>
+        </p:spPr>
+        <p:style>
+          <a:lnRef idx="1">
+            <a:schemeClr val="accent1"/>
+          </a:lnRef>
+          <a:fillRef idx="3">
+            <a:schemeClr val="accent1"/>
+          </a:fillRef>
+          <a:effectRef idx="2">
+            <a:schemeClr val="accent1"/>
+          </a:effectRef>
+          <a:fontRef idx="minor">
+            <a:schemeClr val="lt1"/>
+          </a:fontRef>
+        </p:style>
+        <p:txBody>
+          <a:bodyPr rtlCol="0" anchor="ctr"/>
+          <a:lstStyle/>
+          <a:p>
+            <a:pPr algn="ctr"/>
+          </a:p>
+        </p:txBody>
+      </p:sp>
+      <p:sp>
+        <p:nvSpPr>
+          <p:cNvPr id="35" name="TextBox 34"/>
+          <p:cNvSpPr txBox="1"/>
+          <p:nvPr/>
+        </p:nvSpPr>
+        <p:spPr>
+          <a:xfrm>
+            <a:off x="3314882" y="4152381"/>
+            <a:ext cx="4251960" cy="438912"/>
+          </a:xfrm>
+          <a:prstGeom prst="rect">
+            <a:avLst/>
+          </a:prstGeom>
+          <a:noFill/>
+        </p:spPr>
+        <p:txBody>
+          <a:bodyPr wrap="square" anchor="ctr" lIns="0" rIns="0" tIns="0" bIns="0">
+            <a:spAutoFit/>
+          </a:bodyPr>
+          <a:lstStyle/>
+          <a:p>
+            <a:pPr algn="l">
+              <a:lnSpc>
+                <a:spcPts val="1500"/>
+              </a:lnSpc>
+            </a:pPr>
+            <a:r>
+              <a:rPr sz="1200" b="1" i="0" spc="-12">
+                <a:solidFill>
+                  <a:srgbClr val="00754A"/>
+                </a:solidFill>
+                <a:latin typeface="Pretendard"/>
+                <a:ea typeface="Pretendard"/>
+                <a:cs typeface="Pretendard"/>
+              </a:rPr>
+              <a:t>본문에서  @  입력</a:t>
+            </a:r>
+          </a:p>
+        </p:txBody>
+      </p:sp>
+      <p:sp>
+        <p:nvSpPr>
+          <p:cNvPr id="36" name="TextBox 35"/>
+          <p:cNvSpPr txBox="1"/>
+          <p:nvPr/>
+        </p:nvSpPr>
+        <p:spPr>
+          <a:xfrm>
+            <a:off x="7932602" y="4033509"/>
+            <a:ext cx="3469782" cy="676656"/>
+          </a:xfrm>
+          <a:prstGeom prst="rect">
+            <a:avLst/>
+          </a:prstGeom>
+          <a:noFill/>
+        </p:spPr>
+        <p:txBody>
+          <a:bodyPr wrap="square" anchor="ctr" lIns="0" rIns="0" tIns="0" bIns="0">
+            <a:spAutoFit/>
+          </a:bodyPr>
+          <a:lstStyle/>
+          <a:p>
+            <a:pPr algn="l">
+              <a:lnSpc>
+                <a:spcPts val="1600"/>
+              </a:lnSpc>
+            </a:pPr>
+            <a:r>
+              <a:rPr sz="1250" b="0" i="0" spc="-12">
+                <a:solidFill>
+                  <a:srgbClr val="6B6B6B"/>
+                </a:solidFill>
+                <a:latin typeface="Pretendard"/>
+                <a:ea typeface="Pretendard"/>
+                <a:cs typeface="Pretendard"/>
+              </a:rPr>
+              <a:t>제목·저자로 골라 [@citekey] 자동완성 삽입</a:t>
+            </a:r>
+          </a:p>
+        </p:txBody>
+      </p:sp>
+      <p:sp>
+        <p:nvSpPr>
+          <p:cNvPr id="37" name="Rounded Rectangle 36"/>
+          <p:cNvSpPr/>
+          <p:nvPr/>
+        </p:nvSpPr>
+        <p:spPr>
+          <a:xfrm>
+            <a:off x="663122" y="4810749"/>
+            <a:ext cx="10876422" cy="676656"/>
+          </a:xfrm>
+          <a:prstGeom prst="roundRect">
+            <a:avLst>
+              <a:gd name="adj" fmla="val 8000"/>
+            </a:avLst>
+          </a:prstGeom>
+          <a:solidFill>
+            <a:srgbClr val="FFFFFF"/>
+          </a:solidFill>
+          <a:ln w="11430">
+            <a:solidFill>
+              <a:srgbClr val="D9D9D9"/>
+            </a:solidFill>
+          </a:ln>
+          <a:effectLst/>
+        </p:spPr>
+        <p:style>
+          <a:lnRef idx="1">
+            <a:schemeClr val="accent1"/>
+          </a:lnRef>
+          <a:fillRef idx="3">
+            <a:schemeClr val="accent1"/>
+          </a:fillRef>
+          <a:effectRef idx="2">
+            <a:schemeClr val="accent1"/>
+          </a:effectRef>
+          <a:fontRef idx="minor">
+            <a:schemeClr val="lt1"/>
+          </a:fontRef>
+        </p:style>
+        <p:txBody>
+          <a:bodyPr rtlCol="0" anchor="ctr"/>
+          <a:lstStyle/>
+          <a:p>
+            <a:pPr algn="ctr"/>
+          </a:p>
+        </p:txBody>
+      </p:sp>
+      <p:sp>
+        <p:nvSpPr>
+          <p:cNvPr id="38" name="Oval 37"/>
+          <p:cNvSpPr/>
+          <p:nvPr/>
+        </p:nvSpPr>
+        <p:spPr>
+          <a:xfrm>
+            <a:off x="864290" y="4966197"/>
+            <a:ext cx="365760" cy="365760"/>
+          </a:xfrm>
+          <a:prstGeom prst="ellipse">
+            <a:avLst/>
+          </a:prstGeom>
+          <a:solidFill>
+            <a:srgbClr val="00754A"/>
+          </a:solidFill>
+          <a:ln>
+            <a:noFill/>
+          </a:ln>
+          <a:effectLst/>
+        </p:spPr>
+        <p:style>
+          <a:lnRef idx="1">
+            <a:schemeClr val="accent1"/>
+          </a:lnRef>
+          <a:fillRef idx="3">
+            <a:schemeClr val="accent1"/>
+          </a:fillRef>
+          <a:effectRef idx="2">
+            <a:schemeClr val="accent1"/>
+          </a:effectRef>
+          <a:fontRef idx="minor">
+            <a:schemeClr val="lt1"/>
+          </a:fontRef>
+        </p:style>
+        <p:txBody>
+          <a:bodyPr rtlCol="0" anchor="ctr"/>
+          <a:lstStyle/>
+          <a:p>
+            <a:pPr algn="ctr"/>
+          </a:p>
+        </p:txBody>
+      </p:sp>
+      <p:sp>
+        <p:nvSpPr>
+          <p:cNvPr id="39" name="TextBox 38"/>
+          <p:cNvSpPr txBox="1"/>
+          <p:nvPr/>
+        </p:nvSpPr>
+        <p:spPr>
+          <a:xfrm>
+            <a:off x="864290" y="4966197"/>
+            <a:ext cx="365760" cy="365760"/>
+          </a:xfrm>
+          <a:prstGeom prst="rect">
+            <a:avLst/>
+          </a:prstGeom>
+          <a:noFill/>
+        </p:spPr>
+        <p:txBody>
+          <a:bodyPr wrap="square" anchor="ctr" lIns="0" rIns="0" tIns="0" bIns="0">
+            <a:spAutoFit/>
+          </a:bodyPr>
+          <a:lstStyle/>
+          <a:p>
+            <a:pPr algn="ctr"/>
+            <a:r>
+              <a:rPr sz="1500" b="1" i="0" spc="-15">
+                <a:solidFill>
+                  <a:srgbClr val="FFFFFF"/>
+                </a:solidFill>
+                <a:latin typeface="Pretendard"/>
+                <a:ea typeface="Pretendard"/>
+                <a:cs typeface="Pretendard"/>
+              </a:rPr>
+              <a:t>5</a:t>
+            </a:r>
+          </a:p>
+        </p:txBody>
+      </p:sp>
+      <p:sp>
+        <p:nvSpPr>
+          <p:cNvPr id="40" name="TextBox 39"/>
+          <p:cNvSpPr txBox="1"/>
+          <p:nvPr/>
+        </p:nvSpPr>
+        <p:spPr>
+          <a:xfrm>
+            <a:off x="1348922" y="4810749"/>
+            <a:ext cx="1783080" cy="676656"/>
+          </a:xfrm>
+          <a:prstGeom prst="rect">
+            <a:avLst/>
+          </a:prstGeom>
+          <a:noFill/>
+        </p:spPr>
+        <p:txBody>
+          <a:bodyPr wrap="square" anchor="ctr" lIns="0" rIns="0" tIns="0" bIns="0">
+            <a:spAutoFit/>
+          </a:bodyPr>
+          <a:lstStyle/>
+          <a:p>
+            <a:pPr algn="l">
+              <a:lnSpc>
+                <a:spcPts val="1800"/>
+              </a:lnSpc>
+            </a:pPr>
+            <a:r>
+              <a:rPr sz="1500" b="1" i="0" spc="-15">
+                <a:solidFill>
+                  <a:srgbClr val="006241"/>
+                </a:solidFill>
+                <a:latin typeface="Pretendard"/>
+                <a:ea typeface="Pretendard"/>
+                <a:cs typeface="Pretendard"/>
+              </a:rPr>
+              <a:t>참고문헌 생성</a:t>
+            </a:r>
+          </a:p>
+        </p:txBody>
+      </p:sp>
+      <p:sp>
+        <p:nvSpPr>
+          <p:cNvPr id="41" name="Rounded Rectangle 40"/>
+          <p:cNvSpPr/>
+          <p:nvPr/>
+        </p:nvSpPr>
+        <p:spPr>
+          <a:xfrm>
+            <a:off x="3177722" y="4929621"/>
+            <a:ext cx="4526280" cy="438912"/>
+          </a:xfrm>
+          <a:prstGeom prst="roundRect">
+            <a:avLst>
+              <a:gd name="adj" fmla="val 12000"/>
+            </a:avLst>
+          </a:prstGeom>
+          <a:solidFill>
+            <a:srgbClr val="F2F0EB"/>
+          </a:solidFill>
+          <a:ln>
+            <a:noFill/>
+          </a:ln>
+          <a:effectLst/>
+        </p:spPr>
+        <p:style>
+          <a:lnRef idx="1">
+            <a:schemeClr val="accent1"/>
+          </a:lnRef>
+          <a:fillRef idx="3">
+            <a:schemeClr val="accent1"/>
+          </a:fillRef>
+          <a:effectRef idx="2">
+            <a:schemeClr val="accent1"/>
+          </a:effectRef>
+          <a:fontRef idx="minor">
+            <a:schemeClr val="lt1"/>
+          </a:fontRef>
+        </p:style>
+        <p:txBody>
+          <a:bodyPr rtlCol="0" anchor="ctr"/>
+          <a:lstStyle/>
+          <a:p>
+            <a:pPr algn="ctr"/>
+          </a:p>
+        </p:txBody>
+      </p:sp>
+      <p:sp>
+        <p:nvSpPr>
+          <p:cNvPr id="42" name="TextBox 41"/>
+          <p:cNvSpPr txBox="1"/>
+          <p:nvPr/>
+        </p:nvSpPr>
+        <p:spPr>
+          <a:xfrm>
+            <a:off x="3314882" y="4929621"/>
+            <a:ext cx="4251960" cy="438912"/>
+          </a:xfrm>
+          <a:prstGeom prst="rect">
+            <a:avLst/>
+          </a:prstGeom>
+          <a:noFill/>
+        </p:spPr>
+        <p:txBody>
+          <a:bodyPr wrap="square" anchor="ctr" lIns="0" rIns="0" tIns="0" bIns="0">
+            <a:spAutoFit/>
+          </a:bodyPr>
+          <a:lstStyle/>
+          <a:p>
+            <a:pPr algn="l">
+              <a:lnSpc>
+                <a:spcPts val="1500"/>
+              </a:lnSpc>
+            </a:pPr>
+            <a:r>
+              <a:rPr sz="1200" b="1" i="0" spc="-12">
+                <a:solidFill>
+                  <a:srgbClr val="00754A"/>
+                </a:solidFill>
+                <a:latin typeface="Pretendard"/>
+                <a:ea typeface="Pretendard"/>
+                <a:cs typeface="Pretendard"/>
+              </a:rPr>
+              <a:t>“Update bibliography in current note”</a:t>
+            </a:r>
+          </a:p>
+        </p:txBody>
+      </p:sp>
+      <p:sp>
+        <p:nvSpPr>
+          <p:cNvPr id="43" name="TextBox 42"/>
+          <p:cNvSpPr txBox="1"/>
+          <p:nvPr/>
+        </p:nvSpPr>
+        <p:spPr>
+          <a:xfrm>
+            <a:off x="7932602" y="4810749"/>
+            <a:ext cx="3469782" cy="676656"/>
+          </a:xfrm>
+          <a:prstGeom prst="rect">
+            <a:avLst/>
+          </a:prstGeom>
+          <a:noFill/>
+        </p:spPr>
+        <p:txBody>
+          <a:bodyPr wrap="square" anchor="ctr" lIns="0" rIns="0" tIns="0" bIns="0">
+            <a:spAutoFit/>
+          </a:bodyPr>
+          <a:lstStyle/>
+          <a:p>
+            <a:pPr algn="l">
+              <a:lnSpc>
+                <a:spcPts val="1600"/>
+              </a:lnSpc>
+            </a:pPr>
+            <a:r>
+              <a:rPr sz="1250" b="0" i="0" spc="-12">
+                <a:solidFill>
+                  <a:srgbClr val="6B6B6B"/>
+                </a:solidFill>
+                <a:latin typeface="Pretendard"/>
+                <a:ea typeface="Pretendard"/>
+                <a:cs typeface="Pretendard"/>
+              </a:rPr>
+              <a:t>## References를 저널 스타일(APA·Vancouver·CSL)로 자동 생성</a:t>
+            </a:r>
+          </a:p>
+        </p:txBody>
+      </p:sp>
+      <p:sp>
+        <p:nvSpPr>
+          <p:cNvPr id="44" name="Rounded Rectangle 43"/>
+          <p:cNvSpPr/>
+          <p:nvPr/>
+        </p:nvSpPr>
+        <p:spPr>
+          <a:xfrm>
+            <a:off x="571682" y="5859292"/>
+            <a:ext cx="11059302" cy="457200"/>
+          </a:xfrm>
+          <a:prstGeom prst="roundRect">
+            <a:avLst>
+              <a:gd name="adj" fmla="val 18000"/>
+            </a:avLst>
+          </a:prstGeom>
+          <a:solidFill>
+            <a:srgbClr val="1E3932"/>
+          </a:solidFill>
+          <a:ln>
+            <a:noFill/>
+          </a:ln>
+          <a:effectLst/>
+        </p:spPr>
+        <p:style>
+          <a:lnRef idx="1">
+            <a:schemeClr val="accent1"/>
+          </a:lnRef>
+          <a:fillRef idx="3">
+            <a:schemeClr val="accent1"/>
+          </a:fillRef>
+          <a:effectRef idx="2">
+            <a:schemeClr val="accent1"/>
+          </a:effectRef>
+          <a:fontRef idx="minor">
+            <a:schemeClr val="lt1"/>
+          </a:fontRef>
+        </p:style>
+        <p:txBody>
+          <a:bodyPr rtlCol="0" anchor="ctr"/>
+          <a:lstStyle/>
+          <a:p>
+            <a:pPr algn="ctr"/>
+          </a:p>
+        </p:txBody>
+      </p:sp>
+      <p:sp>
+        <p:nvSpPr>
+          <p:cNvPr id="45" name="TextBox 44"/>
+          <p:cNvSpPr txBox="1"/>
+          <p:nvPr/>
+        </p:nvSpPr>
+        <p:spPr>
+          <a:xfrm>
+            <a:off x="800282" y="5859292"/>
+            <a:ext cx="10602102" cy="457200"/>
+          </a:xfrm>
+          <a:prstGeom prst="rect">
+            <a:avLst/>
+          </a:prstGeom>
+          <a:noFill/>
+        </p:spPr>
+        <p:txBody>
+          <a:bodyPr wrap="square" anchor="ctr" lIns="0" rIns="0" tIns="0" bIns="0">
+            <a:spAutoFit/>
+          </a:bodyPr>
+          <a:lstStyle/>
+          <a:p>
+            <a:pPr algn="l"/>
+            <a:r>
+              <a:rPr sz="1400" b="1" i="0" spc="-14">
+                <a:solidFill>
+                  <a:srgbClr val="FFFFFF"/>
+                </a:solidFill>
+                <a:latin typeface="Pretendard"/>
+                <a:ea typeface="Pretendard"/>
+                <a:cs typeface="Pretendard"/>
+              </a:rPr>
+              <a:t>전부 Cmd+P 한 곳에서 — 처음 딱 한 번 “Rebuild search index”로 색인만 만들어 두면 끝</a:t>
+            </a:r>
+          </a:p>
+        </p:txBody>
+      </p:sp>
+    </p:spTree>
+  </p:cSld>
+  <p:clrMapOvr>
+    <a:masterClrMapping/>
+  </p:clrMapOvr>
+</p:sld>
+</file>
+
+<file path=ppt/slides/slide16.xml><?xml version="1.0" encoding="utf-8"?>
+<p:sld xmlns:a="http://schemas.openxmlformats.org/drawingml/2006/main" xmlns:p="http://schemas.openxmlformats.org/presentationml/2006/main" xmlns:r="http://schemas.openxmlformats.org/officeDocument/2006/relationships">
+  <p:cSld>
+    <p:spTree>
+      <p:nvGrpSpPr>
+        <p:cNvPr id="1" name=""/>
+        <p:cNvGrpSpPr/>
+        <p:nvPr/>
+      </p:nvGrpSpPr>
+      <p:grpSpPr/>
+      <p:sp>
+        <p:nvSpPr>
+          <p:cNvPr id="2" name="Rectangle 1"/>
+          <p:cNvSpPr/>
+          <p:nvPr/>
+        </p:nvSpPr>
+        <p:spPr>
+          <a:xfrm>
+            <a:off x="0" y="0"/>
+            <a:ext cx="12191695" cy="6858000"/>
+          </a:xfrm>
+          <a:prstGeom prst="rect">
+            <a:avLst/>
+          </a:prstGeom>
+          <a:solidFill>
+            <a:srgbClr val="F2F0EB"/>
+          </a:solidFill>
+          <a:ln>
+            <a:noFill/>
+          </a:ln>
+          <a:effectLst/>
+        </p:spPr>
+        <p:style>
+          <a:lnRef idx="1">
+            <a:schemeClr val="accent1"/>
+          </a:lnRef>
+          <a:fillRef idx="3">
+            <a:schemeClr val="accent1"/>
+          </a:fillRef>
+          <a:effectRef idx="2">
+            <a:schemeClr val="accent1"/>
+          </a:effectRef>
+          <a:fontRef idx="minor">
+            <a:schemeClr val="lt1"/>
+          </a:fontRef>
+        </p:style>
+        <p:txBody>
+          <a:bodyPr rtlCol="0" anchor="ctr"/>
+          <a:lstStyle/>
+          <a:p>
+            <a:pPr algn="ctr"/>
+          </a:p>
+        </p:txBody>
+      </p:sp>
+      <p:sp>
+        <p:nvSpPr>
+          <p:cNvPr id="3" name="TextBox 2"/>
+          <p:cNvSpPr txBox="1"/>
+          <p:nvPr/>
+        </p:nvSpPr>
+        <p:spPr>
+          <a:xfrm>
+            <a:off x="138257" y="123444"/>
+            <a:ext cx="5486400" cy="256032"/>
+          </a:xfrm>
+          <a:prstGeom prst="rect">
+            <a:avLst/>
+          </a:prstGeom>
+          <a:noFill/>
+        </p:spPr>
+        <p:txBody>
+          <a:bodyPr wrap="square" anchor="t" lIns="0" rIns="0" tIns="0" bIns="0">
+            <a:spAutoFit/>
+          </a:bodyPr>
+          <a:lstStyle/>
+          <a:p>
+            <a:pPr algn="l"/>
+            <a:r>
+              <a:rPr sz="1100" b="1" i="0" spc="-11">
+                <a:solidFill>
+                  <a:srgbClr val="8E8E93"/>
+                </a:solidFill>
+                <a:latin typeface="Pretendard"/>
+                <a:ea typeface="Pretendard"/>
+                <a:cs typeface="Pretendard"/>
+              </a:rPr>
+              <a:t>CONCLUSION</a:t>
+            </a:r>
+          </a:p>
+        </p:txBody>
+      </p:sp>
+      <p:sp>
+        <p:nvSpPr>
+          <p:cNvPr id="4" name="TextBox 3"/>
+          <p:cNvSpPr txBox="1"/>
+          <p:nvPr/>
+        </p:nvSpPr>
+        <p:spPr>
+          <a:xfrm>
+            <a:off x="251642" y="436260"/>
+            <a:ext cx="10972800" cy="640080"/>
+          </a:xfrm>
+          <a:prstGeom prst="rect">
+            <a:avLst/>
+          </a:prstGeom>
+          <a:noFill/>
+        </p:spPr>
+        <p:txBody>
+          <a:bodyPr wrap="square" anchor="t" lIns="0" rIns="0" tIns="0" bIns="0">
+            <a:spAutoFit/>
+          </a:bodyPr>
+          <a:lstStyle/>
+          <a:p>
+            <a:pPr algn="l">
+              <a:lnSpc>
+                <a:spcPts val="3600"/>
+              </a:lnSpc>
+            </a:pPr>
+            <a:r>
+              <a:rPr sz="3000" b="1" i="0" spc="-30">
+                <a:solidFill>
+                  <a:srgbClr val="006241"/>
+                </a:solidFill>
+                <a:latin typeface="Pretendard"/>
+                <a:ea typeface="Pretendard"/>
+                <a:cs typeface="Pretendard"/>
+              </a:rPr>
+              <a:t>Zotero 없이, 서버 없이, 늘 출처와 함께</a:t>
+            </a:r>
+          </a:p>
+        </p:txBody>
+      </p:sp>
+      <p:pic>
+        <p:nvPicPr>
+          <p:cNvPr id="5" name="Picture 4" descr="logo.png"/>
+          <p:cNvPicPr>
+            <a:picLocks noChangeAspect="1"/>
+          </p:cNvPicPr>
+          <p:nvPr/>
+        </p:nvPicPr>
+        <p:blipFill>
+          <a:blip r:embed="rId2"/>
+          <a:srcRect l="3240" r="16360" t="21390" b="11330"/>
+          <a:stretch>
+            <a:fillRect/>
+          </a:stretch>
+        </p:blipFill>
+        <p:spPr>
+          <a:xfrm>
+            <a:off x="10748314" y="11978"/>
+            <a:ext cx="1443654" cy="798545"/>
+          </a:xfrm>
+          <a:prstGeom prst="rect">
+            <a:avLst/>
+          </a:prstGeom>
+        </p:spPr>
+      </p:pic>
+      <p:sp>
+        <p:nvSpPr>
+          <p:cNvPr id="6" name="Rounded Rectangle 5"/>
+          <p:cNvSpPr/>
+          <p:nvPr/>
+        </p:nvSpPr>
+        <p:spPr>
+          <a:xfrm>
+            <a:off x="251642" y="1290309"/>
+            <a:ext cx="11699382" cy="5227350"/>
+          </a:xfrm>
+          <a:prstGeom prst="roundRect">
+            <a:avLst>
+              <a:gd name="adj" fmla="val 3500"/>
             </a:avLst>
           </a:prstGeom>
           <a:solidFill>
@@ -8312,217 +10088,50 @@
       </p:sp>
       <p:sp>
         <p:nvSpPr>
-          <p:cNvPr id="9" name="Rectangle 8"/>
+          <p:cNvPr id="7" name="TextBox 6"/>
+          <p:cNvSpPr txBox="1"/>
+          <p:nvPr/>
+        </p:nvSpPr>
+        <p:spPr>
+          <a:xfrm>
+            <a:off x="138257" y="6620256"/>
+            <a:ext cx="548640" cy="228600"/>
+          </a:xfrm>
+          <a:prstGeom prst="rect">
+            <a:avLst/>
+          </a:prstGeom>
+          <a:noFill/>
+        </p:spPr>
+        <p:txBody>
+          <a:bodyPr wrap="square" anchor="t" lIns="0" rIns="0" tIns="0" bIns="0">
+            <a:spAutoFit/>
+          </a:bodyPr>
+          <a:lstStyle/>
+          <a:p>
+            <a:pPr algn="l"/>
+            <a:r>
+              <a:rPr sz="900" b="0" i="0" spc="-9">
+                <a:solidFill>
+                  <a:srgbClr val="8E8E93"/>
+                </a:solidFill>
+                <a:latin typeface="Pretendard"/>
+                <a:ea typeface="Pretendard"/>
+                <a:cs typeface="Pretendard"/>
+              </a:rPr>
+              <a:t>16</a:t>
+            </a:r>
+          </a:p>
+        </p:txBody>
+      </p:sp>
+      <p:sp>
+        <p:nvSpPr>
+          <p:cNvPr id="8" name="Rounded Rectangle 7"/>
           <p:cNvSpPr/>
           <p:nvPr/>
         </p:nvSpPr>
         <p:spPr>
           <a:xfrm>
             <a:off x="663122" y="1747509"/>
-            <a:ext cx="3491362" cy="64008"/>
-          </a:xfrm>
-          <a:prstGeom prst="rect">
-            <a:avLst/>
-          </a:prstGeom>
-          <a:solidFill>
-            <a:srgbClr val="00754A"/>
-          </a:solidFill>
-          <a:ln>
-            <a:noFill/>
-          </a:ln>
-          <a:effectLst/>
-        </p:spPr>
-        <p:style>
-          <a:lnRef idx="1">
-            <a:schemeClr val="accent1"/>
-          </a:lnRef>
-          <a:fillRef idx="3">
-            <a:schemeClr val="accent1"/>
-          </a:fillRef>
-          <a:effectRef idx="2">
-            <a:schemeClr val="accent1"/>
-          </a:effectRef>
-          <a:fontRef idx="minor">
-            <a:schemeClr val="lt1"/>
-          </a:fontRef>
-        </p:style>
-        <p:txBody>
-          <a:bodyPr rtlCol="0" anchor="ctr"/>
-          <a:lstStyle/>
-          <a:p>
-            <a:pPr algn="ctr"/>
-          </a:p>
-        </p:txBody>
-      </p:sp>
-      <p:sp>
-        <p:nvSpPr>
-          <p:cNvPr id="10" name="Rounded Rectangle 9"/>
-          <p:cNvSpPr/>
-          <p:nvPr/>
-        </p:nvSpPr>
-        <p:spPr>
-          <a:xfrm>
-            <a:off x="1540123" y="2003541"/>
-            <a:ext cx="1737360" cy="310896"/>
-          </a:xfrm>
-          <a:prstGeom prst="roundRect">
-            <a:avLst>
-              <a:gd name="adj" fmla="val 50000"/>
-            </a:avLst>
-          </a:prstGeom>
-          <a:solidFill>
-            <a:srgbClr val="00754A"/>
-          </a:solidFill>
-          <a:ln>
-            <a:noFill/>
-          </a:ln>
-          <a:effectLst/>
-        </p:spPr>
-        <p:style>
-          <a:lnRef idx="1">
-            <a:schemeClr val="accent1"/>
-          </a:lnRef>
-          <a:fillRef idx="3">
-            <a:schemeClr val="accent1"/>
-          </a:fillRef>
-          <a:effectRef idx="2">
-            <a:schemeClr val="accent1"/>
-          </a:effectRef>
-          <a:fontRef idx="minor">
-            <a:schemeClr val="lt1"/>
-          </a:fontRef>
-        </p:style>
-        <p:txBody>
-          <a:bodyPr rtlCol="0" anchor="ctr"/>
-          <a:lstStyle/>
-          <a:p>
-            <a:pPr algn="ctr"/>
-          </a:p>
-        </p:txBody>
-      </p:sp>
-      <p:sp>
-        <p:nvSpPr>
-          <p:cNvPr id="11" name="TextBox 10"/>
-          <p:cNvSpPr txBox="1"/>
-          <p:nvPr/>
-        </p:nvSpPr>
-        <p:spPr>
-          <a:xfrm>
-            <a:off x="1540123" y="2003541"/>
-            <a:ext cx="1737360" cy="310896"/>
-          </a:xfrm>
-          <a:prstGeom prst="rect">
-            <a:avLst/>
-          </a:prstGeom>
-          <a:noFill/>
-        </p:spPr>
-        <p:txBody>
-          <a:bodyPr wrap="square" anchor="ctr" lIns="0" rIns="0" tIns="0" bIns="0">
-            <a:spAutoFit/>
-          </a:bodyPr>
-          <a:lstStyle/>
-          <a:p>
-            <a:pPr algn="ctr"/>
-            <a:r>
-              <a:rPr sz="1100" b="1" i="0" spc="-11">
-                <a:solidFill>
-                  <a:srgbClr val="FFFFFF"/>
-                </a:solidFill>
-                <a:latin typeface="Pretendard"/>
-                <a:ea typeface="Pretendard"/>
-                <a:cs typeface="Pretendard"/>
-              </a:rPr>
-              <a:t>OWN YOUR DATA</a:t>
-            </a:r>
-          </a:p>
-        </p:txBody>
-      </p:sp>
-      <p:sp>
-        <p:nvSpPr>
-          <p:cNvPr id="12" name="TextBox 11"/>
-          <p:cNvSpPr txBox="1"/>
-          <p:nvPr/>
-        </p:nvSpPr>
-        <p:spPr>
-          <a:xfrm>
-            <a:off x="754562" y="2616189"/>
-            <a:ext cx="3308482" cy="1554480"/>
-          </a:xfrm>
-          <a:prstGeom prst="rect">
-            <a:avLst/>
-          </a:prstGeom>
-          <a:noFill/>
-        </p:spPr>
-        <p:txBody>
-          <a:bodyPr wrap="square" anchor="t" lIns="0" rIns="0" tIns="0" bIns="0">
-            <a:spAutoFit/>
-          </a:bodyPr>
-          <a:lstStyle/>
-          <a:p>
-            <a:pPr algn="ctr"/>
-            <a:r>
-              <a:rPr sz="3400" b="1" i="0" spc="-34">
-                <a:solidFill>
-                  <a:srgbClr val="006241"/>
-                </a:solidFill>
-                <a:latin typeface="Pretendard"/>
-                <a:ea typeface="Pretendard"/>
-                <a:cs typeface="Pretendard"/>
-              </a:rPr>
-              <a:t>마크다운</a:t>
-            </a:r>
-          </a:p>
-          <a:p>
-            <a:pPr algn="ctr">
-              <a:spcBef>
-                <a:spcPts val="200"/>
-              </a:spcBef>
-            </a:pPr>
-            <a:r>
-              <a:rPr sz="1600" b="1" i="0" spc="-16">
-                <a:solidFill>
-                  <a:srgbClr val="1F1F1F"/>
-                </a:solidFill>
-                <a:latin typeface="Pretendard"/>
-                <a:ea typeface="Pretendard"/>
-                <a:cs typeface="Pretendard"/>
-              </a:rPr>
-              <a:t>= 내 DB</a:t>
-            </a:r>
-          </a:p>
-          <a:p>
-            <a:pPr algn="ctr">
-              <a:lnSpc>
-                <a:spcPts val="1600"/>
-              </a:lnSpc>
-              <a:spcBef>
-                <a:spcPts val="1000"/>
-              </a:spcBef>
-            </a:pPr>
-            <a:r>
-              <a:rPr sz="1200" b="0" i="0" spc="-12">
-                <a:solidFill>
-                  <a:srgbClr val="6B6B6B"/>
-                </a:solidFill>
-                <a:latin typeface="Pretendard"/>
-                <a:ea typeface="Pretendard"/>
-                <a:cs typeface="Pretendard"/>
-              </a:rPr>
-              <a:t>평문·git·로컬 우선
-플러그인보다 오래 남음</a:t>
-            </a:r>
-          </a:p>
-        </p:txBody>
-      </p:sp>
-      <p:sp>
-        <p:nvSpPr>
-          <p:cNvPr id="13" name="Rounded Rectangle 12"/>
-          <p:cNvSpPr/>
-          <p:nvPr/>
-        </p:nvSpPr>
-        <p:spPr>
-          <a:xfrm>
-            <a:off x="4355652" y="1747509"/>
             <a:ext cx="3491362" cy="3200400"/>
           </a:xfrm>
           <a:prstGeom prst="roundRect">
@@ -8564,13 +10173,13 @@
       </p:sp>
       <p:sp>
         <p:nvSpPr>
-          <p:cNvPr id="14" name="Rectangle 13"/>
+          <p:cNvPr id="9" name="Rectangle 8"/>
           <p:cNvSpPr/>
           <p:nvPr/>
         </p:nvSpPr>
         <p:spPr>
           <a:xfrm>
-            <a:off x="4355652" y="1747509"/>
+            <a:off x="663122" y="1747509"/>
             <a:ext cx="3491362" cy="64008"/>
           </a:xfrm>
           <a:prstGeom prst="rect">
@@ -8608,13 +10217,13 @@
       </p:sp>
       <p:sp>
         <p:nvSpPr>
-          <p:cNvPr id="15" name="Rounded Rectangle 14"/>
+          <p:cNvPr id="10" name="Rounded Rectangle 9"/>
           <p:cNvSpPr/>
           <p:nvPr/>
         </p:nvSpPr>
         <p:spPr>
           <a:xfrm>
-            <a:off x="5232654" y="2003541"/>
+            <a:off x="1540123" y="2003541"/>
             <a:ext cx="1737360" cy="310896"/>
           </a:xfrm>
           <a:prstGeom prst="roundRect">
@@ -8654,13 +10263,13 @@
       </p:sp>
       <p:sp>
         <p:nvSpPr>
-          <p:cNvPr id="16" name="TextBox 15"/>
-          <p:cNvSpPr txBox="1"/>
-          <p:nvPr/>
-        </p:nvSpPr>
-        <p:spPr>
-          <a:xfrm>
-            <a:off x="5232654" y="2003541"/>
+          <p:cNvPr id="11" name="TextBox 10"/>
+          <p:cNvSpPr txBox="1"/>
+          <p:nvPr/>
+        </p:nvSpPr>
+        <p:spPr>
+          <a:xfrm>
+            <a:off x="1540123" y="2003541"/>
             <a:ext cx="1737360" cy="310896"/>
           </a:xfrm>
           <a:prstGeom prst="rect">
@@ -8684,20 +10293,20 @@
                 <a:ea typeface="Pretendard"/>
                 <a:cs typeface="Pretendard"/>
               </a:rPr>
-              <a:t>GROUNDED</a:t>
-            </a:r>
-          </a:p>
-        </p:txBody>
-      </p:sp>
-      <p:sp>
-        <p:nvSpPr>
-          <p:cNvPr id="17" name="TextBox 16"/>
-          <p:cNvSpPr txBox="1"/>
-          <p:nvPr/>
-        </p:nvSpPr>
-        <p:spPr>
-          <a:xfrm>
-            <a:off x="4447092" y="2616189"/>
+              <a:t>OWN YOUR DATA</a:t>
+            </a:r>
+          </a:p>
+        </p:txBody>
+      </p:sp>
+      <p:sp>
+        <p:nvSpPr>
+          <p:cNvPr id="12" name="TextBox 11"/>
+          <p:cNvSpPr txBox="1"/>
+          <p:nvPr/>
+        </p:nvSpPr>
+        <p:spPr>
+          <a:xfrm>
+            <a:off x="754562" y="2616189"/>
             <a:ext cx="3308482" cy="1554480"/>
           </a:xfrm>
           <a:prstGeom prst="rect">
@@ -8721,7 +10330,7 @@
                 <a:ea typeface="Pretendard"/>
                 <a:cs typeface="Pretendard"/>
               </a:rPr>
-              <a:t>근거</a:t>
+              <a:t>마크다운</a:t>
             </a:r>
           </a:p>
           <a:p>
@@ -8739,7 +10348,7 @@
                 <a:ea typeface="Pretendard"/>
                 <a:cs typeface="Pretendard"/>
               </a:rPr>
-              <a:t>구절 인용</a:t>
+              <a:t>= 내 DB</a:t>
             </a:r>
           </a:p>
           <a:p>
@@ -8760,21 +10369,21 @@
                 <a:ea typeface="Pretendard"/>
                 <a:cs typeface="Pretendard"/>
               </a:rPr>
-              <a:t>출처 없는 답 없음
-서식 참고문헌까지</a:t>
-            </a:r>
-          </a:p>
-        </p:txBody>
-      </p:sp>
-      <p:sp>
-        <p:nvSpPr>
-          <p:cNvPr id="18" name="Rounded Rectangle 17"/>
+              <a:t>평문·git·로컬 우선
+플러그인보다 오래 남음</a:t>
+            </a:r>
+          </a:p>
+        </p:txBody>
+      </p:sp>
+      <p:sp>
+        <p:nvSpPr>
+          <p:cNvPr id="13" name="Rounded Rectangle 12"/>
           <p:cNvSpPr/>
           <p:nvPr/>
         </p:nvSpPr>
         <p:spPr>
           <a:xfrm>
-            <a:off x="8048183" y="1747509"/>
+            <a:off x="4355652" y="1747509"/>
             <a:ext cx="3491362" cy="3200400"/>
           </a:xfrm>
           <a:prstGeom prst="roundRect">
@@ -8816,13 +10425,13 @@
       </p:sp>
       <p:sp>
         <p:nvSpPr>
-          <p:cNvPr id="19" name="Rectangle 18"/>
+          <p:cNvPr id="14" name="Rectangle 13"/>
           <p:cNvSpPr/>
           <p:nvPr/>
         </p:nvSpPr>
         <p:spPr>
           <a:xfrm>
-            <a:off x="8048183" y="1747509"/>
+            <a:off x="4355652" y="1747509"/>
             <a:ext cx="3491362" cy="64008"/>
           </a:xfrm>
           <a:prstGeom prst="rect">
@@ -8860,13 +10469,13 @@
       </p:sp>
       <p:sp>
         <p:nvSpPr>
-          <p:cNvPr id="20" name="Rounded Rectangle 19"/>
+          <p:cNvPr id="15" name="Rounded Rectangle 14"/>
           <p:cNvSpPr/>
           <p:nvPr/>
         </p:nvSpPr>
         <p:spPr>
           <a:xfrm>
-            <a:off x="8925184" y="2003541"/>
+            <a:off x="5232654" y="2003541"/>
             <a:ext cx="1737360" cy="310896"/>
           </a:xfrm>
           <a:prstGeom prst="roundRect">
@@ -8906,13 +10515,13 @@
       </p:sp>
       <p:sp>
         <p:nvSpPr>
-          <p:cNvPr id="21" name="TextBox 20"/>
-          <p:cNvSpPr txBox="1"/>
-          <p:nvPr/>
-        </p:nvSpPr>
-        <p:spPr>
-          <a:xfrm>
-            <a:off x="8925184" y="2003541"/>
+          <p:cNvPr id="16" name="TextBox 15"/>
+          <p:cNvSpPr txBox="1"/>
+          <p:nvPr/>
+        </p:nvSpPr>
+        <p:spPr>
+          <a:xfrm>
+            <a:off x="5232654" y="2003541"/>
             <a:ext cx="1737360" cy="310896"/>
           </a:xfrm>
           <a:prstGeom prst="rect">
@@ -8936,20 +10545,20 @@
                 <a:ea typeface="Pretendard"/>
                 <a:cs typeface="Pretendard"/>
               </a:rPr>
-              <a:t>GRAPH-LITE</a:t>
-            </a:r>
-          </a:p>
-        </p:txBody>
-      </p:sp>
-      <p:sp>
-        <p:nvSpPr>
-          <p:cNvPr id="22" name="TextBox 21"/>
-          <p:cNvSpPr txBox="1"/>
-          <p:nvPr/>
-        </p:nvSpPr>
-        <p:spPr>
-          <a:xfrm>
-            <a:off x="8139623" y="2616189"/>
+              <a:t>GROUNDED</a:t>
+            </a:r>
+          </a:p>
+        </p:txBody>
+      </p:sp>
+      <p:sp>
+        <p:nvSpPr>
+          <p:cNvPr id="17" name="TextBox 16"/>
+          <p:cNvSpPr txBox="1"/>
+          <p:nvPr/>
+        </p:nvSpPr>
+        <p:spPr>
+          <a:xfrm>
+            <a:off x="4447092" y="2616189"/>
             <a:ext cx="3308482" cy="1554480"/>
           </a:xfrm>
           <a:prstGeom prst="rect">
@@ -8973,7 +10582,7 @@
                 <a:ea typeface="Pretendard"/>
                 <a:cs typeface="Pretendard"/>
               </a:rPr>
-              <a:t>그래프</a:t>
+              <a:t>근거</a:t>
             </a:r>
           </a:p>
           <a:p>
@@ -8991,7 +10600,7 @@
                 <a:ea typeface="Pretendard"/>
                 <a:cs typeface="Pretendard"/>
               </a:rPr>
-              <a:t>놓친 논문</a:t>
+              <a:t>구절 인용</a:t>
             </a:r>
           </a:p>
           <a:p>
@@ -9012,6 +10621,258 @@
                 <a:ea typeface="Pretendard"/>
                 <a:cs typeface="Pretendard"/>
               </a:rPr>
+              <a:t>출처 없는 답 없음
+서식 참고문헌까지</a:t>
+            </a:r>
+          </a:p>
+        </p:txBody>
+      </p:sp>
+      <p:sp>
+        <p:nvSpPr>
+          <p:cNvPr id="18" name="Rounded Rectangle 17"/>
+          <p:cNvSpPr/>
+          <p:nvPr/>
+        </p:nvSpPr>
+        <p:spPr>
+          <a:xfrm>
+            <a:off x="8048183" y="1747509"/>
+            <a:ext cx="3491362" cy="3200400"/>
+          </a:xfrm>
+          <a:prstGeom prst="roundRect">
+            <a:avLst>
+              <a:gd name="adj" fmla="val 6000"/>
+            </a:avLst>
+          </a:prstGeom>
+          <a:solidFill>
+            <a:srgbClr val="FFFFFF"/>
+          </a:solidFill>
+          <a:ln w="9525">
+            <a:solidFill>
+              <a:srgbClr val="D9D9D9"/>
+            </a:solidFill>
+          </a:ln>
+          <a:effectLst/>
+        </p:spPr>
+        <p:style>
+          <a:lnRef idx="1">
+            <a:schemeClr val="accent1"/>
+          </a:lnRef>
+          <a:fillRef idx="3">
+            <a:schemeClr val="accent1"/>
+          </a:fillRef>
+          <a:effectRef idx="2">
+            <a:schemeClr val="accent1"/>
+          </a:effectRef>
+          <a:fontRef idx="minor">
+            <a:schemeClr val="lt1"/>
+          </a:fontRef>
+        </p:style>
+        <p:txBody>
+          <a:bodyPr rtlCol="0" anchor="ctr"/>
+          <a:lstStyle/>
+          <a:p>
+            <a:pPr algn="ctr"/>
+          </a:p>
+        </p:txBody>
+      </p:sp>
+      <p:sp>
+        <p:nvSpPr>
+          <p:cNvPr id="19" name="Rectangle 18"/>
+          <p:cNvSpPr/>
+          <p:nvPr/>
+        </p:nvSpPr>
+        <p:spPr>
+          <a:xfrm>
+            <a:off x="8048183" y="1747509"/>
+            <a:ext cx="3491362" cy="64008"/>
+          </a:xfrm>
+          <a:prstGeom prst="rect">
+            <a:avLst/>
+          </a:prstGeom>
+          <a:solidFill>
+            <a:srgbClr val="00754A"/>
+          </a:solidFill>
+          <a:ln>
+            <a:noFill/>
+          </a:ln>
+          <a:effectLst/>
+        </p:spPr>
+        <p:style>
+          <a:lnRef idx="1">
+            <a:schemeClr val="accent1"/>
+          </a:lnRef>
+          <a:fillRef idx="3">
+            <a:schemeClr val="accent1"/>
+          </a:fillRef>
+          <a:effectRef idx="2">
+            <a:schemeClr val="accent1"/>
+          </a:effectRef>
+          <a:fontRef idx="minor">
+            <a:schemeClr val="lt1"/>
+          </a:fontRef>
+        </p:style>
+        <p:txBody>
+          <a:bodyPr rtlCol="0" anchor="ctr"/>
+          <a:lstStyle/>
+          <a:p>
+            <a:pPr algn="ctr"/>
+          </a:p>
+        </p:txBody>
+      </p:sp>
+      <p:sp>
+        <p:nvSpPr>
+          <p:cNvPr id="20" name="Rounded Rectangle 19"/>
+          <p:cNvSpPr/>
+          <p:nvPr/>
+        </p:nvSpPr>
+        <p:spPr>
+          <a:xfrm>
+            <a:off x="8925184" y="2003541"/>
+            <a:ext cx="1737360" cy="310896"/>
+          </a:xfrm>
+          <a:prstGeom prst="roundRect">
+            <a:avLst>
+              <a:gd name="adj" fmla="val 50000"/>
+            </a:avLst>
+          </a:prstGeom>
+          <a:solidFill>
+            <a:srgbClr val="00754A"/>
+          </a:solidFill>
+          <a:ln>
+            <a:noFill/>
+          </a:ln>
+          <a:effectLst/>
+        </p:spPr>
+        <p:style>
+          <a:lnRef idx="1">
+            <a:schemeClr val="accent1"/>
+          </a:lnRef>
+          <a:fillRef idx="3">
+            <a:schemeClr val="accent1"/>
+          </a:fillRef>
+          <a:effectRef idx="2">
+            <a:schemeClr val="accent1"/>
+          </a:effectRef>
+          <a:fontRef idx="minor">
+            <a:schemeClr val="lt1"/>
+          </a:fontRef>
+        </p:style>
+        <p:txBody>
+          <a:bodyPr rtlCol="0" anchor="ctr"/>
+          <a:lstStyle/>
+          <a:p>
+            <a:pPr algn="ctr"/>
+          </a:p>
+        </p:txBody>
+      </p:sp>
+      <p:sp>
+        <p:nvSpPr>
+          <p:cNvPr id="21" name="TextBox 20"/>
+          <p:cNvSpPr txBox="1"/>
+          <p:nvPr/>
+        </p:nvSpPr>
+        <p:spPr>
+          <a:xfrm>
+            <a:off x="8925184" y="2003541"/>
+            <a:ext cx="1737360" cy="310896"/>
+          </a:xfrm>
+          <a:prstGeom prst="rect">
+            <a:avLst/>
+          </a:prstGeom>
+          <a:noFill/>
+        </p:spPr>
+        <p:txBody>
+          <a:bodyPr wrap="square" anchor="ctr" lIns="0" rIns="0" tIns="0" bIns="0">
+            <a:spAutoFit/>
+          </a:bodyPr>
+          <a:lstStyle/>
+          <a:p>
+            <a:pPr algn="ctr"/>
+            <a:r>
+              <a:rPr sz="1100" b="1" i="0" spc="-11">
+                <a:solidFill>
+                  <a:srgbClr val="FFFFFF"/>
+                </a:solidFill>
+                <a:latin typeface="Pretendard"/>
+                <a:ea typeface="Pretendard"/>
+                <a:cs typeface="Pretendard"/>
+              </a:rPr>
+              <a:t>GRAPH-LITE</a:t>
+            </a:r>
+          </a:p>
+        </p:txBody>
+      </p:sp>
+      <p:sp>
+        <p:nvSpPr>
+          <p:cNvPr id="22" name="TextBox 21"/>
+          <p:cNvSpPr txBox="1"/>
+          <p:nvPr/>
+        </p:nvSpPr>
+        <p:spPr>
+          <a:xfrm>
+            <a:off x="8139623" y="2616189"/>
+            <a:ext cx="3308482" cy="1554480"/>
+          </a:xfrm>
+          <a:prstGeom prst="rect">
+            <a:avLst/>
+          </a:prstGeom>
+          <a:noFill/>
+        </p:spPr>
+        <p:txBody>
+          <a:bodyPr wrap="square" anchor="t" lIns="0" rIns="0" tIns="0" bIns="0">
+            <a:spAutoFit/>
+          </a:bodyPr>
+          <a:lstStyle/>
+          <a:p>
+            <a:pPr algn="ctr"/>
+            <a:r>
+              <a:rPr sz="3400" b="1" i="0" spc="-34">
+                <a:solidFill>
+                  <a:srgbClr val="006241"/>
+                </a:solidFill>
+                <a:latin typeface="Pretendard"/>
+                <a:ea typeface="Pretendard"/>
+                <a:cs typeface="Pretendard"/>
+              </a:rPr>
+              <a:t>그래프</a:t>
+            </a:r>
+          </a:p>
+          <a:p>
+            <a:pPr algn="ctr">
+              <a:spcBef>
+                <a:spcPts val="200"/>
+              </a:spcBef>
+            </a:pPr>
+            <a:r>
+              <a:rPr sz="1600" b="1" i="0" spc="-16">
+                <a:solidFill>
+                  <a:srgbClr val="1F1F1F"/>
+                </a:solidFill>
+                <a:latin typeface="Pretendard"/>
+                <a:ea typeface="Pretendard"/>
+                <a:cs typeface="Pretendard"/>
+              </a:rPr>
+              <a:t>놓친 논문</a:t>
+            </a:r>
+          </a:p>
+          <a:p>
+            <a:pPr algn="ctr">
+              <a:lnSpc>
+                <a:spcPts val="1600"/>
+              </a:lnSpc>
+              <a:spcBef>
+                <a:spcPts val="1000"/>
+              </a:spcBef>
+            </a:pPr>
+            <a:r>
+              <a:rPr sz="1200" b="0" i="0" spc="-12">
+                <a:solidFill>
+                  <a:srgbClr val="6B6B6B"/>
+                </a:solidFill>
+                <a:latin typeface="Pretendard"/>
+                <a:ea typeface="Pretendard"/>
+                <a:cs typeface="Pretendard"/>
+              </a:rPr>
               <a:t>OpenAlex 인용엣지
 LLM 비용 0</a:t>
             </a:r>
@@ -9109,7 +10970,7 @@
 </p:sld>
 </file>
 
-<file path=ppt/slides/slide16.xml><?xml version="1.0" encoding="utf-8"?>
+<file path=ppt/slides/slide17.xml><?xml version="1.0" encoding="utf-8"?>
 <p:sld xmlns:a="http://schemas.openxmlformats.org/drawingml/2006/main" xmlns:p="http://schemas.openxmlformats.org/presentationml/2006/main" xmlns:r="http://schemas.openxmlformats.org/officeDocument/2006/relationships">
   <p:cSld>
     <p:spTree>

--- a/presentation/rag_obsidian_deck.pptx
+++ b/presentation/rag_obsidian_deck.pptx
@@ -8148,7 +8148,7 @@
                 <a:ea typeface="Pretendard"/>
                 <a:cs typeface="Pretendard"/>
               </a:rPr>
-              <a:t>쓰는 법은 다섯 동작이 전부다</a:t>
+              <a:t>쓰는 법은 여섯 동작이 전부다</a:t>
             </a:r>
           </a:p>
         </p:txBody>
@@ -8308,8 +8308,8 @@
         </p:nvSpPr>
         <p:spPr>
           <a:xfrm>
-            <a:off x="663122" y="1701789"/>
-            <a:ext cx="10876422" cy="676656"/>
+            <a:off x="663122" y="1637781"/>
+            <a:ext cx="10876422" cy="603504"/>
           </a:xfrm>
           <a:prstGeom prst="roundRect">
             <a:avLst>
@@ -8356,7 +8356,7 @@
         </p:nvSpPr>
         <p:spPr>
           <a:xfrm>
-            <a:off x="864290" y="1857237"/>
+            <a:off x="864290" y="1756653"/>
             <a:ext cx="365760" cy="365760"/>
           </a:xfrm>
           <a:prstGeom prst="ellipse">
@@ -8400,7 +8400,7 @@
         </p:nvSpPr>
         <p:spPr>
           <a:xfrm>
-            <a:off x="864290" y="1857237"/>
+            <a:off x="864290" y="1756653"/>
             <a:ext cx="365760" cy="365760"/>
           </a:xfrm>
           <a:prstGeom prst="rect">
@@ -8437,8 +8437,8 @@
         </p:nvSpPr>
         <p:spPr>
           <a:xfrm>
-            <a:off x="1348922" y="1701789"/>
-            <a:ext cx="1783080" cy="676656"/>
+            <a:off x="1348922" y="1637781"/>
+            <a:ext cx="1783080" cy="603504"/>
           </a:xfrm>
           <a:prstGeom prst="rect">
             <a:avLst/>
@@ -8478,8 +8478,8 @@
         </p:nvSpPr>
         <p:spPr>
           <a:xfrm>
-            <a:off x="3177722" y="1820661"/>
-            <a:ext cx="4526280" cy="438912"/>
+            <a:off x="3177722" y="1756653"/>
+            <a:ext cx="4526280" cy="365760"/>
           </a:xfrm>
           <a:prstGeom prst="roundRect">
             <a:avLst>
@@ -8524,8 +8524,8 @@
         </p:nvSpPr>
         <p:spPr>
           <a:xfrm>
-            <a:off x="3314882" y="1820661"/>
-            <a:ext cx="4251960" cy="438912"/>
+            <a:off x="3314882" y="1756653"/>
+            <a:ext cx="4251960" cy="365760"/>
           </a:xfrm>
           <a:prstGeom prst="rect">
             <a:avLst/>
@@ -8565,8 +8565,8 @@
         </p:nvSpPr>
         <p:spPr>
           <a:xfrm>
-            <a:off x="7932602" y="1701789"/>
-            <a:ext cx="3469782" cy="676656"/>
+            <a:off x="7932602" y="1637781"/>
+            <a:ext cx="3469782" cy="603504"/>
           </a:xfrm>
           <a:prstGeom prst="rect">
             <a:avLst/>
@@ -8606,8 +8606,8 @@
         </p:nvSpPr>
         <p:spPr>
           <a:xfrm>
-            <a:off x="663122" y="2479029"/>
-            <a:ext cx="10876422" cy="676656"/>
+            <a:off x="663122" y="2332725"/>
+            <a:ext cx="10876422" cy="603504"/>
           </a:xfrm>
           <a:prstGeom prst="roundRect">
             <a:avLst>
@@ -8654,7 +8654,7 @@
         </p:nvSpPr>
         <p:spPr>
           <a:xfrm>
-            <a:off x="864290" y="2634477"/>
+            <a:off x="864290" y="2451597"/>
             <a:ext cx="365760" cy="365760"/>
           </a:xfrm>
           <a:prstGeom prst="ellipse">
@@ -8698,7 +8698,7 @@
         </p:nvSpPr>
         <p:spPr>
           <a:xfrm>
-            <a:off x="864290" y="2634477"/>
+            <a:off x="864290" y="2451597"/>
             <a:ext cx="365760" cy="365760"/>
           </a:xfrm>
           <a:prstGeom prst="rect">
@@ -8735,8 +8735,8 @@
         </p:nvSpPr>
         <p:spPr>
           <a:xfrm>
-            <a:off x="1348922" y="2479029"/>
-            <a:ext cx="1783080" cy="676656"/>
+            <a:off x="1348922" y="2332725"/>
+            <a:ext cx="1783080" cy="603504"/>
           </a:xfrm>
           <a:prstGeom prst="rect">
             <a:avLst/>
@@ -8763,7 +8763,7 @@
                 <a:ea typeface="Pretendard"/>
                 <a:cs typeface="Pretendard"/>
               </a:rPr>
-              <a:t>뜻으로 검색</a:t>
+              <a:t>PubMed 검색</a:t>
             </a:r>
           </a:p>
         </p:txBody>
@@ -8776,8 +8776,8 @@
         </p:nvSpPr>
         <p:spPr>
           <a:xfrm>
-            <a:off x="3177722" y="2597901"/>
-            <a:ext cx="4526280" cy="438912"/>
+            <a:off x="3177722" y="2451597"/>
+            <a:ext cx="4526280" cy="365760"/>
           </a:xfrm>
           <a:prstGeom prst="roundRect">
             <a:avLst>
@@ -8822,8 +8822,8 @@
         </p:nvSpPr>
         <p:spPr>
           <a:xfrm>
-            <a:off x="3314882" y="2597901"/>
-            <a:ext cx="4251960" cy="438912"/>
+            <a:off x="3314882" y="2451597"/>
+            <a:ext cx="4251960" cy="365760"/>
           </a:xfrm>
           <a:prstGeom prst="rect">
             <a:avLst/>
@@ -8850,7 +8850,7 @@
                 <a:ea typeface="Pretendard"/>
                 <a:cs typeface="Pretendard"/>
               </a:rPr>
-              <a:t>“Search library (semantic)”  (리본: 돋보기)</a:t>
+              <a:t>“Search PubMed and add references”  (리본: 돋보기)</a:t>
             </a:r>
           </a:p>
         </p:txBody>
@@ -8863,8 +8863,8 @@
         </p:nvSpPr>
         <p:spPr>
           <a:xfrm>
-            <a:off x="7932602" y="2479029"/>
-            <a:ext cx="3469782" cy="676656"/>
+            <a:off x="7932602" y="2332725"/>
+            <a:ext cx="3469782" cy="603504"/>
           </a:xfrm>
           <a:prstGeom prst="rect">
             <a:avLst/>
@@ -8891,7 +8891,7 @@
                 <a:ea typeface="Pretendard"/>
                 <a:cs typeface="Pretendard"/>
               </a:rPr>
-              <a:t>단어+뜻 하이브리드 검색, 저자·연도로 좁히기</a:t>
+              <a:t>키워드로 PubMed 검색 → 골라서 한 번에 서재로</a:t>
             </a:r>
           </a:p>
         </p:txBody>
@@ -8904,8 +8904,8 @@
         </p:nvSpPr>
         <p:spPr>
           <a:xfrm>
-            <a:off x="663122" y="3256269"/>
-            <a:ext cx="10876422" cy="676656"/>
+            <a:off x="663122" y="3027669"/>
+            <a:ext cx="10876422" cy="603504"/>
           </a:xfrm>
           <a:prstGeom prst="roundRect">
             <a:avLst>
@@ -8952,7 +8952,7 @@
         </p:nvSpPr>
         <p:spPr>
           <a:xfrm>
-            <a:off x="864290" y="3411717"/>
+            <a:off x="864290" y="3146541"/>
             <a:ext cx="365760" cy="365760"/>
           </a:xfrm>
           <a:prstGeom prst="ellipse">
@@ -8996,7 +8996,7 @@
         </p:nvSpPr>
         <p:spPr>
           <a:xfrm>
-            <a:off x="864290" y="3411717"/>
+            <a:off x="864290" y="3146541"/>
             <a:ext cx="365760" cy="365760"/>
           </a:xfrm>
           <a:prstGeom prst="rect">
@@ -9033,8 +9033,8 @@
         </p:nvSpPr>
         <p:spPr>
           <a:xfrm>
-            <a:off x="1348922" y="3256269"/>
-            <a:ext cx="1783080" cy="676656"/>
+            <a:off x="1348922" y="3027669"/>
+            <a:ext cx="1783080" cy="603504"/>
           </a:xfrm>
           <a:prstGeom prst="rect">
             <a:avLst/>
@@ -9061,7 +9061,7 @@
                 <a:ea typeface="Pretendard"/>
                 <a:cs typeface="Pretendard"/>
               </a:rPr>
-              <a:t>서재에 질문</a:t>
+              <a:t>뜻으로 검색</a:t>
             </a:r>
           </a:p>
         </p:txBody>
@@ -9074,8 +9074,8 @@
         </p:nvSpPr>
         <p:spPr>
           <a:xfrm>
-            <a:off x="3177722" y="3375141"/>
-            <a:ext cx="4526280" cy="438912"/>
+            <a:off x="3177722" y="3146541"/>
+            <a:ext cx="4526280" cy="365760"/>
           </a:xfrm>
           <a:prstGeom prst="roundRect">
             <a:avLst>
@@ -9120,8 +9120,8 @@
         </p:nvSpPr>
         <p:spPr>
           <a:xfrm>
-            <a:off x="3314882" y="3375141"/>
-            <a:ext cx="4251960" cy="438912"/>
+            <a:off x="3314882" y="3146541"/>
+            <a:ext cx="4251960" cy="365760"/>
           </a:xfrm>
           <a:prstGeom prst="rect">
             <a:avLst/>
@@ -9148,7 +9148,7 @@
                 <a:ea typeface="Pretendard"/>
                 <a:cs typeface="Pretendard"/>
               </a:rPr>
-              <a:t>“Chat with library”  (리본: 말풍선)</a:t>
+              <a:t>“Search library (semantic)”</a:t>
             </a:r>
           </a:p>
         </p:txBody>
@@ -9161,8 +9161,8 @@
         </p:nvSpPr>
         <p:spPr>
           <a:xfrm>
-            <a:off x="7932602" y="3256269"/>
-            <a:ext cx="3469782" cy="676656"/>
+            <a:off x="7932602" y="3027669"/>
+            <a:ext cx="3469782" cy="603504"/>
           </a:xfrm>
           <a:prstGeom prst="rect">
             <a:avLst/>
@@ -9189,7 +9189,7 @@
                 <a:ea typeface="Pretendard"/>
                 <a:cs typeface="Pretendard"/>
               </a:rPr>
-              <a:t>출처 [n] 달린 답 — [n] 클릭하면 원문 노트로</a:t>
+              <a:t>내 서재를 단어+뜻 하이브리드로, 저자·연도 필터</a:t>
             </a:r>
           </a:p>
         </p:txBody>
@@ -9202,8 +9202,8 @@
         </p:nvSpPr>
         <p:spPr>
           <a:xfrm>
-            <a:off x="663122" y="4033509"/>
-            <a:ext cx="10876422" cy="676656"/>
+            <a:off x="663122" y="3722613"/>
+            <a:ext cx="10876422" cy="603504"/>
           </a:xfrm>
           <a:prstGeom prst="roundRect">
             <a:avLst>
@@ -9250,7 +9250,7 @@
         </p:nvSpPr>
         <p:spPr>
           <a:xfrm>
-            <a:off x="864290" y="4188957"/>
+            <a:off x="864290" y="3841485"/>
             <a:ext cx="365760" cy="365760"/>
           </a:xfrm>
           <a:prstGeom prst="ellipse">
@@ -9294,7 +9294,7 @@
         </p:nvSpPr>
         <p:spPr>
           <a:xfrm>
-            <a:off x="864290" y="4188957"/>
+            <a:off x="864290" y="3841485"/>
             <a:ext cx="365760" cy="365760"/>
           </a:xfrm>
           <a:prstGeom prst="rect">
@@ -9331,8 +9331,8 @@
         </p:nvSpPr>
         <p:spPr>
           <a:xfrm>
-            <a:off x="1348922" y="4033509"/>
-            <a:ext cx="1783080" cy="676656"/>
+            <a:off x="1348922" y="3722613"/>
+            <a:ext cx="1783080" cy="603504"/>
           </a:xfrm>
           <a:prstGeom prst="rect">
             <a:avLst/>
@@ -9359,7 +9359,7 @@
                 <a:ea typeface="Pretendard"/>
                 <a:cs typeface="Pretendard"/>
               </a:rPr>
-              <a:t>글 쓰며 인용</a:t>
+              <a:t>서재에 질문</a:t>
             </a:r>
           </a:p>
         </p:txBody>
@@ -9372,8 +9372,8 @@
         </p:nvSpPr>
         <p:spPr>
           <a:xfrm>
-            <a:off x="3177722" y="4152381"/>
-            <a:ext cx="4526280" cy="438912"/>
+            <a:off x="3177722" y="3841485"/>
+            <a:ext cx="4526280" cy="365760"/>
           </a:xfrm>
           <a:prstGeom prst="roundRect">
             <a:avLst>
@@ -9418,8 +9418,8 @@
         </p:nvSpPr>
         <p:spPr>
           <a:xfrm>
-            <a:off x="3314882" y="4152381"/>
-            <a:ext cx="4251960" cy="438912"/>
+            <a:off x="3314882" y="3841485"/>
+            <a:ext cx="4251960" cy="365760"/>
           </a:xfrm>
           <a:prstGeom prst="rect">
             <a:avLst/>
@@ -9446,7 +9446,7 @@
                 <a:ea typeface="Pretendard"/>
                 <a:cs typeface="Pretendard"/>
               </a:rPr>
-              <a:t>본문에서  @  입력</a:t>
+              <a:t>“Chat with library”  (리본: 말풍선)</a:t>
             </a:r>
           </a:p>
         </p:txBody>
@@ -9459,8 +9459,8 @@
         </p:nvSpPr>
         <p:spPr>
           <a:xfrm>
-            <a:off x="7932602" y="4033509"/>
-            <a:ext cx="3469782" cy="676656"/>
+            <a:off x="7932602" y="3722613"/>
+            <a:ext cx="3469782" cy="603504"/>
           </a:xfrm>
           <a:prstGeom prst="rect">
             <a:avLst/>
@@ -9487,7 +9487,7 @@
                 <a:ea typeface="Pretendard"/>
                 <a:cs typeface="Pretendard"/>
               </a:rPr>
-              <a:t>제목·저자로 골라 [@citekey] 자동완성 삽입</a:t>
+              <a:t>출처 [n] 달린 답 — [n] 클릭하면 원문 노트로</a:t>
             </a:r>
           </a:p>
         </p:txBody>
@@ -9500,8 +9500,8 @@
         </p:nvSpPr>
         <p:spPr>
           <a:xfrm>
-            <a:off x="663122" y="4810749"/>
-            <a:ext cx="10876422" cy="676656"/>
+            <a:off x="663122" y="4417557"/>
+            <a:ext cx="10876422" cy="603504"/>
           </a:xfrm>
           <a:prstGeom prst="roundRect">
             <a:avLst>
@@ -9548,7 +9548,7 @@
         </p:nvSpPr>
         <p:spPr>
           <a:xfrm>
-            <a:off x="864290" y="4966197"/>
+            <a:off x="864290" y="4536429"/>
             <a:ext cx="365760" cy="365760"/>
           </a:xfrm>
           <a:prstGeom prst="ellipse">
@@ -9592,7 +9592,7 @@
         </p:nvSpPr>
         <p:spPr>
           <a:xfrm>
-            <a:off x="864290" y="4966197"/>
+            <a:off x="864290" y="4536429"/>
             <a:ext cx="365760" cy="365760"/>
           </a:xfrm>
           <a:prstGeom prst="rect">
@@ -9629,8 +9629,8 @@
         </p:nvSpPr>
         <p:spPr>
           <a:xfrm>
-            <a:off x="1348922" y="4810749"/>
-            <a:ext cx="1783080" cy="676656"/>
+            <a:off x="1348922" y="4417557"/>
+            <a:ext cx="1783080" cy="603504"/>
           </a:xfrm>
           <a:prstGeom prst="rect">
             <a:avLst/>
@@ -9657,7 +9657,7 @@
                 <a:ea typeface="Pretendard"/>
                 <a:cs typeface="Pretendard"/>
               </a:rPr>
-              <a:t>참고문헌 생성</a:t>
+              <a:t>글 쓰며 인용</a:t>
             </a:r>
           </a:p>
         </p:txBody>
@@ -9670,8 +9670,8 @@
         </p:nvSpPr>
         <p:spPr>
           <a:xfrm>
-            <a:off x="3177722" y="4929621"/>
-            <a:ext cx="4526280" cy="438912"/>
+            <a:off x="3177722" y="4536429"/>
+            <a:ext cx="4526280" cy="365760"/>
           </a:xfrm>
           <a:prstGeom prst="roundRect">
             <a:avLst>
@@ -9716,8 +9716,8 @@
         </p:nvSpPr>
         <p:spPr>
           <a:xfrm>
-            <a:off x="3314882" y="4929621"/>
-            <a:ext cx="4251960" cy="438912"/>
+            <a:off x="3314882" y="4536429"/>
+            <a:ext cx="4251960" cy="365760"/>
           </a:xfrm>
           <a:prstGeom prst="rect">
             <a:avLst/>
@@ -9744,7 +9744,7 @@
                 <a:ea typeface="Pretendard"/>
                 <a:cs typeface="Pretendard"/>
               </a:rPr>
-              <a:t>“Update bibliography in current note”</a:t>
+              <a:t>본문에서  @  입력</a:t>
             </a:r>
           </a:p>
         </p:txBody>
@@ -9757,8 +9757,8 @@
         </p:nvSpPr>
         <p:spPr>
           <a:xfrm>
-            <a:off x="7932602" y="4810749"/>
-            <a:ext cx="3469782" cy="676656"/>
+            <a:off x="7932602" y="4417557"/>
+            <a:ext cx="3469782" cy="603504"/>
           </a:xfrm>
           <a:prstGeom prst="rect">
             <a:avLst/>
@@ -9785,7 +9785,7 @@
                 <a:ea typeface="Pretendard"/>
                 <a:cs typeface="Pretendard"/>
               </a:rPr>
-              <a:t>## References를 저널 스타일(APA·Vancouver·CSL)로 자동 생성</a:t>
+              <a:t>제목·저자로 골라 [@citekey] 자동완성 삽입</a:t>
             </a:r>
           </a:p>
         </p:txBody>
@@ -9793,6 +9793,304 @@
       <p:sp>
         <p:nvSpPr>
           <p:cNvPr id="44" name="Rounded Rectangle 43"/>
+          <p:cNvSpPr/>
+          <p:nvPr/>
+        </p:nvSpPr>
+        <p:spPr>
+          <a:xfrm>
+            <a:off x="663122" y="5112501"/>
+            <a:ext cx="10876422" cy="603504"/>
+          </a:xfrm>
+          <a:prstGeom prst="roundRect">
+            <a:avLst>
+              <a:gd name="adj" fmla="val 8000"/>
+            </a:avLst>
+          </a:prstGeom>
+          <a:solidFill>
+            <a:srgbClr val="FFFFFF"/>
+          </a:solidFill>
+          <a:ln w="11430">
+            <a:solidFill>
+              <a:srgbClr val="D9D9D9"/>
+            </a:solidFill>
+          </a:ln>
+          <a:effectLst/>
+        </p:spPr>
+        <p:style>
+          <a:lnRef idx="1">
+            <a:schemeClr val="accent1"/>
+          </a:lnRef>
+          <a:fillRef idx="3">
+            <a:schemeClr val="accent1"/>
+          </a:fillRef>
+          <a:effectRef idx="2">
+            <a:schemeClr val="accent1"/>
+          </a:effectRef>
+          <a:fontRef idx="minor">
+            <a:schemeClr val="lt1"/>
+          </a:fontRef>
+        </p:style>
+        <p:txBody>
+          <a:bodyPr rtlCol="0" anchor="ctr"/>
+          <a:lstStyle/>
+          <a:p>
+            <a:pPr algn="ctr"/>
+          </a:p>
+        </p:txBody>
+      </p:sp>
+      <p:sp>
+        <p:nvSpPr>
+          <p:cNvPr id="45" name="Oval 44"/>
+          <p:cNvSpPr/>
+          <p:nvPr/>
+        </p:nvSpPr>
+        <p:spPr>
+          <a:xfrm>
+            <a:off x="864290" y="5231373"/>
+            <a:ext cx="365760" cy="365760"/>
+          </a:xfrm>
+          <a:prstGeom prst="ellipse">
+            <a:avLst/>
+          </a:prstGeom>
+          <a:solidFill>
+            <a:srgbClr val="00754A"/>
+          </a:solidFill>
+          <a:ln>
+            <a:noFill/>
+          </a:ln>
+          <a:effectLst/>
+        </p:spPr>
+        <p:style>
+          <a:lnRef idx="1">
+            <a:schemeClr val="accent1"/>
+          </a:lnRef>
+          <a:fillRef idx="3">
+            <a:schemeClr val="accent1"/>
+          </a:fillRef>
+          <a:effectRef idx="2">
+            <a:schemeClr val="accent1"/>
+          </a:effectRef>
+          <a:fontRef idx="minor">
+            <a:schemeClr val="lt1"/>
+          </a:fontRef>
+        </p:style>
+        <p:txBody>
+          <a:bodyPr rtlCol="0" anchor="ctr"/>
+          <a:lstStyle/>
+          <a:p>
+            <a:pPr algn="ctr"/>
+          </a:p>
+        </p:txBody>
+      </p:sp>
+      <p:sp>
+        <p:nvSpPr>
+          <p:cNvPr id="46" name="TextBox 45"/>
+          <p:cNvSpPr txBox="1"/>
+          <p:nvPr/>
+        </p:nvSpPr>
+        <p:spPr>
+          <a:xfrm>
+            <a:off x="864290" y="5231373"/>
+            <a:ext cx="365760" cy="365760"/>
+          </a:xfrm>
+          <a:prstGeom prst="rect">
+            <a:avLst/>
+          </a:prstGeom>
+          <a:noFill/>
+        </p:spPr>
+        <p:txBody>
+          <a:bodyPr wrap="square" anchor="ctr" lIns="0" rIns="0" tIns="0" bIns="0">
+            <a:spAutoFit/>
+          </a:bodyPr>
+          <a:lstStyle/>
+          <a:p>
+            <a:pPr algn="ctr"/>
+            <a:r>
+              <a:rPr sz="1500" b="1" i="0" spc="-15">
+                <a:solidFill>
+                  <a:srgbClr val="FFFFFF"/>
+                </a:solidFill>
+                <a:latin typeface="Pretendard"/>
+                <a:ea typeface="Pretendard"/>
+                <a:cs typeface="Pretendard"/>
+              </a:rPr>
+              <a:t>6</a:t>
+            </a:r>
+          </a:p>
+        </p:txBody>
+      </p:sp>
+      <p:sp>
+        <p:nvSpPr>
+          <p:cNvPr id="47" name="TextBox 46"/>
+          <p:cNvSpPr txBox="1"/>
+          <p:nvPr/>
+        </p:nvSpPr>
+        <p:spPr>
+          <a:xfrm>
+            <a:off x="1348922" y="5112501"/>
+            <a:ext cx="1783080" cy="603504"/>
+          </a:xfrm>
+          <a:prstGeom prst="rect">
+            <a:avLst/>
+          </a:prstGeom>
+          <a:noFill/>
+        </p:spPr>
+        <p:txBody>
+          <a:bodyPr wrap="square" anchor="ctr" lIns="0" rIns="0" tIns="0" bIns="0">
+            <a:spAutoFit/>
+          </a:bodyPr>
+          <a:lstStyle/>
+          <a:p>
+            <a:pPr algn="l">
+              <a:lnSpc>
+                <a:spcPts val="1800"/>
+              </a:lnSpc>
+            </a:pPr>
+            <a:r>
+              <a:rPr sz="1500" b="1" i="0" spc="-15">
+                <a:solidFill>
+                  <a:srgbClr val="006241"/>
+                </a:solidFill>
+                <a:latin typeface="Pretendard"/>
+                <a:ea typeface="Pretendard"/>
+                <a:cs typeface="Pretendard"/>
+              </a:rPr>
+              <a:t>참고문헌 생성</a:t>
+            </a:r>
+          </a:p>
+        </p:txBody>
+      </p:sp>
+      <p:sp>
+        <p:nvSpPr>
+          <p:cNvPr id="48" name="Rounded Rectangle 47"/>
+          <p:cNvSpPr/>
+          <p:nvPr/>
+        </p:nvSpPr>
+        <p:spPr>
+          <a:xfrm>
+            <a:off x="3177722" y="5231373"/>
+            <a:ext cx="4526280" cy="365760"/>
+          </a:xfrm>
+          <a:prstGeom prst="roundRect">
+            <a:avLst>
+              <a:gd name="adj" fmla="val 12000"/>
+            </a:avLst>
+          </a:prstGeom>
+          <a:solidFill>
+            <a:srgbClr val="F2F0EB"/>
+          </a:solidFill>
+          <a:ln>
+            <a:noFill/>
+          </a:ln>
+          <a:effectLst/>
+        </p:spPr>
+        <p:style>
+          <a:lnRef idx="1">
+            <a:schemeClr val="accent1"/>
+          </a:lnRef>
+          <a:fillRef idx="3">
+            <a:schemeClr val="accent1"/>
+          </a:fillRef>
+          <a:effectRef idx="2">
+            <a:schemeClr val="accent1"/>
+          </a:effectRef>
+          <a:fontRef idx="minor">
+            <a:schemeClr val="lt1"/>
+          </a:fontRef>
+        </p:style>
+        <p:txBody>
+          <a:bodyPr rtlCol="0" anchor="ctr"/>
+          <a:lstStyle/>
+          <a:p>
+            <a:pPr algn="ctr"/>
+          </a:p>
+        </p:txBody>
+      </p:sp>
+      <p:sp>
+        <p:nvSpPr>
+          <p:cNvPr id="49" name="TextBox 48"/>
+          <p:cNvSpPr txBox="1"/>
+          <p:nvPr/>
+        </p:nvSpPr>
+        <p:spPr>
+          <a:xfrm>
+            <a:off x="3314882" y="5231373"/>
+            <a:ext cx="4251960" cy="365760"/>
+          </a:xfrm>
+          <a:prstGeom prst="rect">
+            <a:avLst/>
+          </a:prstGeom>
+          <a:noFill/>
+        </p:spPr>
+        <p:txBody>
+          <a:bodyPr wrap="square" anchor="ctr" lIns="0" rIns="0" tIns="0" bIns="0">
+            <a:spAutoFit/>
+          </a:bodyPr>
+          <a:lstStyle/>
+          <a:p>
+            <a:pPr algn="l">
+              <a:lnSpc>
+                <a:spcPts val="1500"/>
+              </a:lnSpc>
+            </a:pPr>
+            <a:r>
+              <a:rPr sz="1200" b="1" i="0" spc="-12">
+                <a:solidFill>
+                  <a:srgbClr val="00754A"/>
+                </a:solidFill>
+                <a:latin typeface="Pretendard"/>
+                <a:ea typeface="Pretendard"/>
+                <a:cs typeface="Pretendard"/>
+              </a:rPr>
+              <a:t>“Update bibliography in current note”</a:t>
+            </a:r>
+          </a:p>
+        </p:txBody>
+      </p:sp>
+      <p:sp>
+        <p:nvSpPr>
+          <p:cNvPr id="50" name="TextBox 49"/>
+          <p:cNvSpPr txBox="1"/>
+          <p:nvPr/>
+        </p:nvSpPr>
+        <p:spPr>
+          <a:xfrm>
+            <a:off x="7932602" y="5112501"/>
+            <a:ext cx="3469782" cy="603504"/>
+          </a:xfrm>
+          <a:prstGeom prst="rect">
+            <a:avLst/>
+          </a:prstGeom>
+          <a:noFill/>
+        </p:spPr>
+        <p:txBody>
+          <a:bodyPr wrap="square" anchor="ctr" lIns="0" rIns="0" tIns="0" bIns="0">
+            <a:spAutoFit/>
+          </a:bodyPr>
+          <a:lstStyle/>
+          <a:p>
+            <a:pPr algn="l">
+              <a:lnSpc>
+                <a:spcPts val="1600"/>
+              </a:lnSpc>
+            </a:pPr>
+            <a:r>
+              <a:rPr sz="1250" b="0" i="0" spc="-12">
+                <a:solidFill>
+                  <a:srgbClr val="6B6B6B"/>
+                </a:solidFill>
+                <a:latin typeface="Pretendard"/>
+                <a:ea typeface="Pretendard"/>
+                <a:cs typeface="Pretendard"/>
+              </a:rPr>
+              <a:t>저널 스타일 자동 — 노트에 csl: 한 줄이면 교체 (1만+ 스타일 자동 다운로드)</a:t>
+            </a:r>
+          </a:p>
+        </p:txBody>
+      </p:sp>
+      <p:sp>
+        <p:nvSpPr>
+          <p:cNvPr id="51" name="Rounded Rectangle 50"/>
           <p:cNvSpPr/>
           <p:nvPr/>
         </p:nvSpPr>
@@ -9838,7 +10136,7 @@
       </p:sp>
       <p:sp>
         <p:nvSpPr>
-          <p:cNvPr id="45" name="TextBox 44"/>
+          <p:cNvPr id="52" name="TextBox 51"/>
           <p:cNvSpPr txBox="1"/>
           <p:nvPr/>
         </p:nvSpPr>

--- a/presentation/rag_obsidian_deck.pptx
+++ b/presentation/rag_obsidian_deck.pptx
@@ -22,6 +22,7 @@
     <p:sldId id="270" r:id="rId21"/>
     <p:sldId id="271" r:id="rId22"/>
     <p:sldId id="272" r:id="rId23"/>
+    <p:sldId id="273" r:id="rId24"/>
   </p:sldIdLst>
   <p:sldSz cx="12191695" cy="6858000" type="screen4x3"/>
   <p:notesSz cx="6858000" cy="9144000"/>
@@ -10265,7 +10266,7 @@
                 <a:ea typeface="Pretendard"/>
                 <a:cs typeface="Pretendard"/>
               </a:rPr>
-              <a:t>CONCLUSION</a:t>
+              <a:t>MORE TOOLS</a:t>
             </a:r>
           </a:p>
         </p:txBody>
@@ -10306,7 +10307,7 @@
                 <a:ea typeface="Pretendard"/>
                 <a:cs typeface="Pretendard"/>
               </a:rPr>
-              <a:t>Zotero 없이, 서버 없이, 늘 출처와 함께</a:t>
+              <a:t>추가부터 투고까지, 연구 워크플로 전체를 덮는다</a:t>
             </a:r>
           </a:p>
         </p:txBody>
@@ -10423,14 +10424,51 @@
       </p:sp>
       <p:sp>
         <p:nvSpPr>
-          <p:cNvPr id="8" name="Rounded Rectangle 7"/>
+          <p:cNvPr id="8" name="TextBox 7"/>
+          <p:cNvSpPr txBox="1"/>
+          <p:nvPr/>
+        </p:nvSpPr>
+        <p:spPr>
+          <a:xfrm>
+            <a:off x="6567403" y="6617421"/>
+            <a:ext cx="5486400" cy="228600"/>
+          </a:xfrm>
+          <a:prstGeom prst="rect">
+            <a:avLst/>
+          </a:prstGeom>
+          <a:noFill/>
+        </p:spPr>
+        <p:txBody>
+          <a:bodyPr wrap="square" anchor="t" lIns="0" rIns="0" tIns="0" bIns="0">
+            <a:spAutoFit/>
+          </a:bodyPr>
+          <a:lstStyle/>
+          <a:p>
+            <a:pPr algn="r"/>
+            <a:r>
+              <a:rPr sz="800" b="0" i="0" spc="-8">
+                <a:solidFill>
+                  <a:srgbClr val="8E8E93"/>
+                </a:solidFill>
+                <a:latin typeface="Pretendard"/>
+                <a:ea typeface="Pretendard"/>
+                <a:cs typeface="Pretendard"/>
+              </a:rPr>
+              <a:t>명령 30개 · 전부 Cmd+P</a:t>
+            </a:r>
+          </a:p>
+        </p:txBody>
+      </p:sp>
+      <p:sp>
+        <p:nvSpPr>
+          <p:cNvPr id="9" name="Rounded Rectangle 8"/>
           <p:cNvSpPr/>
           <p:nvPr/>
         </p:nvSpPr>
         <p:spPr>
           <a:xfrm>
             <a:off x="663122" y="1747509"/>
-            <a:ext cx="3491362" cy="3200400"/>
+            <a:ext cx="2568229" cy="3200400"/>
           </a:xfrm>
           <a:prstGeom prst="roundRect">
             <a:avLst>
@@ -10471,14 +10509,14 @@
       </p:sp>
       <p:sp>
         <p:nvSpPr>
-          <p:cNvPr id="9" name="Rectangle 8"/>
+          <p:cNvPr id="10" name="Rectangle 9"/>
           <p:cNvSpPr/>
           <p:nvPr/>
         </p:nvSpPr>
         <p:spPr>
           <a:xfrm>
             <a:off x="663122" y="1747509"/>
-            <a:ext cx="3491362" cy="64008"/>
+            <a:ext cx="2568229" cy="64008"/>
           </a:xfrm>
           <a:prstGeom prst="rect">
             <a:avLst/>
@@ -10515,13 +10553,13 @@
       </p:sp>
       <p:sp>
         <p:nvSpPr>
-          <p:cNvPr id="10" name="Rounded Rectangle 9"/>
+          <p:cNvPr id="11" name="Rounded Rectangle 10"/>
           <p:cNvSpPr/>
           <p:nvPr/>
         </p:nvSpPr>
         <p:spPr>
           <a:xfrm>
-            <a:off x="1540123" y="2003541"/>
+            <a:off x="1078557" y="2003541"/>
             <a:ext cx="1737360" cy="310896"/>
           </a:xfrm>
           <a:prstGeom prst="roundRect">
@@ -10561,13 +10599,13 @@
       </p:sp>
       <p:sp>
         <p:nvSpPr>
-          <p:cNvPr id="11" name="TextBox 10"/>
-          <p:cNvSpPr txBox="1"/>
-          <p:nvPr/>
-        </p:nvSpPr>
-        <p:spPr>
-          <a:xfrm>
-            <a:off x="1540123" y="2003541"/>
+          <p:cNvPr id="12" name="TextBox 11"/>
+          <p:cNvSpPr txBox="1"/>
+          <p:nvPr/>
+        </p:nvSpPr>
+        <p:spPr>
+          <a:xfrm>
+            <a:off x="1078557" y="2003541"/>
             <a:ext cx="1737360" cy="310896"/>
           </a:xfrm>
           <a:prstGeom prst="rect">
@@ -10591,21 +10629,21 @@
                 <a:ea typeface="Pretendard"/>
                 <a:cs typeface="Pretendard"/>
               </a:rPr>
-              <a:t>OWN YOUR DATA</a:t>
-            </a:r>
-          </a:p>
-        </p:txBody>
-      </p:sp>
-      <p:sp>
-        <p:nvSpPr>
-          <p:cNvPr id="12" name="TextBox 11"/>
+              <a:t>MIGRATE</a:t>
+            </a:r>
+          </a:p>
+        </p:txBody>
+      </p:sp>
+      <p:sp>
+        <p:nvSpPr>
+          <p:cNvPr id="13" name="TextBox 12"/>
           <p:cNvSpPr txBox="1"/>
           <p:nvPr/>
         </p:nvSpPr>
         <p:spPr>
           <a:xfrm>
             <a:off x="754562" y="2616189"/>
-            <a:ext cx="3308482" cy="1554480"/>
+            <a:ext cx="2385349" cy="1554480"/>
           </a:xfrm>
           <a:prstGeom prst="rect">
             <a:avLst/>
@@ -10628,7 +10666,7 @@
                 <a:ea typeface="Pretendard"/>
                 <a:cs typeface="Pretendard"/>
               </a:rPr>
-              <a:t>마크다운</a:t>
+              <a:t>이관</a:t>
             </a:r>
           </a:p>
           <a:p>
@@ -10646,7 +10684,7 @@
                 <a:ea typeface="Pretendard"/>
                 <a:cs typeface="Pretendard"/>
               </a:rPr>
-              <a:t>= 내 DB</a:t>
+              <a:t>Zotero·EndNote</a:t>
             </a:r>
           </a:p>
           <a:p>
@@ -10667,22 +10705,23 @@
                 <a:ea typeface="Pretendard"/>
                 <a:cs typeface="Pretendard"/>
               </a:rPr>
-              <a:t>평문·git·로컬 우선
-플러그인보다 오래 남음</a:t>
-            </a:r>
-          </a:p>
-        </p:txBody>
-      </p:sp>
-      <p:sp>
-        <p:nvSpPr>
-          <p:cNvPr id="13" name="Rounded Rectangle 12"/>
+              <a:t>BibTeX/RIS/CSL-JSON
+한 번에 가져오고
+언제든 도로 내보내기</a:t>
+            </a:r>
+          </a:p>
+        </p:txBody>
+      </p:sp>
+      <p:sp>
+        <p:nvSpPr>
+          <p:cNvPr id="14" name="Rounded Rectangle 13"/>
           <p:cNvSpPr/>
           <p:nvPr/>
         </p:nvSpPr>
         <p:spPr>
           <a:xfrm>
-            <a:off x="4355652" y="1747509"/>
-            <a:ext cx="3491362" cy="3200400"/>
+            <a:off x="3432520" y="1747509"/>
+            <a:ext cx="2568229" cy="3200400"/>
           </a:xfrm>
           <a:prstGeom prst="roundRect">
             <a:avLst>
@@ -10723,14 +10762,14 @@
       </p:sp>
       <p:sp>
         <p:nvSpPr>
-          <p:cNvPr id="14" name="Rectangle 13"/>
+          <p:cNvPr id="15" name="Rectangle 14"/>
           <p:cNvSpPr/>
           <p:nvPr/>
         </p:nvSpPr>
         <p:spPr>
           <a:xfrm>
-            <a:off x="4355652" y="1747509"/>
-            <a:ext cx="3491362" cy="64008"/>
+            <a:off x="3432520" y="1747509"/>
+            <a:ext cx="2568229" cy="64008"/>
           </a:xfrm>
           <a:prstGeom prst="rect">
             <a:avLst/>
@@ -10767,13 +10806,13 @@
       </p:sp>
       <p:sp>
         <p:nvSpPr>
-          <p:cNvPr id="15" name="Rounded Rectangle 14"/>
+          <p:cNvPr id="16" name="Rounded Rectangle 15"/>
           <p:cNvSpPr/>
           <p:nvPr/>
         </p:nvSpPr>
         <p:spPr>
           <a:xfrm>
-            <a:off x="5232654" y="2003541"/>
+            <a:off x="3847955" y="2003541"/>
             <a:ext cx="1737360" cy="310896"/>
           </a:xfrm>
           <a:prstGeom prst="roundRect">
@@ -10813,13 +10852,13 @@
       </p:sp>
       <p:sp>
         <p:nvSpPr>
-          <p:cNvPr id="16" name="TextBox 15"/>
-          <p:cNvSpPr txBox="1"/>
-          <p:nvPr/>
-        </p:nvSpPr>
-        <p:spPr>
-          <a:xfrm>
-            <a:off x="5232654" y="2003541"/>
+          <p:cNvPr id="17" name="TextBox 16"/>
+          <p:cNvSpPr txBox="1"/>
+          <p:nvPr/>
+        </p:nvSpPr>
+        <p:spPr>
+          <a:xfrm>
+            <a:off x="3847955" y="2003541"/>
             <a:ext cx="1737360" cy="310896"/>
           </a:xfrm>
           <a:prstGeom prst="rect">
@@ -10843,21 +10882,21 @@
                 <a:ea typeface="Pretendard"/>
                 <a:cs typeface="Pretendard"/>
               </a:rPr>
-              <a:t>GROUNDED</a:t>
-            </a:r>
-          </a:p>
-        </p:txBody>
-      </p:sp>
-      <p:sp>
-        <p:nvSpPr>
-          <p:cNvPr id="17" name="TextBox 16"/>
-          <p:cNvSpPr txBox="1"/>
-          <p:nvPr/>
-        </p:nvSpPr>
-        <p:spPr>
-          <a:xfrm>
-            <a:off x="4447092" y="2616189"/>
-            <a:ext cx="3308482" cy="1554480"/>
+              <a:t>SUMMARIZE</a:t>
+            </a:r>
+          </a:p>
+        </p:txBody>
+      </p:sp>
+      <p:sp>
+        <p:nvSpPr>
+          <p:cNvPr id="18" name="TextBox 17"/>
+          <p:cNvSpPr txBox="1"/>
+          <p:nvPr/>
+        </p:nvSpPr>
+        <p:spPr>
+          <a:xfrm>
+            <a:off x="3523960" y="2616189"/>
+            <a:ext cx="2385349" cy="1554480"/>
           </a:xfrm>
           <a:prstGeom prst="rect">
             <a:avLst/>
@@ -10880,7 +10919,7 @@
                 <a:ea typeface="Pretendard"/>
                 <a:cs typeface="Pretendard"/>
               </a:rPr>
-              <a:t>근거</a:t>
+              <a:t>요약</a:t>
             </a:r>
           </a:p>
           <a:p>
@@ -10898,7 +10937,7 @@
                 <a:ea typeface="Pretendard"/>
                 <a:cs typeface="Pretendard"/>
               </a:rPr>
-              <a:t>구절 인용</a:t>
+              <a:t>LLM + MeSH</a:t>
             </a:r>
           </a:p>
           <a:p>
@@ -10919,22 +10958,23 @@
                 <a:ea typeface="Pretendard"/>
                 <a:cs typeface="Pretendard"/>
               </a:rPr>
-              <a:t>출처 없는 답 없음
-서식 참고문헌까지</a:t>
-            </a:r>
-          </a:p>
-        </p:txBody>
-      </p:sp>
-      <p:sp>
-        <p:nvSpPr>
-          <p:cNvPr id="18" name="Rounded Rectangle 17"/>
+              <a:t>PubMed 추가 시 자동 요약
+(OA는 전문 기반)
++ 진짜 MeSH 태그</a:t>
+            </a:r>
+          </a:p>
+        </p:txBody>
+      </p:sp>
+      <p:sp>
+        <p:nvSpPr>
+          <p:cNvPr id="19" name="Rounded Rectangle 18"/>
           <p:cNvSpPr/>
           <p:nvPr/>
         </p:nvSpPr>
         <p:spPr>
           <a:xfrm>
-            <a:off x="8048183" y="1747509"/>
-            <a:ext cx="3491362" cy="3200400"/>
+            <a:off x="6201918" y="1747509"/>
+            <a:ext cx="2568229" cy="3200400"/>
           </a:xfrm>
           <a:prstGeom prst="roundRect">
             <a:avLst>
@@ -10975,14 +11015,14 @@
       </p:sp>
       <p:sp>
         <p:nvSpPr>
-          <p:cNvPr id="19" name="Rectangle 18"/>
+          <p:cNvPr id="20" name="Rectangle 19"/>
           <p:cNvSpPr/>
           <p:nvPr/>
         </p:nvSpPr>
         <p:spPr>
           <a:xfrm>
-            <a:off x="8048183" y="1747509"/>
-            <a:ext cx="3491362" cy="64008"/>
+            <a:off x="6201918" y="1747509"/>
+            <a:ext cx="2568229" cy="64008"/>
           </a:xfrm>
           <a:prstGeom prst="rect">
             <a:avLst/>
@@ -11019,13 +11059,13 @@
       </p:sp>
       <p:sp>
         <p:nvSpPr>
-          <p:cNvPr id="20" name="Rounded Rectangle 19"/>
+          <p:cNvPr id="21" name="Rounded Rectangle 20"/>
           <p:cNvSpPr/>
           <p:nvPr/>
         </p:nvSpPr>
         <p:spPr>
           <a:xfrm>
-            <a:off x="8925184" y="2003541"/>
+            <a:off x="6617352" y="2003541"/>
             <a:ext cx="1737360" cy="310896"/>
           </a:xfrm>
           <a:prstGeom prst="roundRect">
@@ -11065,13 +11105,13 @@
       </p:sp>
       <p:sp>
         <p:nvSpPr>
-          <p:cNvPr id="21" name="TextBox 20"/>
-          <p:cNvSpPr txBox="1"/>
-          <p:nvPr/>
-        </p:nvSpPr>
-        <p:spPr>
-          <a:xfrm>
-            <a:off x="8925184" y="2003541"/>
+          <p:cNvPr id="22" name="TextBox 21"/>
+          <p:cNvSpPr txBox="1"/>
+          <p:nvPr/>
+        </p:nvSpPr>
+        <p:spPr>
+          <a:xfrm>
+            <a:off x="6617352" y="2003541"/>
             <a:ext cx="1737360" cy="310896"/>
           </a:xfrm>
           <a:prstGeom prst="rect">
@@ -11095,21 +11135,21 @@
                 <a:ea typeface="Pretendard"/>
                 <a:cs typeface="Pretendard"/>
               </a:rPr>
-              <a:t>GRAPH-LITE</a:t>
-            </a:r>
-          </a:p>
-        </p:txBody>
-      </p:sp>
-      <p:sp>
-        <p:nvSpPr>
-          <p:cNvPr id="22" name="TextBox 21"/>
-          <p:cNvSpPr txBox="1"/>
-          <p:nvPr/>
-        </p:nvSpPr>
-        <p:spPr>
-          <a:xfrm>
-            <a:off x="8139623" y="2616189"/>
-            <a:ext cx="3308482" cy="1554480"/>
+              <a:t>WRITE</a:t>
+            </a:r>
+          </a:p>
+        </p:txBody>
+      </p:sp>
+      <p:sp>
+        <p:nvSpPr>
+          <p:cNvPr id="23" name="TextBox 22"/>
+          <p:cNvSpPr txBox="1"/>
+          <p:nvPr/>
+        </p:nvSpPr>
+        <p:spPr>
+          <a:xfrm>
+            <a:off x="6293358" y="2616189"/>
+            <a:ext cx="2385349" cy="1554480"/>
           </a:xfrm>
           <a:prstGeom prst="rect">
             <a:avLst/>
@@ -11132,7 +11172,7 @@
                 <a:ea typeface="Pretendard"/>
                 <a:cs typeface="Pretendard"/>
               </a:rPr>
-              <a:t>그래프</a:t>
+              <a:t>투고</a:t>
             </a:r>
           </a:p>
           <a:p>
@@ -11150,7 +11190,7 @@
                 <a:ea typeface="Pretendard"/>
                 <a:cs typeface="Pretendard"/>
               </a:rPr>
-              <a:t>놓친 논문</a:t>
+              <a:t>원고 컴파일</a:t>
             </a:r>
           </a:p>
           <a:p>
@@ -11171,15 +11211,269 @@
                 <a:ea typeface="Pretendard"/>
                 <a:cs typeface="Pretendard"/>
               </a:rPr>
-              <a:t>OpenAlex 인용엣지
-LLM 비용 0</a:t>
-            </a:r>
-          </a:p>
-        </p:txBody>
-      </p:sp>
-      <p:sp>
-        <p:nvSpPr>
-          <p:cNvPr id="23" name="Rounded Rectangle 22"/>
+              <a:t>[@키] 전부 풀어
+인용+참고문헌 완성본
+(Pandoc-ready)</a:t>
+            </a:r>
+          </a:p>
+        </p:txBody>
+      </p:sp>
+      <p:sp>
+        <p:nvSpPr>
+          <p:cNvPr id="24" name="Rounded Rectangle 23"/>
+          <p:cNvSpPr/>
+          <p:nvPr/>
+        </p:nvSpPr>
+        <p:spPr>
+          <a:xfrm>
+            <a:off x="8971315" y="1747509"/>
+            <a:ext cx="2568229" cy="3200400"/>
+          </a:xfrm>
+          <a:prstGeom prst="roundRect">
+            <a:avLst>
+              <a:gd name="adj" fmla="val 6000"/>
+            </a:avLst>
+          </a:prstGeom>
+          <a:solidFill>
+            <a:srgbClr val="FFFFFF"/>
+          </a:solidFill>
+          <a:ln w="9525">
+            <a:solidFill>
+              <a:srgbClr val="D9D9D9"/>
+            </a:solidFill>
+          </a:ln>
+          <a:effectLst/>
+        </p:spPr>
+        <p:style>
+          <a:lnRef idx="1">
+            <a:schemeClr val="accent1"/>
+          </a:lnRef>
+          <a:fillRef idx="3">
+            <a:schemeClr val="accent1"/>
+          </a:fillRef>
+          <a:effectRef idx="2">
+            <a:schemeClr val="accent1"/>
+          </a:effectRef>
+          <a:fontRef idx="minor">
+            <a:schemeClr val="lt1"/>
+          </a:fontRef>
+        </p:style>
+        <p:txBody>
+          <a:bodyPr rtlCol="0" anchor="ctr"/>
+          <a:lstStyle/>
+          <a:p>
+            <a:pPr algn="ctr"/>
+          </a:p>
+        </p:txBody>
+      </p:sp>
+      <p:sp>
+        <p:nvSpPr>
+          <p:cNvPr id="25" name="Rectangle 24"/>
+          <p:cNvSpPr/>
+          <p:nvPr/>
+        </p:nvSpPr>
+        <p:spPr>
+          <a:xfrm>
+            <a:off x="8971315" y="1747509"/>
+            <a:ext cx="2568229" cy="64008"/>
+          </a:xfrm>
+          <a:prstGeom prst="rect">
+            <a:avLst/>
+          </a:prstGeom>
+          <a:solidFill>
+            <a:srgbClr val="00754A"/>
+          </a:solidFill>
+          <a:ln>
+            <a:noFill/>
+          </a:ln>
+          <a:effectLst/>
+        </p:spPr>
+        <p:style>
+          <a:lnRef idx="1">
+            <a:schemeClr val="accent1"/>
+          </a:lnRef>
+          <a:fillRef idx="3">
+            <a:schemeClr val="accent1"/>
+          </a:fillRef>
+          <a:effectRef idx="2">
+            <a:schemeClr val="accent1"/>
+          </a:effectRef>
+          <a:fontRef idx="minor">
+            <a:schemeClr val="lt1"/>
+          </a:fontRef>
+        </p:style>
+        <p:txBody>
+          <a:bodyPr rtlCol="0" anchor="ctr"/>
+          <a:lstStyle/>
+          <a:p>
+            <a:pPr algn="ctr"/>
+          </a:p>
+        </p:txBody>
+      </p:sp>
+      <p:sp>
+        <p:nvSpPr>
+          <p:cNvPr id="26" name="Rounded Rectangle 25"/>
+          <p:cNvSpPr/>
+          <p:nvPr/>
+        </p:nvSpPr>
+        <p:spPr>
+          <a:xfrm>
+            <a:off x="9386750" y="2003541"/>
+            <a:ext cx="1737360" cy="310896"/>
+          </a:xfrm>
+          <a:prstGeom prst="roundRect">
+            <a:avLst>
+              <a:gd name="adj" fmla="val 50000"/>
+            </a:avLst>
+          </a:prstGeom>
+          <a:solidFill>
+            <a:srgbClr val="00754A"/>
+          </a:solidFill>
+          <a:ln>
+            <a:noFill/>
+          </a:ln>
+          <a:effectLst/>
+        </p:spPr>
+        <p:style>
+          <a:lnRef idx="1">
+            <a:schemeClr val="accent1"/>
+          </a:lnRef>
+          <a:fillRef idx="3">
+            <a:schemeClr val="accent1"/>
+          </a:fillRef>
+          <a:effectRef idx="2">
+            <a:schemeClr val="accent1"/>
+          </a:effectRef>
+          <a:fontRef idx="minor">
+            <a:schemeClr val="lt1"/>
+          </a:fontRef>
+        </p:style>
+        <p:txBody>
+          <a:bodyPr rtlCol="0" anchor="ctr"/>
+          <a:lstStyle/>
+          <a:p>
+            <a:pPr algn="ctr"/>
+          </a:p>
+        </p:txBody>
+      </p:sp>
+      <p:sp>
+        <p:nvSpPr>
+          <p:cNvPr id="27" name="TextBox 26"/>
+          <p:cNvSpPr txBox="1"/>
+          <p:nvPr/>
+        </p:nvSpPr>
+        <p:spPr>
+          <a:xfrm>
+            <a:off x="9386750" y="2003541"/>
+            <a:ext cx="1737360" cy="310896"/>
+          </a:xfrm>
+          <a:prstGeom prst="rect">
+            <a:avLst/>
+          </a:prstGeom>
+          <a:noFill/>
+        </p:spPr>
+        <p:txBody>
+          <a:bodyPr wrap="square" anchor="ctr" lIns="0" rIns="0" tIns="0" bIns="0">
+            <a:spAutoFit/>
+          </a:bodyPr>
+          <a:lstStyle/>
+          <a:p>
+            <a:pPr algn="ctr"/>
+            <a:r>
+              <a:rPr sz="1100" b="1" i="0" spc="-11">
+                <a:solidFill>
+                  <a:srgbClr val="FFFFFF"/>
+                </a:solidFill>
+                <a:latin typeface="Pretendard"/>
+                <a:ea typeface="Pretendard"/>
+                <a:cs typeface="Pretendard"/>
+              </a:rPr>
+              <a:t>CURATE</a:t>
+            </a:r>
+          </a:p>
+        </p:txBody>
+      </p:sp>
+      <p:sp>
+        <p:nvSpPr>
+          <p:cNvPr id="28" name="TextBox 27"/>
+          <p:cNvSpPr txBox="1"/>
+          <p:nvPr/>
+        </p:nvSpPr>
+        <p:spPr>
+          <a:xfrm>
+            <a:off x="9062755" y="2616189"/>
+            <a:ext cx="2385349" cy="1554480"/>
+          </a:xfrm>
+          <a:prstGeom prst="rect">
+            <a:avLst/>
+          </a:prstGeom>
+          <a:noFill/>
+        </p:spPr>
+        <p:txBody>
+          <a:bodyPr wrap="square" anchor="t" lIns="0" rIns="0" tIns="0" bIns="0">
+            <a:spAutoFit/>
+          </a:bodyPr>
+          <a:lstStyle/>
+          <a:p>
+            <a:pPr algn="ctr"/>
+            <a:r>
+              <a:rPr sz="3400" b="1" i="0" spc="-34">
+                <a:solidFill>
+                  <a:srgbClr val="006241"/>
+                </a:solidFill>
+                <a:latin typeface="Pretendard"/>
+                <a:ea typeface="Pretendard"/>
+                <a:cs typeface="Pretendard"/>
+              </a:rPr>
+              <a:t>관리</a:t>
+            </a:r>
+          </a:p>
+          <a:p>
+            <a:pPr algn="ctr">
+              <a:spcBef>
+                <a:spcPts val="200"/>
+              </a:spcBef>
+            </a:pPr>
+            <a:r>
+              <a:rPr sz="1600" b="1" i="0" spc="-16">
+                <a:solidFill>
+                  <a:srgbClr val="1F1F1F"/>
+                </a:solidFill>
+                <a:latin typeface="Pretendard"/>
+                <a:ea typeface="Pretendard"/>
+                <a:cs typeface="Pretendard"/>
+              </a:rPr>
+              <a:t>서재 위생</a:t>
+            </a:r>
+          </a:p>
+          <a:p>
+            <a:pPr algn="ctr">
+              <a:lnSpc>
+                <a:spcPts val="1600"/>
+              </a:lnSpc>
+              <a:spcBef>
+                <a:spcPts val="1000"/>
+              </a:spcBef>
+            </a:pPr>
+            <a:r>
+              <a:rPr sz="1200" b="0" i="0" spc="-12">
+                <a:solidFill>
+                  <a:srgbClr val="6B6B6B"/>
+                </a:solidFill>
+                <a:latin typeface="Pretendard"/>
+                <a:ea typeface="Pretendard"/>
+                <a:cs typeface="Pretendard"/>
+              </a:rPr>
+              <a:t>철회 경고 · 중복 정리
+읽기 큐 · OA PDF 다운로드
+PDF 하이라이트 추출</a:t>
+            </a:r>
+          </a:p>
+        </p:txBody>
+      </p:sp>
+      <p:sp>
+        <p:nvSpPr>
+          <p:cNvPr id="29" name="Rounded Rectangle 28"/>
           <p:cNvSpPr/>
           <p:nvPr/>
         </p:nvSpPr>
@@ -11225,7 +11519,7 @@
       </p:sp>
       <p:sp>
         <p:nvSpPr>
-          <p:cNvPr id="24" name="TextBox 23"/>
+          <p:cNvPr id="30" name="TextBox 29"/>
           <p:cNvSpPr txBox="1"/>
           <p:nvPr/>
         </p:nvSpPr>
@@ -11255,7 +11549,7 @@
                 <a:ea typeface="Pretendard"/>
                 <a:cs typeface="Pretendard"/>
               </a:rPr>
-              <a:t>내 서재가 곧 검색엔진이고, 답은 늘 출처와 함께 — RAG Obsidian</a:t>
+              <a:t>갈아타기 부담 0 (이관+내보내기) — 들어온 뒤엔 읽기·쓰기·투고까지 한 앱에서</a:t>
             </a:r>
           </a:p>
         </p:txBody>
@@ -11269,6 +11563,1095 @@
 </file>
 
 <file path=ppt/slides/slide17.xml><?xml version="1.0" encoding="utf-8"?>
+<p:sld xmlns:a="http://schemas.openxmlformats.org/drawingml/2006/main" xmlns:p="http://schemas.openxmlformats.org/presentationml/2006/main" xmlns:r="http://schemas.openxmlformats.org/officeDocument/2006/relationships">
+  <p:cSld>
+    <p:spTree>
+      <p:nvGrpSpPr>
+        <p:cNvPr id="1" name=""/>
+        <p:cNvGrpSpPr/>
+        <p:nvPr/>
+      </p:nvGrpSpPr>
+      <p:grpSpPr/>
+      <p:sp>
+        <p:nvSpPr>
+          <p:cNvPr id="2" name="Rectangle 1"/>
+          <p:cNvSpPr/>
+          <p:nvPr/>
+        </p:nvSpPr>
+        <p:spPr>
+          <a:xfrm>
+            <a:off x="0" y="0"/>
+            <a:ext cx="12191695" cy="6858000"/>
+          </a:xfrm>
+          <a:prstGeom prst="rect">
+            <a:avLst/>
+          </a:prstGeom>
+          <a:solidFill>
+            <a:srgbClr val="F2F0EB"/>
+          </a:solidFill>
+          <a:ln>
+            <a:noFill/>
+          </a:ln>
+          <a:effectLst/>
+        </p:spPr>
+        <p:style>
+          <a:lnRef idx="1">
+            <a:schemeClr val="accent1"/>
+          </a:lnRef>
+          <a:fillRef idx="3">
+            <a:schemeClr val="accent1"/>
+          </a:fillRef>
+          <a:effectRef idx="2">
+            <a:schemeClr val="accent1"/>
+          </a:effectRef>
+          <a:fontRef idx="minor">
+            <a:schemeClr val="lt1"/>
+          </a:fontRef>
+        </p:style>
+        <p:txBody>
+          <a:bodyPr rtlCol="0" anchor="ctr"/>
+          <a:lstStyle/>
+          <a:p>
+            <a:pPr algn="ctr"/>
+          </a:p>
+        </p:txBody>
+      </p:sp>
+      <p:sp>
+        <p:nvSpPr>
+          <p:cNvPr id="3" name="TextBox 2"/>
+          <p:cNvSpPr txBox="1"/>
+          <p:nvPr/>
+        </p:nvSpPr>
+        <p:spPr>
+          <a:xfrm>
+            <a:off x="138257" y="123444"/>
+            <a:ext cx="5486400" cy="256032"/>
+          </a:xfrm>
+          <a:prstGeom prst="rect">
+            <a:avLst/>
+          </a:prstGeom>
+          <a:noFill/>
+        </p:spPr>
+        <p:txBody>
+          <a:bodyPr wrap="square" anchor="t" lIns="0" rIns="0" tIns="0" bIns="0">
+            <a:spAutoFit/>
+          </a:bodyPr>
+          <a:lstStyle/>
+          <a:p>
+            <a:pPr algn="l"/>
+            <a:r>
+              <a:rPr sz="1100" b="1" i="0" spc="-11">
+                <a:solidFill>
+                  <a:srgbClr val="8E8E93"/>
+                </a:solidFill>
+                <a:latin typeface="Pretendard"/>
+                <a:ea typeface="Pretendard"/>
+                <a:cs typeface="Pretendard"/>
+              </a:rPr>
+              <a:t>CONCLUSION</a:t>
+            </a:r>
+          </a:p>
+        </p:txBody>
+      </p:sp>
+      <p:sp>
+        <p:nvSpPr>
+          <p:cNvPr id="4" name="TextBox 3"/>
+          <p:cNvSpPr txBox="1"/>
+          <p:nvPr/>
+        </p:nvSpPr>
+        <p:spPr>
+          <a:xfrm>
+            <a:off x="251642" y="436260"/>
+            <a:ext cx="10972800" cy="640080"/>
+          </a:xfrm>
+          <a:prstGeom prst="rect">
+            <a:avLst/>
+          </a:prstGeom>
+          <a:noFill/>
+        </p:spPr>
+        <p:txBody>
+          <a:bodyPr wrap="square" anchor="t" lIns="0" rIns="0" tIns="0" bIns="0">
+            <a:spAutoFit/>
+          </a:bodyPr>
+          <a:lstStyle/>
+          <a:p>
+            <a:pPr algn="l">
+              <a:lnSpc>
+                <a:spcPts val="3600"/>
+              </a:lnSpc>
+            </a:pPr>
+            <a:r>
+              <a:rPr sz="3000" b="1" i="0" spc="-30">
+                <a:solidFill>
+                  <a:srgbClr val="006241"/>
+                </a:solidFill>
+                <a:latin typeface="Pretendard"/>
+                <a:ea typeface="Pretendard"/>
+                <a:cs typeface="Pretendard"/>
+              </a:rPr>
+              <a:t>Zotero 없이, 서버 없이, 늘 출처와 함께</a:t>
+            </a:r>
+          </a:p>
+        </p:txBody>
+      </p:sp>
+      <p:pic>
+        <p:nvPicPr>
+          <p:cNvPr id="5" name="Picture 4" descr="logo.png"/>
+          <p:cNvPicPr>
+            <a:picLocks noChangeAspect="1"/>
+          </p:cNvPicPr>
+          <p:nvPr/>
+        </p:nvPicPr>
+        <p:blipFill>
+          <a:blip r:embed="rId2"/>
+          <a:srcRect l="3240" r="16360" t="21390" b="11330"/>
+          <a:stretch>
+            <a:fillRect/>
+          </a:stretch>
+        </p:blipFill>
+        <p:spPr>
+          <a:xfrm>
+            <a:off x="10748314" y="11978"/>
+            <a:ext cx="1443654" cy="798545"/>
+          </a:xfrm>
+          <a:prstGeom prst="rect">
+            <a:avLst/>
+          </a:prstGeom>
+        </p:spPr>
+      </p:pic>
+      <p:sp>
+        <p:nvSpPr>
+          <p:cNvPr id="6" name="Rounded Rectangle 5"/>
+          <p:cNvSpPr/>
+          <p:nvPr/>
+        </p:nvSpPr>
+        <p:spPr>
+          <a:xfrm>
+            <a:off x="251642" y="1290309"/>
+            <a:ext cx="11699382" cy="5227350"/>
+          </a:xfrm>
+          <a:prstGeom prst="roundRect">
+            <a:avLst>
+              <a:gd name="adj" fmla="val 3500"/>
+            </a:avLst>
+          </a:prstGeom>
+          <a:solidFill>
+            <a:srgbClr val="FFFFFF"/>
+          </a:solidFill>
+          <a:ln w="9525">
+            <a:solidFill>
+              <a:srgbClr val="D9D9D9"/>
+            </a:solidFill>
+          </a:ln>
+          <a:effectLst/>
+        </p:spPr>
+        <p:style>
+          <a:lnRef idx="1">
+            <a:schemeClr val="accent1"/>
+          </a:lnRef>
+          <a:fillRef idx="3">
+            <a:schemeClr val="accent1"/>
+          </a:fillRef>
+          <a:effectRef idx="2">
+            <a:schemeClr val="accent1"/>
+          </a:effectRef>
+          <a:fontRef idx="minor">
+            <a:schemeClr val="lt1"/>
+          </a:fontRef>
+        </p:style>
+        <p:txBody>
+          <a:bodyPr rtlCol="0" anchor="ctr"/>
+          <a:lstStyle/>
+          <a:p>
+            <a:pPr algn="ctr"/>
+          </a:p>
+        </p:txBody>
+      </p:sp>
+      <p:sp>
+        <p:nvSpPr>
+          <p:cNvPr id="7" name="TextBox 6"/>
+          <p:cNvSpPr txBox="1"/>
+          <p:nvPr/>
+        </p:nvSpPr>
+        <p:spPr>
+          <a:xfrm>
+            <a:off x="138257" y="6620256"/>
+            <a:ext cx="548640" cy="228600"/>
+          </a:xfrm>
+          <a:prstGeom prst="rect">
+            <a:avLst/>
+          </a:prstGeom>
+          <a:noFill/>
+        </p:spPr>
+        <p:txBody>
+          <a:bodyPr wrap="square" anchor="t" lIns="0" rIns="0" tIns="0" bIns="0">
+            <a:spAutoFit/>
+          </a:bodyPr>
+          <a:lstStyle/>
+          <a:p>
+            <a:pPr algn="l"/>
+            <a:r>
+              <a:rPr sz="900" b="0" i="0" spc="-9">
+                <a:solidFill>
+                  <a:srgbClr val="8E8E93"/>
+                </a:solidFill>
+                <a:latin typeface="Pretendard"/>
+                <a:ea typeface="Pretendard"/>
+                <a:cs typeface="Pretendard"/>
+              </a:rPr>
+              <a:t>17</a:t>
+            </a:r>
+          </a:p>
+        </p:txBody>
+      </p:sp>
+      <p:sp>
+        <p:nvSpPr>
+          <p:cNvPr id="8" name="Rounded Rectangle 7"/>
+          <p:cNvSpPr/>
+          <p:nvPr/>
+        </p:nvSpPr>
+        <p:spPr>
+          <a:xfrm>
+            <a:off x="663122" y="1747509"/>
+            <a:ext cx="3491362" cy="3200400"/>
+          </a:xfrm>
+          <a:prstGeom prst="roundRect">
+            <a:avLst>
+              <a:gd name="adj" fmla="val 6000"/>
+            </a:avLst>
+          </a:prstGeom>
+          <a:solidFill>
+            <a:srgbClr val="FFFFFF"/>
+          </a:solidFill>
+          <a:ln w="9525">
+            <a:solidFill>
+              <a:srgbClr val="D9D9D9"/>
+            </a:solidFill>
+          </a:ln>
+          <a:effectLst/>
+        </p:spPr>
+        <p:style>
+          <a:lnRef idx="1">
+            <a:schemeClr val="accent1"/>
+          </a:lnRef>
+          <a:fillRef idx="3">
+            <a:schemeClr val="accent1"/>
+          </a:fillRef>
+          <a:effectRef idx="2">
+            <a:schemeClr val="accent1"/>
+          </a:effectRef>
+          <a:fontRef idx="minor">
+            <a:schemeClr val="lt1"/>
+          </a:fontRef>
+        </p:style>
+        <p:txBody>
+          <a:bodyPr rtlCol="0" anchor="ctr"/>
+          <a:lstStyle/>
+          <a:p>
+            <a:pPr algn="ctr"/>
+          </a:p>
+        </p:txBody>
+      </p:sp>
+      <p:sp>
+        <p:nvSpPr>
+          <p:cNvPr id="9" name="Rectangle 8"/>
+          <p:cNvSpPr/>
+          <p:nvPr/>
+        </p:nvSpPr>
+        <p:spPr>
+          <a:xfrm>
+            <a:off x="663122" y="1747509"/>
+            <a:ext cx="3491362" cy="64008"/>
+          </a:xfrm>
+          <a:prstGeom prst="rect">
+            <a:avLst/>
+          </a:prstGeom>
+          <a:solidFill>
+            <a:srgbClr val="00754A"/>
+          </a:solidFill>
+          <a:ln>
+            <a:noFill/>
+          </a:ln>
+          <a:effectLst/>
+        </p:spPr>
+        <p:style>
+          <a:lnRef idx="1">
+            <a:schemeClr val="accent1"/>
+          </a:lnRef>
+          <a:fillRef idx="3">
+            <a:schemeClr val="accent1"/>
+          </a:fillRef>
+          <a:effectRef idx="2">
+            <a:schemeClr val="accent1"/>
+          </a:effectRef>
+          <a:fontRef idx="minor">
+            <a:schemeClr val="lt1"/>
+          </a:fontRef>
+        </p:style>
+        <p:txBody>
+          <a:bodyPr rtlCol="0" anchor="ctr"/>
+          <a:lstStyle/>
+          <a:p>
+            <a:pPr algn="ctr"/>
+          </a:p>
+        </p:txBody>
+      </p:sp>
+      <p:sp>
+        <p:nvSpPr>
+          <p:cNvPr id="10" name="Rounded Rectangle 9"/>
+          <p:cNvSpPr/>
+          <p:nvPr/>
+        </p:nvSpPr>
+        <p:spPr>
+          <a:xfrm>
+            <a:off x="1540123" y="2003541"/>
+            <a:ext cx="1737360" cy="310896"/>
+          </a:xfrm>
+          <a:prstGeom prst="roundRect">
+            <a:avLst>
+              <a:gd name="adj" fmla="val 50000"/>
+            </a:avLst>
+          </a:prstGeom>
+          <a:solidFill>
+            <a:srgbClr val="00754A"/>
+          </a:solidFill>
+          <a:ln>
+            <a:noFill/>
+          </a:ln>
+          <a:effectLst/>
+        </p:spPr>
+        <p:style>
+          <a:lnRef idx="1">
+            <a:schemeClr val="accent1"/>
+          </a:lnRef>
+          <a:fillRef idx="3">
+            <a:schemeClr val="accent1"/>
+          </a:fillRef>
+          <a:effectRef idx="2">
+            <a:schemeClr val="accent1"/>
+          </a:effectRef>
+          <a:fontRef idx="minor">
+            <a:schemeClr val="lt1"/>
+          </a:fontRef>
+        </p:style>
+        <p:txBody>
+          <a:bodyPr rtlCol="0" anchor="ctr"/>
+          <a:lstStyle/>
+          <a:p>
+            <a:pPr algn="ctr"/>
+          </a:p>
+        </p:txBody>
+      </p:sp>
+      <p:sp>
+        <p:nvSpPr>
+          <p:cNvPr id="11" name="TextBox 10"/>
+          <p:cNvSpPr txBox="1"/>
+          <p:nvPr/>
+        </p:nvSpPr>
+        <p:spPr>
+          <a:xfrm>
+            <a:off x="1540123" y="2003541"/>
+            <a:ext cx="1737360" cy="310896"/>
+          </a:xfrm>
+          <a:prstGeom prst="rect">
+            <a:avLst/>
+          </a:prstGeom>
+          <a:noFill/>
+        </p:spPr>
+        <p:txBody>
+          <a:bodyPr wrap="square" anchor="ctr" lIns="0" rIns="0" tIns="0" bIns="0">
+            <a:spAutoFit/>
+          </a:bodyPr>
+          <a:lstStyle/>
+          <a:p>
+            <a:pPr algn="ctr"/>
+            <a:r>
+              <a:rPr sz="1100" b="1" i="0" spc="-11">
+                <a:solidFill>
+                  <a:srgbClr val="FFFFFF"/>
+                </a:solidFill>
+                <a:latin typeface="Pretendard"/>
+                <a:ea typeface="Pretendard"/>
+                <a:cs typeface="Pretendard"/>
+              </a:rPr>
+              <a:t>OWN YOUR DATA</a:t>
+            </a:r>
+          </a:p>
+        </p:txBody>
+      </p:sp>
+      <p:sp>
+        <p:nvSpPr>
+          <p:cNvPr id="12" name="TextBox 11"/>
+          <p:cNvSpPr txBox="1"/>
+          <p:nvPr/>
+        </p:nvSpPr>
+        <p:spPr>
+          <a:xfrm>
+            <a:off x="754562" y="2616189"/>
+            <a:ext cx="3308482" cy="1554480"/>
+          </a:xfrm>
+          <a:prstGeom prst="rect">
+            <a:avLst/>
+          </a:prstGeom>
+          <a:noFill/>
+        </p:spPr>
+        <p:txBody>
+          <a:bodyPr wrap="square" anchor="t" lIns="0" rIns="0" tIns="0" bIns="0">
+            <a:spAutoFit/>
+          </a:bodyPr>
+          <a:lstStyle/>
+          <a:p>
+            <a:pPr algn="ctr"/>
+            <a:r>
+              <a:rPr sz="3400" b="1" i="0" spc="-34">
+                <a:solidFill>
+                  <a:srgbClr val="006241"/>
+                </a:solidFill>
+                <a:latin typeface="Pretendard"/>
+                <a:ea typeface="Pretendard"/>
+                <a:cs typeface="Pretendard"/>
+              </a:rPr>
+              <a:t>마크다운</a:t>
+            </a:r>
+          </a:p>
+          <a:p>
+            <a:pPr algn="ctr">
+              <a:spcBef>
+                <a:spcPts val="200"/>
+              </a:spcBef>
+            </a:pPr>
+            <a:r>
+              <a:rPr sz="1600" b="1" i="0" spc="-16">
+                <a:solidFill>
+                  <a:srgbClr val="1F1F1F"/>
+                </a:solidFill>
+                <a:latin typeface="Pretendard"/>
+                <a:ea typeface="Pretendard"/>
+                <a:cs typeface="Pretendard"/>
+              </a:rPr>
+              <a:t>= 내 DB</a:t>
+            </a:r>
+          </a:p>
+          <a:p>
+            <a:pPr algn="ctr">
+              <a:lnSpc>
+                <a:spcPts val="1600"/>
+              </a:lnSpc>
+              <a:spcBef>
+                <a:spcPts val="1000"/>
+              </a:spcBef>
+            </a:pPr>
+            <a:r>
+              <a:rPr sz="1200" b="0" i="0" spc="-12">
+                <a:solidFill>
+                  <a:srgbClr val="6B6B6B"/>
+                </a:solidFill>
+                <a:latin typeface="Pretendard"/>
+                <a:ea typeface="Pretendard"/>
+                <a:cs typeface="Pretendard"/>
+              </a:rPr>
+              <a:t>평문·git·로컬 우선
+플러그인보다 오래 남음</a:t>
+            </a:r>
+          </a:p>
+        </p:txBody>
+      </p:sp>
+      <p:sp>
+        <p:nvSpPr>
+          <p:cNvPr id="13" name="Rounded Rectangle 12"/>
+          <p:cNvSpPr/>
+          <p:nvPr/>
+        </p:nvSpPr>
+        <p:spPr>
+          <a:xfrm>
+            <a:off x="4355652" y="1747509"/>
+            <a:ext cx="3491362" cy="3200400"/>
+          </a:xfrm>
+          <a:prstGeom prst="roundRect">
+            <a:avLst>
+              <a:gd name="adj" fmla="val 6000"/>
+            </a:avLst>
+          </a:prstGeom>
+          <a:solidFill>
+            <a:srgbClr val="FFFFFF"/>
+          </a:solidFill>
+          <a:ln w="9525">
+            <a:solidFill>
+              <a:srgbClr val="D9D9D9"/>
+            </a:solidFill>
+          </a:ln>
+          <a:effectLst/>
+        </p:spPr>
+        <p:style>
+          <a:lnRef idx="1">
+            <a:schemeClr val="accent1"/>
+          </a:lnRef>
+          <a:fillRef idx="3">
+            <a:schemeClr val="accent1"/>
+          </a:fillRef>
+          <a:effectRef idx="2">
+            <a:schemeClr val="accent1"/>
+          </a:effectRef>
+          <a:fontRef idx="minor">
+            <a:schemeClr val="lt1"/>
+          </a:fontRef>
+        </p:style>
+        <p:txBody>
+          <a:bodyPr rtlCol="0" anchor="ctr"/>
+          <a:lstStyle/>
+          <a:p>
+            <a:pPr algn="ctr"/>
+          </a:p>
+        </p:txBody>
+      </p:sp>
+      <p:sp>
+        <p:nvSpPr>
+          <p:cNvPr id="14" name="Rectangle 13"/>
+          <p:cNvSpPr/>
+          <p:nvPr/>
+        </p:nvSpPr>
+        <p:spPr>
+          <a:xfrm>
+            <a:off x="4355652" y="1747509"/>
+            <a:ext cx="3491362" cy="64008"/>
+          </a:xfrm>
+          <a:prstGeom prst="rect">
+            <a:avLst/>
+          </a:prstGeom>
+          <a:solidFill>
+            <a:srgbClr val="00754A"/>
+          </a:solidFill>
+          <a:ln>
+            <a:noFill/>
+          </a:ln>
+          <a:effectLst/>
+        </p:spPr>
+        <p:style>
+          <a:lnRef idx="1">
+            <a:schemeClr val="accent1"/>
+          </a:lnRef>
+          <a:fillRef idx="3">
+            <a:schemeClr val="accent1"/>
+          </a:fillRef>
+          <a:effectRef idx="2">
+            <a:schemeClr val="accent1"/>
+          </a:effectRef>
+          <a:fontRef idx="minor">
+            <a:schemeClr val="lt1"/>
+          </a:fontRef>
+        </p:style>
+        <p:txBody>
+          <a:bodyPr rtlCol="0" anchor="ctr"/>
+          <a:lstStyle/>
+          <a:p>
+            <a:pPr algn="ctr"/>
+          </a:p>
+        </p:txBody>
+      </p:sp>
+      <p:sp>
+        <p:nvSpPr>
+          <p:cNvPr id="15" name="Rounded Rectangle 14"/>
+          <p:cNvSpPr/>
+          <p:nvPr/>
+        </p:nvSpPr>
+        <p:spPr>
+          <a:xfrm>
+            <a:off x="5232654" y="2003541"/>
+            <a:ext cx="1737360" cy="310896"/>
+          </a:xfrm>
+          <a:prstGeom prst="roundRect">
+            <a:avLst>
+              <a:gd name="adj" fmla="val 50000"/>
+            </a:avLst>
+          </a:prstGeom>
+          <a:solidFill>
+            <a:srgbClr val="00754A"/>
+          </a:solidFill>
+          <a:ln>
+            <a:noFill/>
+          </a:ln>
+          <a:effectLst/>
+        </p:spPr>
+        <p:style>
+          <a:lnRef idx="1">
+            <a:schemeClr val="accent1"/>
+          </a:lnRef>
+          <a:fillRef idx="3">
+            <a:schemeClr val="accent1"/>
+          </a:fillRef>
+          <a:effectRef idx="2">
+            <a:schemeClr val="accent1"/>
+          </a:effectRef>
+          <a:fontRef idx="minor">
+            <a:schemeClr val="lt1"/>
+          </a:fontRef>
+        </p:style>
+        <p:txBody>
+          <a:bodyPr rtlCol="0" anchor="ctr"/>
+          <a:lstStyle/>
+          <a:p>
+            <a:pPr algn="ctr"/>
+          </a:p>
+        </p:txBody>
+      </p:sp>
+      <p:sp>
+        <p:nvSpPr>
+          <p:cNvPr id="16" name="TextBox 15"/>
+          <p:cNvSpPr txBox="1"/>
+          <p:nvPr/>
+        </p:nvSpPr>
+        <p:spPr>
+          <a:xfrm>
+            <a:off x="5232654" y="2003541"/>
+            <a:ext cx="1737360" cy="310896"/>
+          </a:xfrm>
+          <a:prstGeom prst="rect">
+            <a:avLst/>
+          </a:prstGeom>
+          <a:noFill/>
+        </p:spPr>
+        <p:txBody>
+          <a:bodyPr wrap="square" anchor="ctr" lIns="0" rIns="0" tIns="0" bIns="0">
+            <a:spAutoFit/>
+          </a:bodyPr>
+          <a:lstStyle/>
+          <a:p>
+            <a:pPr algn="ctr"/>
+            <a:r>
+              <a:rPr sz="1100" b="1" i="0" spc="-11">
+                <a:solidFill>
+                  <a:srgbClr val="FFFFFF"/>
+                </a:solidFill>
+                <a:latin typeface="Pretendard"/>
+                <a:ea typeface="Pretendard"/>
+                <a:cs typeface="Pretendard"/>
+              </a:rPr>
+              <a:t>GROUNDED</a:t>
+            </a:r>
+          </a:p>
+        </p:txBody>
+      </p:sp>
+      <p:sp>
+        <p:nvSpPr>
+          <p:cNvPr id="17" name="TextBox 16"/>
+          <p:cNvSpPr txBox="1"/>
+          <p:nvPr/>
+        </p:nvSpPr>
+        <p:spPr>
+          <a:xfrm>
+            <a:off x="4447092" y="2616189"/>
+            <a:ext cx="3308482" cy="1554480"/>
+          </a:xfrm>
+          <a:prstGeom prst="rect">
+            <a:avLst/>
+          </a:prstGeom>
+          <a:noFill/>
+        </p:spPr>
+        <p:txBody>
+          <a:bodyPr wrap="square" anchor="t" lIns="0" rIns="0" tIns="0" bIns="0">
+            <a:spAutoFit/>
+          </a:bodyPr>
+          <a:lstStyle/>
+          <a:p>
+            <a:pPr algn="ctr"/>
+            <a:r>
+              <a:rPr sz="3400" b="1" i="0" spc="-34">
+                <a:solidFill>
+                  <a:srgbClr val="006241"/>
+                </a:solidFill>
+                <a:latin typeface="Pretendard"/>
+                <a:ea typeface="Pretendard"/>
+                <a:cs typeface="Pretendard"/>
+              </a:rPr>
+              <a:t>근거</a:t>
+            </a:r>
+          </a:p>
+          <a:p>
+            <a:pPr algn="ctr">
+              <a:spcBef>
+                <a:spcPts val="200"/>
+              </a:spcBef>
+            </a:pPr>
+            <a:r>
+              <a:rPr sz="1600" b="1" i="0" spc="-16">
+                <a:solidFill>
+                  <a:srgbClr val="1F1F1F"/>
+                </a:solidFill>
+                <a:latin typeface="Pretendard"/>
+                <a:ea typeface="Pretendard"/>
+                <a:cs typeface="Pretendard"/>
+              </a:rPr>
+              <a:t>구절 인용</a:t>
+            </a:r>
+          </a:p>
+          <a:p>
+            <a:pPr algn="ctr">
+              <a:lnSpc>
+                <a:spcPts val="1600"/>
+              </a:lnSpc>
+              <a:spcBef>
+                <a:spcPts val="1000"/>
+              </a:spcBef>
+            </a:pPr>
+            <a:r>
+              <a:rPr sz="1200" b="0" i="0" spc="-12">
+                <a:solidFill>
+                  <a:srgbClr val="6B6B6B"/>
+                </a:solidFill>
+                <a:latin typeface="Pretendard"/>
+                <a:ea typeface="Pretendard"/>
+                <a:cs typeface="Pretendard"/>
+              </a:rPr>
+              <a:t>출처 없는 답 없음
+서식 참고문헌까지</a:t>
+            </a:r>
+          </a:p>
+        </p:txBody>
+      </p:sp>
+      <p:sp>
+        <p:nvSpPr>
+          <p:cNvPr id="18" name="Rounded Rectangle 17"/>
+          <p:cNvSpPr/>
+          <p:nvPr/>
+        </p:nvSpPr>
+        <p:spPr>
+          <a:xfrm>
+            <a:off x="8048183" y="1747509"/>
+            <a:ext cx="3491362" cy="3200400"/>
+          </a:xfrm>
+          <a:prstGeom prst="roundRect">
+            <a:avLst>
+              <a:gd name="adj" fmla="val 6000"/>
+            </a:avLst>
+          </a:prstGeom>
+          <a:solidFill>
+            <a:srgbClr val="FFFFFF"/>
+          </a:solidFill>
+          <a:ln w="9525">
+            <a:solidFill>
+              <a:srgbClr val="D9D9D9"/>
+            </a:solidFill>
+          </a:ln>
+          <a:effectLst/>
+        </p:spPr>
+        <p:style>
+          <a:lnRef idx="1">
+            <a:schemeClr val="accent1"/>
+          </a:lnRef>
+          <a:fillRef idx="3">
+            <a:schemeClr val="accent1"/>
+          </a:fillRef>
+          <a:effectRef idx="2">
+            <a:schemeClr val="accent1"/>
+          </a:effectRef>
+          <a:fontRef idx="minor">
+            <a:schemeClr val="lt1"/>
+          </a:fontRef>
+        </p:style>
+        <p:txBody>
+          <a:bodyPr rtlCol="0" anchor="ctr"/>
+          <a:lstStyle/>
+          <a:p>
+            <a:pPr algn="ctr"/>
+          </a:p>
+        </p:txBody>
+      </p:sp>
+      <p:sp>
+        <p:nvSpPr>
+          <p:cNvPr id="19" name="Rectangle 18"/>
+          <p:cNvSpPr/>
+          <p:nvPr/>
+        </p:nvSpPr>
+        <p:spPr>
+          <a:xfrm>
+            <a:off x="8048183" y="1747509"/>
+            <a:ext cx="3491362" cy="64008"/>
+          </a:xfrm>
+          <a:prstGeom prst="rect">
+            <a:avLst/>
+          </a:prstGeom>
+          <a:solidFill>
+            <a:srgbClr val="00754A"/>
+          </a:solidFill>
+          <a:ln>
+            <a:noFill/>
+          </a:ln>
+          <a:effectLst/>
+        </p:spPr>
+        <p:style>
+          <a:lnRef idx="1">
+            <a:schemeClr val="accent1"/>
+          </a:lnRef>
+          <a:fillRef idx="3">
+            <a:schemeClr val="accent1"/>
+          </a:fillRef>
+          <a:effectRef idx="2">
+            <a:schemeClr val="accent1"/>
+          </a:effectRef>
+          <a:fontRef idx="minor">
+            <a:schemeClr val="lt1"/>
+          </a:fontRef>
+        </p:style>
+        <p:txBody>
+          <a:bodyPr rtlCol="0" anchor="ctr"/>
+          <a:lstStyle/>
+          <a:p>
+            <a:pPr algn="ctr"/>
+          </a:p>
+        </p:txBody>
+      </p:sp>
+      <p:sp>
+        <p:nvSpPr>
+          <p:cNvPr id="20" name="Rounded Rectangle 19"/>
+          <p:cNvSpPr/>
+          <p:nvPr/>
+        </p:nvSpPr>
+        <p:spPr>
+          <a:xfrm>
+            <a:off x="8925184" y="2003541"/>
+            <a:ext cx="1737360" cy="310896"/>
+          </a:xfrm>
+          <a:prstGeom prst="roundRect">
+            <a:avLst>
+              <a:gd name="adj" fmla="val 50000"/>
+            </a:avLst>
+          </a:prstGeom>
+          <a:solidFill>
+            <a:srgbClr val="00754A"/>
+          </a:solidFill>
+          <a:ln>
+            <a:noFill/>
+          </a:ln>
+          <a:effectLst/>
+        </p:spPr>
+        <p:style>
+          <a:lnRef idx="1">
+            <a:schemeClr val="accent1"/>
+          </a:lnRef>
+          <a:fillRef idx="3">
+            <a:schemeClr val="accent1"/>
+          </a:fillRef>
+          <a:effectRef idx="2">
+            <a:schemeClr val="accent1"/>
+          </a:effectRef>
+          <a:fontRef idx="minor">
+            <a:schemeClr val="lt1"/>
+          </a:fontRef>
+        </p:style>
+        <p:txBody>
+          <a:bodyPr rtlCol="0" anchor="ctr"/>
+          <a:lstStyle/>
+          <a:p>
+            <a:pPr algn="ctr"/>
+          </a:p>
+        </p:txBody>
+      </p:sp>
+      <p:sp>
+        <p:nvSpPr>
+          <p:cNvPr id="21" name="TextBox 20"/>
+          <p:cNvSpPr txBox="1"/>
+          <p:nvPr/>
+        </p:nvSpPr>
+        <p:spPr>
+          <a:xfrm>
+            <a:off x="8925184" y="2003541"/>
+            <a:ext cx="1737360" cy="310896"/>
+          </a:xfrm>
+          <a:prstGeom prst="rect">
+            <a:avLst/>
+          </a:prstGeom>
+          <a:noFill/>
+        </p:spPr>
+        <p:txBody>
+          <a:bodyPr wrap="square" anchor="ctr" lIns="0" rIns="0" tIns="0" bIns="0">
+            <a:spAutoFit/>
+          </a:bodyPr>
+          <a:lstStyle/>
+          <a:p>
+            <a:pPr algn="ctr"/>
+            <a:r>
+              <a:rPr sz="1100" b="1" i="0" spc="-11">
+                <a:solidFill>
+                  <a:srgbClr val="FFFFFF"/>
+                </a:solidFill>
+                <a:latin typeface="Pretendard"/>
+                <a:ea typeface="Pretendard"/>
+                <a:cs typeface="Pretendard"/>
+              </a:rPr>
+              <a:t>GRAPH-LITE</a:t>
+            </a:r>
+          </a:p>
+        </p:txBody>
+      </p:sp>
+      <p:sp>
+        <p:nvSpPr>
+          <p:cNvPr id="22" name="TextBox 21"/>
+          <p:cNvSpPr txBox="1"/>
+          <p:nvPr/>
+        </p:nvSpPr>
+        <p:spPr>
+          <a:xfrm>
+            <a:off x="8139623" y="2616189"/>
+            <a:ext cx="3308482" cy="1554480"/>
+          </a:xfrm>
+          <a:prstGeom prst="rect">
+            <a:avLst/>
+          </a:prstGeom>
+          <a:noFill/>
+        </p:spPr>
+        <p:txBody>
+          <a:bodyPr wrap="square" anchor="t" lIns="0" rIns="0" tIns="0" bIns="0">
+            <a:spAutoFit/>
+          </a:bodyPr>
+          <a:lstStyle/>
+          <a:p>
+            <a:pPr algn="ctr"/>
+            <a:r>
+              <a:rPr sz="3400" b="1" i="0" spc="-34">
+                <a:solidFill>
+                  <a:srgbClr val="006241"/>
+                </a:solidFill>
+                <a:latin typeface="Pretendard"/>
+                <a:ea typeface="Pretendard"/>
+                <a:cs typeface="Pretendard"/>
+              </a:rPr>
+              <a:t>그래프</a:t>
+            </a:r>
+          </a:p>
+          <a:p>
+            <a:pPr algn="ctr">
+              <a:spcBef>
+                <a:spcPts val="200"/>
+              </a:spcBef>
+            </a:pPr>
+            <a:r>
+              <a:rPr sz="1600" b="1" i="0" spc="-16">
+                <a:solidFill>
+                  <a:srgbClr val="1F1F1F"/>
+                </a:solidFill>
+                <a:latin typeface="Pretendard"/>
+                <a:ea typeface="Pretendard"/>
+                <a:cs typeface="Pretendard"/>
+              </a:rPr>
+              <a:t>놓친 논문</a:t>
+            </a:r>
+          </a:p>
+          <a:p>
+            <a:pPr algn="ctr">
+              <a:lnSpc>
+                <a:spcPts val="1600"/>
+              </a:lnSpc>
+              <a:spcBef>
+                <a:spcPts val="1000"/>
+              </a:spcBef>
+            </a:pPr>
+            <a:r>
+              <a:rPr sz="1200" b="0" i="0" spc="-12">
+                <a:solidFill>
+                  <a:srgbClr val="6B6B6B"/>
+                </a:solidFill>
+                <a:latin typeface="Pretendard"/>
+                <a:ea typeface="Pretendard"/>
+                <a:cs typeface="Pretendard"/>
+              </a:rPr>
+              <a:t>OpenAlex 인용엣지
+LLM 비용 0</a:t>
+            </a:r>
+          </a:p>
+        </p:txBody>
+      </p:sp>
+      <p:sp>
+        <p:nvSpPr>
+          <p:cNvPr id="23" name="Rounded Rectangle 22"/>
+          <p:cNvSpPr/>
+          <p:nvPr/>
+        </p:nvSpPr>
+        <p:spPr>
+          <a:xfrm>
+            <a:off x="571682" y="5859292"/>
+            <a:ext cx="11059302" cy="457200"/>
+          </a:xfrm>
+          <a:prstGeom prst="roundRect">
+            <a:avLst>
+              <a:gd name="adj" fmla="val 18000"/>
+            </a:avLst>
+          </a:prstGeom>
+          <a:solidFill>
+            <a:srgbClr val="1E3932"/>
+          </a:solidFill>
+          <a:ln>
+            <a:noFill/>
+          </a:ln>
+          <a:effectLst/>
+        </p:spPr>
+        <p:style>
+          <a:lnRef idx="1">
+            <a:schemeClr val="accent1"/>
+          </a:lnRef>
+          <a:fillRef idx="3">
+            <a:schemeClr val="accent1"/>
+          </a:fillRef>
+          <a:effectRef idx="2">
+            <a:schemeClr val="accent1"/>
+          </a:effectRef>
+          <a:fontRef idx="minor">
+            <a:schemeClr val="lt1"/>
+          </a:fontRef>
+        </p:style>
+        <p:txBody>
+          <a:bodyPr rtlCol="0" anchor="ctr"/>
+          <a:lstStyle/>
+          <a:p>
+            <a:pPr algn="ctr"/>
+          </a:p>
+        </p:txBody>
+      </p:sp>
+      <p:sp>
+        <p:nvSpPr>
+          <p:cNvPr id="24" name="TextBox 23"/>
+          <p:cNvSpPr txBox="1"/>
+          <p:nvPr/>
+        </p:nvSpPr>
+        <p:spPr>
+          <a:xfrm>
+            <a:off x="800282" y="5859292"/>
+            <a:ext cx="10602102" cy="457200"/>
+          </a:xfrm>
+          <a:prstGeom prst="rect">
+            <a:avLst/>
+          </a:prstGeom>
+          <a:noFill/>
+        </p:spPr>
+        <p:txBody>
+          <a:bodyPr wrap="square" anchor="ctr" lIns="0" rIns="0" tIns="0" bIns="0">
+            <a:spAutoFit/>
+          </a:bodyPr>
+          <a:lstStyle/>
+          <a:p>
+            <a:pPr algn="l"/>
+            <a:r>
+              <a:rPr sz="1400" b="1" i="0" spc="-14">
+                <a:solidFill>
+                  <a:srgbClr val="FFFFFF"/>
+                </a:solidFill>
+                <a:latin typeface="Pretendard"/>
+                <a:ea typeface="Pretendard"/>
+                <a:cs typeface="Pretendard"/>
+              </a:rPr>
+              <a:t>내 서재가 곧 검색엔진이고, 답은 늘 출처와 함께 — RAG Obsidian</a:t>
+            </a:r>
+          </a:p>
+        </p:txBody>
+      </p:sp>
+    </p:spTree>
+  </p:cSld>
+  <p:clrMapOvr>
+    <a:masterClrMapping/>
+  </p:clrMapOvr>
+</p:sld>
+</file>
+
+<file path=ppt/slides/slide18.xml><?xml version="1.0" encoding="utf-8"?>
 <p:sld xmlns:a="http://schemas.openxmlformats.org/drawingml/2006/main" xmlns:p="http://schemas.openxmlformats.org/presentationml/2006/main" xmlns:r="http://schemas.openxmlformats.org/officeDocument/2006/relationships">
   <p:cSld>
     <p:spTree>

--- a/presentation/rag_obsidian_deck.pptx
+++ b/presentation/rag_obsidian_deck.pptx
@@ -23,6 +23,8 @@
     <p:sldId id="271" r:id="rId22"/>
     <p:sldId id="272" r:id="rId23"/>
     <p:sldId id="273" r:id="rId24"/>
+    <p:sldId id="274" r:id="rId25"/>
+    <p:sldId id="275" r:id="rId26"/>
   </p:sldIdLst>
   <p:sldSz cx="12191695" cy="6858000" type="screen4x3"/>
   <p:notesSz cx="6858000" cy="9144000"/>
@@ -3190,11 +3192,11 @@
               <a:gd name="adj" fmla="val 50000"/>
             </a:avLst>
           </a:prstGeom>
-          <a:solidFill>
-            <a:srgbClr val="00754A"/>
-          </a:solidFill>
-          <a:ln>
-            <a:noFill/>
+          <a:noFill/>
+          <a:ln w="19050">
+            <a:solidFill>
+              <a:srgbClr val="00754A"/>
+            </a:solidFill>
           </a:ln>
           <a:effectLst/>
         </p:spPr>
@@ -3246,7 +3248,7 @@
             <a:r>
               <a:rPr sz="1400" b="1" i="0" spc="-14">
                 <a:solidFill>
-                  <a:srgbClr val="FFFFFF"/>
+                  <a:srgbClr val="00754A"/>
                 </a:solidFill>
                 <a:latin typeface="Pretendard"/>
                 <a:ea typeface="Pretendard"/>
@@ -4010,11 +4012,11 @@
               <a:gd name="adj" fmla="val 18000"/>
             </a:avLst>
           </a:prstGeom>
-          <a:solidFill>
-            <a:srgbClr val="1E3932"/>
-          </a:solidFill>
-          <a:ln>
-            <a:noFill/>
+          <a:noFill/>
+          <a:ln w="19050">
+            <a:solidFill>
+              <a:srgbClr val="00754A"/>
+            </a:solidFill>
           </a:ln>
           <a:effectLst/>
         </p:spPr>
@@ -4066,7 +4068,7 @@
             <a:r>
               <a:rPr sz="1400" b="1" i="0" spc="-14">
                 <a:solidFill>
-                  <a:srgbClr val="FFFFFF"/>
+                  <a:srgbClr val="006241"/>
                 </a:solidFill>
                 <a:latin typeface="Pretendard"/>
                 <a:ea typeface="Pretendard"/>
@@ -4473,7 +4475,7 @@
                       <a:r>
                         <a:rPr sz="1200" b="1" i="0" spc="-12">
                           <a:solidFill>
-                            <a:srgbClr val="FFFFFF"/>
+                            <a:srgbClr val="006241"/>
                           </a:solidFill>
                           <a:latin typeface="Pretendard"/>
                           <a:ea typeface="Pretendard"/>
@@ -4485,7 +4487,7 @@
                   </a:txBody>
                   <a:tcPr marL="91440" marT="27432" marB="27432" anchor="ctr">
                     <a:solidFill>
-                      <a:srgbClr val="00754A"/>
+                      <a:srgbClr val="F9F9F9"/>
                     </a:solidFill>
                   </a:tcPr>
                 </a:tc>
@@ -4587,7 +4589,7 @@
                   </a:txBody>
                   <a:tcPr marL="91440" marT="27432" marB="27432" anchor="ctr">
                     <a:solidFill>
-                      <a:srgbClr val="D4E9E2"/>
+                      <a:srgbClr val="FFFFFF"/>
                     </a:solidFill>
                   </a:tcPr>
                 </a:tc>
@@ -4689,7 +4691,7 @@
                   </a:txBody>
                   <a:tcPr marL="91440" marT="27432" marB="27432" anchor="ctr">
                     <a:solidFill>
-                      <a:srgbClr val="D4E9E2"/>
+                      <a:srgbClr val="EDEBE9"/>
                     </a:solidFill>
                   </a:tcPr>
                 </a:tc>
@@ -4791,7 +4793,7 @@
                   </a:txBody>
                   <a:tcPr marL="91440" marT="27432" marB="27432" anchor="ctr">
                     <a:solidFill>
-                      <a:srgbClr val="D4E9E2"/>
+                      <a:srgbClr val="FFFFFF"/>
                     </a:solidFill>
                   </a:tcPr>
                 </a:tc>
@@ -4893,7 +4895,7 @@
                   </a:txBody>
                   <a:tcPr marL="91440" marT="27432" marB="27432" anchor="ctr">
                     <a:solidFill>
-                      <a:srgbClr val="D4E9E2"/>
+                      <a:srgbClr val="EDEBE9"/>
                     </a:solidFill>
                   </a:tcPr>
                 </a:tc>
@@ -4995,7 +4997,7 @@
                   </a:txBody>
                   <a:tcPr marL="91440" marT="27432" marB="27432" anchor="ctr">
                     <a:solidFill>
-                      <a:srgbClr val="D4E9E2"/>
+                      <a:srgbClr val="FFFFFF"/>
                     </a:solidFill>
                   </a:tcPr>
                 </a:tc>
@@ -5097,7 +5099,7 @@
                   </a:txBody>
                   <a:tcPr marL="91440" marT="27432" marB="27432" anchor="ctr">
                     <a:solidFill>
-                      <a:srgbClr val="D4E9E2"/>
+                      <a:srgbClr val="EDEBE9"/>
                     </a:solidFill>
                   </a:tcPr>
                 </a:tc>
@@ -5200,7 +5202,7 @@
                 <a:ea typeface="Pretendard"/>
                 <a:cs typeface="Pretendard"/>
               </a:rPr>
-              <a:t>VALIDATION</a:t>
+              <a:t>ROADMAP</a:t>
             </a:r>
           </a:p>
         </p:txBody>
@@ -5241,7 +5243,7 @@
                 <a:ea typeface="Pretendard"/>
                 <a:cs typeface="Pretendard"/>
               </a:rPr>
-              <a:t>40개 통합검증, 실제 API·데이터로 전부 통과</a:t>
+              <a:t>Phase 0부터 5까지, 각 단계가 따로도 쓸모 있다</a:t>
             </a:r>
           </a:p>
         </p:txBody>
@@ -5388,34 +5390,30 @@
                 <a:ea typeface="Pretendard"/>
                 <a:cs typeface="Pretendard"/>
               </a:rPr>
-              <a:t>npm test · 통합 하니스 40 checks</a:t>
-            </a:r>
-          </a:p>
-        </p:txBody>
-      </p:sp>
-      <p:sp>
-        <p:nvSpPr>
-          <p:cNvPr id="9" name="Rounded Rectangle 8"/>
+              <a:t>v0.4.0 · github.com/grotyx/rag-obsidian</a:t>
+            </a:r>
+          </a:p>
+        </p:txBody>
+      </p:sp>
+      <p:sp>
+        <p:nvSpPr>
+          <p:cNvPr id="9" name="Rectangle 8"/>
           <p:cNvSpPr/>
           <p:nvPr/>
         </p:nvSpPr>
         <p:spPr>
           <a:xfrm>
-            <a:off x="663122" y="1656069"/>
-            <a:ext cx="2568229" cy="1234440"/>
-          </a:xfrm>
-          <a:prstGeom prst="roundRect">
-            <a:avLst>
-              <a:gd name="adj" fmla="val 8000"/>
-            </a:avLst>
+            <a:off x="937442" y="3622029"/>
+            <a:ext cx="10327782" cy="22860"/>
+          </a:xfrm>
+          <a:prstGeom prst="rect">
+            <a:avLst/>
           </a:prstGeom>
           <a:solidFill>
-            <a:srgbClr val="FFFFFF"/>
+            <a:srgbClr val="00754A"/>
           </a:solidFill>
-          <a:ln w="9525">
-            <a:solidFill>
-              <a:srgbClr val="D9D9D9"/>
-            </a:solidFill>
+          <a:ln>
+            <a:noFill/>
           </a:ln>
           <a:effectLst/>
         </p:spPr>
@@ -5443,100 +5441,24 @@
       </p:sp>
       <p:sp>
         <p:nvSpPr>
-          <p:cNvPr id="10" name="TextBox 9"/>
-          <p:cNvSpPr txBox="1"/>
-          <p:nvPr/>
-        </p:nvSpPr>
-        <p:spPr>
-          <a:xfrm>
-            <a:off x="754562" y="1765797"/>
-            <a:ext cx="2385349" cy="685800"/>
-          </a:xfrm>
-          <a:prstGeom prst="rect">
-            <a:avLst/>
-          </a:prstGeom>
-          <a:noFill/>
-        </p:spPr>
-        <p:txBody>
-          <a:bodyPr wrap="square" anchor="ctr" lIns="0" rIns="0" tIns="0" bIns="0">
-            <a:spAutoFit/>
-          </a:bodyPr>
-          <a:lstStyle/>
-          <a:p>
-            <a:pPr algn="ctr"/>
-            <a:r>
-              <a:rPr sz="4000" b="1" i="0" spc="-40">
-                <a:solidFill>
-                  <a:srgbClr val="006241"/>
-                </a:solidFill>
-                <a:latin typeface="Pretendard"/>
-                <a:ea typeface="Pretendard"/>
-                <a:cs typeface="Pretendard"/>
-              </a:rPr>
-              <a:t>40</a:t>
-            </a:r>
-          </a:p>
-        </p:txBody>
-      </p:sp>
-      <p:sp>
-        <p:nvSpPr>
-          <p:cNvPr id="11" name="TextBox 10"/>
-          <p:cNvSpPr txBox="1"/>
-          <p:nvPr/>
-        </p:nvSpPr>
-        <p:spPr>
-          <a:xfrm>
-            <a:off x="754562" y="2497317"/>
-            <a:ext cx="2385349" cy="320040"/>
-          </a:xfrm>
-          <a:prstGeom prst="rect">
-            <a:avLst/>
-          </a:prstGeom>
-          <a:noFill/>
-        </p:spPr>
-        <p:txBody>
-          <a:bodyPr wrap="square" anchor="t" lIns="0" rIns="0" tIns="0" bIns="0">
-            <a:spAutoFit/>
-          </a:bodyPr>
-          <a:lstStyle/>
-          <a:p>
-            <a:pPr algn="ctr"/>
-            <a:r>
-              <a:rPr sz="1200" b="0" i="0" spc="-12">
-                <a:solidFill>
-                  <a:srgbClr val="6B6B6B"/>
-                </a:solidFill>
-                <a:latin typeface="Pretendard"/>
-                <a:ea typeface="Pretendard"/>
-                <a:cs typeface="Pretendard"/>
-              </a:rPr>
-              <a:t>통합검증 통과 (실패 0)</a:t>
-            </a:r>
-          </a:p>
-        </p:txBody>
-      </p:sp>
-      <p:sp>
-        <p:nvSpPr>
-          <p:cNvPr id="12" name="Rounded Rectangle 11"/>
+          <p:cNvPr id="10" name="Oval 9"/>
           <p:cNvSpPr/>
           <p:nvPr/>
         </p:nvSpPr>
         <p:spPr>
           <a:xfrm>
-            <a:off x="3432520" y="1656069"/>
-            <a:ext cx="2568229" cy="1234440"/>
-          </a:xfrm>
-          <a:prstGeom prst="roundRect">
-            <a:avLst>
-              <a:gd name="adj" fmla="val 8000"/>
-            </a:avLst>
+            <a:off x="836858" y="3535161"/>
+            <a:ext cx="201168" cy="201168"/>
+          </a:xfrm>
+          <a:prstGeom prst="ellipse">
+            <a:avLst/>
           </a:prstGeom>
           <a:solidFill>
-            <a:srgbClr val="FFFFFF"/>
+            <a:srgbClr val="00754A"/>
           </a:solidFill>
-          <a:ln w="9525">
+          <a:ln w="19050">
             <a:solidFill>
-              <a:srgbClr val="D9D9D9"/>
+              <a:srgbClr val="FFFFFF"/>
             </a:solidFill>
           </a:ln>
           <a:effectLst/>
@@ -5565,29 +5487,29 @@
       </p:sp>
       <p:sp>
         <p:nvSpPr>
-          <p:cNvPr id="13" name="TextBox 12"/>
-          <p:cNvSpPr txBox="1"/>
-          <p:nvPr/>
-        </p:nvSpPr>
-        <p:spPr>
-          <a:xfrm>
-            <a:off x="3523960" y="1765797"/>
-            <a:ext cx="2385349" cy="685800"/>
-          </a:xfrm>
-          <a:prstGeom prst="rect">
-            <a:avLst/>
-          </a:prstGeom>
-          <a:noFill/>
-        </p:spPr>
-        <p:txBody>
-          <a:bodyPr wrap="square" anchor="ctr" lIns="0" rIns="0" tIns="0" bIns="0">
+          <p:cNvPr id="11" name="TextBox 10"/>
+          <p:cNvSpPr txBox="1"/>
+          <p:nvPr/>
+        </p:nvSpPr>
+        <p:spPr>
+          <a:xfrm>
+            <a:off x="114482" y="2799069"/>
+            <a:ext cx="1645920" cy="457200"/>
+          </a:xfrm>
+          <a:prstGeom prst="rect">
+            <a:avLst/>
+          </a:prstGeom>
+          <a:noFill/>
+        </p:spPr>
+        <p:txBody>
+          <a:bodyPr wrap="square" anchor="t" lIns="0" rIns="0" tIns="0" bIns="0">
             <a:spAutoFit/>
           </a:bodyPr>
           <a:lstStyle/>
           <a:p>
             <a:pPr algn="ctr"/>
             <a:r>
-              <a:rPr sz="4000" b="1" i="0" spc="-40">
+              <a:rPr sz="1700" b="1" i="0" spc="-17">
                 <a:solidFill>
                   <a:srgbClr val="006241"/>
                 </a:solidFill>
@@ -5595,21 +5517,21 @@
                 <a:ea typeface="Pretendard"/>
                 <a:cs typeface="Pretendard"/>
               </a:rPr>
-              <a:t>0</a:t>
-            </a:r>
-          </a:p>
-        </p:txBody>
-      </p:sp>
-      <p:sp>
-        <p:nvSpPr>
-          <p:cNvPr id="14" name="TextBox 13"/>
-          <p:cNvSpPr txBox="1"/>
-          <p:nvPr/>
-        </p:nvSpPr>
-        <p:spPr>
-          <a:xfrm>
-            <a:off x="3523960" y="2497317"/>
-            <a:ext cx="2385349" cy="320040"/>
+              <a:t>P0</a:t>
+            </a:r>
+          </a:p>
+        </p:txBody>
+      </p:sp>
+      <p:sp>
+        <p:nvSpPr>
+          <p:cNvPr id="12" name="TextBox 11"/>
+          <p:cNvSpPr txBox="1"/>
+          <p:nvPr/>
+        </p:nvSpPr>
+        <p:spPr>
+          <a:xfrm>
+            <a:off x="68762" y="3850629"/>
+            <a:ext cx="1737360" cy="914400"/>
           </a:xfrm>
           <a:prstGeom prst="rect">
             <a:avLst/>
@@ -5622,43 +5544,46 @@
           </a:bodyPr>
           <a:lstStyle/>
           <a:p>
-            <a:pPr algn="ctr"/>
+            <a:pPr algn="ctr">
+              <a:lnSpc>
+                <a:spcPts val="1500"/>
+              </a:lnSpc>
+            </a:pPr>
             <a:r>
               <a:rPr sz="1200" b="0" i="0" spc="-12">
                 <a:solidFill>
-                  <a:srgbClr val="6B6B6B"/>
-                </a:solidFill>
-                <a:latin typeface="Pretendard"/>
-                <a:ea typeface="Pretendard"/>
-                <a:cs typeface="Pretendard"/>
-              </a:rPr>
-              <a:t>백엔드/서버</a:t>
-            </a:r>
-          </a:p>
-        </p:txBody>
-      </p:sp>
-      <p:sp>
-        <p:nvSpPr>
-          <p:cNvPr id="15" name="Rounded Rectangle 14"/>
+                  <a:srgbClr val="1F1F1F"/>
+                </a:solidFill>
+                <a:latin typeface="Pretendard"/>
+                <a:ea typeface="Pretendard"/>
+                <a:cs typeface="Pretendard"/>
+              </a:rPr>
+              <a:t>서지관리
+DOI→노트</a:t>
+            </a:r>
+          </a:p>
+        </p:txBody>
+      </p:sp>
+      <p:sp>
+        <p:nvSpPr>
+          <p:cNvPr id="13" name="Oval 12"/>
           <p:cNvSpPr/>
           <p:nvPr/>
         </p:nvSpPr>
         <p:spPr>
           <a:xfrm>
-            <a:off x="6201918" y="1656069"/>
-            <a:ext cx="2568229" cy="1234440"/>
-          </a:xfrm>
-          <a:prstGeom prst="roundRect">
-            <a:avLst>
-              <a:gd name="adj" fmla="val 8000"/>
-            </a:avLst>
+            <a:off x="2902415" y="3535161"/>
+            <a:ext cx="201168" cy="201168"/>
+          </a:xfrm>
+          <a:prstGeom prst="ellipse">
+            <a:avLst/>
           </a:prstGeom>
           <a:solidFill>
-            <a:srgbClr val="FFFFFF"/>
+            <a:srgbClr val="00754A"/>
           </a:solidFill>
-          <a:ln w="9525">
+          <a:ln w="19050">
             <a:solidFill>
-              <a:srgbClr val="D9D9D9"/>
+              <a:srgbClr val="FFFFFF"/>
             </a:solidFill>
           </a:ln>
           <a:effectLst/>
@@ -5687,29 +5612,29 @@
       </p:sp>
       <p:sp>
         <p:nvSpPr>
-          <p:cNvPr id="16" name="TextBox 15"/>
-          <p:cNvSpPr txBox="1"/>
-          <p:nvPr/>
-        </p:nvSpPr>
-        <p:spPr>
-          <a:xfrm>
-            <a:off x="6293358" y="1765797"/>
-            <a:ext cx="2385349" cy="685800"/>
-          </a:xfrm>
-          <a:prstGeom prst="rect">
-            <a:avLst/>
-          </a:prstGeom>
-          <a:noFill/>
-        </p:spPr>
-        <p:txBody>
-          <a:bodyPr wrap="square" anchor="ctr" lIns="0" rIns="0" tIns="0" bIns="0">
+          <p:cNvPr id="14" name="TextBox 13"/>
+          <p:cNvSpPr txBox="1"/>
+          <p:nvPr/>
+        </p:nvSpPr>
+        <p:spPr>
+          <a:xfrm>
+            <a:off x="2180039" y="2799069"/>
+            <a:ext cx="1645920" cy="457200"/>
+          </a:xfrm>
+          <a:prstGeom prst="rect">
+            <a:avLst/>
+          </a:prstGeom>
+          <a:noFill/>
+        </p:spPr>
+        <p:txBody>
+          <a:bodyPr wrap="square" anchor="t" lIns="0" rIns="0" tIns="0" bIns="0">
             <a:spAutoFit/>
           </a:bodyPr>
           <a:lstStyle/>
           <a:p>
             <a:pPr algn="ctr"/>
             <a:r>
-              <a:rPr sz="4000" b="1" i="0" spc="-40">
+              <a:rPr sz="1700" b="1" i="0" spc="-17">
                 <a:solidFill>
                   <a:srgbClr val="006241"/>
                 </a:solidFill>
@@ -5717,21 +5642,21 @@
                 <a:ea typeface="Pretendard"/>
                 <a:cs typeface="Pretendard"/>
               </a:rPr>
-              <a:t>9</a:t>
-            </a:r>
-          </a:p>
-        </p:txBody>
-      </p:sp>
-      <p:sp>
-        <p:nvSpPr>
-          <p:cNvPr id="17" name="TextBox 16"/>
-          <p:cNvSpPr txBox="1"/>
-          <p:nvPr/>
-        </p:nvSpPr>
-        <p:spPr>
-          <a:xfrm>
-            <a:off x="6293358" y="2497317"/>
-            <a:ext cx="2385349" cy="320040"/>
+              <a:t>P1</a:t>
+            </a:r>
+          </a:p>
+        </p:txBody>
+      </p:sp>
+      <p:sp>
+        <p:nvSpPr>
+          <p:cNvPr id="15" name="TextBox 14"/>
+          <p:cNvSpPr txBox="1"/>
+          <p:nvPr/>
+        </p:nvSpPr>
+        <p:spPr>
+          <a:xfrm>
+            <a:off x="2134319" y="3850629"/>
+            <a:ext cx="1737360" cy="914400"/>
           </a:xfrm>
           <a:prstGeom prst="rect">
             <a:avLst/>
@@ -5744,43 +5669,46 @@
           </a:bodyPr>
           <a:lstStyle/>
           <a:p>
-            <a:pPr algn="ctr"/>
+            <a:pPr algn="ctr">
+              <a:lnSpc>
+                <a:spcPts val="1500"/>
+              </a:lnSpc>
+            </a:pPr>
             <a:r>
               <a:rPr sz="1200" b="0" i="0" spc="-12">
                 <a:solidFill>
-                  <a:srgbClr val="6B6B6B"/>
-                </a:solidFill>
-                <a:latin typeface="Pretendard"/>
-                <a:ea typeface="Pretendard"/>
-                <a:cs typeface="Pretendard"/>
-              </a:rPr>
-              <a:t>놓친 논문 발굴 (실데이터)</a:t>
-            </a:r>
-          </a:p>
-        </p:txBody>
-      </p:sp>
-      <p:sp>
-        <p:nvSpPr>
-          <p:cNvPr id="18" name="Rounded Rectangle 17"/>
+                  <a:srgbClr val="1F1F1F"/>
+                </a:solidFill>
+                <a:latin typeface="Pretendard"/>
+                <a:ea typeface="Pretendard"/>
+                <a:cs typeface="Pretendard"/>
+              </a:rPr>
+              <a:t>의미 검색
+Orama</a:t>
+            </a:r>
+          </a:p>
+        </p:txBody>
+      </p:sp>
+      <p:sp>
+        <p:nvSpPr>
+          <p:cNvPr id="16" name="Oval 15"/>
           <p:cNvSpPr/>
           <p:nvPr/>
         </p:nvSpPr>
         <p:spPr>
           <a:xfrm>
-            <a:off x="8971315" y="1656069"/>
-            <a:ext cx="2568229" cy="1234440"/>
-          </a:xfrm>
-          <a:prstGeom prst="roundRect">
-            <a:avLst>
-              <a:gd name="adj" fmla="val 8000"/>
-            </a:avLst>
+            <a:off x="4967971" y="3535161"/>
+            <a:ext cx="201168" cy="201168"/>
+          </a:xfrm>
+          <a:prstGeom prst="ellipse">
+            <a:avLst/>
           </a:prstGeom>
           <a:solidFill>
-            <a:srgbClr val="FFFFFF"/>
+            <a:srgbClr val="00754A"/>
           </a:solidFill>
-          <a:ln w="9525">
+          <a:ln w="19050">
             <a:solidFill>
-              <a:srgbClr val="D9D9D9"/>
+              <a:srgbClr val="FFFFFF"/>
             </a:solidFill>
           </a:ln>
           <a:effectLst/>
@@ -5809,29 +5737,29 @@
       </p:sp>
       <p:sp>
         <p:nvSpPr>
-          <p:cNvPr id="19" name="TextBox 18"/>
-          <p:cNvSpPr txBox="1"/>
-          <p:nvPr/>
-        </p:nvSpPr>
-        <p:spPr>
-          <a:xfrm>
-            <a:off x="9062755" y="1765797"/>
-            <a:ext cx="2385349" cy="685800"/>
-          </a:xfrm>
-          <a:prstGeom prst="rect">
-            <a:avLst/>
-          </a:prstGeom>
-          <a:noFill/>
-        </p:spPr>
-        <p:txBody>
-          <a:bodyPr wrap="square" anchor="ctr" lIns="0" rIns="0" tIns="0" bIns="0">
+          <p:cNvPr id="17" name="TextBox 16"/>
+          <p:cNvSpPr txBox="1"/>
+          <p:nvPr/>
+        </p:nvSpPr>
+        <p:spPr>
+          <a:xfrm>
+            <a:off x="4245595" y="2799069"/>
+            <a:ext cx="1645920" cy="457200"/>
+          </a:xfrm>
+          <a:prstGeom prst="rect">
+            <a:avLst/>
+          </a:prstGeom>
+          <a:noFill/>
+        </p:spPr>
+        <p:txBody>
+          <a:bodyPr wrap="square" anchor="t" lIns="0" rIns="0" tIns="0" bIns="0">
             <a:spAutoFit/>
           </a:bodyPr>
           <a:lstStyle/>
           <a:p>
             <a:pPr algn="ctr"/>
             <a:r>
-              <a:rPr sz="4000" b="1" i="0" spc="-40">
+              <a:rPr sz="1700" b="1" i="0" spc="-17">
                 <a:solidFill>
                   <a:srgbClr val="006241"/>
                 </a:solidFill>
@@ -5839,21 +5767,21 @@
                 <a:ea typeface="Pretendard"/>
                 <a:cs typeface="Pretendard"/>
               </a:rPr>
-              <a:t>19p</a:t>
-            </a:r>
-          </a:p>
-        </p:txBody>
-      </p:sp>
-      <p:sp>
-        <p:nvSpPr>
-          <p:cNvPr id="20" name="TextBox 19"/>
-          <p:cNvSpPr txBox="1"/>
-          <p:nvPr/>
-        </p:nvSpPr>
-        <p:spPr>
-          <a:xfrm>
-            <a:off x="9062755" y="2497317"/>
-            <a:ext cx="2385349" cy="320040"/>
+              <a:t>P2</a:t>
+            </a:r>
+          </a:p>
+        </p:txBody>
+      </p:sp>
+      <p:sp>
+        <p:nvSpPr>
+          <p:cNvPr id="18" name="TextBox 17"/>
+          <p:cNvSpPr txBox="1"/>
+          <p:nvPr/>
+        </p:nvSpPr>
+        <p:spPr>
+          <a:xfrm>
+            <a:off x="4199875" y="3850629"/>
+            <a:ext cx="1737360" cy="914400"/>
           </a:xfrm>
           <a:prstGeom prst="rect">
             <a:avLst/>
@@ -5866,103 +5794,46 @@
           </a:bodyPr>
           <a:lstStyle/>
           <a:p>
-            <a:pPr algn="ctr"/>
+            <a:pPr algn="ctr">
+              <a:lnSpc>
+                <a:spcPts val="1500"/>
+              </a:lnSpc>
+            </a:pPr>
             <a:r>
               <a:rPr sz="1200" b="0" i="0" spc="-12">
                 <a:solidFill>
-                  <a:srgbClr val="6B6B6B"/>
-                </a:solidFill>
-                <a:latin typeface="Pretendard"/>
-                <a:ea typeface="Pretendard"/>
-                <a:cs typeface="Pretendard"/>
-              </a:rPr>
-              <a:t>실 PDF 추출 · 72K자</a:t>
-            </a:r>
-          </a:p>
-        </p:txBody>
-      </p:sp>
-      <p:sp>
-        <p:nvSpPr>
-          <p:cNvPr id="21" name="TextBox 20"/>
-          <p:cNvSpPr txBox="1"/>
-          <p:nvPr/>
-        </p:nvSpPr>
-        <p:spPr>
-          <a:xfrm>
-            <a:off x="663122" y="2963661"/>
-            <a:ext cx="10876422" cy="274320"/>
-          </a:xfrm>
-          <a:prstGeom prst="rect">
-            <a:avLst/>
-          </a:prstGeom>
-          <a:noFill/>
-        </p:spPr>
-        <p:txBody>
-          <a:bodyPr wrap="square" anchor="t" lIns="0" rIns="0" tIns="0" bIns="0">
-            <a:spAutoFit/>
-          </a:bodyPr>
-          <a:lstStyle/>
-          <a:p>
-            <a:pPr algn="l"/>
-            <a:r>
-              <a:rPr sz="1200" b="0" i="1" spc="-12">
-                <a:solidFill>
-                  <a:srgbClr val="6B6B6B"/>
-                </a:solidFill>
-                <a:latin typeface="Pretendard"/>
-                <a:ea typeface="Pretendard"/>
-                <a:cs typeface="Pretendard"/>
-              </a:rPr>
-              <a:t>단계별 검증 분포</a:t>
-            </a:r>
-          </a:p>
-        </p:txBody>
-      </p:sp>
-      <p:pic>
-        <p:nvPicPr>
-          <p:cNvPr id="22" name="Picture 21" descr="validation.png"/>
-          <p:cNvPicPr>
-            <a:picLocks noChangeAspect="1"/>
-          </p:cNvPicPr>
-          <p:nvPr/>
-        </p:nvPicPr>
-        <p:blipFill>
-          <a:blip r:embed="rId3"/>
-          <a:stretch>
-            <a:fillRect/>
-          </a:stretch>
-        </p:blipFill>
-        <p:spPr>
-          <a:xfrm>
-            <a:off x="663122" y="3274557"/>
-            <a:ext cx="10876422" cy="2488673"/>
-          </a:xfrm>
-          <a:prstGeom prst="rect">
-            <a:avLst/>
-          </a:prstGeom>
-        </p:spPr>
-      </p:pic>
-      <p:sp>
-        <p:nvSpPr>
-          <p:cNvPr id="23" name="Rounded Rectangle 22"/>
+                  <a:srgbClr val="1F1F1F"/>
+                </a:solidFill>
+                <a:latin typeface="Pretendard"/>
+                <a:ea typeface="Pretendard"/>
+                <a:cs typeface="Pretendard"/>
+              </a:rPr>
+              <a:t>근거 채팅</a:t>
+            </a:r>
+          </a:p>
+        </p:txBody>
+      </p:sp>
+      <p:sp>
+        <p:nvSpPr>
+          <p:cNvPr id="19" name="Oval 18"/>
           <p:cNvSpPr/>
           <p:nvPr/>
         </p:nvSpPr>
         <p:spPr>
           <a:xfrm>
-            <a:off x="571682" y="5859292"/>
-            <a:ext cx="11059302" cy="457200"/>
-          </a:xfrm>
-          <a:prstGeom prst="roundRect">
-            <a:avLst>
-              <a:gd name="adj" fmla="val 18000"/>
-            </a:avLst>
+            <a:off x="7033528" y="3535161"/>
+            <a:ext cx="201168" cy="201168"/>
+          </a:xfrm>
+          <a:prstGeom prst="ellipse">
+            <a:avLst/>
           </a:prstGeom>
           <a:solidFill>
-            <a:srgbClr val="1E3932"/>
+            <a:srgbClr val="00754A"/>
           </a:solidFill>
-          <a:ln>
-            <a:noFill/>
+          <a:ln w="19050">
+            <a:solidFill>
+              <a:srgbClr val="FFFFFF"/>
+            </a:solidFill>
           </a:ln>
           <a:effectLst/>
         </p:spPr>
@@ -5990,7 +5861,382 @@
       </p:sp>
       <p:sp>
         <p:nvSpPr>
+          <p:cNvPr id="20" name="TextBox 19"/>
+          <p:cNvSpPr txBox="1"/>
+          <p:nvPr/>
+        </p:nvSpPr>
+        <p:spPr>
+          <a:xfrm>
+            <a:off x="6311152" y="2799069"/>
+            <a:ext cx="1645920" cy="457200"/>
+          </a:xfrm>
+          <a:prstGeom prst="rect">
+            <a:avLst/>
+          </a:prstGeom>
+          <a:noFill/>
+        </p:spPr>
+        <p:txBody>
+          <a:bodyPr wrap="square" anchor="t" lIns="0" rIns="0" tIns="0" bIns="0">
+            <a:spAutoFit/>
+          </a:bodyPr>
+          <a:lstStyle/>
+          <a:p>
+            <a:pPr algn="ctr"/>
+            <a:r>
+              <a:rPr sz="1700" b="1" i="0" spc="-17">
+                <a:solidFill>
+                  <a:srgbClr val="006241"/>
+                </a:solidFill>
+                <a:latin typeface="Pretendard"/>
+                <a:ea typeface="Pretendard"/>
+                <a:cs typeface="Pretendard"/>
+              </a:rPr>
+              <a:t>P3</a:t>
+            </a:r>
+          </a:p>
+        </p:txBody>
+      </p:sp>
+      <p:sp>
+        <p:nvSpPr>
+          <p:cNvPr id="21" name="TextBox 20"/>
+          <p:cNvSpPr txBox="1"/>
+          <p:nvPr/>
+        </p:nvSpPr>
+        <p:spPr>
+          <a:xfrm>
+            <a:off x="6265432" y="3850629"/>
+            <a:ext cx="1737360" cy="914400"/>
+          </a:xfrm>
+          <a:prstGeom prst="rect">
+            <a:avLst/>
+          </a:prstGeom>
+          <a:noFill/>
+        </p:spPr>
+        <p:txBody>
+          <a:bodyPr wrap="square" anchor="t" lIns="0" rIns="0" tIns="0" bIns="0">
+            <a:spAutoFit/>
+          </a:bodyPr>
+          <a:lstStyle/>
+          <a:p>
+            <a:pPr algn="ctr">
+              <a:lnSpc>
+                <a:spcPts val="1500"/>
+              </a:lnSpc>
+            </a:pPr>
+            <a:r>
+              <a:rPr sz="1200" b="0" i="0" spc="-12">
+                <a:solidFill>
+                  <a:srgbClr val="1F1F1F"/>
+                </a:solidFill>
+                <a:latin typeface="Pretendard"/>
+                <a:ea typeface="Pretendard"/>
+                <a:cs typeface="Pretendard"/>
+              </a:rPr>
+              <a:t>PDF
+임포트</a:t>
+            </a:r>
+          </a:p>
+        </p:txBody>
+      </p:sp>
+      <p:sp>
+        <p:nvSpPr>
+          <p:cNvPr id="22" name="Oval 21"/>
+          <p:cNvSpPr/>
+          <p:nvPr/>
+        </p:nvSpPr>
+        <p:spPr>
+          <a:xfrm>
+            <a:off x="9099084" y="3535161"/>
+            <a:ext cx="201168" cy="201168"/>
+          </a:xfrm>
+          <a:prstGeom prst="ellipse">
+            <a:avLst/>
+          </a:prstGeom>
+          <a:solidFill>
+            <a:srgbClr val="00754A"/>
+          </a:solidFill>
+          <a:ln w="19050">
+            <a:solidFill>
+              <a:srgbClr val="FFFFFF"/>
+            </a:solidFill>
+          </a:ln>
+          <a:effectLst/>
+        </p:spPr>
+        <p:style>
+          <a:lnRef idx="1">
+            <a:schemeClr val="accent1"/>
+          </a:lnRef>
+          <a:fillRef idx="3">
+            <a:schemeClr val="accent1"/>
+          </a:fillRef>
+          <a:effectRef idx="2">
+            <a:schemeClr val="accent1"/>
+          </a:effectRef>
+          <a:fontRef idx="minor">
+            <a:schemeClr val="lt1"/>
+          </a:fontRef>
+        </p:style>
+        <p:txBody>
+          <a:bodyPr rtlCol="0" anchor="ctr"/>
+          <a:lstStyle/>
+          <a:p>
+            <a:pPr algn="ctr"/>
+          </a:p>
+        </p:txBody>
+      </p:sp>
+      <p:sp>
+        <p:nvSpPr>
+          <p:cNvPr id="23" name="TextBox 22"/>
+          <p:cNvSpPr txBox="1"/>
+          <p:nvPr/>
+        </p:nvSpPr>
+        <p:spPr>
+          <a:xfrm>
+            <a:off x="8376708" y="2799069"/>
+            <a:ext cx="1645920" cy="457200"/>
+          </a:xfrm>
+          <a:prstGeom prst="rect">
+            <a:avLst/>
+          </a:prstGeom>
+          <a:noFill/>
+        </p:spPr>
+        <p:txBody>
+          <a:bodyPr wrap="square" anchor="t" lIns="0" rIns="0" tIns="0" bIns="0">
+            <a:spAutoFit/>
+          </a:bodyPr>
+          <a:lstStyle/>
+          <a:p>
+            <a:pPr algn="ctr"/>
+            <a:r>
+              <a:rPr sz="1700" b="1" i="0" spc="-17">
+                <a:solidFill>
+                  <a:srgbClr val="006241"/>
+                </a:solidFill>
+                <a:latin typeface="Pretendard"/>
+                <a:ea typeface="Pretendard"/>
+                <a:cs typeface="Pretendard"/>
+              </a:rPr>
+              <a:t>P4</a:t>
+            </a:r>
+          </a:p>
+        </p:txBody>
+      </p:sp>
+      <p:sp>
+        <p:nvSpPr>
           <p:cNvPr id="24" name="TextBox 23"/>
+          <p:cNvSpPr txBox="1"/>
+          <p:nvPr/>
+        </p:nvSpPr>
+        <p:spPr>
+          <a:xfrm>
+            <a:off x="8330988" y="3850629"/>
+            <a:ext cx="1737360" cy="914400"/>
+          </a:xfrm>
+          <a:prstGeom prst="rect">
+            <a:avLst/>
+          </a:prstGeom>
+          <a:noFill/>
+        </p:spPr>
+        <p:txBody>
+          <a:bodyPr wrap="square" anchor="t" lIns="0" rIns="0" tIns="0" bIns="0">
+            <a:spAutoFit/>
+          </a:bodyPr>
+          <a:lstStyle/>
+          <a:p>
+            <a:pPr algn="ctr">
+              <a:lnSpc>
+                <a:spcPts val="1500"/>
+              </a:lnSpc>
+            </a:pPr>
+            <a:r>
+              <a:rPr sz="1200" b="0" i="0" spc="-12">
+                <a:solidFill>
+                  <a:srgbClr val="1F1F1F"/>
+                </a:solidFill>
+                <a:latin typeface="Pretendard"/>
+                <a:ea typeface="Pretendard"/>
+                <a:cs typeface="Pretendard"/>
+              </a:rPr>
+              <a:t>인용
+그래프</a:t>
+            </a:r>
+          </a:p>
+        </p:txBody>
+      </p:sp>
+      <p:sp>
+        <p:nvSpPr>
+          <p:cNvPr id="25" name="Oval 24"/>
+          <p:cNvSpPr/>
+          <p:nvPr/>
+        </p:nvSpPr>
+        <p:spPr>
+          <a:xfrm>
+            <a:off x="11164641" y="3535161"/>
+            <a:ext cx="201168" cy="201168"/>
+          </a:xfrm>
+          <a:prstGeom prst="ellipse">
+            <a:avLst/>
+          </a:prstGeom>
+          <a:solidFill>
+            <a:srgbClr val="00754A"/>
+          </a:solidFill>
+          <a:ln w="19050">
+            <a:solidFill>
+              <a:srgbClr val="FFFFFF"/>
+            </a:solidFill>
+          </a:ln>
+          <a:effectLst/>
+        </p:spPr>
+        <p:style>
+          <a:lnRef idx="1">
+            <a:schemeClr val="accent1"/>
+          </a:lnRef>
+          <a:fillRef idx="3">
+            <a:schemeClr val="accent1"/>
+          </a:fillRef>
+          <a:effectRef idx="2">
+            <a:schemeClr val="accent1"/>
+          </a:effectRef>
+          <a:fontRef idx="minor">
+            <a:schemeClr val="lt1"/>
+          </a:fontRef>
+        </p:style>
+        <p:txBody>
+          <a:bodyPr rtlCol="0" anchor="ctr"/>
+          <a:lstStyle/>
+          <a:p>
+            <a:pPr algn="ctr"/>
+          </a:p>
+        </p:txBody>
+      </p:sp>
+      <p:sp>
+        <p:nvSpPr>
+          <p:cNvPr id="26" name="TextBox 25"/>
+          <p:cNvSpPr txBox="1"/>
+          <p:nvPr/>
+        </p:nvSpPr>
+        <p:spPr>
+          <a:xfrm>
+            <a:off x="10442265" y="2799069"/>
+            <a:ext cx="1645920" cy="457200"/>
+          </a:xfrm>
+          <a:prstGeom prst="rect">
+            <a:avLst/>
+          </a:prstGeom>
+          <a:noFill/>
+        </p:spPr>
+        <p:txBody>
+          <a:bodyPr wrap="square" anchor="t" lIns="0" rIns="0" tIns="0" bIns="0">
+            <a:spAutoFit/>
+          </a:bodyPr>
+          <a:lstStyle/>
+          <a:p>
+            <a:pPr algn="ctr"/>
+            <a:r>
+              <a:rPr sz="1700" b="1" i="0" spc="-17">
+                <a:solidFill>
+                  <a:srgbClr val="006241"/>
+                </a:solidFill>
+                <a:latin typeface="Pretendard"/>
+                <a:ea typeface="Pretendard"/>
+                <a:cs typeface="Pretendard"/>
+              </a:rPr>
+              <a:t>P5</a:t>
+            </a:r>
+          </a:p>
+        </p:txBody>
+      </p:sp>
+      <p:sp>
+        <p:nvSpPr>
+          <p:cNvPr id="27" name="TextBox 26"/>
+          <p:cNvSpPr txBox="1"/>
+          <p:nvPr/>
+        </p:nvSpPr>
+        <p:spPr>
+          <a:xfrm>
+            <a:off x="10396545" y="3850629"/>
+            <a:ext cx="1737360" cy="914400"/>
+          </a:xfrm>
+          <a:prstGeom prst="rect">
+            <a:avLst/>
+          </a:prstGeom>
+          <a:noFill/>
+        </p:spPr>
+        <p:txBody>
+          <a:bodyPr wrap="square" anchor="t" lIns="0" rIns="0" tIns="0" bIns="0">
+            <a:spAutoFit/>
+          </a:bodyPr>
+          <a:lstStyle/>
+          <a:p>
+            <a:pPr algn="ctr">
+              <a:lnSpc>
+                <a:spcPts val="1500"/>
+              </a:lnSpc>
+            </a:pPr>
+            <a:r>
+              <a:rPr sz="1200" b="0" i="0" spc="-12">
+                <a:solidFill>
+                  <a:srgbClr val="1F1F1F"/>
+                </a:solidFill>
+                <a:latin typeface="Pretendard"/>
+                <a:ea typeface="Pretendard"/>
+                <a:cs typeface="Pretendard"/>
+              </a:rPr>
+              <a:t>작성 지원
+참고문헌</a:t>
+            </a:r>
+          </a:p>
+        </p:txBody>
+      </p:sp>
+      <p:sp>
+        <p:nvSpPr>
+          <p:cNvPr id="28" name="Rounded Rectangle 27"/>
+          <p:cNvSpPr/>
+          <p:nvPr/>
+        </p:nvSpPr>
+        <p:spPr>
+          <a:xfrm>
+            <a:off x="571682" y="5859292"/>
+            <a:ext cx="11059302" cy="457200"/>
+          </a:xfrm>
+          <a:prstGeom prst="roundRect">
+            <a:avLst>
+              <a:gd name="adj" fmla="val 18000"/>
+            </a:avLst>
+          </a:prstGeom>
+          <a:noFill/>
+          <a:ln w="19050">
+            <a:solidFill>
+              <a:srgbClr val="00754A"/>
+            </a:solidFill>
+          </a:ln>
+          <a:effectLst/>
+        </p:spPr>
+        <p:style>
+          <a:lnRef idx="1">
+            <a:schemeClr val="accent1"/>
+          </a:lnRef>
+          <a:fillRef idx="3">
+            <a:schemeClr val="accent1"/>
+          </a:fillRef>
+          <a:effectRef idx="2">
+            <a:schemeClr val="accent1"/>
+          </a:effectRef>
+          <a:fontRef idx="minor">
+            <a:schemeClr val="lt1"/>
+          </a:fontRef>
+        </p:style>
+        <p:txBody>
+          <a:bodyPr rtlCol="0" anchor="ctr"/>
+          <a:lstStyle/>
+          <a:p>
+            <a:pPr algn="ctr"/>
+          </a:p>
+        </p:txBody>
+      </p:sp>
+      <p:sp>
+        <p:nvSpPr>
+          <p:cNvPr id="29" name="TextBox 28"/>
           <p:cNvSpPr txBox="1"/>
           <p:nvPr/>
         </p:nvSpPr>
@@ -6014,13 +6260,13 @@
             <a:r>
               <a:rPr sz="1400" b="1" i="0" spc="-14">
                 <a:solidFill>
-                  <a:srgbClr val="FFFFFF"/>
-                </a:solidFill>
-                <a:latin typeface="Pretendard"/>
-                <a:ea typeface="Pretendard"/>
-                <a:cs typeface="Pretendard"/>
-              </a:rPr>
-              <a:t>live Crossref·PubMed·OpenAlex + Orama + pdfjs 실검증</a:t>
+                  <a:srgbClr val="006241"/>
+                </a:solidFill>
+                <a:latin typeface="Pretendard"/>
+                <a:ea typeface="Pretendard"/>
+                <a:cs typeface="Pretendard"/>
+              </a:rPr>
+              <a:t>향후: 풀 CSL(citeproc) 스타일 · 온톨로지 검색확장 · 모바일 QA</a:t>
             </a:r>
           </a:p>
         </p:txBody>
@@ -6119,7 +6365,7 @@
                 <a:ea typeface="Pretendard"/>
                 <a:cs typeface="Pretendard"/>
               </a:rPr>
-              <a:t>ROADMAP</a:t>
+              <a:t>GET STARTED</a:t>
             </a:r>
           </a:p>
         </p:txBody>
@@ -6160,7 +6406,7 @@
                 <a:ea typeface="Pretendard"/>
                 <a:cs typeface="Pretendard"/>
               </a:rPr>
-              <a:t>Phase 0부터 5까지, 각 단계가 따로도 쓸모 있다</a:t>
+              <a:t>Obsidian만 있으면 오늘부터 시작</a:t>
             </a:r>
           </a:p>
         </p:txBody>
@@ -6277,60 +6523,25 @@
       </p:sp>
       <p:sp>
         <p:nvSpPr>
-          <p:cNvPr id="8" name="TextBox 7"/>
-          <p:cNvSpPr txBox="1"/>
-          <p:nvPr/>
-        </p:nvSpPr>
-        <p:spPr>
-          <a:xfrm>
-            <a:off x="6567403" y="6617421"/>
-            <a:ext cx="5486400" cy="228600"/>
-          </a:xfrm>
-          <a:prstGeom prst="rect">
-            <a:avLst/>
-          </a:prstGeom>
-          <a:noFill/>
-        </p:spPr>
-        <p:txBody>
-          <a:bodyPr wrap="square" anchor="t" lIns="0" rIns="0" tIns="0" bIns="0">
-            <a:spAutoFit/>
-          </a:bodyPr>
-          <a:lstStyle/>
-          <a:p>
-            <a:pPr algn="r"/>
-            <a:r>
-              <a:rPr sz="800" b="0" i="0" spc="-8">
-                <a:solidFill>
-                  <a:srgbClr val="8E8E93"/>
-                </a:solidFill>
-                <a:latin typeface="Pretendard"/>
-                <a:ea typeface="Pretendard"/>
-                <a:cs typeface="Pretendard"/>
-              </a:rPr>
-              <a:t>v0.4.0 · github.com/grotyx/rag-obsidian</a:t>
-            </a:r>
-          </a:p>
-        </p:txBody>
-      </p:sp>
-      <p:sp>
-        <p:nvSpPr>
-          <p:cNvPr id="9" name="Rectangle 8"/>
+          <p:cNvPr id="8" name="Rounded Rectangle 7"/>
           <p:cNvSpPr/>
           <p:nvPr/>
         </p:nvSpPr>
         <p:spPr>
           <a:xfrm>
-            <a:off x="937442" y="3622029"/>
-            <a:ext cx="10327782" cy="22860"/>
-          </a:xfrm>
-          <a:prstGeom prst="rect">
-            <a:avLst/>
-          </a:prstGeom>
-          <a:solidFill>
-            <a:srgbClr val="00754A"/>
-          </a:solidFill>
-          <a:ln>
-            <a:noFill/>
+            <a:off x="663122" y="1838949"/>
+            <a:ext cx="3320674" cy="1280160"/>
+          </a:xfrm>
+          <a:prstGeom prst="roundRect">
+            <a:avLst>
+              <a:gd name="adj" fmla="val 6000"/>
+            </a:avLst>
+          </a:prstGeom>
+          <a:noFill/>
+          <a:ln w="19050">
+            <a:solidFill>
+              <a:srgbClr val="00754A"/>
+            </a:solidFill>
           </a:ln>
           <a:effectLst/>
         </p:spPr>
@@ -6358,24 +6569,102 @@
       </p:sp>
       <p:sp>
         <p:nvSpPr>
-          <p:cNvPr id="10" name="Oval 9"/>
+          <p:cNvPr id="9" name="TextBox 8"/>
+          <p:cNvSpPr txBox="1"/>
+          <p:nvPr/>
+        </p:nvSpPr>
+        <p:spPr>
+          <a:xfrm>
+            <a:off x="800282" y="1838949"/>
+            <a:ext cx="3046354" cy="1280160"/>
+          </a:xfrm>
+          <a:prstGeom prst="rect">
+            <a:avLst/>
+          </a:prstGeom>
+          <a:noFill/>
+        </p:spPr>
+        <p:txBody>
+          <a:bodyPr wrap="square" anchor="ctr" lIns="0" rIns="0" tIns="0" bIns="0">
+            <a:spAutoFit/>
+          </a:bodyPr>
+          <a:lstStyle/>
+          <a:p>
+            <a:pPr algn="ctr">
+              <a:lnSpc>
+                <a:spcPts val="2200"/>
+              </a:lnSpc>
+            </a:pPr>
+            <a:r>
+              <a:rPr sz="1700" b="1" i="0" spc="-17">
+                <a:solidFill>
+                  <a:srgbClr val="1F1F1F"/>
+                </a:solidFill>
+                <a:latin typeface="Pretendard"/>
+                <a:ea typeface="Pretendard"/>
+                <a:cs typeface="Pretendard"/>
+              </a:rPr>
+              <a:t>Obsidian 설치</a:t>
+            </a:r>
+          </a:p>
+        </p:txBody>
+      </p:sp>
+      <p:sp>
+        <p:nvSpPr>
+          <p:cNvPr id="10" name="TextBox 9"/>
+          <p:cNvSpPr txBox="1"/>
+          <p:nvPr/>
+        </p:nvSpPr>
+        <p:spPr>
+          <a:xfrm>
+            <a:off x="4002084" y="2250429"/>
+            <a:ext cx="420624" cy="457200"/>
+          </a:xfrm>
+          <a:prstGeom prst="rect">
+            <a:avLst/>
+          </a:prstGeom>
+          <a:noFill/>
+        </p:spPr>
+        <p:txBody>
+          <a:bodyPr wrap="square" anchor="ctr" lIns="0" rIns="0" tIns="0" bIns="0">
+            <a:spAutoFit/>
+          </a:bodyPr>
+          <a:lstStyle/>
+          <a:p>
+            <a:pPr algn="ctr"/>
+            <a:r>
+              <a:rPr sz="2400" b="1" i="0" spc="-24">
+                <a:solidFill>
+                  <a:srgbClr val="00754A"/>
+                </a:solidFill>
+                <a:latin typeface="Pretendard"/>
+                <a:ea typeface="Pretendard"/>
+                <a:cs typeface="Pretendard"/>
+              </a:rPr>
+              <a:t>→</a:t>
+            </a:r>
+          </a:p>
+        </p:txBody>
+      </p:sp>
+      <p:sp>
+        <p:nvSpPr>
+          <p:cNvPr id="11" name="Rounded Rectangle 10"/>
           <p:cNvSpPr/>
           <p:nvPr/>
         </p:nvSpPr>
         <p:spPr>
           <a:xfrm>
-            <a:off x="836858" y="3535161"/>
-            <a:ext cx="201168" cy="201168"/>
-          </a:xfrm>
-          <a:prstGeom prst="ellipse">
-            <a:avLst/>
-          </a:prstGeom>
-          <a:solidFill>
-            <a:srgbClr val="00754A"/>
-          </a:solidFill>
+            <a:off x="4440996" y="1838949"/>
+            <a:ext cx="3320674" cy="1280160"/>
+          </a:xfrm>
+          <a:prstGeom prst="roundRect">
+            <a:avLst>
+              <a:gd name="adj" fmla="val 6000"/>
+            </a:avLst>
+          </a:prstGeom>
+          <a:noFill/>
           <a:ln w="19050">
             <a:solidFill>
-              <a:srgbClr val="FFFFFF"/>
+              <a:srgbClr val="00754A"/>
             </a:solidFill>
           </a:ln>
           <a:effectLst/>
@@ -6404,70 +6693,33 @@
       </p:sp>
       <p:sp>
         <p:nvSpPr>
-          <p:cNvPr id="11" name="TextBox 10"/>
-          <p:cNvSpPr txBox="1"/>
-          <p:nvPr/>
-        </p:nvSpPr>
-        <p:spPr>
-          <a:xfrm>
-            <a:off x="114482" y="2799069"/>
-            <a:ext cx="1645920" cy="457200"/>
-          </a:xfrm>
-          <a:prstGeom prst="rect">
-            <a:avLst/>
-          </a:prstGeom>
-          <a:noFill/>
-        </p:spPr>
-        <p:txBody>
-          <a:bodyPr wrap="square" anchor="t" lIns="0" rIns="0" tIns="0" bIns="0">
-            <a:spAutoFit/>
-          </a:bodyPr>
-          <a:lstStyle/>
-          <a:p>
-            <a:pPr algn="ctr"/>
-            <a:r>
-              <a:rPr sz="1700" b="1" i="0" spc="-17">
-                <a:solidFill>
-                  <a:srgbClr val="006241"/>
-                </a:solidFill>
-                <a:latin typeface="Pretendard"/>
-                <a:ea typeface="Pretendard"/>
-                <a:cs typeface="Pretendard"/>
-              </a:rPr>
-              <a:t>P0</a:t>
-            </a:r>
-          </a:p>
-        </p:txBody>
-      </p:sp>
-      <p:sp>
-        <p:nvSpPr>
           <p:cNvPr id="12" name="TextBox 11"/>
           <p:cNvSpPr txBox="1"/>
           <p:nvPr/>
         </p:nvSpPr>
         <p:spPr>
           <a:xfrm>
-            <a:off x="68762" y="3850629"/>
-            <a:ext cx="1737360" cy="914400"/>
-          </a:xfrm>
-          <a:prstGeom prst="rect">
-            <a:avLst/>
-          </a:prstGeom>
-          <a:noFill/>
-        </p:spPr>
-        <p:txBody>
-          <a:bodyPr wrap="square" anchor="t" lIns="0" rIns="0" tIns="0" bIns="0">
+            <a:off x="4578156" y="1838949"/>
+            <a:ext cx="3046354" cy="1280160"/>
+          </a:xfrm>
+          <a:prstGeom prst="rect">
+            <a:avLst/>
+          </a:prstGeom>
+          <a:noFill/>
+        </p:spPr>
+        <p:txBody>
+          <a:bodyPr wrap="square" anchor="ctr" lIns="0" rIns="0" tIns="0" bIns="0">
             <a:spAutoFit/>
           </a:bodyPr>
           <a:lstStyle/>
           <a:p>
             <a:pPr algn="ctr">
               <a:lnSpc>
-                <a:spcPts val="1500"/>
+                <a:spcPts val="2200"/>
               </a:lnSpc>
             </a:pPr>
             <a:r>
-              <a:rPr sz="1200" b="0" i="0" spc="-12">
+              <a:rPr sz="1700" b="1" i="0" spc="-17">
                 <a:solidFill>
                   <a:srgbClr val="1F1F1F"/>
                 </a:solidFill>
@@ -6475,32 +6727,69 @@
                 <a:ea typeface="Pretendard"/>
                 <a:cs typeface="Pretendard"/>
               </a:rPr>
-              <a:t>서지관리
-DOI→노트</a:t>
-            </a:r>
-          </a:p>
-        </p:txBody>
-      </p:sp>
-      <p:sp>
-        <p:nvSpPr>
-          <p:cNvPr id="13" name="Oval 12"/>
+              <a:t>RAG Obsidian
+플러그인 활성화</a:t>
+            </a:r>
+          </a:p>
+        </p:txBody>
+      </p:sp>
+      <p:sp>
+        <p:nvSpPr>
+          <p:cNvPr id="13" name="TextBox 12"/>
+          <p:cNvSpPr txBox="1"/>
+          <p:nvPr/>
+        </p:nvSpPr>
+        <p:spPr>
+          <a:xfrm>
+            <a:off x="7779959" y="2250429"/>
+            <a:ext cx="420624" cy="457200"/>
+          </a:xfrm>
+          <a:prstGeom prst="rect">
+            <a:avLst/>
+          </a:prstGeom>
+          <a:noFill/>
+        </p:spPr>
+        <p:txBody>
+          <a:bodyPr wrap="square" anchor="ctr" lIns="0" rIns="0" tIns="0" bIns="0">
+            <a:spAutoFit/>
+          </a:bodyPr>
+          <a:lstStyle/>
+          <a:p>
+            <a:pPr algn="ctr"/>
+            <a:r>
+              <a:rPr sz="2400" b="1" i="0" spc="-24">
+                <a:solidFill>
+                  <a:srgbClr val="00754A"/>
+                </a:solidFill>
+                <a:latin typeface="Pretendard"/>
+                <a:ea typeface="Pretendard"/>
+                <a:cs typeface="Pretendard"/>
+              </a:rPr>
+              <a:t>→</a:t>
+            </a:r>
+          </a:p>
+        </p:txBody>
+      </p:sp>
+      <p:sp>
+        <p:nvSpPr>
+          <p:cNvPr id="14" name="Rounded Rectangle 13"/>
           <p:cNvSpPr/>
           <p:nvPr/>
         </p:nvSpPr>
         <p:spPr>
           <a:xfrm>
-            <a:off x="2902415" y="3535161"/>
-            <a:ext cx="201168" cy="201168"/>
-          </a:xfrm>
-          <a:prstGeom prst="ellipse">
-            <a:avLst/>
-          </a:prstGeom>
-          <a:solidFill>
-            <a:srgbClr val="00754A"/>
-          </a:solidFill>
+            <a:off x="8218871" y="1838949"/>
+            <a:ext cx="3320674" cy="1280160"/>
+          </a:xfrm>
+          <a:prstGeom prst="roundRect">
+            <a:avLst>
+              <a:gd name="adj" fmla="val 6000"/>
+            </a:avLst>
+          </a:prstGeom>
+          <a:noFill/>
           <a:ln w="19050">
             <a:solidFill>
-              <a:srgbClr val="FFFFFF"/>
+              <a:srgbClr val="00754A"/>
             </a:solidFill>
           </a:ln>
           <a:effectLst/>
@@ -6529,70 +6818,33 @@
       </p:sp>
       <p:sp>
         <p:nvSpPr>
-          <p:cNvPr id="14" name="TextBox 13"/>
-          <p:cNvSpPr txBox="1"/>
-          <p:nvPr/>
-        </p:nvSpPr>
-        <p:spPr>
-          <a:xfrm>
-            <a:off x="2180039" y="2799069"/>
-            <a:ext cx="1645920" cy="457200"/>
-          </a:xfrm>
-          <a:prstGeom prst="rect">
-            <a:avLst/>
-          </a:prstGeom>
-          <a:noFill/>
-        </p:spPr>
-        <p:txBody>
-          <a:bodyPr wrap="square" anchor="t" lIns="0" rIns="0" tIns="0" bIns="0">
-            <a:spAutoFit/>
-          </a:bodyPr>
-          <a:lstStyle/>
-          <a:p>
-            <a:pPr algn="ctr"/>
-            <a:r>
-              <a:rPr sz="1700" b="1" i="0" spc="-17">
-                <a:solidFill>
-                  <a:srgbClr val="006241"/>
-                </a:solidFill>
-                <a:latin typeface="Pretendard"/>
-                <a:ea typeface="Pretendard"/>
-                <a:cs typeface="Pretendard"/>
-              </a:rPr>
-              <a:t>P1</a:t>
-            </a:r>
-          </a:p>
-        </p:txBody>
-      </p:sp>
-      <p:sp>
-        <p:nvSpPr>
           <p:cNvPr id="15" name="TextBox 14"/>
           <p:cNvSpPr txBox="1"/>
           <p:nvPr/>
         </p:nvSpPr>
         <p:spPr>
           <a:xfrm>
-            <a:off x="2134319" y="3850629"/>
-            <a:ext cx="1737360" cy="914400"/>
-          </a:xfrm>
-          <a:prstGeom prst="rect">
-            <a:avLst/>
-          </a:prstGeom>
-          <a:noFill/>
-        </p:spPr>
-        <p:txBody>
-          <a:bodyPr wrap="square" anchor="t" lIns="0" rIns="0" tIns="0" bIns="0">
+            <a:off x="8356031" y="1838949"/>
+            <a:ext cx="3046354" cy="1280160"/>
+          </a:xfrm>
+          <a:prstGeom prst="rect">
+            <a:avLst/>
+          </a:prstGeom>
+          <a:noFill/>
+        </p:spPr>
+        <p:txBody>
+          <a:bodyPr wrap="square" anchor="ctr" lIns="0" rIns="0" tIns="0" bIns="0">
             <a:spAutoFit/>
           </a:bodyPr>
           <a:lstStyle/>
           <a:p>
             <a:pPr algn="ctr">
               <a:lnSpc>
-                <a:spcPts val="1500"/>
+                <a:spcPts val="2200"/>
               </a:lnSpc>
             </a:pPr>
             <a:r>
-              <a:rPr sz="1200" b="0" i="0" spc="-12">
+              <a:rPr sz="1700" b="1" i="0" spc="-17">
                 <a:solidFill>
                   <a:srgbClr val="1F1F1F"/>
                 </a:solidFill>
@@ -6600,32 +6852,31 @@
                 <a:ea typeface="Pretendard"/>
                 <a:cs typeface="Pretendard"/>
               </a:rPr>
-              <a:t>의미 검색
-Orama</a:t>
-            </a:r>
-          </a:p>
-        </p:txBody>
-      </p:sp>
-      <p:sp>
-        <p:nvSpPr>
-          <p:cNvPr id="16" name="Oval 15"/>
+              <a:t>임베딩·LLM 키 설정</a:t>
+            </a:r>
+          </a:p>
+        </p:txBody>
+      </p:sp>
+      <p:sp>
+        <p:nvSpPr>
+          <p:cNvPr id="16" name="Rounded Rectangle 15"/>
           <p:cNvSpPr/>
           <p:nvPr/>
         </p:nvSpPr>
         <p:spPr>
           <a:xfrm>
-            <a:off x="4967971" y="3535161"/>
-            <a:ext cx="201168" cy="201168"/>
-          </a:xfrm>
-          <a:prstGeom prst="ellipse">
-            <a:avLst/>
-          </a:prstGeom>
-          <a:solidFill>
-            <a:srgbClr val="00754A"/>
-          </a:solidFill>
-          <a:ln w="19050">
+            <a:off x="1394642" y="3777477"/>
+            <a:ext cx="9413382" cy="960120"/>
+          </a:xfrm>
+          <a:prstGeom prst="roundRect">
+            <a:avLst>
+              <a:gd name="adj" fmla="val 10000"/>
+            </a:avLst>
+          </a:prstGeom>
+          <a:noFill/>
+          <a:ln w="22225">
             <a:solidFill>
-              <a:srgbClr val="FFFFFF"/>
+              <a:srgbClr val="00754A"/>
             </a:solidFill>
           </a:ln>
           <a:effectLst/>
@@ -6660,8 +6911,82 @@
         </p:nvSpPr>
         <p:spPr>
           <a:xfrm>
-            <a:off x="4245595" y="2799069"/>
-            <a:ext cx="1645920" cy="457200"/>
+            <a:off x="1394642" y="3923781"/>
+            <a:ext cx="9413382" cy="320040"/>
+          </a:xfrm>
+          <a:prstGeom prst="rect">
+            <a:avLst/>
+          </a:prstGeom>
+          <a:noFill/>
+        </p:spPr>
+        <p:txBody>
+          <a:bodyPr wrap="square" anchor="ctr" lIns="0" rIns="0" tIns="0" bIns="0">
+            <a:spAutoFit/>
+          </a:bodyPr>
+          <a:lstStyle/>
+          <a:p>
+            <a:pPr algn="ctr"/>
+            <a:r>
+              <a:rPr sz="1200" b="1" i="0" spc="-12">
+                <a:solidFill>
+                  <a:srgbClr val="00754A"/>
+                </a:solidFill>
+                <a:latin typeface="Pretendard"/>
+                <a:ea typeface="Pretendard"/>
+                <a:cs typeface="Pretendard"/>
+              </a:rPr>
+              <a:t>코드 · 문서 · 이슈</a:t>
+            </a:r>
+          </a:p>
+        </p:txBody>
+      </p:sp>
+      <p:sp>
+        <p:nvSpPr>
+          <p:cNvPr id="18" name="TextBox 17"/>
+          <p:cNvSpPr txBox="1"/>
+          <p:nvPr/>
+        </p:nvSpPr>
+        <p:spPr>
+          <a:xfrm>
+            <a:off x="1394642" y="4234677"/>
+            <a:ext cx="9413382" cy="457200"/>
+          </a:xfrm>
+          <a:prstGeom prst="rect">
+            <a:avLst/>
+          </a:prstGeom>
+          <a:noFill/>
+        </p:spPr>
+        <p:txBody>
+          <a:bodyPr wrap="square" anchor="ctr" lIns="0" rIns="0" tIns="0" bIns="0">
+            <a:spAutoFit/>
+          </a:bodyPr>
+          <a:lstStyle/>
+          <a:p>
+            <a:pPr algn="ctr"/>
+            <a:r>
+              <a:rPr sz="2700" b="1" i="0" spc="-27">
+                <a:solidFill>
+                  <a:srgbClr val="006241"/>
+                </a:solidFill>
+                <a:latin typeface="Pretendard"/>
+                <a:ea typeface="Pretendard"/>
+                <a:cs typeface="Pretendard"/>
+              </a:rPr>
+              <a:t>github.com/grotyx/rag-obsidian</a:t>
+            </a:r>
+          </a:p>
+        </p:txBody>
+      </p:sp>
+      <p:sp>
+        <p:nvSpPr>
+          <p:cNvPr id="19" name="TextBox 18"/>
+          <p:cNvSpPr txBox="1"/>
+          <p:nvPr/>
+        </p:nvSpPr>
+        <p:spPr>
+          <a:xfrm>
+            <a:off x="663122" y="4920477"/>
+            <a:ext cx="10876422" cy="365760"/>
           </a:xfrm>
           <a:prstGeom prst="rect">
             <a:avLst/>
@@ -6676,80 +7001,39 @@
           <a:p>
             <a:pPr algn="ctr"/>
             <a:r>
-              <a:rPr sz="1700" b="1" i="0" spc="-17">
-                <a:solidFill>
-                  <a:srgbClr val="006241"/>
-                </a:solidFill>
-                <a:latin typeface="Pretendard"/>
-                <a:ea typeface="Pretendard"/>
-                <a:cs typeface="Pretendard"/>
-              </a:rPr>
-              <a:t>P2</a:t>
-            </a:r>
-          </a:p>
-        </p:txBody>
-      </p:sp>
-      <p:sp>
-        <p:nvSpPr>
-          <p:cNvPr id="18" name="TextBox 17"/>
-          <p:cNvSpPr txBox="1"/>
-          <p:nvPr/>
-        </p:nvSpPr>
-        <p:spPr>
-          <a:xfrm>
-            <a:off x="4199875" y="3850629"/>
-            <a:ext cx="1737360" cy="914400"/>
-          </a:xfrm>
-          <a:prstGeom prst="rect">
-            <a:avLst/>
-          </a:prstGeom>
-          <a:noFill/>
-        </p:spPr>
-        <p:txBody>
-          <a:bodyPr wrap="square" anchor="t" lIns="0" rIns="0" tIns="0" bIns="0">
-            <a:spAutoFit/>
-          </a:bodyPr>
-          <a:lstStyle/>
-          <a:p>
-            <a:pPr algn="ctr">
-              <a:lnSpc>
-                <a:spcPts val="1500"/>
-              </a:lnSpc>
-            </a:pPr>
-            <a:r>
-              <a:rPr sz="1200" b="0" i="0" spc="-12">
-                <a:solidFill>
-                  <a:srgbClr val="1F1F1F"/>
-                </a:solidFill>
-                <a:latin typeface="Pretendard"/>
-                <a:ea typeface="Pretendard"/>
-                <a:cs typeface="Pretendard"/>
-              </a:rPr>
-              <a:t>근거 채팅</a:t>
-            </a:r>
-          </a:p>
-        </p:txBody>
-      </p:sp>
-      <p:sp>
-        <p:nvSpPr>
-          <p:cNvPr id="19" name="Oval 18"/>
+              <a:rPr sz="1300" b="0" i="0" spc="-13">
+                <a:solidFill>
+                  <a:srgbClr val="6B6B6B"/>
+                </a:solidFill>
+                <a:latin typeface="Pretendard"/>
+                <a:ea typeface="Pretendard"/>
+                <a:cs typeface="Pretendard"/>
+              </a:rPr>
+              <a:t>현재 v0.4.0 · 개발 빌드로 사용 중 · 공개 배포 예정</a:t>
+            </a:r>
+          </a:p>
+        </p:txBody>
+      </p:sp>
+      <p:sp>
+        <p:nvSpPr>
+          <p:cNvPr id="20" name="Rounded Rectangle 19"/>
           <p:cNvSpPr/>
           <p:nvPr/>
         </p:nvSpPr>
         <p:spPr>
           <a:xfrm>
-            <a:off x="7033528" y="3535161"/>
-            <a:ext cx="201168" cy="201168"/>
-          </a:xfrm>
-          <a:prstGeom prst="ellipse">
-            <a:avLst/>
-          </a:prstGeom>
-          <a:solidFill>
-            <a:srgbClr val="00754A"/>
-          </a:solidFill>
+            <a:off x="571682" y="5859292"/>
+            <a:ext cx="11059302" cy="457200"/>
+          </a:xfrm>
+          <a:prstGeom prst="roundRect">
+            <a:avLst>
+              <a:gd name="adj" fmla="val 18000"/>
+            </a:avLst>
+          </a:prstGeom>
+          <a:noFill/>
           <a:ln w="19050">
             <a:solidFill>
-              <a:srgbClr val="FFFFFF"/>
+              <a:srgbClr val="00754A"/>
             </a:solidFill>
           </a:ln>
           <a:effectLst/>
@@ -6778,382 +7062,7 @@
       </p:sp>
       <p:sp>
         <p:nvSpPr>
-          <p:cNvPr id="20" name="TextBox 19"/>
-          <p:cNvSpPr txBox="1"/>
-          <p:nvPr/>
-        </p:nvSpPr>
-        <p:spPr>
-          <a:xfrm>
-            <a:off x="6311152" y="2799069"/>
-            <a:ext cx="1645920" cy="457200"/>
-          </a:xfrm>
-          <a:prstGeom prst="rect">
-            <a:avLst/>
-          </a:prstGeom>
-          <a:noFill/>
-        </p:spPr>
-        <p:txBody>
-          <a:bodyPr wrap="square" anchor="t" lIns="0" rIns="0" tIns="0" bIns="0">
-            <a:spAutoFit/>
-          </a:bodyPr>
-          <a:lstStyle/>
-          <a:p>
-            <a:pPr algn="ctr"/>
-            <a:r>
-              <a:rPr sz="1700" b="1" i="0" spc="-17">
-                <a:solidFill>
-                  <a:srgbClr val="006241"/>
-                </a:solidFill>
-                <a:latin typeface="Pretendard"/>
-                <a:ea typeface="Pretendard"/>
-                <a:cs typeface="Pretendard"/>
-              </a:rPr>
-              <a:t>P3</a:t>
-            </a:r>
-          </a:p>
-        </p:txBody>
-      </p:sp>
-      <p:sp>
-        <p:nvSpPr>
           <p:cNvPr id="21" name="TextBox 20"/>
-          <p:cNvSpPr txBox="1"/>
-          <p:nvPr/>
-        </p:nvSpPr>
-        <p:spPr>
-          <a:xfrm>
-            <a:off x="6265432" y="3850629"/>
-            <a:ext cx="1737360" cy="914400"/>
-          </a:xfrm>
-          <a:prstGeom prst="rect">
-            <a:avLst/>
-          </a:prstGeom>
-          <a:noFill/>
-        </p:spPr>
-        <p:txBody>
-          <a:bodyPr wrap="square" anchor="t" lIns="0" rIns="0" tIns="0" bIns="0">
-            <a:spAutoFit/>
-          </a:bodyPr>
-          <a:lstStyle/>
-          <a:p>
-            <a:pPr algn="ctr">
-              <a:lnSpc>
-                <a:spcPts val="1500"/>
-              </a:lnSpc>
-            </a:pPr>
-            <a:r>
-              <a:rPr sz="1200" b="0" i="0" spc="-12">
-                <a:solidFill>
-                  <a:srgbClr val="1F1F1F"/>
-                </a:solidFill>
-                <a:latin typeface="Pretendard"/>
-                <a:ea typeface="Pretendard"/>
-                <a:cs typeface="Pretendard"/>
-              </a:rPr>
-              <a:t>PDF
-임포트</a:t>
-            </a:r>
-          </a:p>
-        </p:txBody>
-      </p:sp>
-      <p:sp>
-        <p:nvSpPr>
-          <p:cNvPr id="22" name="Oval 21"/>
-          <p:cNvSpPr/>
-          <p:nvPr/>
-        </p:nvSpPr>
-        <p:spPr>
-          <a:xfrm>
-            <a:off x="9099084" y="3535161"/>
-            <a:ext cx="201168" cy="201168"/>
-          </a:xfrm>
-          <a:prstGeom prst="ellipse">
-            <a:avLst/>
-          </a:prstGeom>
-          <a:solidFill>
-            <a:srgbClr val="00754A"/>
-          </a:solidFill>
-          <a:ln w="19050">
-            <a:solidFill>
-              <a:srgbClr val="FFFFFF"/>
-            </a:solidFill>
-          </a:ln>
-          <a:effectLst/>
-        </p:spPr>
-        <p:style>
-          <a:lnRef idx="1">
-            <a:schemeClr val="accent1"/>
-          </a:lnRef>
-          <a:fillRef idx="3">
-            <a:schemeClr val="accent1"/>
-          </a:fillRef>
-          <a:effectRef idx="2">
-            <a:schemeClr val="accent1"/>
-          </a:effectRef>
-          <a:fontRef idx="minor">
-            <a:schemeClr val="lt1"/>
-          </a:fontRef>
-        </p:style>
-        <p:txBody>
-          <a:bodyPr rtlCol="0" anchor="ctr"/>
-          <a:lstStyle/>
-          <a:p>
-            <a:pPr algn="ctr"/>
-          </a:p>
-        </p:txBody>
-      </p:sp>
-      <p:sp>
-        <p:nvSpPr>
-          <p:cNvPr id="23" name="TextBox 22"/>
-          <p:cNvSpPr txBox="1"/>
-          <p:nvPr/>
-        </p:nvSpPr>
-        <p:spPr>
-          <a:xfrm>
-            <a:off x="8376708" y="2799069"/>
-            <a:ext cx="1645920" cy="457200"/>
-          </a:xfrm>
-          <a:prstGeom prst="rect">
-            <a:avLst/>
-          </a:prstGeom>
-          <a:noFill/>
-        </p:spPr>
-        <p:txBody>
-          <a:bodyPr wrap="square" anchor="t" lIns="0" rIns="0" tIns="0" bIns="0">
-            <a:spAutoFit/>
-          </a:bodyPr>
-          <a:lstStyle/>
-          <a:p>
-            <a:pPr algn="ctr"/>
-            <a:r>
-              <a:rPr sz="1700" b="1" i="0" spc="-17">
-                <a:solidFill>
-                  <a:srgbClr val="006241"/>
-                </a:solidFill>
-                <a:latin typeface="Pretendard"/>
-                <a:ea typeface="Pretendard"/>
-                <a:cs typeface="Pretendard"/>
-              </a:rPr>
-              <a:t>P4</a:t>
-            </a:r>
-          </a:p>
-        </p:txBody>
-      </p:sp>
-      <p:sp>
-        <p:nvSpPr>
-          <p:cNvPr id="24" name="TextBox 23"/>
-          <p:cNvSpPr txBox="1"/>
-          <p:nvPr/>
-        </p:nvSpPr>
-        <p:spPr>
-          <a:xfrm>
-            <a:off x="8330988" y="3850629"/>
-            <a:ext cx="1737360" cy="914400"/>
-          </a:xfrm>
-          <a:prstGeom prst="rect">
-            <a:avLst/>
-          </a:prstGeom>
-          <a:noFill/>
-        </p:spPr>
-        <p:txBody>
-          <a:bodyPr wrap="square" anchor="t" lIns="0" rIns="0" tIns="0" bIns="0">
-            <a:spAutoFit/>
-          </a:bodyPr>
-          <a:lstStyle/>
-          <a:p>
-            <a:pPr algn="ctr">
-              <a:lnSpc>
-                <a:spcPts val="1500"/>
-              </a:lnSpc>
-            </a:pPr>
-            <a:r>
-              <a:rPr sz="1200" b="0" i="0" spc="-12">
-                <a:solidFill>
-                  <a:srgbClr val="1F1F1F"/>
-                </a:solidFill>
-                <a:latin typeface="Pretendard"/>
-                <a:ea typeface="Pretendard"/>
-                <a:cs typeface="Pretendard"/>
-              </a:rPr>
-              <a:t>인용
-그래프</a:t>
-            </a:r>
-          </a:p>
-        </p:txBody>
-      </p:sp>
-      <p:sp>
-        <p:nvSpPr>
-          <p:cNvPr id="25" name="Oval 24"/>
-          <p:cNvSpPr/>
-          <p:nvPr/>
-        </p:nvSpPr>
-        <p:spPr>
-          <a:xfrm>
-            <a:off x="11164641" y="3535161"/>
-            <a:ext cx="201168" cy="201168"/>
-          </a:xfrm>
-          <a:prstGeom prst="ellipse">
-            <a:avLst/>
-          </a:prstGeom>
-          <a:solidFill>
-            <a:srgbClr val="00754A"/>
-          </a:solidFill>
-          <a:ln w="19050">
-            <a:solidFill>
-              <a:srgbClr val="FFFFFF"/>
-            </a:solidFill>
-          </a:ln>
-          <a:effectLst/>
-        </p:spPr>
-        <p:style>
-          <a:lnRef idx="1">
-            <a:schemeClr val="accent1"/>
-          </a:lnRef>
-          <a:fillRef idx="3">
-            <a:schemeClr val="accent1"/>
-          </a:fillRef>
-          <a:effectRef idx="2">
-            <a:schemeClr val="accent1"/>
-          </a:effectRef>
-          <a:fontRef idx="minor">
-            <a:schemeClr val="lt1"/>
-          </a:fontRef>
-        </p:style>
-        <p:txBody>
-          <a:bodyPr rtlCol="0" anchor="ctr"/>
-          <a:lstStyle/>
-          <a:p>
-            <a:pPr algn="ctr"/>
-          </a:p>
-        </p:txBody>
-      </p:sp>
-      <p:sp>
-        <p:nvSpPr>
-          <p:cNvPr id="26" name="TextBox 25"/>
-          <p:cNvSpPr txBox="1"/>
-          <p:nvPr/>
-        </p:nvSpPr>
-        <p:spPr>
-          <a:xfrm>
-            <a:off x="10442265" y="2799069"/>
-            <a:ext cx="1645920" cy="457200"/>
-          </a:xfrm>
-          <a:prstGeom prst="rect">
-            <a:avLst/>
-          </a:prstGeom>
-          <a:noFill/>
-        </p:spPr>
-        <p:txBody>
-          <a:bodyPr wrap="square" anchor="t" lIns="0" rIns="0" tIns="0" bIns="0">
-            <a:spAutoFit/>
-          </a:bodyPr>
-          <a:lstStyle/>
-          <a:p>
-            <a:pPr algn="ctr"/>
-            <a:r>
-              <a:rPr sz="1700" b="1" i="0" spc="-17">
-                <a:solidFill>
-                  <a:srgbClr val="006241"/>
-                </a:solidFill>
-                <a:latin typeface="Pretendard"/>
-                <a:ea typeface="Pretendard"/>
-                <a:cs typeface="Pretendard"/>
-              </a:rPr>
-              <a:t>P5</a:t>
-            </a:r>
-          </a:p>
-        </p:txBody>
-      </p:sp>
-      <p:sp>
-        <p:nvSpPr>
-          <p:cNvPr id="27" name="TextBox 26"/>
-          <p:cNvSpPr txBox="1"/>
-          <p:nvPr/>
-        </p:nvSpPr>
-        <p:spPr>
-          <a:xfrm>
-            <a:off x="10396545" y="3850629"/>
-            <a:ext cx="1737360" cy="914400"/>
-          </a:xfrm>
-          <a:prstGeom prst="rect">
-            <a:avLst/>
-          </a:prstGeom>
-          <a:noFill/>
-        </p:spPr>
-        <p:txBody>
-          <a:bodyPr wrap="square" anchor="t" lIns="0" rIns="0" tIns="0" bIns="0">
-            <a:spAutoFit/>
-          </a:bodyPr>
-          <a:lstStyle/>
-          <a:p>
-            <a:pPr algn="ctr">
-              <a:lnSpc>
-                <a:spcPts val="1500"/>
-              </a:lnSpc>
-            </a:pPr>
-            <a:r>
-              <a:rPr sz="1200" b="0" i="0" spc="-12">
-                <a:solidFill>
-                  <a:srgbClr val="1F1F1F"/>
-                </a:solidFill>
-                <a:latin typeface="Pretendard"/>
-                <a:ea typeface="Pretendard"/>
-                <a:cs typeface="Pretendard"/>
-              </a:rPr>
-              <a:t>작성 지원
-참고문헌</a:t>
-            </a:r>
-          </a:p>
-        </p:txBody>
-      </p:sp>
-      <p:sp>
-        <p:nvSpPr>
-          <p:cNvPr id="28" name="Rounded Rectangle 27"/>
-          <p:cNvSpPr/>
-          <p:nvPr/>
-        </p:nvSpPr>
-        <p:spPr>
-          <a:xfrm>
-            <a:off x="571682" y="5859292"/>
-            <a:ext cx="11059302" cy="457200"/>
-          </a:xfrm>
-          <a:prstGeom prst="roundRect">
-            <a:avLst>
-              <a:gd name="adj" fmla="val 18000"/>
-            </a:avLst>
-          </a:prstGeom>
-          <a:solidFill>
-            <a:srgbClr val="1E3932"/>
-          </a:solidFill>
-          <a:ln>
-            <a:noFill/>
-          </a:ln>
-          <a:effectLst/>
-        </p:spPr>
-        <p:style>
-          <a:lnRef idx="1">
-            <a:schemeClr val="accent1"/>
-          </a:lnRef>
-          <a:fillRef idx="3">
-            <a:schemeClr val="accent1"/>
-          </a:fillRef>
-          <a:effectRef idx="2">
-            <a:schemeClr val="accent1"/>
-          </a:effectRef>
-          <a:fontRef idx="minor">
-            <a:schemeClr val="lt1"/>
-          </a:fontRef>
-        </p:style>
-        <p:txBody>
-          <a:bodyPr rtlCol="0" anchor="ctr"/>
-          <a:lstStyle/>
-          <a:p>
-            <a:pPr algn="ctr"/>
-          </a:p>
-        </p:txBody>
-      </p:sp>
-      <p:sp>
-        <p:nvSpPr>
-          <p:cNvPr id="29" name="TextBox 28"/>
           <p:cNvSpPr txBox="1"/>
           <p:nvPr/>
         </p:nvSpPr>
@@ -7177,13 +7086,13 @@
             <a:r>
               <a:rPr sz="1400" b="1" i="0" spc="-14">
                 <a:solidFill>
-                  <a:srgbClr val="FFFFFF"/>
-                </a:solidFill>
-                <a:latin typeface="Pretendard"/>
-                <a:ea typeface="Pretendard"/>
-                <a:cs typeface="Pretendard"/>
-              </a:rPr>
-              <a:t>향후: 풀 CSL(citeproc) 스타일 · 온톨로지 검색확장 · 모바일 QA</a:t>
+                  <a:srgbClr val="006241"/>
+                </a:solidFill>
+                <a:latin typeface="Pretendard"/>
+                <a:ea typeface="Pretendard"/>
+                <a:cs typeface="Pretendard"/>
+              </a:rPr>
+              <a:t>Obsidian만 있으면 오늘부터 — 내 서재가 답하기 시작한다</a:t>
             </a:r>
           </a:p>
         </p:txBody>
@@ -7282,7 +7191,7 @@
                 <a:ea typeface="Pretendard"/>
                 <a:cs typeface="Pretendard"/>
               </a:rPr>
-              <a:t>GET STARTED</a:t>
+              <a:t>HOW TO USE ①</a:t>
             </a:r>
           </a:p>
         </p:txBody>
@@ -7323,7 +7232,7 @@
                 <a:ea typeface="Pretendard"/>
                 <a:cs typeface="Pretendard"/>
               </a:rPr>
-              <a:t>Obsidian만 있으면 오늘부터 시작</a:t>
+              <a:t>서재 채우는 법 — 네 가지 입구</a:t>
             </a:r>
           </a:p>
         </p:txBody>
@@ -7440,19 +7349,102 @@
       </p:sp>
       <p:sp>
         <p:nvSpPr>
-          <p:cNvPr id="8" name="Rounded Rectangle 7"/>
+          <p:cNvPr id="8" name="TextBox 7"/>
+          <p:cNvSpPr txBox="1"/>
+          <p:nvPr/>
+        </p:nvSpPr>
+        <p:spPr>
+          <a:xfrm>
+            <a:off x="6567403" y="6617421"/>
+            <a:ext cx="5486400" cy="228600"/>
+          </a:xfrm>
+          <a:prstGeom prst="rect">
+            <a:avLst/>
+          </a:prstGeom>
+          <a:noFill/>
+        </p:spPr>
+        <p:txBody>
+          <a:bodyPr wrap="square" anchor="t" lIns="0" rIns="0" tIns="0" bIns="0">
+            <a:spAutoFit/>
+          </a:bodyPr>
+          <a:lstStyle/>
+          <a:p>
+            <a:pPr algn="r"/>
+            <a:r>
+              <a:rPr sz="800" b="0" i="0" spc="-8">
+                <a:solidFill>
+                  <a:srgbClr val="8E8E93"/>
+                </a:solidFill>
+                <a:latin typeface="Pretendard"/>
+                <a:ea typeface="Pretendard"/>
+                <a:cs typeface="Pretendard"/>
+              </a:rPr>
+              <a:t>명령 팔레트 = Cmd/Ctrl+P · 'RAG'만 쳐도 전부 검색</a:t>
+            </a:r>
+          </a:p>
+        </p:txBody>
+      </p:sp>
+      <p:sp>
+        <p:nvSpPr>
+          <p:cNvPr id="9" name="Rounded Rectangle 8"/>
           <p:cNvSpPr/>
           <p:nvPr/>
         </p:nvSpPr>
         <p:spPr>
           <a:xfrm>
-            <a:off x="663122" y="1838949"/>
-            <a:ext cx="3320674" cy="1280160"/>
+            <a:off x="663122" y="1637781"/>
+            <a:ext cx="10876422" cy="868680"/>
           </a:xfrm>
           <a:prstGeom prst="roundRect">
             <a:avLst>
-              <a:gd name="adj" fmla="val 6000"/>
+              <a:gd name="adj" fmla="val 8000"/>
             </a:avLst>
+          </a:prstGeom>
+          <a:solidFill>
+            <a:srgbClr val="FFFFFF"/>
+          </a:solidFill>
+          <a:ln w="11430">
+            <a:solidFill>
+              <a:srgbClr val="D9D9D9"/>
+            </a:solidFill>
+          </a:ln>
+          <a:effectLst/>
+        </p:spPr>
+        <p:style>
+          <a:lnRef idx="1">
+            <a:schemeClr val="accent1"/>
+          </a:lnRef>
+          <a:fillRef idx="3">
+            <a:schemeClr val="accent1"/>
+          </a:fillRef>
+          <a:effectRef idx="2">
+            <a:schemeClr val="accent1"/>
+          </a:effectRef>
+          <a:fontRef idx="minor">
+            <a:schemeClr val="lt1"/>
+          </a:fontRef>
+        </p:style>
+        <p:txBody>
+          <a:bodyPr rtlCol="0" anchor="ctr"/>
+          <a:lstStyle/>
+          <a:p>
+            <a:pPr algn="ctr"/>
+          </a:p>
+        </p:txBody>
+      </p:sp>
+      <p:sp>
+        <p:nvSpPr>
+          <p:cNvPr id="10" name="Oval 9"/>
+          <p:cNvSpPr/>
+          <p:nvPr/>
+        </p:nvSpPr>
+        <p:spPr>
+          <a:xfrm>
+            <a:off x="864290" y="1889241"/>
+            <a:ext cx="365760" cy="365760"/>
+          </a:xfrm>
+          <a:prstGeom prst="ellipse">
+            <a:avLst/>
           </a:prstGeom>
           <a:noFill/>
           <a:ln w="19050">
@@ -7486,14 +7478,14 @@
       </p:sp>
       <p:sp>
         <p:nvSpPr>
-          <p:cNvPr id="9" name="TextBox 8"/>
-          <p:cNvSpPr txBox="1"/>
-          <p:nvPr/>
-        </p:nvSpPr>
-        <p:spPr>
-          <a:xfrm>
-            <a:off x="800282" y="1838949"/>
-            <a:ext cx="3046354" cy="1280160"/>
+          <p:cNvPr id="11" name="TextBox 10"/>
+          <p:cNvSpPr txBox="1"/>
+          <p:nvPr/>
+        </p:nvSpPr>
+        <p:spPr>
+          <a:xfrm>
+            <a:off x="864290" y="1889241"/>
+            <a:ext cx="365760" cy="365760"/>
           </a:xfrm>
           <a:prstGeom prst="rect">
             <a:avLst/>
@@ -7506,77 +7498,272 @@
           </a:bodyPr>
           <a:lstStyle/>
           <a:p>
-            <a:pPr algn="ctr">
+            <a:pPr algn="ctr"/>
+            <a:r>
+              <a:rPr sz="1500" b="1" i="0" spc="-15">
+                <a:solidFill>
+                  <a:srgbClr val="00754A"/>
+                </a:solidFill>
+                <a:latin typeface="Pretendard"/>
+                <a:ea typeface="Pretendard"/>
+                <a:cs typeface="Pretendard"/>
+              </a:rPr>
+              <a:t>1</a:t>
+            </a:r>
+          </a:p>
+        </p:txBody>
+      </p:sp>
+      <p:sp>
+        <p:nvSpPr>
+          <p:cNvPr id="12" name="TextBox 11"/>
+          <p:cNvSpPr txBox="1"/>
+          <p:nvPr/>
+        </p:nvSpPr>
+        <p:spPr>
+          <a:xfrm>
+            <a:off x="1348922" y="1637781"/>
+            <a:ext cx="1828800" cy="868680"/>
+          </a:xfrm>
+          <a:prstGeom prst="rect">
+            <a:avLst/>
+          </a:prstGeom>
+          <a:noFill/>
+        </p:spPr>
+        <p:txBody>
+          <a:bodyPr wrap="square" anchor="ctr" lIns="0" rIns="0" tIns="0" bIns="0">
+            <a:spAutoFit/>
+          </a:bodyPr>
+          <a:lstStyle/>
+          <a:p>
+            <a:pPr algn="l">
               <a:lnSpc>
-                <a:spcPts val="2200"/>
+                <a:spcPts val="1800"/>
               </a:lnSpc>
             </a:pPr>
             <a:r>
-              <a:rPr sz="1700" b="1" i="0" spc="-17">
-                <a:solidFill>
-                  <a:srgbClr val="1F1F1F"/>
-                </a:solidFill>
-                <a:latin typeface="Pretendard"/>
-                <a:ea typeface="Pretendard"/>
-                <a:cs typeface="Pretendard"/>
-              </a:rPr>
-              <a:t>Obsidian 설치</a:t>
-            </a:r>
-          </a:p>
-        </p:txBody>
-      </p:sp>
-      <p:sp>
-        <p:nvSpPr>
-          <p:cNvPr id="10" name="TextBox 9"/>
-          <p:cNvSpPr txBox="1"/>
-          <p:nvPr/>
-        </p:nvSpPr>
-        <p:spPr>
-          <a:xfrm>
-            <a:off x="4002084" y="2250429"/>
-            <a:ext cx="420624" cy="457200"/>
-          </a:xfrm>
-          <a:prstGeom prst="rect">
-            <a:avLst/>
-          </a:prstGeom>
-          <a:noFill/>
-        </p:spPr>
-        <p:txBody>
-          <a:bodyPr wrap="square" anchor="ctr" lIns="0" rIns="0" tIns="0" bIns="0">
-            <a:spAutoFit/>
-          </a:bodyPr>
-          <a:lstStyle/>
-          <a:p>
-            <a:pPr algn="ctr"/>
-            <a:r>
-              <a:rPr sz="2400" b="1" i="0" spc="-24">
-                <a:solidFill>
-                  <a:srgbClr val="00754A"/>
-                </a:solidFill>
-                <a:latin typeface="Pretendard"/>
-                <a:ea typeface="Pretendard"/>
-                <a:cs typeface="Pretendard"/>
-              </a:rPr>
-              <a:t>→</a:t>
-            </a:r>
-          </a:p>
-        </p:txBody>
-      </p:sp>
-      <p:sp>
-        <p:nvSpPr>
-          <p:cNvPr id="11" name="Rounded Rectangle 10"/>
+              <a:rPr sz="1500" b="1" i="0" spc="-15">
+                <a:solidFill>
+                  <a:srgbClr val="006241"/>
+                </a:solidFill>
+                <a:latin typeface="Pretendard"/>
+                <a:ea typeface="Pretendard"/>
+                <a:cs typeface="Pretendard"/>
+              </a:rPr>
+              <a:t>DOI·PMID 추가</a:t>
+            </a:r>
+          </a:p>
+        </p:txBody>
+      </p:sp>
+      <p:sp>
+        <p:nvSpPr>
+          <p:cNvPr id="13" name="Rounded Rectangle 12"/>
           <p:cNvSpPr/>
           <p:nvPr/>
         </p:nvSpPr>
         <p:spPr>
           <a:xfrm>
-            <a:off x="4440996" y="1838949"/>
-            <a:ext cx="3320674" cy="1280160"/>
+            <a:off x="3269162" y="1820661"/>
+            <a:ext cx="4206240" cy="502920"/>
           </a:xfrm>
           <a:prstGeom prst="roundRect">
             <a:avLst>
-              <a:gd name="adj" fmla="val 6000"/>
+              <a:gd name="adj" fmla="val 12000"/>
             </a:avLst>
+          </a:prstGeom>
+          <a:noFill/>
+          <a:ln w="11430">
+            <a:solidFill>
+              <a:srgbClr val="D9D9D9"/>
+            </a:solidFill>
+          </a:ln>
+          <a:effectLst/>
+        </p:spPr>
+        <p:style>
+          <a:lnRef idx="1">
+            <a:schemeClr val="accent1"/>
+          </a:lnRef>
+          <a:fillRef idx="3">
+            <a:schemeClr val="accent1"/>
+          </a:fillRef>
+          <a:effectRef idx="2">
+            <a:schemeClr val="accent1"/>
+          </a:effectRef>
+          <a:fontRef idx="minor">
+            <a:schemeClr val="lt1"/>
+          </a:fontRef>
+        </p:style>
+        <p:txBody>
+          <a:bodyPr rtlCol="0" anchor="ctr"/>
+          <a:lstStyle/>
+          <a:p>
+            <a:pPr algn="ctr"/>
+          </a:p>
+        </p:txBody>
+      </p:sp>
+      <p:sp>
+        <p:nvSpPr>
+          <p:cNvPr id="14" name="TextBox 13"/>
+          <p:cNvSpPr txBox="1"/>
+          <p:nvPr/>
+        </p:nvSpPr>
+        <p:spPr>
+          <a:xfrm>
+            <a:off x="3406322" y="1820661"/>
+            <a:ext cx="3931920" cy="502920"/>
+          </a:xfrm>
+          <a:prstGeom prst="rect">
+            <a:avLst/>
+          </a:prstGeom>
+          <a:noFill/>
+        </p:spPr>
+        <p:txBody>
+          <a:bodyPr wrap="square" anchor="ctr" lIns="0" rIns="0" tIns="0" bIns="0">
+            <a:spAutoFit/>
+          </a:bodyPr>
+          <a:lstStyle/>
+          <a:p>
+            <a:pPr algn="l">
+              <a:lnSpc>
+                <a:spcPts val="1500"/>
+              </a:lnSpc>
+            </a:pPr>
+            <a:r>
+              <a:rPr sz="1200" b="1" i="0" spc="-12">
+                <a:solidFill>
+                  <a:srgbClr val="00754A"/>
+                </a:solidFill>
+                <a:latin typeface="Pretendard"/>
+                <a:ea typeface="Pretendard"/>
+                <a:cs typeface="Pretendard"/>
+              </a:rPr>
+              <a:t>“Add reference by DOI / PMID / arXiv”</a:t>
+            </a:r>
+          </a:p>
+        </p:txBody>
+      </p:sp>
+      <p:sp>
+        <p:nvSpPr>
+          <p:cNvPr id="15" name="TextBox 14"/>
+          <p:cNvSpPr txBox="1"/>
+          <p:nvPr/>
+        </p:nvSpPr>
+        <p:spPr>
+          <a:xfrm>
+            <a:off x="7704002" y="1637781"/>
+            <a:ext cx="3652662" cy="868680"/>
+          </a:xfrm>
+          <a:prstGeom prst="rect">
+            <a:avLst/>
+          </a:prstGeom>
+          <a:noFill/>
+        </p:spPr>
+        <p:txBody>
+          <a:bodyPr wrap="square" anchor="ctr" lIns="0" rIns="0" tIns="0" bIns="0">
+            <a:spAutoFit/>
+          </a:bodyPr>
+          <a:lstStyle/>
+          <a:p>
+            <a:pPr algn="l">
+              <a:lnSpc>
+                <a:spcPts val="1500"/>
+              </a:lnSpc>
+            </a:pPr>
+            <a:r>
+              <a:rPr sz="1150" b="0" i="0" spc="-12">
+                <a:solidFill>
+                  <a:srgbClr val="6B6B6B"/>
+                </a:solidFill>
+                <a:latin typeface="Pretendard"/>
+                <a:ea typeface="Pretendard"/>
+                <a:cs typeface="Pretendard"/>
+              </a:rPr>
+              <a:t>식별자 붙여넣기 → References/에 노트 자동 생성.</a:t>
+            </a:r>
+          </a:p>
+          <a:p>
+            <a:pPr algn="l">
+              <a:lnSpc>
+                <a:spcPts val="1500"/>
+              </a:lnSpc>
+              <a:spcBef>
+                <a:spcPts val="200"/>
+              </a:spcBef>
+            </a:pPr>
+            <a:r>
+              <a:rPr sz="1150" b="0" i="0" spc="-12">
+                <a:solidFill>
+                  <a:srgbClr val="6B6B6B"/>
+                </a:solidFill>
+                <a:latin typeface="Pretendard"/>
+                <a:ea typeface="Pretendard"/>
+                <a:cs typeface="Pretendard"/>
+              </a:rPr>
+              <a:t>제목·저자·연도·초록까지 자동으로 채워진다</a:t>
+            </a:r>
+          </a:p>
+        </p:txBody>
+      </p:sp>
+      <p:sp>
+        <p:nvSpPr>
+          <p:cNvPr id="16" name="Rounded Rectangle 15"/>
+          <p:cNvSpPr/>
+          <p:nvPr/>
+        </p:nvSpPr>
+        <p:spPr>
+          <a:xfrm>
+            <a:off x="663122" y="2625333"/>
+            <a:ext cx="10876422" cy="868680"/>
+          </a:xfrm>
+          <a:prstGeom prst="roundRect">
+            <a:avLst>
+              <a:gd name="adj" fmla="val 8000"/>
+            </a:avLst>
+          </a:prstGeom>
+          <a:solidFill>
+            <a:srgbClr val="FFFFFF"/>
+          </a:solidFill>
+          <a:ln w="11430">
+            <a:solidFill>
+              <a:srgbClr val="D9D9D9"/>
+            </a:solidFill>
+          </a:ln>
+          <a:effectLst/>
+        </p:spPr>
+        <p:style>
+          <a:lnRef idx="1">
+            <a:schemeClr val="accent1"/>
+          </a:lnRef>
+          <a:fillRef idx="3">
+            <a:schemeClr val="accent1"/>
+          </a:fillRef>
+          <a:effectRef idx="2">
+            <a:schemeClr val="accent1"/>
+          </a:effectRef>
+          <a:fontRef idx="minor">
+            <a:schemeClr val="lt1"/>
+          </a:fontRef>
+        </p:style>
+        <p:txBody>
+          <a:bodyPr rtlCol="0" anchor="ctr"/>
+          <a:lstStyle/>
+          <a:p>
+            <a:pPr algn="ctr"/>
+          </a:p>
+        </p:txBody>
+      </p:sp>
+      <p:sp>
+        <p:nvSpPr>
+          <p:cNvPr id="17" name="Oval 16"/>
+          <p:cNvSpPr/>
+          <p:nvPr/>
+        </p:nvSpPr>
+        <p:spPr>
+          <a:xfrm>
+            <a:off x="864290" y="2876793"/>
+            <a:ext cx="365760" cy="365760"/>
+          </a:xfrm>
+          <a:prstGeom prst="ellipse">
+            <a:avLst/>
           </a:prstGeom>
           <a:noFill/>
           <a:ln w="19050">
@@ -7610,14 +7797,14 @@
       </p:sp>
       <p:sp>
         <p:nvSpPr>
-          <p:cNvPr id="12" name="TextBox 11"/>
-          <p:cNvSpPr txBox="1"/>
-          <p:nvPr/>
-        </p:nvSpPr>
-        <p:spPr>
-          <a:xfrm>
-            <a:off x="4578156" y="1838949"/>
-            <a:ext cx="3046354" cy="1280160"/>
+          <p:cNvPr id="18" name="TextBox 17"/>
+          <p:cNvSpPr txBox="1"/>
+          <p:nvPr/>
+        </p:nvSpPr>
+        <p:spPr>
+          <a:xfrm>
+            <a:off x="864290" y="2876793"/>
+            <a:ext cx="365760" cy="365760"/>
           </a:xfrm>
           <a:prstGeom prst="rect">
             <a:avLst/>
@@ -7630,78 +7817,272 @@
           </a:bodyPr>
           <a:lstStyle/>
           <a:p>
-            <a:pPr algn="ctr">
+            <a:pPr algn="ctr"/>
+            <a:r>
+              <a:rPr sz="1500" b="1" i="0" spc="-15">
+                <a:solidFill>
+                  <a:srgbClr val="00754A"/>
+                </a:solidFill>
+                <a:latin typeface="Pretendard"/>
+                <a:ea typeface="Pretendard"/>
+                <a:cs typeface="Pretendard"/>
+              </a:rPr>
+              <a:t>2</a:t>
+            </a:r>
+          </a:p>
+        </p:txBody>
+      </p:sp>
+      <p:sp>
+        <p:nvSpPr>
+          <p:cNvPr id="19" name="TextBox 18"/>
+          <p:cNvSpPr txBox="1"/>
+          <p:nvPr/>
+        </p:nvSpPr>
+        <p:spPr>
+          <a:xfrm>
+            <a:off x="1348922" y="2625333"/>
+            <a:ext cx="1828800" cy="868680"/>
+          </a:xfrm>
+          <a:prstGeom prst="rect">
+            <a:avLst/>
+          </a:prstGeom>
+          <a:noFill/>
+        </p:spPr>
+        <p:txBody>
+          <a:bodyPr wrap="square" anchor="ctr" lIns="0" rIns="0" tIns="0" bIns="0">
+            <a:spAutoFit/>
+          </a:bodyPr>
+          <a:lstStyle/>
+          <a:p>
+            <a:pPr algn="l">
               <a:lnSpc>
-                <a:spcPts val="2200"/>
+                <a:spcPts val="1800"/>
               </a:lnSpc>
             </a:pPr>
             <a:r>
-              <a:rPr sz="1700" b="1" i="0" spc="-17">
-                <a:solidFill>
-                  <a:srgbClr val="1F1F1F"/>
-                </a:solidFill>
-                <a:latin typeface="Pretendard"/>
-                <a:ea typeface="Pretendard"/>
-                <a:cs typeface="Pretendard"/>
-              </a:rPr>
-              <a:t>RAG Obsidian
-플러그인 활성화</a:t>
-            </a:r>
-          </a:p>
-        </p:txBody>
-      </p:sp>
-      <p:sp>
-        <p:nvSpPr>
-          <p:cNvPr id="13" name="TextBox 12"/>
-          <p:cNvSpPr txBox="1"/>
-          <p:nvPr/>
-        </p:nvSpPr>
-        <p:spPr>
-          <a:xfrm>
-            <a:off x="7779959" y="2250429"/>
-            <a:ext cx="420624" cy="457200"/>
-          </a:xfrm>
-          <a:prstGeom prst="rect">
-            <a:avLst/>
-          </a:prstGeom>
-          <a:noFill/>
-        </p:spPr>
-        <p:txBody>
-          <a:bodyPr wrap="square" anchor="ctr" lIns="0" rIns="0" tIns="0" bIns="0">
-            <a:spAutoFit/>
-          </a:bodyPr>
-          <a:lstStyle/>
-          <a:p>
-            <a:pPr algn="ctr"/>
-            <a:r>
-              <a:rPr sz="2400" b="1" i="0" spc="-24">
-                <a:solidFill>
-                  <a:srgbClr val="00754A"/>
-                </a:solidFill>
-                <a:latin typeface="Pretendard"/>
-                <a:ea typeface="Pretendard"/>
-                <a:cs typeface="Pretendard"/>
-              </a:rPr>
-              <a:t>→</a:t>
-            </a:r>
-          </a:p>
-        </p:txBody>
-      </p:sp>
-      <p:sp>
-        <p:nvSpPr>
-          <p:cNvPr id="14" name="Rounded Rectangle 13"/>
+              <a:rPr sz="1500" b="1" i="0" spc="-15">
+                <a:solidFill>
+                  <a:srgbClr val="006241"/>
+                </a:solidFill>
+                <a:latin typeface="Pretendard"/>
+                <a:ea typeface="Pretendard"/>
+                <a:cs typeface="Pretendard"/>
+              </a:rPr>
+              <a:t>PubMed 검색</a:t>
+            </a:r>
+          </a:p>
+        </p:txBody>
+      </p:sp>
+      <p:sp>
+        <p:nvSpPr>
+          <p:cNvPr id="20" name="Rounded Rectangle 19"/>
           <p:cNvSpPr/>
           <p:nvPr/>
         </p:nvSpPr>
         <p:spPr>
           <a:xfrm>
-            <a:off x="8218871" y="1838949"/>
-            <a:ext cx="3320674" cy="1280160"/>
+            <a:off x="3269162" y="2808213"/>
+            <a:ext cx="4206240" cy="502920"/>
           </a:xfrm>
           <a:prstGeom prst="roundRect">
             <a:avLst>
-              <a:gd name="adj" fmla="val 6000"/>
+              <a:gd name="adj" fmla="val 12000"/>
             </a:avLst>
+          </a:prstGeom>
+          <a:noFill/>
+          <a:ln w="11430">
+            <a:solidFill>
+              <a:srgbClr val="D9D9D9"/>
+            </a:solidFill>
+          </a:ln>
+          <a:effectLst/>
+        </p:spPr>
+        <p:style>
+          <a:lnRef idx="1">
+            <a:schemeClr val="accent1"/>
+          </a:lnRef>
+          <a:fillRef idx="3">
+            <a:schemeClr val="accent1"/>
+          </a:fillRef>
+          <a:effectRef idx="2">
+            <a:schemeClr val="accent1"/>
+          </a:effectRef>
+          <a:fontRef idx="minor">
+            <a:schemeClr val="lt1"/>
+          </a:fontRef>
+        </p:style>
+        <p:txBody>
+          <a:bodyPr rtlCol="0" anchor="ctr"/>
+          <a:lstStyle/>
+          <a:p>
+            <a:pPr algn="ctr"/>
+          </a:p>
+        </p:txBody>
+      </p:sp>
+      <p:sp>
+        <p:nvSpPr>
+          <p:cNvPr id="21" name="TextBox 20"/>
+          <p:cNvSpPr txBox="1"/>
+          <p:nvPr/>
+        </p:nvSpPr>
+        <p:spPr>
+          <a:xfrm>
+            <a:off x="3406322" y="2808213"/>
+            <a:ext cx="3931920" cy="502920"/>
+          </a:xfrm>
+          <a:prstGeom prst="rect">
+            <a:avLst/>
+          </a:prstGeom>
+          <a:noFill/>
+        </p:spPr>
+        <p:txBody>
+          <a:bodyPr wrap="square" anchor="ctr" lIns="0" rIns="0" tIns="0" bIns="0">
+            <a:spAutoFit/>
+          </a:bodyPr>
+          <a:lstStyle/>
+          <a:p>
+            <a:pPr algn="l">
+              <a:lnSpc>
+                <a:spcPts val="1500"/>
+              </a:lnSpc>
+            </a:pPr>
+            <a:r>
+              <a:rPr sz="1200" b="1" i="0" spc="-12">
+                <a:solidFill>
+                  <a:srgbClr val="00754A"/>
+                </a:solidFill>
+                <a:latin typeface="Pretendard"/>
+                <a:ea typeface="Pretendard"/>
+                <a:cs typeface="Pretendard"/>
+              </a:rPr>
+              <a:t>“Search PubMed and add references”  (리본: 돋보기)</a:t>
+            </a:r>
+          </a:p>
+        </p:txBody>
+      </p:sp>
+      <p:sp>
+        <p:nvSpPr>
+          <p:cNvPr id="22" name="TextBox 21"/>
+          <p:cNvSpPr txBox="1"/>
+          <p:nvPr/>
+        </p:nvSpPr>
+        <p:spPr>
+          <a:xfrm>
+            <a:off x="7704002" y="2625333"/>
+            <a:ext cx="3652662" cy="868680"/>
+          </a:xfrm>
+          <a:prstGeom prst="rect">
+            <a:avLst/>
+          </a:prstGeom>
+          <a:noFill/>
+        </p:spPr>
+        <p:txBody>
+          <a:bodyPr wrap="square" anchor="ctr" lIns="0" rIns="0" tIns="0" bIns="0">
+            <a:spAutoFit/>
+          </a:bodyPr>
+          <a:lstStyle/>
+          <a:p>
+            <a:pPr algn="l">
+              <a:lnSpc>
+                <a:spcPts val="1500"/>
+              </a:lnSpc>
+            </a:pPr>
+            <a:r>
+              <a:rPr sz="1150" b="0" i="0" spc="-12">
+                <a:solidFill>
+                  <a:srgbClr val="6B6B6B"/>
+                </a:solidFill>
+                <a:latin typeface="Pretendard"/>
+                <a:ea typeface="Pretendard"/>
+                <a:cs typeface="Pretendard"/>
+              </a:rPr>
+              <a:t>키워드 검색 → 체크해서 한 번에 추가.</a:t>
+            </a:r>
+          </a:p>
+          <a:p>
+            <a:pPr algn="l">
+              <a:lnSpc>
+                <a:spcPts val="1500"/>
+              </a:lnSpc>
+              <a:spcBef>
+                <a:spcPts val="200"/>
+              </a:spcBef>
+            </a:pPr>
+            <a:r>
+              <a:rPr sz="1150" b="0" i="0" spc="-12">
+                <a:solidFill>
+                  <a:srgbClr val="6B6B6B"/>
+                </a:solidFill>
+                <a:latin typeface="Pretendard"/>
+                <a:ea typeface="Pretendard"/>
+                <a:cs typeface="Pretendard"/>
+              </a:rPr>
+              <a:t>옵션: LLM 자동 요약(OA는 전문 기반) + MeSH 태그</a:t>
+            </a:r>
+          </a:p>
+        </p:txBody>
+      </p:sp>
+      <p:sp>
+        <p:nvSpPr>
+          <p:cNvPr id="23" name="Rounded Rectangle 22"/>
+          <p:cNvSpPr/>
+          <p:nvPr/>
+        </p:nvSpPr>
+        <p:spPr>
+          <a:xfrm>
+            <a:off x="663122" y="3612885"/>
+            <a:ext cx="10876422" cy="868680"/>
+          </a:xfrm>
+          <a:prstGeom prst="roundRect">
+            <a:avLst>
+              <a:gd name="adj" fmla="val 8000"/>
+            </a:avLst>
+          </a:prstGeom>
+          <a:solidFill>
+            <a:srgbClr val="FFFFFF"/>
+          </a:solidFill>
+          <a:ln w="11430">
+            <a:solidFill>
+              <a:srgbClr val="D9D9D9"/>
+            </a:solidFill>
+          </a:ln>
+          <a:effectLst/>
+        </p:spPr>
+        <p:style>
+          <a:lnRef idx="1">
+            <a:schemeClr val="accent1"/>
+          </a:lnRef>
+          <a:fillRef idx="3">
+            <a:schemeClr val="accent1"/>
+          </a:fillRef>
+          <a:effectRef idx="2">
+            <a:schemeClr val="accent1"/>
+          </a:effectRef>
+          <a:fontRef idx="minor">
+            <a:schemeClr val="lt1"/>
+          </a:fontRef>
+        </p:style>
+        <p:txBody>
+          <a:bodyPr rtlCol="0" anchor="ctr"/>
+          <a:lstStyle/>
+          <a:p>
+            <a:pPr algn="ctr"/>
+          </a:p>
+        </p:txBody>
+      </p:sp>
+      <p:sp>
+        <p:nvSpPr>
+          <p:cNvPr id="24" name="Oval 23"/>
+          <p:cNvSpPr/>
+          <p:nvPr/>
+        </p:nvSpPr>
+        <p:spPr>
+          <a:xfrm>
+            <a:off x="864290" y="3864345"/>
+            <a:ext cx="365760" cy="365760"/>
+          </a:xfrm>
+          <a:prstGeom prst="ellipse">
+            <a:avLst/>
           </a:prstGeom>
           <a:noFill/>
           <a:ln w="19050">
@@ -7735,14 +8116,14 @@
       </p:sp>
       <p:sp>
         <p:nvSpPr>
-          <p:cNvPr id="15" name="TextBox 14"/>
-          <p:cNvSpPr txBox="1"/>
-          <p:nvPr/>
-        </p:nvSpPr>
-        <p:spPr>
-          <a:xfrm>
-            <a:off x="8356031" y="1838949"/>
-            <a:ext cx="3046354" cy="1280160"/>
+          <p:cNvPr id="25" name="TextBox 24"/>
+          <p:cNvSpPr txBox="1"/>
+          <p:nvPr/>
+        </p:nvSpPr>
+        <p:spPr>
+          <a:xfrm>
+            <a:off x="864290" y="3864345"/>
+            <a:ext cx="365760" cy="365760"/>
           </a:xfrm>
           <a:prstGeom prst="rect">
             <a:avLst/>
@@ -7755,43 +8136,275 @@
           </a:bodyPr>
           <a:lstStyle/>
           <a:p>
-            <a:pPr algn="ctr">
+            <a:pPr algn="ctr"/>
+            <a:r>
+              <a:rPr sz="1500" b="1" i="0" spc="-15">
+                <a:solidFill>
+                  <a:srgbClr val="00754A"/>
+                </a:solidFill>
+                <a:latin typeface="Pretendard"/>
+                <a:ea typeface="Pretendard"/>
+                <a:cs typeface="Pretendard"/>
+              </a:rPr>
+              <a:t>3</a:t>
+            </a:r>
+          </a:p>
+        </p:txBody>
+      </p:sp>
+      <p:sp>
+        <p:nvSpPr>
+          <p:cNvPr id="26" name="TextBox 25"/>
+          <p:cNvSpPr txBox="1"/>
+          <p:nvPr/>
+        </p:nvSpPr>
+        <p:spPr>
+          <a:xfrm>
+            <a:off x="1348922" y="3612885"/>
+            <a:ext cx="1828800" cy="868680"/>
+          </a:xfrm>
+          <a:prstGeom prst="rect">
+            <a:avLst/>
+          </a:prstGeom>
+          <a:noFill/>
+        </p:spPr>
+        <p:txBody>
+          <a:bodyPr wrap="square" anchor="ctr" lIns="0" rIns="0" tIns="0" bIns="0">
+            <a:spAutoFit/>
+          </a:bodyPr>
+          <a:lstStyle/>
+          <a:p>
+            <a:pPr algn="l">
               <a:lnSpc>
-                <a:spcPts val="2200"/>
+                <a:spcPts val="1800"/>
               </a:lnSpc>
             </a:pPr>
             <a:r>
-              <a:rPr sz="1700" b="1" i="0" spc="-17">
-                <a:solidFill>
-                  <a:srgbClr val="1F1F1F"/>
-                </a:solidFill>
-                <a:latin typeface="Pretendard"/>
-                <a:ea typeface="Pretendard"/>
-                <a:cs typeface="Pretendard"/>
-              </a:rPr>
-              <a:t>임베딩·LLM 키 설정</a:t>
-            </a:r>
-          </a:p>
-        </p:txBody>
-      </p:sp>
-      <p:sp>
-        <p:nvSpPr>
-          <p:cNvPr id="16" name="Rounded Rectangle 15"/>
+              <a:rPr sz="1500" b="1" i="0" spc="-15">
+                <a:solidFill>
+                  <a:srgbClr val="006241"/>
+                </a:solidFill>
+                <a:latin typeface="Pretendard"/>
+                <a:ea typeface="Pretendard"/>
+                <a:cs typeface="Pretendard"/>
+              </a:rPr>
+              <a:t>PDF 던져넣기</a:t>
+            </a:r>
+          </a:p>
+        </p:txBody>
+      </p:sp>
+      <p:sp>
+        <p:nvSpPr>
+          <p:cNvPr id="27" name="Rounded Rectangle 26"/>
           <p:cNvSpPr/>
           <p:nvPr/>
         </p:nvSpPr>
         <p:spPr>
           <a:xfrm>
-            <a:off x="1394642" y="3777477"/>
-            <a:ext cx="9413382" cy="960120"/>
+            <a:off x="3269162" y="3795765"/>
+            <a:ext cx="4206240" cy="502920"/>
           </a:xfrm>
           <a:prstGeom prst="roundRect">
             <a:avLst>
-              <a:gd name="adj" fmla="val 10000"/>
+              <a:gd name="adj" fmla="val 12000"/>
             </a:avLst>
           </a:prstGeom>
           <a:noFill/>
-          <a:ln w="22225">
+          <a:ln w="11430">
+            <a:solidFill>
+              <a:srgbClr val="D9D9D9"/>
+            </a:solidFill>
+          </a:ln>
+          <a:effectLst/>
+        </p:spPr>
+        <p:style>
+          <a:lnRef idx="1">
+            <a:schemeClr val="accent1"/>
+          </a:lnRef>
+          <a:fillRef idx="3">
+            <a:schemeClr val="accent1"/>
+          </a:fillRef>
+          <a:effectRef idx="2">
+            <a:schemeClr val="accent1"/>
+          </a:effectRef>
+          <a:fontRef idx="minor">
+            <a:schemeClr val="lt1"/>
+          </a:fontRef>
+        </p:style>
+        <p:txBody>
+          <a:bodyPr rtlCol="0" anchor="ctr"/>
+          <a:lstStyle/>
+          <a:p>
+            <a:pPr algn="ctr"/>
+          </a:p>
+        </p:txBody>
+      </p:sp>
+      <p:sp>
+        <p:nvSpPr>
+          <p:cNvPr id="28" name="TextBox 27"/>
+          <p:cNvSpPr txBox="1"/>
+          <p:nvPr/>
+        </p:nvSpPr>
+        <p:spPr>
+          <a:xfrm>
+            <a:off x="3406322" y="3795765"/>
+            <a:ext cx="3931920" cy="502920"/>
+          </a:xfrm>
+          <a:prstGeom prst="rect">
+            <a:avLst/>
+          </a:prstGeom>
+          <a:noFill/>
+        </p:spPr>
+        <p:txBody>
+          <a:bodyPr wrap="square" anchor="ctr" lIns="0" rIns="0" tIns="0" bIns="0">
+            <a:spAutoFit/>
+          </a:bodyPr>
+          <a:lstStyle/>
+          <a:p>
+            <a:pPr algn="l">
+              <a:lnSpc>
+                <a:spcPts val="1500"/>
+              </a:lnSpc>
+            </a:pPr>
+            <a:r>
+              <a:rPr sz="1200" b="1" i="0" spc="-12">
+                <a:solidFill>
+                  <a:srgbClr val="00754A"/>
+                </a:solidFill>
+                <a:latin typeface="Pretendard"/>
+                <a:ea typeface="Pretendard"/>
+                <a:cs typeface="Pretendard"/>
+              </a:rPr>
+              <a:t>“Import PDF into library”</a:t>
+            </a:r>
+          </a:p>
+        </p:txBody>
+      </p:sp>
+      <p:sp>
+        <p:nvSpPr>
+          <p:cNvPr id="29" name="TextBox 28"/>
+          <p:cNvSpPr txBox="1"/>
+          <p:nvPr/>
+        </p:nvSpPr>
+        <p:spPr>
+          <a:xfrm>
+            <a:off x="7704002" y="3612885"/>
+            <a:ext cx="3652662" cy="868680"/>
+          </a:xfrm>
+          <a:prstGeom prst="rect">
+            <a:avLst/>
+          </a:prstGeom>
+          <a:noFill/>
+        </p:spPr>
+        <p:txBody>
+          <a:bodyPr wrap="square" anchor="ctr" lIns="0" rIns="0" tIns="0" bIns="0">
+            <a:spAutoFit/>
+          </a:bodyPr>
+          <a:lstStyle/>
+          <a:p>
+            <a:pPr algn="l">
+              <a:lnSpc>
+                <a:spcPts val="1500"/>
+              </a:lnSpc>
+            </a:pPr>
+            <a:r>
+              <a:rPr sz="1150" b="0" i="0" spc="-12">
+                <a:solidFill>
+                  <a:srgbClr val="6B6B6B"/>
+                </a:solidFill>
+                <a:latin typeface="Pretendard"/>
+                <a:ea typeface="Pretendard"/>
+                <a:cs typeface="Pretendard"/>
+              </a:rPr>
+              <a:t>PDF에서 텍스트·DOI를 찾아 메타데이터 자동 인식.</a:t>
+            </a:r>
+          </a:p>
+          <a:p>
+            <a:pPr algn="l">
+              <a:lnSpc>
+                <a:spcPts val="1500"/>
+              </a:lnSpc>
+              <a:spcBef>
+                <a:spcPts val="200"/>
+              </a:spcBef>
+            </a:pPr>
+            <a:r>
+              <a:rPr sz="1150" b="0" i="0" spc="-12">
+                <a:solidFill>
+                  <a:srgbClr val="6B6B6B"/>
+                </a:solidFill>
+                <a:latin typeface="Pretendard"/>
+                <a:ea typeface="Pretendard"/>
+                <a:cs typeface="Pretendard"/>
+              </a:rPr>
+              <a:t>식별자 없으면 LLM이 제목·저자를 추출</a:t>
+            </a:r>
+          </a:p>
+        </p:txBody>
+      </p:sp>
+      <p:sp>
+        <p:nvSpPr>
+          <p:cNvPr id="30" name="Rounded Rectangle 29"/>
+          <p:cNvSpPr/>
+          <p:nvPr/>
+        </p:nvSpPr>
+        <p:spPr>
+          <a:xfrm>
+            <a:off x="663122" y="4600437"/>
+            <a:ext cx="10876422" cy="868680"/>
+          </a:xfrm>
+          <a:prstGeom prst="roundRect">
+            <a:avLst>
+              <a:gd name="adj" fmla="val 8000"/>
+            </a:avLst>
+          </a:prstGeom>
+          <a:solidFill>
+            <a:srgbClr val="FFFFFF"/>
+          </a:solidFill>
+          <a:ln w="11430">
+            <a:solidFill>
+              <a:srgbClr val="D9D9D9"/>
+            </a:solidFill>
+          </a:ln>
+          <a:effectLst/>
+        </p:spPr>
+        <p:style>
+          <a:lnRef idx="1">
+            <a:schemeClr val="accent1"/>
+          </a:lnRef>
+          <a:fillRef idx="3">
+            <a:schemeClr val="accent1"/>
+          </a:fillRef>
+          <a:effectRef idx="2">
+            <a:schemeClr val="accent1"/>
+          </a:effectRef>
+          <a:fontRef idx="minor">
+            <a:schemeClr val="lt1"/>
+          </a:fontRef>
+        </p:style>
+        <p:txBody>
+          <a:bodyPr rtlCol="0" anchor="ctr"/>
+          <a:lstStyle/>
+          <a:p>
+            <a:pPr algn="ctr"/>
+          </a:p>
+        </p:txBody>
+      </p:sp>
+      <p:sp>
+        <p:nvSpPr>
+          <p:cNvPr id="31" name="Oval 30"/>
+          <p:cNvSpPr/>
+          <p:nvPr/>
+        </p:nvSpPr>
+        <p:spPr>
+          <a:xfrm>
+            <a:off x="864290" y="4851897"/>
+            <a:ext cx="365760" cy="365760"/>
+          </a:xfrm>
+          <a:prstGeom prst="ellipse">
+            <a:avLst/>
+          </a:prstGeom>
+          <a:noFill/>
+          <a:ln w="19050">
             <a:solidFill>
               <a:srgbClr val="00754A"/>
             </a:solidFill>
@@ -7822,14 +8435,14 @@
       </p:sp>
       <p:sp>
         <p:nvSpPr>
-          <p:cNvPr id="17" name="TextBox 16"/>
-          <p:cNvSpPr txBox="1"/>
-          <p:nvPr/>
-        </p:nvSpPr>
-        <p:spPr>
-          <a:xfrm>
-            <a:off x="1394642" y="3923781"/>
-            <a:ext cx="9413382" cy="320040"/>
+          <p:cNvPr id="32" name="TextBox 31"/>
+          <p:cNvSpPr txBox="1"/>
+          <p:nvPr/>
+        </p:nvSpPr>
+        <p:spPr>
+          <a:xfrm>
+            <a:off x="864290" y="4851897"/>
+            <a:ext cx="365760" cy="365760"/>
           </a:xfrm>
           <a:prstGeom prst="rect">
             <a:avLst/>
@@ -7844,7 +8457,7 @@
           <a:p>
             <a:pPr algn="ctr"/>
             <a:r>
-              <a:rPr sz="1200" b="1" i="0" spc="-12">
+              <a:rPr sz="1500" b="1" i="0" spc="-15">
                 <a:solidFill>
                   <a:srgbClr val="00754A"/>
                 </a:solidFill>
@@ -7852,21 +8465,21 @@
                 <a:ea typeface="Pretendard"/>
                 <a:cs typeface="Pretendard"/>
               </a:rPr>
-              <a:t>코드 · 문서 · 이슈</a:t>
-            </a:r>
-          </a:p>
-        </p:txBody>
-      </p:sp>
-      <p:sp>
-        <p:nvSpPr>
-          <p:cNvPr id="18" name="TextBox 17"/>
-          <p:cNvSpPr txBox="1"/>
-          <p:nvPr/>
-        </p:nvSpPr>
-        <p:spPr>
-          <a:xfrm>
-            <a:off x="1394642" y="4234677"/>
-            <a:ext cx="9413382" cy="457200"/>
+              <a:t>4</a:t>
+            </a:r>
+          </a:p>
+        </p:txBody>
+      </p:sp>
+      <p:sp>
+        <p:nvSpPr>
+          <p:cNvPr id="33" name="TextBox 32"/>
+          <p:cNvSpPr txBox="1"/>
+          <p:nvPr/>
+        </p:nvSpPr>
+        <p:spPr>
+          <a:xfrm>
+            <a:off x="1348922" y="4600437"/>
+            <a:ext cx="1828800" cy="868680"/>
           </a:xfrm>
           <a:prstGeom prst="rect">
             <a:avLst/>
@@ -7879,9 +8492,13 @@
           </a:bodyPr>
           <a:lstStyle/>
           <a:p>
-            <a:pPr algn="ctr"/>
-            <a:r>
-              <a:rPr sz="2700" b="1" i="0" spc="-27">
+            <a:pPr algn="l">
+              <a:lnSpc>
+                <a:spcPts val="1800"/>
+              </a:lnSpc>
+            </a:pPr>
+            <a:r>
+              <a:rPr sz="1500" b="1" i="0" spc="-15">
                 <a:solidFill>
                   <a:srgbClr val="006241"/>
                 </a:solidFill>
@@ -7889,69 +8506,32 @@
                 <a:ea typeface="Pretendard"/>
                 <a:cs typeface="Pretendard"/>
               </a:rPr>
-              <a:t>github.com/grotyx/rag-obsidian</a:t>
-            </a:r>
-          </a:p>
-        </p:txBody>
-      </p:sp>
-      <p:sp>
-        <p:nvSpPr>
-          <p:cNvPr id="19" name="TextBox 18"/>
-          <p:cNvSpPr txBox="1"/>
-          <p:nvPr/>
-        </p:nvSpPr>
-        <p:spPr>
-          <a:xfrm>
-            <a:off x="663122" y="4920477"/>
-            <a:ext cx="10876422" cy="365760"/>
-          </a:xfrm>
-          <a:prstGeom prst="rect">
-            <a:avLst/>
-          </a:prstGeom>
-          <a:noFill/>
-        </p:spPr>
-        <p:txBody>
-          <a:bodyPr wrap="square" anchor="t" lIns="0" rIns="0" tIns="0" bIns="0">
-            <a:spAutoFit/>
-          </a:bodyPr>
-          <a:lstStyle/>
-          <a:p>
-            <a:pPr algn="ctr"/>
-            <a:r>
-              <a:rPr sz="1300" b="0" i="0" spc="-13">
-                <a:solidFill>
-                  <a:srgbClr val="6B6B6B"/>
-                </a:solidFill>
-                <a:latin typeface="Pretendard"/>
-                <a:ea typeface="Pretendard"/>
-                <a:cs typeface="Pretendard"/>
-              </a:rPr>
-              <a:t>현재 v0.4.0 · 개발 빌드로 사용 중 · 공개 배포 예정</a:t>
-            </a:r>
-          </a:p>
-        </p:txBody>
-      </p:sp>
-      <p:sp>
-        <p:nvSpPr>
-          <p:cNvPr id="20" name="Rounded Rectangle 19"/>
+              <a:t>Zotero·EndNote 이관</a:t>
+            </a:r>
+          </a:p>
+        </p:txBody>
+      </p:sp>
+      <p:sp>
+        <p:nvSpPr>
+          <p:cNvPr id="34" name="Rounded Rectangle 33"/>
           <p:cNvSpPr/>
           <p:nvPr/>
         </p:nvSpPr>
         <p:spPr>
           <a:xfrm>
-            <a:off x="571682" y="5859292"/>
-            <a:ext cx="11059302" cy="457200"/>
+            <a:off x="3269162" y="4783317"/>
+            <a:ext cx="4206240" cy="502920"/>
           </a:xfrm>
           <a:prstGeom prst="roundRect">
             <a:avLst>
-              <a:gd name="adj" fmla="val 18000"/>
+              <a:gd name="adj" fmla="val 12000"/>
             </a:avLst>
           </a:prstGeom>
-          <a:solidFill>
-            <a:srgbClr val="1E3932"/>
-          </a:solidFill>
-          <a:ln>
-            <a:noFill/>
+          <a:noFill/>
+          <a:ln w="11430">
+            <a:solidFill>
+              <a:srgbClr val="D9D9D9"/>
+            </a:solidFill>
           </a:ln>
           <a:effectLst/>
         </p:spPr>
@@ -7979,7 +8559,156 @@
       </p:sp>
       <p:sp>
         <p:nvSpPr>
-          <p:cNvPr id="21" name="TextBox 20"/>
+          <p:cNvPr id="35" name="TextBox 34"/>
+          <p:cNvSpPr txBox="1"/>
+          <p:nvPr/>
+        </p:nvSpPr>
+        <p:spPr>
+          <a:xfrm>
+            <a:off x="3406322" y="4783317"/>
+            <a:ext cx="3931920" cy="502920"/>
+          </a:xfrm>
+          <a:prstGeom prst="rect">
+            <a:avLst/>
+          </a:prstGeom>
+          <a:noFill/>
+        </p:spPr>
+        <p:txBody>
+          <a:bodyPr wrap="square" anchor="ctr" lIns="0" rIns="0" tIns="0" bIns="0">
+            <a:spAutoFit/>
+          </a:bodyPr>
+          <a:lstStyle/>
+          <a:p>
+            <a:pPr algn="l">
+              <a:lnSpc>
+                <a:spcPts val="1500"/>
+              </a:lnSpc>
+            </a:pPr>
+            <a:r>
+              <a:rPr sz="1200" b="1" i="0" spc="-12">
+                <a:solidFill>
+                  <a:srgbClr val="00754A"/>
+                </a:solidFill>
+                <a:latin typeface="Pretendard"/>
+                <a:ea typeface="Pretendard"/>
+                <a:cs typeface="Pretendard"/>
+              </a:rPr>
+              <a:t>“Import references (BibTeX / RIS / CSL-JSON)”</a:t>
+            </a:r>
+          </a:p>
+        </p:txBody>
+      </p:sp>
+      <p:sp>
+        <p:nvSpPr>
+          <p:cNvPr id="36" name="TextBox 35"/>
+          <p:cNvSpPr txBox="1"/>
+          <p:nvPr/>
+        </p:nvSpPr>
+        <p:spPr>
+          <a:xfrm>
+            <a:off x="7704002" y="4600437"/>
+            <a:ext cx="3652662" cy="868680"/>
+          </a:xfrm>
+          <a:prstGeom prst="rect">
+            <a:avLst/>
+          </a:prstGeom>
+          <a:noFill/>
+        </p:spPr>
+        <p:txBody>
+          <a:bodyPr wrap="square" anchor="ctr" lIns="0" rIns="0" tIns="0" bIns="0">
+            <a:spAutoFit/>
+          </a:bodyPr>
+          <a:lstStyle/>
+          <a:p>
+            <a:pPr algn="l">
+              <a:lnSpc>
+                <a:spcPts val="1500"/>
+              </a:lnSpc>
+            </a:pPr>
+            <a:r>
+              <a:rPr sz="1150" b="0" i="0" spc="-12">
+                <a:solidFill>
+                  <a:srgbClr val="6B6B6B"/>
+                </a:solidFill>
+                <a:latin typeface="Pretendard"/>
+                <a:ea typeface="Pretendard"/>
+                <a:cs typeface="Pretendard"/>
+              </a:rPr>
+              <a:t>기존 서재를 내보내기 파일로 한 번에 가져온다.</a:t>
+            </a:r>
+          </a:p>
+          <a:p>
+            <a:pPr algn="l">
+              <a:lnSpc>
+                <a:spcPts val="1500"/>
+              </a:lnSpc>
+              <a:spcBef>
+                <a:spcPts val="200"/>
+              </a:spcBef>
+            </a:pPr>
+            <a:r>
+              <a:rPr sz="1150" b="0" i="0" spc="-12">
+                <a:solidFill>
+                  <a:srgbClr val="6B6B6B"/>
+                </a:solidFill>
+                <a:latin typeface="Pretendard"/>
+                <a:ea typeface="Pretendard"/>
+                <a:cs typeface="Pretendard"/>
+              </a:rPr>
+              <a:t>중복은 자동으로 건너뜀</a:t>
+            </a:r>
+          </a:p>
+        </p:txBody>
+      </p:sp>
+      <p:sp>
+        <p:nvSpPr>
+          <p:cNvPr id="37" name="Rounded Rectangle 36"/>
+          <p:cNvSpPr/>
+          <p:nvPr/>
+        </p:nvSpPr>
+        <p:spPr>
+          <a:xfrm>
+            <a:off x="571682" y="5859292"/>
+            <a:ext cx="11059302" cy="457200"/>
+          </a:xfrm>
+          <a:prstGeom prst="roundRect">
+            <a:avLst>
+              <a:gd name="adj" fmla="val 18000"/>
+            </a:avLst>
+          </a:prstGeom>
+          <a:noFill/>
+          <a:ln w="19050">
+            <a:solidFill>
+              <a:srgbClr val="00754A"/>
+            </a:solidFill>
+          </a:ln>
+          <a:effectLst/>
+        </p:spPr>
+        <p:style>
+          <a:lnRef idx="1">
+            <a:schemeClr val="accent1"/>
+          </a:lnRef>
+          <a:fillRef idx="3">
+            <a:schemeClr val="accent1"/>
+          </a:fillRef>
+          <a:effectRef idx="2">
+            <a:schemeClr val="accent1"/>
+          </a:effectRef>
+          <a:fontRef idx="minor">
+            <a:schemeClr val="lt1"/>
+          </a:fontRef>
+        </p:style>
+        <p:txBody>
+          <a:bodyPr rtlCol="0" anchor="ctr"/>
+          <a:lstStyle/>
+          <a:p>
+            <a:pPr algn="ctr"/>
+          </a:p>
+        </p:txBody>
+      </p:sp>
+      <p:sp>
+        <p:nvSpPr>
+          <p:cNvPr id="38" name="TextBox 37"/>
           <p:cNvSpPr txBox="1"/>
           <p:nvPr/>
         </p:nvSpPr>
@@ -8003,13 +8732,13 @@
             <a:r>
               <a:rPr sz="1400" b="1" i="0" spc="-14">
                 <a:solidFill>
-                  <a:srgbClr val="FFFFFF"/>
-                </a:solidFill>
-                <a:latin typeface="Pretendard"/>
-                <a:ea typeface="Pretendard"/>
-                <a:cs typeface="Pretendard"/>
-              </a:rPr>
-              <a:t>Obsidian만 있으면 오늘부터 — 내 서재가 답하기 시작한다</a:t>
+                  <a:srgbClr val="006241"/>
+                </a:solidFill>
+                <a:latin typeface="Pretendard"/>
+                <a:ea typeface="Pretendard"/>
+                <a:cs typeface="Pretendard"/>
+              </a:rPr>
+              <a:t>넣는 방법이 무엇이든 결과는 같다 — 노트 하나. 처음 한 번만 “Rebuild search index”.</a:t>
             </a:r>
           </a:p>
         </p:txBody>
@@ -8108,7 +8837,7 @@
                 <a:ea typeface="Pretendard"/>
                 <a:cs typeface="Pretendard"/>
               </a:rPr>
-              <a:t>HOW TO USE</a:t>
+              <a:t>HOW TO USE ②</a:t>
             </a:r>
           </a:p>
         </p:txBody>
@@ -8149,7 +8878,7 @@
                 <a:ea typeface="Pretendard"/>
                 <a:cs typeface="Pretendard"/>
               </a:rPr>
-              <a:t>쓰는 법은 여섯 동작이 전부다</a:t>
+              <a:t>찾고, 묻고, 쓰는 법 — 매일 쓰는 네 가지</a:t>
             </a:r>
           </a:p>
         </p:txBody>
@@ -8296,7 +9025,7 @@
                 <a:ea typeface="Pretendard"/>
                 <a:cs typeface="Pretendard"/>
               </a:rPr>
-              <a:t>명령 팔레트 = Cmd/Ctrl+P · 'RAG'만 쳐도 전부 검색됨</a:t>
+              <a:t>명령 팔레트 = Cmd/Ctrl+P · 'RAG'만 쳐도 전부 검색</a:t>
             </a:r>
           </a:p>
         </p:txBody>
@@ -8310,7 +9039,7 @@
         <p:spPr>
           <a:xfrm>
             <a:off x="663122" y="1637781"/>
-            <a:ext cx="10876422" cy="603504"/>
+            <a:ext cx="10876422" cy="868680"/>
           </a:xfrm>
           <a:prstGeom prst="roundRect">
             <a:avLst>
@@ -8357,17 +9086,17 @@
         </p:nvSpPr>
         <p:spPr>
           <a:xfrm>
-            <a:off x="864290" y="1756653"/>
+            <a:off x="864290" y="1889241"/>
             <a:ext cx="365760" cy="365760"/>
           </a:xfrm>
           <a:prstGeom prst="ellipse">
             <a:avLst/>
           </a:prstGeom>
-          <a:solidFill>
-            <a:srgbClr val="00754A"/>
-          </a:solidFill>
-          <a:ln>
-            <a:noFill/>
+          <a:noFill/>
+          <a:ln w="19050">
+            <a:solidFill>
+              <a:srgbClr val="00754A"/>
+            </a:solidFill>
           </a:ln>
           <a:effectLst/>
         </p:spPr>
@@ -8401,7 +9130,7 @@
         </p:nvSpPr>
         <p:spPr>
           <a:xfrm>
-            <a:off x="864290" y="1756653"/>
+            <a:off x="864290" y="1889241"/>
             <a:ext cx="365760" cy="365760"/>
           </a:xfrm>
           <a:prstGeom prst="rect">
@@ -8419,7 +9148,7 @@
             <a:r>
               <a:rPr sz="1500" b="1" i="0" spc="-15">
                 <a:solidFill>
-                  <a:srgbClr val="FFFFFF"/>
+                  <a:srgbClr val="00754A"/>
                 </a:solidFill>
                 <a:latin typeface="Pretendard"/>
                 <a:ea typeface="Pretendard"/>
@@ -8439,7 +9168,7 @@
         <p:spPr>
           <a:xfrm>
             <a:off x="1348922" y="1637781"/>
-            <a:ext cx="1783080" cy="603504"/>
+            <a:ext cx="1828800" cy="868680"/>
           </a:xfrm>
           <a:prstGeom prst="rect">
             <a:avLst/>
@@ -8466,7 +9195,7 @@
                 <a:ea typeface="Pretendard"/>
                 <a:cs typeface="Pretendard"/>
               </a:rPr>
-              <a:t>논문 추가</a:t>
+              <a:t>뜻으로 검색</a:t>
             </a:r>
           </a:p>
         </p:txBody>
@@ -8479,19 +9208,19 @@
         </p:nvSpPr>
         <p:spPr>
           <a:xfrm>
-            <a:off x="3177722" y="1756653"/>
-            <a:ext cx="4526280" cy="365760"/>
+            <a:off x="3269162" y="1820661"/>
+            <a:ext cx="4206240" cy="502920"/>
           </a:xfrm>
           <a:prstGeom prst="roundRect">
             <a:avLst>
               <a:gd name="adj" fmla="val 12000"/>
             </a:avLst>
           </a:prstGeom>
-          <a:solidFill>
-            <a:srgbClr val="F2F0EB"/>
-          </a:solidFill>
-          <a:ln>
-            <a:noFill/>
+          <a:noFill/>
+          <a:ln w="11430">
+            <a:solidFill>
+              <a:srgbClr val="D9D9D9"/>
+            </a:solidFill>
           </a:ln>
           <a:effectLst/>
         </p:spPr>
@@ -8525,8 +9254,8 @@
         </p:nvSpPr>
         <p:spPr>
           <a:xfrm>
-            <a:off x="3314882" y="1756653"/>
-            <a:ext cx="4251960" cy="365760"/>
+            <a:off x="3406322" y="1820661"/>
+            <a:ext cx="3931920" cy="502920"/>
           </a:xfrm>
           <a:prstGeom prst="rect">
             <a:avLst/>
@@ -8553,7 +9282,7 @@
                 <a:ea typeface="Pretendard"/>
                 <a:cs typeface="Pretendard"/>
               </a:rPr>
-              <a:t>Cmd+P → “Add reference by DOI / PMID / arXiv”</a:t>
+              <a:t>“Search library (semantic)”</a:t>
             </a:r>
           </a:p>
         </p:txBody>
@@ -8566,8 +9295,8 @@
         </p:nvSpPr>
         <p:spPr>
           <a:xfrm>
-            <a:off x="7932602" y="1637781"/>
-            <a:ext cx="3469782" cy="603504"/>
+            <a:off x="7704002" y="1637781"/>
+            <a:ext cx="3652662" cy="868680"/>
           </a:xfrm>
           <a:prstGeom prst="rect">
             <a:avLst/>
@@ -8582,11 +9311,11 @@
           <a:p>
             <a:pPr algn="l">
               <a:lnSpc>
-                <a:spcPts val="1600"/>
+                <a:spcPts val="1500"/>
               </a:lnSpc>
             </a:pPr>
             <a:r>
-              <a:rPr sz="1250" b="0" i="0" spc="-12">
+              <a:rPr sz="1150" b="0" i="0" spc="-12">
                 <a:solidFill>
                   <a:srgbClr val="6B6B6B"/>
                 </a:solidFill>
@@ -8594,7 +9323,28 @@
                 <a:ea typeface="Pretendard"/>
                 <a:cs typeface="Pretendard"/>
               </a:rPr>
-              <a:t>DOI·PMID 붙여넣기 → References/에 노트 자동 생성</a:t>
+              <a:t>단어+뜻 하이브리드 — 'MI'로 'myocardial infarction'도 잡힌다.</a:t>
+            </a:r>
+          </a:p>
+          <a:p>
+            <a:pPr algn="l">
+              <a:lnSpc>
+                <a:spcPts val="1500"/>
+              </a:lnSpc>
+              <a:spcBef>
+                <a:spcPts val="200"/>
+              </a:spcBef>
+            </a:pPr>
+            <a:r>
+              <a:rPr sz="1150" b="0" i="0" spc="-12">
+                <a:solidFill>
+                  <a:srgbClr val="6B6B6B"/>
+                </a:solidFill>
+                <a:latin typeface="Pretendard"/>
+                <a:ea typeface="Pretendard"/>
+                <a:cs typeface="Pretendard"/>
+              </a:rPr>
+              <a:t>저자·연도·저널 필터 병행</a:t>
             </a:r>
           </a:p>
         </p:txBody>
@@ -8607,8 +9357,8 @@
         </p:nvSpPr>
         <p:spPr>
           <a:xfrm>
-            <a:off x="663122" y="2332725"/>
-            <a:ext cx="10876422" cy="603504"/>
+            <a:off x="663122" y="2625333"/>
+            <a:ext cx="10876422" cy="868680"/>
           </a:xfrm>
           <a:prstGeom prst="roundRect">
             <a:avLst>
@@ -8655,17 +9405,17 @@
         </p:nvSpPr>
         <p:spPr>
           <a:xfrm>
-            <a:off x="864290" y="2451597"/>
+            <a:off x="864290" y="2876793"/>
             <a:ext cx="365760" cy="365760"/>
           </a:xfrm>
           <a:prstGeom prst="ellipse">
             <a:avLst/>
           </a:prstGeom>
-          <a:solidFill>
-            <a:srgbClr val="00754A"/>
-          </a:solidFill>
-          <a:ln>
-            <a:noFill/>
+          <a:noFill/>
+          <a:ln w="19050">
+            <a:solidFill>
+              <a:srgbClr val="00754A"/>
+            </a:solidFill>
           </a:ln>
           <a:effectLst/>
         </p:spPr>
@@ -8699,7 +9449,7 @@
         </p:nvSpPr>
         <p:spPr>
           <a:xfrm>
-            <a:off x="864290" y="2451597"/>
+            <a:off x="864290" y="2876793"/>
             <a:ext cx="365760" cy="365760"/>
           </a:xfrm>
           <a:prstGeom prst="rect">
@@ -8717,7 +9467,7 @@
             <a:r>
               <a:rPr sz="1500" b="1" i="0" spc="-15">
                 <a:solidFill>
-                  <a:srgbClr val="FFFFFF"/>
+                  <a:srgbClr val="00754A"/>
                 </a:solidFill>
                 <a:latin typeface="Pretendard"/>
                 <a:ea typeface="Pretendard"/>
@@ -8736,8 +9486,8 @@
         </p:nvSpPr>
         <p:spPr>
           <a:xfrm>
-            <a:off x="1348922" y="2332725"/>
-            <a:ext cx="1783080" cy="603504"/>
+            <a:off x="1348922" y="2625333"/>
+            <a:ext cx="1828800" cy="868680"/>
           </a:xfrm>
           <a:prstGeom prst="rect">
             <a:avLst/>
@@ -8764,7 +9514,7 @@
                 <a:ea typeface="Pretendard"/>
                 <a:cs typeface="Pretendard"/>
               </a:rPr>
-              <a:t>PubMed 검색</a:t>
+              <a:t>서재에 질문</a:t>
             </a:r>
           </a:p>
         </p:txBody>
@@ -8777,19 +9527,19 @@
         </p:nvSpPr>
         <p:spPr>
           <a:xfrm>
-            <a:off x="3177722" y="2451597"/>
-            <a:ext cx="4526280" cy="365760"/>
+            <a:off x="3269162" y="2808213"/>
+            <a:ext cx="4206240" cy="502920"/>
           </a:xfrm>
           <a:prstGeom prst="roundRect">
             <a:avLst>
               <a:gd name="adj" fmla="val 12000"/>
             </a:avLst>
           </a:prstGeom>
-          <a:solidFill>
-            <a:srgbClr val="F2F0EB"/>
-          </a:solidFill>
-          <a:ln>
-            <a:noFill/>
+          <a:noFill/>
+          <a:ln w="11430">
+            <a:solidFill>
+              <a:srgbClr val="D9D9D9"/>
+            </a:solidFill>
           </a:ln>
           <a:effectLst/>
         </p:spPr>
@@ -8823,8 +9573,8 @@
         </p:nvSpPr>
         <p:spPr>
           <a:xfrm>
-            <a:off x="3314882" y="2451597"/>
-            <a:ext cx="4251960" cy="365760"/>
+            <a:off x="3406322" y="2808213"/>
+            <a:ext cx="3931920" cy="502920"/>
           </a:xfrm>
           <a:prstGeom prst="rect">
             <a:avLst/>
@@ -8851,7 +9601,7 @@
                 <a:ea typeface="Pretendard"/>
                 <a:cs typeface="Pretendard"/>
               </a:rPr>
-              <a:t>“Search PubMed and add references”  (리본: 돋보기)</a:t>
+              <a:t>“Chat with library”  (리본: 말풍선)</a:t>
             </a:r>
           </a:p>
         </p:txBody>
@@ -8864,8 +9614,8 @@
         </p:nvSpPr>
         <p:spPr>
           <a:xfrm>
-            <a:off x="7932602" y="2332725"/>
-            <a:ext cx="3469782" cy="603504"/>
+            <a:off x="7704002" y="2625333"/>
+            <a:ext cx="3652662" cy="868680"/>
           </a:xfrm>
           <a:prstGeom prst="rect">
             <a:avLst/>
@@ -8880,11 +9630,11 @@
           <a:p>
             <a:pPr algn="l">
               <a:lnSpc>
-                <a:spcPts val="1600"/>
+                <a:spcPts val="1500"/>
               </a:lnSpc>
             </a:pPr>
             <a:r>
-              <a:rPr sz="1250" b="0" i="0" spc="-12">
+              <a:rPr sz="1150" b="0" i="0" spc="-12">
                 <a:solidFill>
                   <a:srgbClr val="6B6B6B"/>
                 </a:solidFill>
@@ -8892,7 +9642,28 @@
                 <a:ea typeface="Pretendard"/>
                 <a:cs typeface="Pretendard"/>
               </a:rPr>
-              <a:t>키워드로 PubMed 검색 → 골라서 한 번에 서재로</a:t>
+              <a:t>내 서재 구절만 근거로 답하고 문장마다 [n].</a:t>
+            </a:r>
+          </a:p>
+          <a:p>
+            <a:pPr algn="l">
+              <a:lnSpc>
+                <a:spcPts val="1500"/>
+              </a:lnSpc>
+              <a:spcBef>
+                <a:spcPts val="200"/>
+              </a:spcBef>
+            </a:pPr>
+            <a:r>
+              <a:rPr sz="1150" b="0" i="0" spc="-12">
+                <a:solidFill>
+                  <a:srgbClr val="6B6B6B"/>
+                </a:solidFill>
+                <a:latin typeface="Pretendard"/>
+                <a:ea typeface="Pretendard"/>
+                <a:cs typeface="Pretendard"/>
+              </a:rPr>
+              <a:t>[n] 클릭 → 원문 노트로 이동</a:t>
             </a:r>
           </a:p>
         </p:txBody>
@@ -8905,8 +9676,8 @@
         </p:nvSpPr>
         <p:spPr>
           <a:xfrm>
-            <a:off x="663122" y="3027669"/>
-            <a:ext cx="10876422" cy="603504"/>
+            <a:off x="663122" y="3612885"/>
+            <a:ext cx="10876422" cy="868680"/>
           </a:xfrm>
           <a:prstGeom prst="roundRect">
             <a:avLst>
@@ -8953,17 +9724,17 @@
         </p:nvSpPr>
         <p:spPr>
           <a:xfrm>
-            <a:off x="864290" y="3146541"/>
+            <a:off x="864290" y="3864345"/>
             <a:ext cx="365760" cy="365760"/>
           </a:xfrm>
           <a:prstGeom prst="ellipse">
             <a:avLst/>
           </a:prstGeom>
-          <a:solidFill>
-            <a:srgbClr val="00754A"/>
-          </a:solidFill>
-          <a:ln>
-            <a:noFill/>
+          <a:noFill/>
+          <a:ln w="19050">
+            <a:solidFill>
+              <a:srgbClr val="00754A"/>
+            </a:solidFill>
           </a:ln>
           <a:effectLst/>
         </p:spPr>
@@ -8997,7 +9768,7 @@
         </p:nvSpPr>
         <p:spPr>
           <a:xfrm>
-            <a:off x="864290" y="3146541"/>
+            <a:off x="864290" y="3864345"/>
             <a:ext cx="365760" cy="365760"/>
           </a:xfrm>
           <a:prstGeom prst="rect">
@@ -9015,7 +9786,7 @@
             <a:r>
               <a:rPr sz="1500" b="1" i="0" spc="-15">
                 <a:solidFill>
-                  <a:srgbClr val="FFFFFF"/>
+                  <a:srgbClr val="00754A"/>
                 </a:solidFill>
                 <a:latin typeface="Pretendard"/>
                 <a:ea typeface="Pretendard"/>
@@ -9034,8 +9805,8 @@
         </p:nvSpPr>
         <p:spPr>
           <a:xfrm>
-            <a:off x="1348922" y="3027669"/>
-            <a:ext cx="1783080" cy="603504"/>
+            <a:off x="1348922" y="3612885"/>
+            <a:ext cx="1828800" cy="868680"/>
           </a:xfrm>
           <a:prstGeom prst="rect">
             <a:avLst/>
@@ -9062,7 +9833,7 @@
                 <a:ea typeface="Pretendard"/>
                 <a:cs typeface="Pretendard"/>
               </a:rPr>
-              <a:t>뜻으로 검색</a:t>
+              <a:t>글 쓰며 인용</a:t>
             </a:r>
           </a:p>
         </p:txBody>
@@ -9075,19 +9846,19 @@
         </p:nvSpPr>
         <p:spPr>
           <a:xfrm>
-            <a:off x="3177722" y="3146541"/>
-            <a:ext cx="4526280" cy="365760"/>
+            <a:off x="3269162" y="3795765"/>
+            <a:ext cx="4206240" cy="502920"/>
           </a:xfrm>
           <a:prstGeom prst="roundRect">
             <a:avLst>
               <a:gd name="adj" fmla="val 12000"/>
             </a:avLst>
           </a:prstGeom>
-          <a:solidFill>
-            <a:srgbClr val="F2F0EB"/>
-          </a:solidFill>
-          <a:ln>
-            <a:noFill/>
+          <a:noFill/>
+          <a:ln w="11430">
+            <a:solidFill>
+              <a:srgbClr val="D9D9D9"/>
+            </a:solidFill>
           </a:ln>
           <a:effectLst/>
         </p:spPr>
@@ -9121,8 +9892,8 @@
         </p:nvSpPr>
         <p:spPr>
           <a:xfrm>
-            <a:off x="3314882" y="3146541"/>
-            <a:ext cx="4251960" cy="365760"/>
+            <a:off x="3406322" y="3795765"/>
+            <a:ext cx="3931920" cy="502920"/>
           </a:xfrm>
           <a:prstGeom prst="rect">
             <a:avLst/>
@@ -9149,7 +9920,7 @@
                 <a:ea typeface="Pretendard"/>
                 <a:cs typeface="Pretendard"/>
               </a:rPr>
-              <a:t>“Search library (semantic)”</a:t>
+              <a:t>본문에서  @  입력</a:t>
             </a:r>
           </a:p>
         </p:txBody>
@@ -9162,8 +9933,8 @@
         </p:nvSpPr>
         <p:spPr>
           <a:xfrm>
-            <a:off x="7932602" y="3027669"/>
-            <a:ext cx="3469782" cy="603504"/>
+            <a:off x="7704002" y="3612885"/>
+            <a:ext cx="3652662" cy="868680"/>
           </a:xfrm>
           <a:prstGeom prst="rect">
             <a:avLst/>
@@ -9178,11 +9949,11 @@
           <a:p>
             <a:pPr algn="l">
               <a:lnSpc>
-                <a:spcPts val="1600"/>
+                <a:spcPts val="1500"/>
               </a:lnSpc>
             </a:pPr>
             <a:r>
-              <a:rPr sz="1250" b="0" i="0" spc="-12">
+              <a:rPr sz="1150" b="0" i="0" spc="-12">
                 <a:solidFill>
                   <a:srgbClr val="6B6B6B"/>
                 </a:solidFill>
@@ -9190,7 +9961,28 @@
                 <a:ea typeface="Pretendard"/>
                 <a:cs typeface="Pretendard"/>
               </a:rPr>
-              <a:t>내 서재를 단어+뜻 하이브리드로, 저자·연도 필터</a:t>
+              <a:t>제목·저자로 검색해 [@citekey] 삽입.</a:t>
+            </a:r>
+          </a:p>
+          <a:p>
+            <a:pPr algn="l">
+              <a:lnSpc>
+                <a:spcPts val="1500"/>
+              </a:lnSpc>
+              <a:spcBef>
+                <a:spcPts val="200"/>
+              </a:spcBef>
+            </a:pPr>
+            <a:r>
+              <a:rPr sz="1150" b="0" i="0" spc="-12">
+                <a:solidFill>
+                  <a:srgbClr val="6B6B6B"/>
+                </a:solidFill>
+                <a:latin typeface="Pretendard"/>
+                <a:ea typeface="Pretendard"/>
+                <a:cs typeface="Pretendard"/>
+              </a:rPr>
+              <a:t>읽기 화면에선 (Park, 2022)·[1] 같은 서식 인용으로 렌더</a:t>
             </a:r>
           </a:p>
         </p:txBody>
@@ -9203,8 +9995,8 @@
         </p:nvSpPr>
         <p:spPr>
           <a:xfrm>
-            <a:off x="663122" y="3722613"/>
-            <a:ext cx="10876422" cy="603504"/>
+            <a:off x="663122" y="4600437"/>
+            <a:ext cx="10876422" cy="868680"/>
           </a:xfrm>
           <a:prstGeom prst="roundRect">
             <a:avLst>
@@ -9251,17 +10043,17 @@
         </p:nvSpPr>
         <p:spPr>
           <a:xfrm>
-            <a:off x="864290" y="3841485"/>
+            <a:off x="864290" y="4851897"/>
             <a:ext cx="365760" cy="365760"/>
           </a:xfrm>
           <a:prstGeom prst="ellipse">
             <a:avLst/>
           </a:prstGeom>
-          <a:solidFill>
-            <a:srgbClr val="00754A"/>
-          </a:solidFill>
-          <a:ln>
-            <a:noFill/>
+          <a:noFill/>
+          <a:ln w="19050">
+            <a:solidFill>
+              <a:srgbClr val="00754A"/>
+            </a:solidFill>
           </a:ln>
           <a:effectLst/>
         </p:spPr>
@@ -9295,7 +10087,7 @@
         </p:nvSpPr>
         <p:spPr>
           <a:xfrm>
-            <a:off x="864290" y="3841485"/>
+            <a:off x="864290" y="4851897"/>
             <a:ext cx="365760" cy="365760"/>
           </a:xfrm>
           <a:prstGeom prst="rect">
@@ -9313,7 +10105,7 @@
             <a:r>
               <a:rPr sz="1500" b="1" i="0" spc="-15">
                 <a:solidFill>
-                  <a:srgbClr val="FFFFFF"/>
+                  <a:srgbClr val="00754A"/>
                 </a:solidFill>
                 <a:latin typeface="Pretendard"/>
                 <a:ea typeface="Pretendard"/>
@@ -9332,8 +10124,8 @@
         </p:nvSpPr>
         <p:spPr>
           <a:xfrm>
-            <a:off x="1348922" y="3722613"/>
-            <a:ext cx="1783080" cy="603504"/>
+            <a:off x="1348922" y="4600437"/>
+            <a:ext cx="1828800" cy="868680"/>
           </a:xfrm>
           <a:prstGeom prst="rect">
             <a:avLst/>
@@ -9360,7 +10152,7 @@
                 <a:ea typeface="Pretendard"/>
                 <a:cs typeface="Pretendard"/>
               </a:rPr>
-              <a:t>서재에 질문</a:t>
+              <a:t>참고문헌 생성</a:t>
             </a:r>
           </a:p>
         </p:txBody>
@@ -9373,145 +10165,15 @@
         </p:nvSpPr>
         <p:spPr>
           <a:xfrm>
-            <a:off x="3177722" y="3841485"/>
-            <a:ext cx="4526280" cy="365760"/>
+            <a:off x="3269162" y="4783317"/>
+            <a:ext cx="4206240" cy="502920"/>
           </a:xfrm>
           <a:prstGeom prst="roundRect">
             <a:avLst>
               <a:gd name="adj" fmla="val 12000"/>
             </a:avLst>
           </a:prstGeom>
-          <a:solidFill>
-            <a:srgbClr val="F2F0EB"/>
-          </a:solidFill>
-          <a:ln>
-            <a:noFill/>
-          </a:ln>
-          <a:effectLst/>
-        </p:spPr>
-        <p:style>
-          <a:lnRef idx="1">
-            <a:schemeClr val="accent1"/>
-          </a:lnRef>
-          <a:fillRef idx="3">
-            <a:schemeClr val="accent1"/>
-          </a:fillRef>
-          <a:effectRef idx="2">
-            <a:schemeClr val="accent1"/>
-          </a:effectRef>
-          <a:fontRef idx="minor">
-            <a:schemeClr val="lt1"/>
-          </a:fontRef>
-        </p:style>
-        <p:txBody>
-          <a:bodyPr rtlCol="0" anchor="ctr"/>
-          <a:lstStyle/>
-          <a:p>
-            <a:pPr algn="ctr"/>
-          </a:p>
-        </p:txBody>
-      </p:sp>
-      <p:sp>
-        <p:nvSpPr>
-          <p:cNvPr id="35" name="TextBox 34"/>
-          <p:cNvSpPr txBox="1"/>
-          <p:nvPr/>
-        </p:nvSpPr>
-        <p:spPr>
-          <a:xfrm>
-            <a:off x="3314882" y="3841485"/>
-            <a:ext cx="4251960" cy="365760"/>
-          </a:xfrm>
-          <a:prstGeom prst="rect">
-            <a:avLst/>
-          </a:prstGeom>
-          <a:noFill/>
-        </p:spPr>
-        <p:txBody>
-          <a:bodyPr wrap="square" anchor="ctr" lIns="0" rIns="0" tIns="0" bIns="0">
-            <a:spAutoFit/>
-          </a:bodyPr>
-          <a:lstStyle/>
-          <a:p>
-            <a:pPr algn="l">
-              <a:lnSpc>
-                <a:spcPts val="1500"/>
-              </a:lnSpc>
-            </a:pPr>
-            <a:r>
-              <a:rPr sz="1200" b="1" i="0" spc="-12">
-                <a:solidFill>
-                  <a:srgbClr val="00754A"/>
-                </a:solidFill>
-                <a:latin typeface="Pretendard"/>
-                <a:ea typeface="Pretendard"/>
-                <a:cs typeface="Pretendard"/>
-              </a:rPr>
-              <a:t>“Chat with library”  (리본: 말풍선)</a:t>
-            </a:r>
-          </a:p>
-        </p:txBody>
-      </p:sp>
-      <p:sp>
-        <p:nvSpPr>
-          <p:cNvPr id="36" name="TextBox 35"/>
-          <p:cNvSpPr txBox="1"/>
-          <p:nvPr/>
-        </p:nvSpPr>
-        <p:spPr>
-          <a:xfrm>
-            <a:off x="7932602" y="3722613"/>
-            <a:ext cx="3469782" cy="603504"/>
-          </a:xfrm>
-          <a:prstGeom prst="rect">
-            <a:avLst/>
-          </a:prstGeom>
-          <a:noFill/>
-        </p:spPr>
-        <p:txBody>
-          <a:bodyPr wrap="square" anchor="ctr" lIns="0" rIns="0" tIns="0" bIns="0">
-            <a:spAutoFit/>
-          </a:bodyPr>
-          <a:lstStyle/>
-          <a:p>
-            <a:pPr algn="l">
-              <a:lnSpc>
-                <a:spcPts val="1600"/>
-              </a:lnSpc>
-            </a:pPr>
-            <a:r>
-              <a:rPr sz="1250" b="0" i="0" spc="-12">
-                <a:solidFill>
-                  <a:srgbClr val="6B6B6B"/>
-                </a:solidFill>
-                <a:latin typeface="Pretendard"/>
-                <a:ea typeface="Pretendard"/>
-                <a:cs typeface="Pretendard"/>
-              </a:rPr>
-              <a:t>출처 [n] 달린 답 — [n] 클릭하면 원문 노트로</a:t>
-            </a:r>
-          </a:p>
-        </p:txBody>
-      </p:sp>
-      <p:sp>
-        <p:nvSpPr>
-          <p:cNvPr id="37" name="Rounded Rectangle 36"/>
-          <p:cNvSpPr/>
-          <p:nvPr/>
-        </p:nvSpPr>
-        <p:spPr>
-          <a:xfrm>
-            <a:off x="663122" y="4417557"/>
-            <a:ext cx="10876422" cy="603504"/>
-          </a:xfrm>
-          <a:prstGeom prst="roundRect">
-            <a:avLst>
-              <a:gd name="adj" fmla="val 8000"/>
-            </a:avLst>
-          </a:prstGeom>
-          <a:solidFill>
-            <a:srgbClr val="FFFFFF"/>
-          </a:solidFill>
+          <a:noFill/>
           <a:ln w="11430">
             <a:solidFill>
               <a:srgbClr val="D9D9D9"/>
@@ -9543,23 +10205,128 @@
       </p:sp>
       <p:sp>
         <p:nvSpPr>
-          <p:cNvPr id="38" name="Oval 37"/>
+          <p:cNvPr id="35" name="TextBox 34"/>
+          <p:cNvSpPr txBox="1"/>
+          <p:nvPr/>
+        </p:nvSpPr>
+        <p:spPr>
+          <a:xfrm>
+            <a:off x="3406322" y="4783317"/>
+            <a:ext cx="3931920" cy="502920"/>
+          </a:xfrm>
+          <a:prstGeom prst="rect">
+            <a:avLst/>
+          </a:prstGeom>
+          <a:noFill/>
+        </p:spPr>
+        <p:txBody>
+          <a:bodyPr wrap="square" anchor="ctr" lIns="0" rIns="0" tIns="0" bIns="0">
+            <a:spAutoFit/>
+          </a:bodyPr>
+          <a:lstStyle/>
+          <a:p>
+            <a:pPr algn="l">
+              <a:lnSpc>
+                <a:spcPts val="1500"/>
+              </a:lnSpc>
+            </a:pPr>
+            <a:r>
+              <a:rPr sz="1200" b="1" i="0" spc="-12">
+                <a:solidFill>
+                  <a:srgbClr val="00754A"/>
+                </a:solidFill>
+                <a:latin typeface="Pretendard"/>
+                <a:ea typeface="Pretendard"/>
+                <a:cs typeface="Pretendard"/>
+              </a:rPr>
+              <a:t>“Update bibliography in current note”</a:t>
+            </a:r>
+          </a:p>
+        </p:txBody>
+      </p:sp>
+      <p:sp>
+        <p:nvSpPr>
+          <p:cNvPr id="36" name="TextBox 35"/>
+          <p:cNvSpPr txBox="1"/>
+          <p:nvPr/>
+        </p:nvSpPr>
+        <p:spPr>
+          <a:xfrm>
+            <a:off x="7704002" y="4600437"/>
+            <a:ext cx="3652662" cy="868680"/>
+          </a:xfrm>
+          <a:prstGeom prst="rect">
+            <a:avLst/>
+          </a:prstGeom>
+          <a:noFill/>
+        </p:spPr>
+        <p:txBody>
+          <a:bodyPr wrap="square" anchor="ctr" lIns="0" rIns="0" tIns="0" bIns="0">
+            <a:spAutoFit/>
+          </a:bodyPr>
+          <a:lstStyle/>
+          <a:p>
+            <a:pPr algn="l">
+              <a:lnSpc>
+                <a:spcPts val="1500"/>
+              </a:lnSpc>
+            </a:pPr>
+            <a:r>
+              <a:rPr sz="1150" b="0" i="0" spc="-12">
+                <a:solidFill>
+                  <a:srgbClr val="6B6B6B"/>
+                </a:solidFill>
+                <a:latin typeface="Pretendard"/>
+                <a:ea typeface="Pretendard"/>
+                <a:cs typeface="Pretendard"/>
+              </a:rPr>
+              <a:t>## References를 저널 스타일로 자동 생성.</a:t>
+            </a:r>
+          </a:p>
+          <a:p>
+            <a:pPr algn="l">
+              <a:lnSpc>
+                <a:spcPts val="1500"/>
+              </a:lnSpc>
+              <a:spcBef>
+                <a:spcPts val="200"/>
+              </a:spcBef>
+            </a:pPr>
+            <a:r>
+              <a:rPr sz="1150" b="0" i="0" spc="-12">
+                <a:solidFill>
+                  <a:srgbClr val="6B6B6B"/>
+                </a:solidFill>
+                <a:latin typeface="Pretendard"/>
+                <a:ea typeface="Pretendard"/>
+                <a:cs typeface="Pretendard"/>
+              </a:rPr>
+              <a:t>노트에 csl: 한 줄로 저널 교체 — 1만+ 스타일 자동 다운로드</a:t>
+            </a:r>
+          </a:p>
+        </p:txBody>
+      </p:sp>
+      <p:sp>
+        <p:nvSpPr>
+          <p:cNvPr id="37" name="Rounded Rectangle 36"/>
           <p:cNvSpPr/>
           <p:nvPr/>
         </p:nvSpPr>
         <p:spPr>
           <a:xfrm>
-            <a:off x="864290" y="4536429"/>
-            <a:ext cx="365760" cy="365760"/>
-          </a:xfrm>
-          <a:prstGeom prst="ellipse">
-            <a:avLst/>
-          </a:prstGeom>
-          <a:solidFill>
-            <a:srgbClr val="00754A"/>
-          </a:solidFill>
-          <a:ln>
-            <a:noFill/>
+            <a:off x="571682" y="5859292"/>
+            <a:ext cx="11059302" cy="457200"/>
+          </a:xfrm>
+          <a:prstGeom prst="roundRect">
+            <a:avLst>
+              <a:gd name="adj" fmla="val 18000"/>
+            </a:avLst>
+          </a:prstGeom>
+          <a:noFill/>
+          <a:ln w="19050">
+            <a:solidFill>
+              <a:srgbClr val="00754A"/>
+            </a:solidFill>
           </a:ln>
           <a:effectLst/>
         </p:spPr>
@@ -9587,557 +10354,7 @@
       </p:sp>
       <p:sp>
         <p:nvSpPr>
-          <p:cNvPr id="39" name="TextBox 38"/>
-          <p:cNvSpPr txBox="1"/>
-          <p:nvPr/>
-        </p:nvSpPr>
-        <p:spPr>
-          <a:xfrm>
-            <a:off x="864290" y="4536429"/>
-            <a:ext cx="365760" cy="365760"/>
-          </a:xfrm>
-          <a:prstGeom prst="rect">
-            <a:avLst/>
-          </a:prstGeom>
-          <a:noFill/>
-        </p:spPr>
-        <p:txBody>
-          <a:bodyPr wrap="square" anchor="ctr" lIns="0" rIns="0" tIns="0" bIns="0">
-            <a:spAutoFit/>
-          </a:bodyPr>
-          <a:lstStyle/>
-          <a:p>
-            <a:pPr algn="ctr"/>
-            <a:r>
-              <a:rPr sz="1500" b="1" i="0" spc="-15">
-                <a:solidFill>
-                  <a:srgbClr val="FFFFFF"/>
-                </a:solidFill>
-                <a:latin typeface="Pretendard"/>
-                <a:ea typeface="Pretendard"/>
-                <a:cs typeface="Pretendard"/>
-              </a:rPr>
-              <a:t>5</a:t>
-            </a:r>
-          </a:p>
-        </p:txBody>
-      </p:sp>
-      <p:sp>
-        <p:nvSpPr>
-          <p:cNvPr id="40" name="TextBox 39"/>
-          <p:cNvSpPr txBox="1"/>
-          <p:nvPr/>
-        </p:nvSpPr>
-        <p:spPr>
-          <a:xfrm>
-            <a:off x="1348922" y="4417557"/>
-            <a:ext cx="1783080" cy="603504"/>
-          </a:xfrm>
-          <a:prstGeom prst="rect">
-            <a:avLst/>
-          </a:prstGeom>
-          <a:noFill/>
-        </p:spPr>
-        <p:txBody>
-          <a:bodyPr wrap="square" anchor="ctr" lIns="0" rIns="0" tIns="0" bIns="0">
-            <a:spAutoFit/>
-          </a:bodyPr>
-          <a:lstStyle/>
-          <a:p>
-            <a:pPr algn="l">
-              <a:lnSpc>
-                <a:spcPts val="1800"/>
-              </a:lnSpc>
-            </a:pPr>
-            <a:r>
-              <a:rPr sz="1500" b="1" i="0" spc="-15">
-                <a:solidFill>
-                  <a:srgbClr val="006241"/>
-                </a:solidFill>
-                <a:latin typeface="Pretendard"/>
-                <a:ea typeface="Pretendard"/>
-                <a:cs typeface="Pretendard"/>
-              </a:rPr>
-              <a:t>글 쓰며 인용</a:t>
-            </a:r>
-          </a:p>
-        </p:txBody>
-      </p:sp>
-      <p:sp>
-        <p:nvSpPr>
-          <p:cNvPr id="41" name="Rounded Rectangle 40"/>
-          <p:cNvSpPr/>
-          <p:nvPr/>
-        </p:nvSpPr>
-        <p:spPr>
-          <a:xfrm>
-            <a:off x="3177722" y="4536429"/>
-            <a:ext cx="4526280" cy="365760"/>
-          </a:xfrm>
-          <a:prstGeom prst="roundRect">
-            <a:avLst>
-              <a:gd name="adj" fmla="val 12000"/>
-            </a:avLst>
-          </a:prstGeom>
-          <a:solidFill>
-            <a:srgbClr val="F2F0EB"/>
-          </a:solidFill>
-          <a:ln>
-            <a:noFill/>
-          </a:ln>
-          <a:effectLst/>
-        </p:spPr>
-        <p:style>
-          <a:lnRef idx="1">
-            <a:schemeClr val="accent1"/>
-          </a:lnRef>
-          <a:fillRef idx="3">
-            <a:schemeClr val="accent1"/>
-          </a:fillRef>
-          <a:effectRef idx="2">
-            <a:schemeClr val="accent1"/>
-          </a:effectRef>
-          <a:fontRef idx="minor">
-            <a:schemeClr val="lt1"/>
-          </a:fontRef>
-        </p:style>
-        <p:txBody>
-          <a:bodyPr rtlCol="0" anchor="ctr"/>
-          <a:lstStyle/>
-          <a:p>
-            <a:pPr algn="ctr"/>
-          </a:p>
-        </p:txBody>
-      </p:sp>
-      <p:sp>
-        <p:nvSpPr>
-          <p:cNvPr id="42" name="TextBox 41"/>
-          <p:cNvSpPr txBox="1"/>
-          <p:nvPr/>
-        </p:nvSpPr>
-        <p:spPr>
-          <a:xfrm>
-            <a:off x="3314882" y="4536429"/>
-            <a:ext cx="4251960" cy="365760"/>
-          </a:xfrm>
-          <a:prstGeom prst="rect">
-            <a:avLst/>
-          </a:prstGeom>
-          <a:noFill/>
-        </p:spPr>
-        <p:txBody>
-          <a:bodyPr wrap="square" anchor="ctr" lIns="0" rIns="0" tIns="0" bIns="0">
-            <a:spAutoFit/>
-          </a:bodyPr>
-          <a:lstStyle/>
-          <a:p>
-            <a:pPr algn="l">
-              <a:lnSpc>
-                <a:spcPts val="1500"/>
-              </a:lnSpc>
-            </a:pPr>
-            <a:r>
-              <a:rPr sz="1200" b="1" i="0" spc="-12">
-                <a:solidFill>
-                  <a:srgbClr val="00754A"/>
-                </a:solidFill>
-                <a:latin typeface="Pretendard"/>
-                <a:ea typeface="Pretendard"/>
-                <a:cs typeface="Pretendard"/>
-              </a:rPr>
-              <a:t>본문에서  @  입력</a:t>
-            </a:r>
-          </a:p>
-        </p:txBody>
-      </p:sp>
-      <p:sp>
-        <p:nvSpPr>
-          <p:cNvPr id="43" name="TextBox 42"/>
-          <p:cNvSpPr txBox="1"/>
-          <p:nvPr/>
-        </p:nvSpPr>
-        <p:spPr>
-          <a:xfrm>
-            <a:off x="7932602" y="4417557"/>
-            <a:ext cx="3469782" cy="603504"/>
-          </a:xfrm>
-          <a:prstGeom prst="rect">
-            <a:avLst/>
-          </a:prstGeom>
-          <a:noFill/>
-        </p:spPr>
-        <p:txBody>
-          <a:bodyPr wrap="square" anchor="ctr" lIns="0" rIns="0" tIns="0" bIns="0">
-            <a:spAutoFit/>
-          </a:bodyPr>
-          <a:lstStyle/>
-          <a:p>
-            <a:pPr algn="l">
-              <a:lnSpc>
-                <a:spcPts val="1600"/>
-              </a:lnSpc>
-            </a:pPr>
-            <a:r>
-              <a:rPr sz="1250" b="0" i="0" spc="-12">
-                <a:solidFill>
-                  <a:srgbClr val="6B6B6B"/>
-                </a:solidFill>
-                <a:latin typeface="Pretendard"/>
-                <a:ea typeface="Pretendard"/>
-                <a:cs typeface="Pretendard"/>
-              </a:rPr>
-              <a:t>제목·저자로 골라 [@citekey] 자동완성 삽입</a:t>
-            </a:r>
-          </a:p>
-        </p:txBody>
-      </p:sp>
-      <p:sp>
-        <p:nvSpPr>
-          <p:cNvPr id="44" name="Rounded Rectangle 43"/>
-          <p:cNvSpPr/>
-          <p:nvPr/>
-        </p:nvSpPr>
-        <p:spPr>
-          <a:xfrm>
-            <a:off x="663122" y="5112501"/>
-            <a:ext cx="10876422" cy="603504"/>
-          </a:xfrm>
-          <a:prstGeom prst="roundRect">
-            <a:avLst>
-              <a:gd name="adj" fmla="val 8000"/>
-            </a:avLst>
-          </a:prstGeom>
-          <a:solidFill>
-            <a:srgbClr val="FFFFFF"/>
-          </a:solidFill>
-          <a:ln w="11430">
-            <a:solidFill>
-              <a:srgbClr val="D9D9D9"/>
-            </a:solidFill>
-          </a:ln>
-          <a:effectLst/>
-        </p:spPr>
-        <p:style>
-          <a:lnRef idx="1">
-            <a:schemeClr val="accent1"/>
-          </a:lnRef>
-          <a:fillRef idx="3">
-            <a:schemeClr val="accent1"/>
-          </a:fillRef>
-          <a:effectRef idx="2">
-            <a:schemeClr val="accent1"/>
-          </a:effectRef>
-          <a:fontRef idx="minor">
-            <a:schemeClr val="lt1"/>
-          </a:fontRef>
-        </p:style>
-        <p:txBody>
-          <a:bodyPr rtlCol="0" anchor="ctr"/>
-          <a:lstStyle/>
-          <a:p>
-            <a:pPr algn="ctr"/>
-          </a:p>
-        </p:txBody>
-      </p:sp>
-      <p:sp>
-        <p:nvSpPr>
-          <p:cNvPr id="45" name="Oval 44"/>
-          <p:cNvSpPr/>
-          <p:nvPr/>
-        </p:nvSpPr>
-        <p:spPr>
-          <a:xfrm>
-            <a:off x="864290" y="5231373"/>
-            <a:ext cx="365760" cy="365760"/>
-          </a:xfrm>
-          <a:prstGeom prst="ellipse">
-            <a:avLst/>
-          </a:prstGeom>
-          <a:solidFill>
-            <a:srgbClr val="00754A"/>
-          </a:solidFill>
-          <a:ln>
-            <a:noFill/>
-          </a:ln>
-          <a:effectLst/>
-        </p:spPr>
-        <p:style>
-          <a:lnRef idx="1">
-            <a:schemeClr val="accent1"/>
-          </a:lnRef>
-          <a:fillRef idx="3">
-            <a:schemeClr val="accent1"/>
-          </a:fillRef>
-          <a:effectRef idx="2">
-            <a:schemeClr val="accent1"/>
-          </a:effectRef>
-          <a:fontRef idx="minor">
-            <a:schemeClr val="lt1"/>
-          </a:fontRef>
-        </p:style>
-        <p:txBody>
-          <a:bodyPr rtlCol="0" anchor="ctr"/>
-          <a:lstStyle/>
-          <a:p>
-            <a:pPr algn="ctr"/>
-          </a:p>
-        </p:txBody>
-      </p:sp>
-      <p:sp>
-        <p:nvSpPr>
-          <p:cNvPr id="46" name="TextBox 45"/>
-          <p:cNvSpPr txBox="1"/>
-          <p:nvPr/>
-        </p:nvSpPr>
-        <p:spPr>
-          <a:xfrm>
-            <a:off x="864290" y="5231373"/>
-            <a:ext cx="365760" cy="365760"/>
-          </a:xfrm>
-          <a:prstGeom prst="rect">
-            <a:avLst/>
-          </a:prstGeom>
-          <a:noFill/>
-        </p:spPr>
-        <p:txBody>
-          <a:bodyPr wrap="square" anchor="ctr" lIns="0" rIns="0" tIns="0" bIns="0">
-            <a:spAutoFit/>
-          </a:bodyPr>
-          <a:lstStyle/>
-          <a:p>
-            <a:pPr algn="ctr"/>
-            <a:r>
-              <a:rPr sz="1500" b="1" i="0" spc="-15">
-                <a:solidFill>
-                  <a:srgbClr val="FFFFFF"/>
-                </a:solidFill>
-                <a:latin typeface="Pretendard"/>
-                <a:ea typeface="Pretendard"/>
-                <a:cs typeface="Pretendard"/>
-              </a:rPr>
-              <a:t>6</a:t>
-            </a:r>
-          </a:p>
-        </p:txBody>
-      </p:sp>
-      <p:sp>
-        <p:nvSpPr>
-          <p:cNvPr id="47" name="TextBox 46"/>
-          <p:cNvSpPr txBox="1"/>
-          <p:nvPr/>
-        </p:nvSpPr>
-        <p:spPr>
-          <a:xfrm>
-            <a:off x="1348922" y="5112501"/>
-            <a:ext cx="1783080" cy="603504"/>
-          </a:xfrm>
-          <a:prstGeom prst="rect">
-            <a:avLst/>
-          </a:prstGeom>
-          <a:noFill/>
-        </p:spPr>
-        <p:txBody>
-          <a:bodyPr wrap="square" anchor="ctr" lIns="0" rIns="0" tIns="0" bIns="0">
-            <a:spAutoFit/>
-          </a:bodyPr>
-          <a:lstStyle/>
-          <a:p>
-            <a:pPr algn="l">
-              <a:lnSpc>
-                <a:spcPts val="1800"/>
-              </a:lnSpc>
-            </a:pPr>
-            <a:r>
-              <a:rPr sz="1500" b="1" i="0" spc="-15">
-                <a:solidFill>
-                  <a:srgbClr val="006241"/>
-                </a:solidFill>
-                <a:latin typeface="Pretendard"/>
-                <a:ea typeface="Pretendard"/>
-                <a:cs typeface="Pretendard"/>
-              </a:rPr>
-              <a:t>참고문헌 생성</a:t>
-            </a:r>
-          </a:p>
-        </p:txBody>
-      </p:sp>
-      <p:sp>
-        <p:nvSpPr>
-          <p:cNvPr id="48" name="Rounded Rectangle 47"/>
-          <p:cNvSpPr/>
-          <p:nvPr/>
-        </p:nvSpPr>
-        <p:spPr>
-          <a:xfrm>
-            <a:off x="3177722" y="5231373"/>
-            <a:ext cx="4526280" cy="365760"/>
-          </a:xfrm>
-          <a:prstGeom prst="roundRect">
-            <a:avLst>
-              <a:gd name="adj" fmla="val 12000"/>
-            </a:avLst>
-          </a:prstGeom>
-          <a:solidFill>
-            <a:srgbClr val="F2F0EB"/>
-          </a:solidFill>
-          <a:ln>
-            <a:noFill/>
-          </a:ln>
-          <a:effectLst/>
-        </p:spPr>
-        <p:style>
-          <a:lnRef idx="1">
-            <a:schemeClr val="accent1"/>
-          </a:lnRef>
-          <a:fillRef idx="3">
-            <a:schemeClr val="accent1"/>
-          </a:fillRef>
-          <a:effectRef idx="2">
-            <a:schemeClr val="accent1"/>
-          </a:effectRef>
-          <a:fontRef idx="minor">
-            <a:schemeClr val="lt1"/>
-          </a:fontRef>
-        </p:style>
-        <p:txBody>
-          <a:bodyPr rtlCol="0" anchor="ctr"/>
-          <a:lstStyle/>
-          <a:p>
-            <a:pPr algn="ctr"/>
-          </a:p>
-        </p:txBody>
-      </p:sp>
-      <p:sp>
-        <p:nvSpPr>
-          <p:cNvPr id="49" name="TextBox 48"/>
-          <p:cNvSpPr txBox="1"/>
-          <p:nvPr/>
-        </p:nvSpPr>
-        <p:spPr>
-          <a:xfrm>
-            <a:off x="3314882" y="5231373"/>
-            <a:ext cx="4251960" cy="365760"/>
-          </a:xfrm>
-          <a:prstGeom prst="rect">
-            <a:avLst/>
-          </a:prstGeom>
-          <a:noFill/>
-        </p:spPr>
-        <p:txBody>
-          <a:bodyPr wrap="square" anchor="ctr" lIns="0" rIns="0" tIns="0" bIns="0">
-            <a:spAutoFit/>
-          </a:bodyPr>
-          <a:lstStyle/>
-          <a:p>
-            <a:pPr algn="l">
-              <a:lnSpc>
-                <a:spcPts val="1500"/>
-              </a:lnSpc>
-            </a:pPr>
-            <a:r>
-              <a:rPr sz="1200" b="1" i="0" spc="-12">
-                <a:solidFill>
-                  <a:srgbClr val="00754A"/>
-                </a:solidFill>
-                <a:latin typeface="Pretendard"/>
-                <a:ea typeface="Pretendard"/>
-                <a:cs typeface="Pretendard"/>
-              </a:rPr>
-              <a:t>“Update bibliography in current note”</a:t>
-            </a:r>
-          </a:p>
-        </p:txBody>
-      </p:sp>
-      <p:sp>
-        <p:nvSpPr>
-          <p:cNvPr id="50" name="TextBox 49"/>
-          <p:cNvSpPr txBox="1"/>
-          <p:nvPr/>
-        </p:nvSpPr>
-        <p:spPr>
-          <a:xfrm>
-            <a:off x="7932602" y="5112501"/>
-            <a:ext cx="3469782" cy="603504"/>
-          </a:xfrm>
-          <a:prstGeom prst="rect">
-            <a:avLst/>
-          </a:prstGeom>
-          <a:noFill/>
-        </p:spPr>
-        <p:txBody>
-          <a:bodyPr wrap="square" anchor="ctr" lIns="0" rIns="0" tIns="0" bIns="0">
-            <a:spAutoFit/>
-          </a:bodyPr>
-          <a:lstStyle/>
-          <a:p>
-            <a:pPr algn="l">
-              <a:lnSpc>
-                <a:spcPts val="1600"/>
-              </a:lnSpc>
-            </a:pPr>
-            <a:r>
-              <a:rPr sz="1250" b="0" i="0" spc="-12">
-                <a:solidFill>
-                  <a:srgbClr val="6B6B6B"/>
-                </a:solidFill>
-                <a:latin typeface="Pretendard"/>
-                <a:ea typeface="Pretendard"/>
-                <a:cs typeface="Pretendard"/>
-              </a:rPr>
-              <a:t>저널 스타일 자동 — 노트에 csl: 한 줄이면 교체 (1만+ 스타일 자동 다운로드)</a:t>
-            </a:r>
-          </a:p>
-        </p:txBody>
-      </p:sp>
-      <p:sp>
-        <p:nvSpPr>
-          <p:cNvPr id="51" name="Rounded Rectangle 50"/>
-          <p:cNvSpPr/>
-          <p:nvPr/>
-        </p:nvSpPr>
-        <p:spPr>
-          <a:xfrm>
-            <a:off x="571682" y="5859292"/>
-            <a:ext cx="11059302" cy="457200"/>
-          </a:xfrm>
-          <a:prstGeom prst="roundRect">
-            <a:avLst>
-              <a:gd name="adj" fmla="val 18000"/>
-            </a:avLst>
-          </a:prstGeom>
-          <a:solidFill>
-            <a:srgbClr val="1E3932"/>
-          </a:solidFill>
-          <a:ln>
-            <a:noFill/>
-          </a:ln>
-          <a:effectLst/>
-        </p:spPr>
-        <p:style>
-          <a:lnRef idx="1">
-            <a:schemeClr val="accent1"/>
-          </a:lnRef>
-          <a:fillRef idx="3">
-            <a:schemeClr val="accent1"/>
-          </a:fillRef>
-          <a:effectRef idx="2">
-            <a:schemeClr val="accent1"/>
-          </a:effectRef>
-          <a:fontRef idx="minor">
-            <a:schemeClr val="lt1"/>
-          </a:fontRef>
-        </p:style>
-        <p:txBody>
-          <a:bodyPr rtlCol="0" anchor="ctr"/>
-          <a:lstStyle/>
-          <a:p>
-            <a:pPr algn="ctr"/>
-          </a:p>
-        </p:txBody>
-      </p:sp>
-      <p:sp>
-        <p:nvSpPr>
-          <p:cNvPr id="52" name="TextBox 51"/>
+          <p:cNvPr id="38" name="TextBox 37"/>
           <p:cNvSpPr txBox="1"/>
           <p:nvPr/>
         </p:nvSpPr>
@@ -10161,13 +10378,13 @@
             <a:r>
               <a:rPr sz="1400" b="1" i="0" spc="-14">
                 <a:solidFill>
-                  <a:srgbClr val="FFFFFF"/>
-                </a:solidFill>
-                <a:latin typeface="Pretendard"/>
-                <a:ea typeface="Pretendard"/>
-                <a:cs typeface="Pretendard"/>
-              </a:rPr>
-              <a:t>전부 Cmd+P 한 곳에서 — 처음 딱 한 번 “Rebuild search index”로 색인만 만들어 두면 끝</a:t>
+                  <a:srgbClr val="006241"/>
+                </a:solidFill>
+                <a:latin typeface="Pretendard"/>
+                <a:ea typeface="Pretendard"/>
+                <a:cs typeface="Pretendard"/>
+              </a:rPr>
+              <a:t>추가 → 검색 → 질문 → 인용 → 참고문헌, 전부 Cmd+P 안에서.</a:t>
             </a:r>
           </a:p>
         </p:txBody>
@@ -10509,23 +10726,25 @@
       </p:sp>
       <p:sp>
         <p:nvSpPr>
-          <p:cNvPr id="10" name="Rectangle 9"/>
+          <p:cNvPr id="10" name="Rounded Rectangle 9"/>
           <p:cNvSpPr/>
           <p:nvPr/>
         </p:nvSpPr>
         <p:spPr>
           <a:xfrm>
-            <a:off x="663122" y="1747509"/>
-            <a:ext cx="2568229" cy="64008"/>
-          </a:xfrm>
-          <a:prstGeom prst="rect">
-            <a:avLst/>
-          </a:prstGeom>
-          <a:solidFill>
-            <a:srgbClr val="00754A"/>
-          </a:solidFill>
-          <a:ln>
-            <a:noFill/>
+            <a:off x="1078557" y="2003541"/>
+            <a:ext cx="1737360" cy="310896"/>
+          </a:xfrm>
+          <a:prstGeom prst="roundRect">
+            <a:avLst>
+              <a:gd name="adj" fmla="val 50000"/>
+            </a:avLst>
+          </a:prstGeom>
+          <a:noFill/>
+          <a:ln w="15875">
+            <a:solidFill>
+              <a:srgbClr val="00754A"/>
+            </a:solidFill>
           </a:ln>
           <a:effectLst/>
         </p:spPr>
@@ -10553,8 +10772,8 @@
       </p:sp>
       <p:sp>
         <p:nvSpPr>
-          <p:cNvPr id="11" name="Rounded Rectangle 10"/>
-          <p:cNvSpPr/>
+          <p:cNvPr id="11" name="TextBox 10"/>
+          <p:cNvSpPr txBox="1"/>
           <p:nvPr/>
         </p:nvSpPr>
         <p:spPr>
@@ -10562,81 +10781,35 @@
             <a:off x="1078557" y="2003541"/>
             <a:ext cx="1737360" cy="310896"/>
           </a:xfrm>
-          <a:prstGeom prst="roundRect">
-            <a:avLst>
-              <a:gd name="adj" fmla="val 50000"/>
-            </a:avLst>
-          </a:prstGeom>
-          <a:solidFill>
-            <a:srgbClr val="00754A"/>
-          </a:solidFill>
-          <a:ln>
-            <a:noFill/>
-          </a:ln>
-          <a:effectLst/>
-        </p:spPr>
-        <p:style>
-          <a:lnRef idx="1">
-            <a:schemeClr val="accent1"/>
-          </a:lnRef>
-          <a:fillRef idx="3">
-            <a:schemeClr val="accent1"/>
-          </a:fillRef>
-          <a:effectRef idx="2">
-            <a:schemeClr val="accent1"/>
-          </a:effectRef>
-          <a:fontRef idx="minor">
-            <a:schemeClr val="lt1"/>
-          </a:fontRef>
-        </p:style>
-        <p:txBody>
-          <a:bodyPr rtlCol="0" anchor="ctr"/>
+          <a:prstGeom prst="rect">
+            <a:avLst/>
+          </a:prstGeom>
+          <a:noFill/>
+        </p:spPr>
+        <p:txBody>
+          <a:bodyPr wrap="square" anchor="ctr" lIns="0" rIns="0" tIns="0" bIns="0">
+            <a:spAutoFit/>
+          </a:bodyPr>
           <a:lstStyle/>
           <a:p>
             <a:pPr algn="ctr"/>
+            <a:r>
+              <a:rPr sz="1100" b="1" i="0" spc="-11">
+                <a:solidFill>
+                  <a:srgbClr val="00754A"/>
+                </a:solidFill>
+                <a:latin typeface="Pretendard"/>
+                <a:ea typeface="Pretendard"/>
+                <a:cs typeface="Pretendard"/>
+              </a:rPr>
+              <a:t>EXPORT</a:t>
+            </a:r>
           </a:p>
         </p:txBody>
       </p:sp>
       <p:sp>
         <p:nvSpPr>
           <p:cNvPr id="12" name="TextBox 11"/>
-          <p:cNvSpPr txBox="1"/>
-          <p:nvPr/>
-        </p:nvSpPr>
-        <p:spPr>
-          <a:xfrm>
-            <a:off x="1078557" y="2003541"/>
-            <a:ext cx="1737360" cy="310896"/>
-          </a:xfrm>
-          <a:prstGeom prst="rect">
-            <a:avLst/>
-          </a:prstGeom>
-          <a:noFill/>
-        </p:spPr>
-        <p:txBody>
-          <a:bodyPr wrap="square" anchor="ctr" lIns="0" rIns="0" tIns="0" bIns="0">
-            <a:spAutoFit/>
-          </a:bodyPr>
-          <a:lstStyle/>
-          <a:p>
-            <a:pPr algn="ctr"/>
-            <a:r>
-              <a:rPr sz="1100" b="1" i="0" spc="-11">
-                <a:solidFill>
-                  <a:srgbClr val="FFFFFF"/>
-                </a:solidFill>
-                <a:latin typeface="Pretendard"/>
-                <a:ea typeface="Pretendard"/>
-                <a:cs typeface="Pretendard"/>
-              </a:rPr>
-              <a:t>MIGRATE</a:t>
-            </a:r>
-          </a:p>
-        </p:txBody>
-      </p:sp>
-      <p:sp>
-        <p:nvSpPr>
-          <p:cNvPr id="13" name="TextBox 12"/>
           <p:cNvSpPr txBox="1"/>
           <p:nvPr/>
         </p:nvSpPr>
@@ -10666,7 +10839,7 @@
                 <a:ea typeface="Pretendard"/>
                 <a:cs typeface="Pretendard"/>
               </a:rPr>
-              <a:t>이관</a:t>
+              <a:t>내보내기</a:t>
             </a:r>
           </a:p>
           <a:p>
@@ -10684,7 +10857,7 @@
                 <a:ea typeface="Pretendard"/>
                 <a:cs typeface="Pretendard"/>
               </a:rPr>
-              <a:t>Zotero·EndNote</a:t>
+              <a:t>lock-in 0</a:t>
             </a:r>
           </a:p>
           <a:p>
@@ -10705,16 +10878,16 @@
                 <a:ea typeface="Pretendard"/>
                 <a:cs typeface="Pretendard"/>
               </a:rPr>
-              <a:t>BibTeX/RIS/CSL-JSON
-한 번에 가져오고
-언제든 도로 내보내기</a:t>
-            </a:r>
-          </a:p>
-        </p:txBody>
-      </p:sp>
-      <p:sp>
-        <p:nvSpPr>
-          <p:cNvPr id="14" name="Rounded Rectangle 13"/>
+              <a:t>BibTeX/RIS/CSL-JSON로
+언제든 통째로 도로
+가져갈 수 있다</a:t>
+            </a:r>
+          </a:p>
+        </p:txBody>
+      </p:sp>
+      <p:sp>
+        <p:nvSpPr>
+          <p:cNvPr id="13" name="Rounded Rectangle 12"/>
           <p:cNvSpPr/>
           <p:nvPr/>
         </p:nvSpPr>
@@ -10762,23 +10935,25 @@
       </p:sp>
       <p:sp>
         <p:nvSpPr>
-          <p:cNvPr id="15" name="Rectangle 14"/>
+          <p:cNvPr id="14" name="Rounded Rectangle 13"/>
           <p:cNvSpPr/>
           <p:nvPr/>
         </p:nvSpPr>
         <p:spPr>
           <a:xfrm>
-            <a:off x="3432520" y="1747509"/>
-            <a:ext cx="2568229" cy="64008"/>
-          </a:xfrm>
-          <a:prstGeom prst="rect">
-            <a:avLst/>
-          </a:prstGeom>
-          <a:solidFill>
-            <a:srgbClr val="00754A"/>
-          </a:solidFill>
-          <a:ln>
-            <a:noFill/>
+            <a:off x="3847955" y="2003541"/>
+            <a:ext cx="1737360" cy="310896"/>
+          </a:xfrm>
+          <a:prstGeom prst="roundRect">
+            <a:avLst>
+              <a:gd name="adj" fmla="val 50000"/>
+            </a:avLst>
+          </a:prstGeom>
+          <a:noFill/>
+          <a:ln w="15875">
+            <a:solidFill>
+              <a:srgbClr val="00754A"/>
+            </a:solidFill>
           </a:ln>
           <a:effectLst/>
         </p:spPr>
@@ -10806,8 +10981,8 @@
       </p:sp>
       <p:sp>
         <p:nvSpPr>
-          <p:cNvPr id="16" name="Rounded Rectangle 15"/>
-          <p:cNvSpPr/>
+          <p:cNvPr id="15" name="TextBox 14"/>
+          <p:cNvSpPr txBox="1"/>
           <p:nvPr/>
         </p:nvSpPr>
         <p:spPr>
@@ -10815,68 +10990,22 @@
             <a:off x="3847955" y="2003541"/>
             <a:ext cx="1737360" cy="310896"/>
           </a:xfrm>
-          <a:prstGeom prst="roundRect">
-            <a:avLst>
-              <a:gd name="adj" fmla="val 50000"/>
-            </a:avLst>
-          </a:prstGeom>
-          <a:solidFill>
-            <a:srgbClr val="00754A"/>
-          </a:solidFill>
-          <a:ln>
-            <a:noFill/>
-          </a:ln>
-          <a:effectLst/>
-        </p:spPr>
-        <p:style>
-          <a:lnRef idx="1">
-            <a:schemeClr val="accent1"/>
-          </a:lnRef>
-          <a:fillRef idx="3">
-            <a:schemeClr val="accent1"/>
-          </a:fillRef>
-          <a:effectRef idx="2">
-            <a:schemeClr val="accent1"/>
-          </a:effectRef>
-          <a:fontRef idx="minor">
-            <a:schemeClr val="lt1"/>
-          </a:fontRef>
-        </p:style>
-        <p:txBody>
-          <a:bodyPr rtlCol="0" anchor="ctr"/>
+          <a:prstGeom prst="rect">
+            <a:avLst/>
+          </a:prstGeom>
+          <a:noFill/>
+        </p:spPr>
+        <p:txBody>
+          <a:bodyPr wrap="square" anchor="ctr" lIns="0" rIns="0" tIns="0" bIns="0">
+            <a:spAutoFit/>
+          </a:bodyPr>
           <a:lstStyle/>
           <a:p>
             <a:pPr algn="ctr"/>
-          </a:p>
-        </p:txBody>
-      </p:sp>
-      <p:sp>
-        <p:nvSpPr>
-          <p:cNvPr id="17" name="TextBox 16"/>
-          <p:cNvSpPr txBox="1"/>
-          <p:nvPr/>
-        </p:nvSpPr>
-        <p:spPr>
-          <a:xfrm>
-            <a:off x="3847955" y="2003541"/>
-            <a:ext cx="1737360" cy="310896"/>
-          </a:xfrm>
-          <a:prstGeom prst="rect">
-            <a:avLst/>
-          </a:prstGeom>
-          <a:noFill/>
-        </p:spPr>
-        <p:txBody>
-          <a:bodyPr wrap="square" anchor="ctr" lIns="0" rIns="0" tIns="0" bIns="0">
-            <a:spAutoFit/>
-          </a:bodyPr>
-          <a:lstStyle/>
-          <a:p>
-            <a:pPr algn="ctr"/>
             <a:r>
               <a:rPr sz="1100" b="1" i="0" spc="-11">
                 <a:solidFill>
-                  <a:srgbClr val="FFFFFF"/>
+                  <a:srgbClr val="00754A"/>
                 </a:solidFill>
                 <a:latin typeface="Pretendard"/>
                 <a:ea typeface="Pretendard"/>
@@ -10889,7 +11018,7 @@
       </p:sp>
       <p:sp>
         <p:nvSpPr>
-          <p:cNvPr id="18" name="TextBox 17"/>
+          <p:cNvPr id="16" name="TextBox 15"/>
           <p:cNvSpPr txBox="1"/>
           <p:nvPr/>
         </p:nvSpPr>
@@ -10958,16 +11087,15 @@
                 <a:ea typeface="Pretendard"/>
                 <a:cs typeface="Pretendard"/>
               </a:rPr>
-              <a:t>PubMed 추가 시 자동 요약
-(OA는 전문 기반)
-+ 진짜 MeSH 태그</a:t>
-            </a:r>
-          </a:p>
-        </p:txBody>
-      </p:sp>
-      <p:sp>
-        <p:nvSpPr>
-          <p:cNvPr id="19" name="Rounded Rectangle 18"/>
+              <a:t>추가 시 자동 요약·MeSH
+(OA는 전문 기반)</a:t>
+            </a:r>
+          </a:p>
+        </p:txBody>
+      </p:sp>
+      <p:sp>
+        <p:nvSpPr>
+          <p:cNvPr id="17" name="Rounded Rectangle 16"/>
           <p:cNvSpPr/>
           <p:nvPr/>
         </p:nvSpPr>
@@ -11015,23 +11143,25 @@
       </p:sp>
       <p:sp>
         <p:nvSpPr>
-          <p:cNvPr id="20" name="Rectangle 19"/>
+          <p:cNvPr id="18" name="Rounded Rectangle 17"/>
           <p:cNvSpPr/>
           <p:nvPr/>
         </p:nvSpPr>
         <p:spPr>
           <a:xfrm>
-            <a:off x="6201918" y="1747509"/>
-            <a:ext cx="2568229" cy="64008"/>
-          </a:xfrm>
-          <a:prstGeom prst="rect">
-            <a:avLst/>
-          </a:prstGeom>
-          <a:solidFill>
-            <a:srgbClr val="00754A"/>
-          </a:solidFill>
-          <a:ln>
-            <a:noFill/>
+            <a:off x="6617352" y="2003541"/>
+            <a:ext cx="1737360" cy="310896"/>
+          </a:xfrm>
+          <a:prstGeom prst="roundRect">
+            <a:avLst>
+              <a:gd name="adj" fmla="val 50000"/>
+            </a:avLst>
+          </a:prstGeom>
+          <a:noFill/>
+          <a:ln w="15875">
+            <a:solidFill>
+              <a:srgbClr val="00754A"/>
+            </a:solidFill>
           </a:ln>
           <a:effectLst/>
         </p:spPr>
@@ -11059,8 +11189,8 @@
       </p:sp>
       <p:sp>
         <p:nvSpPr>
-          <p:cNvPr id="21" name="Rounded Rectangle 20"/>
-          <p:cNvSpPr/>
+          <p:cNvPr id="19" name="TextBox 18"/>
+          <p:cNvSpPr txBox="1"/>
           <p:nvPr/>
         </p:nvSpPr>
         <p:spPr>
@@ -11068,68 +11198,22 @@
             <a:off x="6617352" y="2003541"/>
             <a:ext cx="1737360" cy="310896"/>
           </a:xfrm>
-          <a:prstGeom prst="roundRect">
-            <a:avLst>
-              <a:gd name="adj" fmla="val 50000"/>
-            </a:avLst>
-          </a:prstGeom>
-          <a:solidFill>
-            <a:srgbClr val="00754A"/>
-          </a:solidFill>
-          <a:ln>
-            <a:noFill/>
-          </a:ln>
-          <a:effectLst/>
-        </p:spPr>
-        <p:style>
-          <a:lnRef idx="1">
-            <a:schemeClr val="accent1"/>
-          </a:lnRef>
-          <a:fillRef idx="3">
-            <a:schemeClr val="accent1"/>
-          </a:fillRef>
-          <a:effectRef idx="2">
-            <a:schemeClr val="accent1"/>
-          </a:effectRef>
-          <a:fontRef idx="minor">
-            <a:schemeClr val="lt1"/>
-          </a:fontRef>
-        </p:style>
-        <p:txBody>
-          <a:bodyPr rtlCol="0" anchor="ctr"/>
+          <a:prstGeom prst="rect">
+            <a:avLst/>
+          </a:prstGeom>
+          <a:noFill/>
+        </p:spPr>
+        <p:txBody>
+          <a:bodyPr wrap="square" anchor="ctr" lIns="0" rIns="0" tIns="0" bIns="0">
+            <a:spAutoFit/>
+          </a:bodyPr>
           <a:lstStyle/>
           <a:p>
             <a:pPr algn="ctr"/>
-          </a:p>
-        </p:txBody>
-      </p:sp>
-      <p:sp>
-        <p:nvSpPr>
-          <p:cNvPr id="22" name="TextBox 21"/>
-          <p:cNvSpPr txBox="1"/>
-          <p:nvPr/>
-        </p:nvSpPr>
-        <p:spPr>
-          <a:xfrm>
-            <a:off x="6617352" y="2003541"/>
-            <a:ext cx="1737360" cy="310896"/>
-          </a:xfrm>
-          <a:prstGeom prst="rect">
-            <a:avLst/>
-          </a:prstGeom>
-          <a:noFill/>
-        </p:spPr>
-        <p:txBody>
-          <a:bodyPr wrap="square" anchor="ctr" lIns="0" rIns="0" tIns="0" bIns="0">
-            <a:spAutoFit/>
-          </a:bodyPr>
-          <a:lstStyle/>
-          <a:p>
-            <a:pPr algn="ctr"/>
             <a:r>
               <a:rPr sz="1100" b="1" i="0" spc="-11">
                 <a:solidFill>
-                  <a:srgbClr val="FFFFFF"/>
+                  <a:srgbClr val="00754A"/>
                 </a:solidFill>
                 <a:latin typeface="Pretendard"/>
                 <a:ea typeface="Pretendard"/>
@@ -11142,7 +11226,7 @@
       </p:sp>
       <p:sp>
         <p:nvSpPr>
-          <p:cNvPr id="23" name="TextBox 22"/>
+          <p:cNvPr id="20" name="TextBox 19"/>
           <p:cNvSpPr txBox="1"/>
           <p:nvPr/>
         </p:nvSpPr>
@@ -11220,7 +11304,7 @@
       </p:sp>
       <p:sp>
         <p:nvSpPr>
-          <p:cNvPr id="24" name="Rounded Rectangle 23"/>
+          <p:cNvPr id="21" name="Rounded Rectangle 20"/>
           <p:cNvSpPr/>
           <p:nvPr/>
         </p:nvSpPr>
@@ -11268,23 +11352,25 @@
       </p:sp>
       <p:sp>
         <p:nvSpPr>
-          <p:cNvPr id="25" name="Rectangle 24"/>
+          <p:cNvPr id="22" name="Rounded Rectangle 21"/>
           <p:cNvSpPr/>
           <p:nvPr/>
         </p:nvSpPr>
         <p:spPr>
           <a:xfrm>
-            <a:off x="8971315" y="1747509"/>
-            <a:ext cx="2568229" cy="64008"/>
-          </a:xfrm>
-          <a:prstGeom prst="rect">
-            <a:avLst/>
-          </a:prstGeom>
-          <a:solidFill>
-            <a:srgbClr val="00754A"/>
-          </a:solidFill>
-          <a:ln>
-            <a:noFill/>
+            <a:off x="9386750" y="2003541"/>
+            <a:ext cx="1737360" cy="310896"/>
+          </a:xfrm>
+          <a:prstGeom prst="roundRect">
+            <a:avLst>
+              <a:gd name="adj" fmla="val 50000"/>
+            </a:avLst>
+          </a:prstGeom>
+          <a:noFill/>
+          <a:ln w="15875">
+            <a:solidFill>
+              <a:srgbClr val="00754A"/>
+            </a:solidFill>
           </a:ln>
           <a:effectLst/>
         </p:spPr>
@@ -11312,8 +11398,8 @@
       </p:sp>
       <p:sp>
         <p:nvSpPr>
-          <p:cNvPr id="26" name="Rounded Rectangle 25"/>
-          <p:cNvSpPr/>
+          <p:cNvPr id="23" name="TextBox 22"/>
+          <p:cNvSpPr txBox="1"/>
           <p:nvPr/>
         </p:nvSpPr>
         <p:spPr>
@@ -11321,68 +11407,22 @@
             <a:off x="9386750" y="2003541"/>
             <a:ext cx="1737360" cy="310896"/>
           </a:xfrm>
-          <a:prstGeom prst="roundRect">
-            <a:avLst>
-              <a:gd name="adj" fmla="val 50000"/>
-            </a:avLst>
-          </a:prstGeom>
-          <a:solidFill>
-            <a:srgbClr val="00754A"/>
-          </a:solidFill>
-          <a:ln>
-            <a:noFill/>
-          </a:ln>
-          <a:effectLst/>
-        </p:spPr>
-        <p:style>
-          <a:lnRef idx="1">
-            <a:schemeClr val="accent1"/>
-          </a:lnRef>
-          <a:fillRef idx="3">
-            <a:schemeClr val="accent1"/>
-          </a:fillRef>
-          <a:effectRef idx="2">
-            <a:schemeClr val="accent1"/>
-          </a:effectRef>
-          <a:fontRef idx="minor">
-            <a:schemeClr val="lt1"/>
-          </a:fontRef>
-        </p:style>
-        <p:txBody>
-          <a:bodyPr rtlCol="0" anchor="ctr"/>
+          <a:prstGeom prst="rect">
+            <a:avLst/>
+          </a:prstGeom>
+          <a:noFill/>
+        </p:spPr>
+        <p:txBody>
+          <a:bodyPr wrap="square" anchor="ctr" lIns="0" rIns="0" tIns="0" bIns="0">
+            <a:spAutoFit/>
+          </a:bodyPr>
           <a:lstStyle/>
           <a:p>
             <a:pPr algn="ctr"/>
-          </a:p>
-        </p:txBody>
-      </p:sp>
-      <p:sp>
-        <p:nvSpPr>
-          <p:cNvPr id="27" name="TextBox 26"/>
-          <p:cNvSpPr txBox="1"/>
-          <p:nvPr/>
-        </p:nvSpPr>
-        <p:spPr>
-          <a:xfrm>
-            <a:off x="9386750" y="2003541"/>
-            <a:ext cx="1737360" cy="310896"/>
-          </a:xfrm>
-          <a:prstGeom prst="rect">
-            <a:avLst/>
-          </a:prstGeom>
-          <a:noFill/>
-        </p:spPr>
-        <p:txBody>
-          <a:bodyPr wrap="square" anchor="ctr" lIns="0" rIns="0" tIns="0" bIns="0">
-            <a:spAutoFit/>
-          </a:bodyPr>
-          <a:lstStyle/>
-          <a:p>
-            <a:pPr algn="ctr"/>
             <a:r>
               <a:rPr sz="1100" b="1" i="0" spc="-11">
                 <a:solidFill>
-                  <a:srgbClr val="FFFFFF"/>
+                  <a:srgbClr val="00754A"/>
                 </a:solidFill>
                 <a:latin typeface="Pretendard"/>
                 <a:ea typeface="Pretendard"/>
@@ -11395,7 +11435,7 @@
       </p:sp>
       <p:sp>
         <p:nvSpPr>
-          <p:cNvPr id="28" name="TextBox 27"/>
+          <p:cNvPr id="24" name="TextBox 23"/>
           <p:cNvSpPr txBox="1"/>
           <p:nvPr/>
         </p:nvSpPr>
@@ -11473,7 +11513,7 @@
       </p:sp>
       <p:sp>
         <p:nvSpPr>
-          <p:cNvPr id="29" name="Rounded Rectangle 28"/>
+          <p:cNvPr id="25" name="Rounded Rectangle 24"/>
           <p:cNvSpPr/>
           <p:nvPr/>
         </p:nvSpPr>
@@ -11487,11 +11527,11 @@
               <a:gd name="adj" fmla="val 18000"/>
             </a:avLst>
           </a:prstGeom>
-          <a:solidFill>
-            <a:srgbClr val="1E3932"/>
-          </a:solidFill>
-          <a:ln>
-            <a:noFill/>
+          <a:noFill/>
+          <a:ln w="19050">
+            <a:solidFill>
+              <a:srgbClr val="00754A"/>
+            </a:solidFill>
           </a:ln>
           <a:effectLst/>
         </p:spPr>
@@ -11519,7 +11559,7 @@
       </p:sp>
       <p:sp>
         <p:nvSpPr>
-          <p:cNvPr id="30" name="TextBox 29"/>
+          <p:cNvPr id="26" name="TextBox 25"/>
           <p:cNvSpPr txBox="1"/>
           <p:nvPr/>
         </p:nvSpPr>
@@ -11543,13 +11583,13 @@
             <a:r>
               <a:rPr sz="1400" b="1" i="0" spc="-14">
                 <a:solidFill>
-                  <a:srgbClr val="FFFFFF"/>
-                </a:solidFill>
-                <a:latin typeface="Pretendard"/>
-                <a:ea typeface="Pretendard"/>
-                <a:cs typeface="Pretendard"/>
-              </a:rPr>
-              <a:t>갈아타기 부담 0 (이관+내보내기) — 들어온 뒤엔 읽기·쓰기·투고까지 한 앱에서</a:t>
+                  <a:srgbClr val="006241"/>
+                </a:solidFill>
+                <a:latin typeface="Pretendard"/>
+                <a:ea typeface="Pretendard"/>
+                <a:cs typeface="Pretendard"/>
+              </a:rPr>
+              <a:t>lock-in 0 (언제든 내보내기) — 들어온 뒤엔 읽기·쓰기·투고까지 한 앱에서</a:t>
             </a:r>
           </a:p>
         </p:txBody>
@@ -11854,23 +11894,25 @@
       </p:sp>
       <p:sp>
         <p:nvSpPr>
-          <p:cNvPr id="9" name="Rectangle 8"/>
+          <p:cNvPr id="9" name="Rounded Rectangle 8"/>
           <p:cNvSpPr/>
           <p:nvPr/>
         </p:nvSpPr>
         <p:spPr>
           <a:xfrm>
-            <a:off x="663122" y="1747509"/>
-            <a:ext cx="3491362" cy="64008"/>
-          </a:xfrm>
-          <a:prstGeom prst="rect">
-            <a:avLst/>
-          </a:prstGeom>
-          <a:solidFill>
-            <a:srgbClr val="00754A"/>
-          </a:solidFill>
-          <a:ln>
-            <a:noFill/>
+            <a:off x="1540123" y="2003541"/>
+            <a:ext cx="1737360" cy="310896"/>
+          </a:xfrm>
+          <a:prstGeom prst="roundRect">
+            <a:avLst>
+              <a:gd name="adj" fmla="val 50000"/>
+            </a:avLst>
+          </a:prstGeom>
+          <a:noFill/>
+          <a:ln w="15875">
+            <a:solidFill>
+              <a:srgbClr val="00754A"/>
+            </a:solidFill>
           </a:ln>
           <a:effectLst/>
         </p:spPr>
@@ -11898,8 +11940,8 @@
       </p:sp>
       <p:sp>
         <p:nvSpPr>
-          <p:cNvPr id="10" name="Rounded Rectangle 9"/>
-          <p:cNvSpPr/>
+          <p:cNvPr id="10" name="TextBox 9"/>
+          <p:cNvSpPr txBox="1"/>
           <p:nvPr/>
         </p:nvSpPr>
         <p:spPr>
@@ -11907,81 +11949,35 @@
             <a:off x="1540123" y="2003541"/>
             <a:ext cx="1737360" cy="310896"/>
           </a:xfrm>
-          <a:prstGeom prst="roundRect">
-            <a:avLst>
-              <a:gd name="adj" fmla="val 50000"/>
-            </a:avLst>
-          </a:prstGeom>
-          <a:solidFill>
-            <a:srgbClr val="00754A"/>
-          </a:solidFill>
-          <a:ln>
-            <a:noFill/>
-          </a:ln>
-          <a:effectLst/>
-        </p:spPr>
-        <p:style>
-          <a:lnRef idx="1">
-            <a:schemeClr val="accent1"/>
-          </a:lnRef>
-          <a:fillRef idx="3">
-            <a:schemeClr val="accent1"/>
-          </a:fillRef>
-          <a:effectRef idx="2">
-            <a:schemeClr val="accent1"/>
-          </a:effectRef>
-          <a:fontRef idx="minor">
-            <a:schemeClr val="lt1"/>
-          </a:fontRef>
-        </p:style>
-        <p:txBody>
-          <a:bodyPr rtlCol="0" anchor="ctr"/>
+          <a:prstGeom prst="rect">
+            <a:avLst/>
+          </a:prstGeom>
+          <a:noFill/>
+        </p:spPr>
+        <p:txBody>
+          <a:bodyPr wrap="square" anchor="ctr" lIns="0" rIns="0" tIns="0" bIns="0">
+            <a:spAutoFit/>
+          </a:bodyPr>
           <a:lstStyle/>
           <a:p>
             <a:pPr algn="ctr"/>
+            <a:r>
+              <a:rPr sz="1100" b="1" i="0" spc="-11">
+                <a:solidFill>
+                  <a:srgbClr val="00754A"/>
+                </a:solidFill>
+                <a:latin typeface="Pretendard"/>
+                <a:ea typeface="Pretendard"/>
+                <a:cs typeface="Pretendard"/>
+              </a:rPr>
+              <a:t>OWN YOUR DATA</a:t>
+            </a:r>
           </a:p>
         </p:txBody>
       </p:sp>
       <p:sp>
         <p:nvSpPr>
           <p:cNvPr id="11" name="TextBox 10"/>
-          <p:cNvSpPr txBox="1"/>
-          <p:nvPr/>
-        </p:nvSpPr>
-        <p:spPr>
-          <a:xfrm>
-            <a:off x="1540123" y="2003541"/>
-            <a:ext cx="1737360" cy="310896"/>
-          </a:xfrm>
-          <a:prstGeom prst="rect">
-            <a:avLst/>
-          </a:prstGeom>
-          <a:noFill/>
-        </p:spPr>
-        <p:txBody>
-          <a:bodyPr wrap="square" anchor="ctr" lIns="0" rIns="0" tIns="0" bIns="0">
-            <a:spAutoFit/>
-          </a:bodyPr>
-          <a:lstStyle/>
-          <a:p>
-            <a:pPr algn="ctr"/>
-            <a:r>
-              <a:rPr sz="1100" b="1" i="0" spc="-11">
-                <a:solidFill>
-                  <a:srgbClr val="FFFFFF"/>
-                </a:solidFill>
-                <a:latin typeface="Pretendard"/>
-                <a:ea typeface="Pretendard"/>
-                <a:cs typeface="Pretendard"/>
-              </a:rPr>
-              <a:t>OWN YOUR DATA</a:t>
-            </a:r>
-          </a:p>
-        </p:txBody>
-      </p:sp>
-      <p:sp>
-        <p:nvSpPr>
-          <p:cNvPr id="12" name="TextBox 11"/>
           <p:cNvSpPr txBox="1"/>
           <p:nvPr/>
         </p:nvSpPr>
@@ -12058,7 +12054,7 @@
       </p:sp>
       <p:sp>
         <p:nvSpPr>
-          <p:cNvPr id="13" name="Rounded Rectangle 12"/>
+          <p:cNvPr id="12" name="Rounded Rectangle 11"/>
           <p:cNvSpPr/>
           <p:nvPr/>
         </p:nvSpPr>
@@ -12106,23 +12102,25 @@
       </p:sp>
       <p:sp>
         <p:nvSpPr>
-          <p:cNvPr id="14" name="Rectangle 13"/>
+          <p:cNvPr id="13" name="Rounded Rectangle 12"/>
           <p:cNvSpPr/>
           <p:nvPr/>
         </p:nvSpPr>
         <p:spPr>
           <a:xfrm>
-            <a:off x="4355652" y="1747509"/>
-            <a:ext cx="3491362" cy="64008"/>
-          </a:xfrm>
-          <a:prstGeom prst="rect">
-            <a:avLst/>
-          </a:prstGeom>
-          <a:solidFill>
-            <a:srgbClr val="00754A"/>
-          </a:solidFill>
-          <a:ln>
-            <a:noFill/>
+            <a:off x="5232654" y="2003541"/>
+            <a:ext cx="1737360" cy="310896"/>
+          </a:xfrm>
+          <a:prstGeom prst="roundRect">
+            <a:avLst>
+              <a:gd name="adj" fmla="val 50000"/>
+            </a:avLst>
+          </a:prstGeom>
+          <a:noFill/>
+          <a:ln w="15875">
+            <a:solidFill>
+              <a:srgbClr val="00754A"/>
+            </a:solidFill>
           </a:ln>
           <a:effectLst/>
         </p:spPr>
@@ -12150,8 +12148,8 @@
       </p:sp>
       <p:sp>
         <p:nvSpPr>
-          <p:cNvPr id="15" name="Rounded Rectangle 14"/>
-          <p:cNvSpPr/>
+          <p:cNvPr id="14" name="TextBox 13"/>
+          <p:cNvSpPr txBox="1"/>
           <p:nvPr/>
         </p:nvSpPr>
         <p:spPr>
@@ -12159,68 +12157,22 @@
             <a:off x="5232654" y="2003541"/>
             <a:ext cx="1737360" cy="310896"/>
           </a:xfrm>
-          <a:prstGeom prst="roundRect">
-            <a:avLst>
-              <a:gd name="adj" fmla="val 50000"/>
-            </a:avLst>
-          </a:prstGeom>
-          <a:solidFill>
-            <a:srgbClr val="00754A"/>
-          </a:solidFill>
-          <a:ln>
-            <a:noFill/>
-          </a:ln>
-          <a:effectLst/>
-        </p:spPr>
-        <p:style>
-          <a:lnRef idx="1">
-            <a:schemeClr val="accent1"/>
-          </a:lnRef>
-          <a:fillRef idx="3">
-            <a:schemeClr val="accent1"/>
-          </a:fillRef>
-          <a:effectRef idx="2">
-            <a:schemeClr val="accent1"/>
-          </a:effectRef>
-          <a:fontRef idx="minor">
-            <a:schemeClr val="lt1"/>
-          </a:fontRef>
-        </p:style>
-        <p:txBody>
-          <a:bodyPr rtlCol="0" anchor="ctr"/>
+          <a:prstGeom prst="rect">
+            <a:avLst/>
+          </a:prstGeom>
+          <a:noFill/>
+        </p:spPr>
+        <p:txBody>
+          <a:bodyPr wrap="square" anchor="ctr" lIns="0" rIns="0" tIns="0" bIns="0">
+            <a:spAutoFit/>
+          </a:bodyPr>
           <a:lstStyle/>
           <a:p>
             <a:pPr algn="ctr"/>
-          </a:p>
-        </p:txBody>
-      </p:sp>
-      <p:sp>
-        <p:nvSpPr>
-          <p:cNvPr id="16" name="TextBox 15"/>
-          <p:cNvSpPr txBox="1"/>
-          <p:nvPr/>
-        </p:nvSpPr>
-        <p:spPr>
-          <a:xfrm>
-            <a:off x="5232654" y="2003541"/>
-            <a:ext cx="1737360" cy="310896"/>
-          </a:xfrm>
-          <a:prstGeom prst="rect">
-            <a:avLst/>
-          </a:prstGeom>
-          <a:noFill/>
-        </p:spPr>
-        <p:txBody>
-          <a:bodyPr wrap="square" anchor="ctr" lIns="0" rIns="0" tIns="0" bIns="0">
-            <a:spAutoFit/>
-          </a:bodyPr>
-          <a:lstStyle/>
-          <a:p>
-            <a:pPr algn="ctr"/>
             <a:r>
               <a:rPr sz="1100" b="1" i="0" spc="-11">
                 <a:solidFill>
-                  <a:srgbClr val="FFFFFF"/>
+                  <a:srgbClr val="00754A"/>
                 </a:solidFill>
                 <a:latin typeface="Pretendard"/>
                 <a:ea typeface="Pretendard"/>
@@ -12233,7 +12185,7 @@
       </p:sp>
       <p:sp>
         <p:nvSpPr>
-          <p:cNvPr id="17" name="TextBox 16"/>
+          <p:cNvPr id="15" name="TextBox 14"/>
           <p:cNvSpPr txBox="1"/>
           <p:nvPr/>
         </p:nvSpPr>
@@ -12310,7 +12262,7 @@
       </p:sp>
       <p:sp>
         <p:nvSpPr>
-          <p:cNvPr id="18" name="Rounded Rectangle 17"/>
+          <p:cNvPr id="16" name="Rounded Rectangle 15"/>
           <p:cNvSpPr/>
           <p:nvPr/>
         </p:nvSpPr>
@@ -12358,23 +12310,25 @@
       </p:sp>
       <p:sp>
         <p:nvSpPr>
-          <p:cNvPr id="19" name="Rectangle 18"/>
+          <p:cNvPr id="17" name="Rounded Rectangle 16"/>
           <p:cNvSpPr/>
           <p:nvPr/>
         </p:nvSpPr>
         <p:spPr>
           <a:xfrm>
-            <a:off x="8048183" y="1747509"/>
-            <a:ext cx="3491362" cy="64008"/>
-          </a:xfrm>
-          <a:prstGeom prst="rect">
-            <a:avLst/>
-          </a:prstGeom>
-          <a:solidFill>
-            <a:srgbClr val="00754A"/>
-          </a:solidFill>
-          <a:ln>
-            <a:noFill/>
+            <a:off x="8925184" y="2003541"/>
+            <a:ext cx="1737360" cy="310896"/>
+          </a:xfrm>
+          <a:prstGeom prst="roundRect">
+            <a:avLst>
+              <a:gd name="adj" fmla="val 50000"/>
+            </a:avLst>
+          </a:prstGeom>
+          <a:noFill/>
+          <a:ln w="15875">
+            <a:solidFill>
+              <a:srgbClr val="00754A"/>
+            </a:solidFill>
           </a:ln>
           <a:effectLst/>
         </p:spPr>
@@ -12402,8 +12356,8 @@
       </p:sp>
       <p:sp>
         <p:nvSpPr>
-          <p:cNvPr id="20" name="Rounded Rectangle 19"/>
-          <p:cNvSpPr/>
+          <p:cNvPr id="18" name="TextBox 17"/>
+          <p:cNvSpPr txBox="1"/>
           <p:nvPr/>
         </p:nvSpPr>
         <p:spPr>
@@ -12411,68 +12365,22 @@
             <a:off x="8925184" y="2003541"/>
             <a:ext cx="1737360" cy="310896"/>
           </a:xfrm>
-          <a:prstGeom prst="roundRect">
-            <a:avLst>
-              <a:gd name="adj" fmla="val 50000"/>
-            </a:avLst>
-          </a:prstGeom>
-          <a:solidFill>
-            <a:srgbClr val="00754A"/>
-          </a:solidFill>
-          <a:ln>
-            <a:noFill/>
-          </a:ln>
-          <a:effectLst/>
-        </p:spPr>
-        <p:style>
-          <a:lnRef idx="1">
-            <a:schemeClr val="accent1"/>
-          </a:lnRef>
-          <a:fillRef idx="3">
-            <a:schemeClr val="accent1"/>
-          </a:fillRef>
-          <a:effectRef idx="2">
-            <a:schemeClr val="accent1"/>
-          </a:effectRef>
-          <a:fontRef idx="minor">
-            <a:schemeClr val="lt1"/>
-          </a:fontRef>
-        </p:style>
-        <p:txBody>
-          <a:bodyPr rtlCol="0" anchor="ctr"/>
+          <a:prstGeom prst="rect">
+            <a:avLst/>
+          </a:prstGeom>
+          <a:noFill/>
+        </p:spPr>
+        <p:txBody>
+          <a:bodyPr wrap="square" anchor="ctr" lIns="0" rIns="0" tIns="0" bIns="0">
+            <a:spAutoFit/>
+          </a:bodyPr>
           <a:lstStyle/>
           <a:p>
             <a:pPr algn="ctr"/>
-          </a:p>
-        </p:txBody>
-      </p:sp>
-      <p:sp>
-        <p:nvSpPr>
-          <p:cNvPr id="21" name="TextBox 20"/>
-          <p:cNvSpPr txBox="1"/>
-          <p:nvPr/>
-        </p:nvSpPr>
-        <p:spPr>
-          <a:xfrm>
-            <a:off x="8925184" y="2003541"/>
-            <a:ext cx="1737360" cy="310896"/>
-          </a:xfrm>
-          <a:prstGeom prst="rect">
-            <a:avLst/>
-          </a:prstGeom>
-          <a:noFill/>
-        </p:spPr>
-        <p:txBody>
-          <a:bodyPr wrap="square" anchor="ctr" lIns="0" rIns="0" tIns="0" bIns="0">
-            <a:spAutoFit/>
-          </a:bodyPr>
-          <a:lstStyle/>
-          <a:p>
-            <a:pPr algn="ctr"/>
             <a:r>
               <a:rPr sz="1100" b="1" i="0" spc="-11">
                 <a:solidFill>
-                  <a:srgbClr val="FFFFFF"/>
+                  <a:srgbClr val="00754A"/>
                 </a:solidFill>
                 <a:latin typeface="Pretendard"/>
                 <a:ea typeface="Pretendard"/>
@@ -12485,7 +12393,7 @@
       </p:sp>
       <p:sp>
         <p:nvSpPr>
-          <p:cNvPr id="22" name="TextBox 21"/>
+          <p:cNvPr id="19" name="TextBox 18"/>
           <p:cNvSpPr txBox="1"/>
           <p:nvPr/>
         </p:nvSpPr>
@@ -12562,7 +12470,7 @@
       </p:sp>
       <p:sp>
         <p:nvSpPr>
-          <p:cNvPr id="23" name="Rounded Rectangle 22"/>
+          <p:cNvPr id="20" name="Rounded Rectangle 19"/>
           <p:cNvSpPr/>
           <p:nvPr/>
         </p:nvSpPr>
@@ -12576,11 +12484,11 @@
               <a:gd name="adj" fmla="val 18000"/>
             </a:avLst>
           </a:prstGeom>
-          <a:solidFill>
-            <a:srgbClr val="1E3932"/>
-          </a:solidFill>
-          <a:ln>
-            <a:noFill/>
+          <a:noFill/>
+          <a:ln w="19050">
+            <a:solidFill>
+              <a:srgbClr val="00754A"/>
+            </a:solidFill>
           </a:ln>
           <a:effectLst/>
         </p:spPr>
@@ -12608,7 +12516,7 @@
       </p:sp>
       <p:sp>
         <p:nvSpPr>
-          <p:cNvPr id="24" name="TextBox 23"/>
+          <p:cNvPr id="21" name="TextBox 20"/>
           <p:cNvSpPr txBox="1"/>
           <p:nvPr/>
         </p:nvSpPr>
@@ -12632,7 +12540,7 @@
             <a:r>
               <a:rPr sz="1400" b="1" i="0" spc="-14">
                 <a:solidFill>
-                  <a:srgbClr val="FFFFFF"/>
+                  <a:srgbClr val="006241"/>
                 </a:solidFill>
                 <a:latin typeface="Pretendard"/>
                 <a:ea typeface="Pretendard"/>
@@ -12867,6 +12775,646 @@
 </p:sld>
 </file>
 
+<file path=ppt/slides/slide19.xml><?xml version="1.0" encoding="utf-8"?>
+<p:sld xmlns:a="http://schemas.openxmlformats.org/drawingml/2006/main" xmlns:p="http://schemas.openxmlformats.org/presentationml/2006/main" xmlns:r="http://schemas.openxmlformats.org/officeDocument/2006/relationships">
+  <p:cSld>
+    <p:spTree>
+      <p:nvGrpSpPr>
+        <p:cNvPr id="1" name=""/>
+        <p:cNvGrpSpPr/>
+        <p:nvPr/>
+      </p:nvGrpSpPr>
+      <p:grpSpPr/>
+      <p:sp>
+        <p:nvSpPr>
+          <p:cNvPr id="2" name="Rectangle 1"/>
+          <p:cNvSpPr/>
+          <p:nvPr/>
+        </p:nvSpPr>
+        <p:spPr>
+          <a:xfrm>
+            <a:off x="0" y="0"/>
+            <a:ext cx="12191695" cy="6858000"/>
+          </a:xfrm>
+          <a:prstGeom prst="rect">
+            <a:avLst/>
+          </a:prstGeom>
+          <a:solidFill>
+            <a:srgbClr val="F2F0EB"/>
+          </a:solidFill>
+          <a:ln>
+            <a:noFill/>
+          </a:ln>
+          <a:effectLst/>
+        </p:spPr>
+        <p:style>
+          <a:lnRef idx="1">
+            <a:schemeClr val="accent1"/>
+          </a:lnRef>
+          <a:fillRef idx="3">
+            <a:schemeClr val="accent1"/>
+          </a:fillRef>
+          <a:effectRef idx="2">
+            <a:schemeClr val="accent1"/>
+          </a:effectRef>
+          <a:fontRef idx="minor">
+            <a:schemeClr val="lt1"/>
+          </a:fontRef>
+        </p:style>
+        <p:txBody>
+          <a:bodyPr rtlCol="0" anchor="ctr"/>
+          <a:lstStyle/>
+          <a:p>
+            <a:pPr algn="ctr"/>
+          </a:p>
+        </p:txBody>
+      </p:sp>
+      <p:sp>
+        <p:nvSpPr>
+          <p:cNvPr id="3" name="TextBox 2"/>
+          <p:cNvSpPr txBox="1"/>
+          <p:nvPr/>
+        </p:nvSpPr>
+        <p:spPr>
+          <a:xfrm>
+            <a:off x="138257" y="123444"/>
+            <a:ext cx="5486400" cy="256032"/>
+          </a:xfrm>
+          <a:prstGeom prst="rect">
+            <a:avLst/>
+          </a:prstGeom>
+          <a:noFill/>
+        </p:spPr>
+        <p:txBody>
+          <a:bodyPr wrap="square" anchor="t" lIns="0" rIns="0" tIns="0" bIns="0">
+            <a:spAutoFit/>
+          </a:bodyPr>
+          <a:lstStyle/>
+          <a:p>
+            <a:pPr algn="l"/>
+            <a:r>
+              <a:rPr sz="1100" b="1" i="0" spc="-11">
+                <a:solidFill>
+                  <a:srgbClr val="8E8E93"/>
+                </a:solidFill>
+                <a:latin typeface="Pretendard"/>
+                <a:ea typeface="Pretendard"/>
+                <a:cs typeface="Pretendard"/>
+              </a:rPr>
+              <a:t>APPENDIX · Q&amp;A</a:t>
+            </a:r>
+          </a:p>
+        </p:txBody>
+      </p:sp>
+      <p:sp>
+        <p:nvSpPr>
+          <p:cNvPr id="4" name="TextBox 3"/>
+          <p:cNvSpPr txBox="1"/>
+          <p:nvPr/>
+        </p:nvSpPr>
+        <p:spPr>
+          <a:xfrm>
+            <a:off x="251642" y="436260"/>
+            <a:ext cx="10972800" cy="640080"/>
+          </a:xfrm>
+          <a:prstGeom prst="rect">
+            <a:avLst/>
+          </a:prstGeom>
+          <a:noFill/>
+        </p:spPr>
+        <p:txBody>
+          <a:bodyPr wrap="square" anchor="t" lIns="0" rIns="0" tIns="0" bIns="0">
+            <a:spAutoFit/>
+          </a:bodyPr>
+          <a:lstStyle/>
+          <a:p>
+            <a:pPr algn="l">
+              <a:lnSpc>
+                <a:spcPts val="3600"/>
+              </a:lnSpc>
+            </a:pPr>
+            <a:r>
+              <a:rPr sz="3000" b="1" i="0" spc="-30">
+                <a:solidFill>
+                  <a:srgbClr val="006241"/>
+                </a:solidFill>
+                <a:latin typeface="Pretendard"/>
+                <a:ea typeface="Pretendard"/>
+                <a:cs typeface="Pretendard"/>
+              </a:rPr>
+              <a:t>자주 나올 질문 ①</a:t>
+            </a:r>
+          </a:p>
+        </p:txBody>
+      </p:sp>
+      <p:pic>
+        <p:nvPicPr>
+          <p:cNvPr id="5" name="Picture 4" descr="logo.png"/>
+          <p:cNvPicPr>
+            <a:picLocks noChangeAspect="1"/>
+          </p:cNvPicPr>
+          <p:nvPr/>
+        </p:nvPicPr>
+        <p:blipFill>
+          <a:blip r:embed="rId2"/>
+          <a:srcRect l="3240" r="16360" t="21390" b="11330"/>
+          <a:stretch>
+            <a:fillRect/>
+          </a:stretch>
+        </p:blipFill>
+        <p:spPr>
+          <a:xfrm>
+            <a:off x="10748314" y="11978"/>
+            <a:ext cx="1443654" cy="798545"/>
+          </a:xfrm>
+          <a:prstGeom prst="rect">
+            <a:avLst/>
+          </a:prstGeom>
+        </p:spPr>
+      </p:pic>
+      <p:sp>
+        <p:nvSpPr>
+          <p:cNvPr id="6" name="Rounded Rectangle 5"/>
+          <p:cNvSpPr/>
+          <p:nvPr/>
+        </p:nvSpPr>
+        <p:spPr>
+          <a:xfrm>
+            <a:off x="251642" y="1290309"/>
+            <a:ext cx="11699382" cy="5227350"/>
+          </a:xfrm>
+          <a:prstGeom prst="roundRect">
+            <a:avLst>
+              <a:gd name="adj" fmla="val 3500"/>
+            </a:avLst>
+          </a:prstGeom>
+          <a:solidFill>
+            <a:srgbClr val="FFFFFF"/>
+          </a:solidFill>
+          <a:ln w="9525">
+            <a:solidFill>
+              <a:srgbClr val="D9D9D9"/>
+            </a:solidFill>
+          </a:ln>
+          <a:effectLst/>
+        </p:spPr>
+        <p:style>
+          <a:lnRef idx="1">
+            <a:schemeClr val="accent1"/>
+          </a:lnRef>
+          <a:fillRef idx="3">
+            <a:schemeClr val="accent1"/>
+          </a:fillRef>
+          <a:effectRef idx="2">
+            <a:schemeClr val="accent1"/>
+          </a:effectRef>
+          <a:fontRef idx="minor">
+            <a:schemeClr val="lt1"/>
+          </a:fontRef>
+        </p:style>
+        <p:txBody>
+          <a:bodyPr rtlCol="0" anchor="ctr"/>
+          <a:lstStyle/>
+          <a:p>
+            <a:pPr algn="ctr"/>
+          </a:p>
+        </p:txBody>
+      </p:sp>
+      <p:sp>
+        <p:nvSpPr>
+          <p:cNvPr id="7" name="TextBox 6"/>
+          <p:cNvSpPr txBox="1"/>
+          <p:nvPr/>
+        </p:nvSpPr>
+        <p:spPr>
+          <a:xfrm>
+            <a:off x="138257" y="6620256"/>
+            <a:ext cx="548640" cy="228600"/>
+          </a:xfrm>
+          <a:prstGeom prst="rect">
+            <a:avLst/>
+          </a:prstGeom>
+          <a:noFill/>
+        </p:spPr>
+        <p:txBody>
+          <a:bodyPr wrap="square" anchor="t" lIns="0" rIns="0" tIns="0" bIns="0">
+            <a:spAutoFit/>
+          </a:bodyPr>
+          <a:lstStyle/>
+          <a:p>
+            <a:pPr algn="l"/>
+            <a:r>
+              <a:rPr sz="900" b="0" i="0" spc="-9">
+                <a:solidFill>
+                  <a:srgbClr val="8E8E93"/>
+                </a:solidFill>
+                <a:latin typeface="Pretendard"/>
+                <a:ea typeface="Pretendard"/>
+                <a:cs typeface="Pretendard"/>
+              </a:rPr>
+              <a:t>19</a:t>
+            </a:r>
+          </a:p>
+        </p:txBody>
+      </p:sp>
+      <p:sp>
+        <p:nvSpPr>
+          <p:cNvPr id="8" name="Rounded Rectangle 7"/>
+          <p:cNvSpPr/>
+          <p:nvPr/>
+        </p:nvSpPr>
+        <p:spPr>
+          <a:xfrm>
+            <a:off x="663122" y="1656069"/>
+            <a:ext cx="10876422" cy="1364498"/>
+          </a:xfrm>
+          <a:prstGeom prst="roundRect">
+            <a:avLst>
+              <a:gd name="adj" fmla="val 6000"/>
+            </a:avLst>
+          </a:prstGeom>
+          <a:noFill/>
+          <a:ln w="11430">
+            <a:solidFill>
+              <a:srgbClr val="D9D9D9"/>
+            </a:solidFill>
+          </a:ln>
+          <a:effectLst/>
+        </p:spPr>
+        <p:style>
+          <a:lnRef idx="1">
+            <a:schemeClr val="accent1"/>
+          </a:lnRef>
+          <a:fillRef idx="3">
+            <a:schemeClr val="accent1"/>
+          </a:fillRef>
+          <a:effectRef idx="2">
+            <a:schemeClr val="accent1"/>
+          </a:effectRef>
+          <a:fontRef idx="minor">
+            <a:schemeClr val="lt1"/>
+          </a:fontRef>
+        </p:style>
+        <p:txBody>
+          <a:bodyPr rtlCol="0" anchor="ctr"/>
+          <a:lstStyle/>
+          <a:p>
+            <a:pPr algn="ctr"/>
+          </a:p>
+        </p:txBody>
+      </p:sp>
+      <p:sp>
+        <p:nvSpPr>
+          <p:cNvPr id="9" name="TextBox 8"/>
+          <p:cNvSpPr txBox="1"/>
+          <p:nvPr/>
+        </p:nvSpPr>
+        <p:spPr>
+          <a:xfrm>
+            <a:off x="1028882" y="1656069"/>
+            <a:ext cx="10144902" cy="1364498"/>
+          </a:xfrm>
+          <a:prstGeom prst="rect">
+            <a:avLst/>
+          </a:prstGeom>
+          <a:noFill/>
+        </p:spPr>
+        <p:txBody>
+          <a:bodyPr wrap="square" anchor="ctr" lIns="0" rIns="0" tIns="0" bIns="0">
+            <a:spAutoFit/>
+          </a:bodyPr>
+          <a:lstStyle/>
+          <a:p>
+            <a:pPr algn="l">
+              <a:lnSpc>
+                <a:spcPts val="2000"/>
+              </a:lnSpc>
+            </a:pPr>
+            <a:r>
+              <a:rPr sz="1500" b="1" i="0" spc="-15">
+                <a:solidFill>
+                  <a:srgbClr val="006241"/>
+                </a:solidFill>
+                <a:latin typeface="Pretendard"/>
+                <a:ea typeface="Pretendard"/>
+                <a:cs typeface="Pretendard"/>
+              </a:rPr>
+              <a:t>Q.  </a:t>
+            </a:r>
+            <a:r>
+              <a:rPr sz="1500" b="1" i="0" spc="-15">
+                <a:solidFill>
+                  <a:srgbClr val="006241"/>
+                </a:solidFill>
+                <a:latin typeface="Pretendard"/>
+                <a:ea typeface="Pretendard"/>
+                <a:cs typeface="Pretendard"/>
+              </a:rPr>
+              <a:t>Zotero랑 뭐가 다른가요?</a:t>
+            </a:r>
+          </a:p>
+          <a:p>
+            <a:pPr algn="l">
+              <a:lnSpc>
+                <a:spcPts val="1700"/>
+              </a:lnSpc>
+              <a:spcBef>
+                <a:spcPts val="600"/>
+              </a:spcBef>
+            </a:pPr>
+            <a:r>
+              <a:rPr sz="1250" b="1" i="0" spc="-12">
+                <a:solidFill>
+                  <a:srgbClr val="00754A"/>
+                </a:solidFill>
+                <a:latin typeface="Pretendard"/>
+                <a:ea typeface="Pretendard"/>
+                <a:cs typeface="Pretendard"/>
+              </a:rPr>
+              <a:t>A.  </a:t>
+            </a:r>
+            <a:r>
+              <a:rPr sz="1250" b="0" i="0" spc="-12">
+                <a:solidFill>
+                  <a:srgbClr val="1F1F1F"/>
+                </a:solidFill>
+                <a:latin typeface="Pretendard"/>
+                <a:ea typeface="Pretendard"/>
+                <a:cs typeface="Pretendard"/>
+              </a:rPr>
+              <a:t>Zotero는 별도 앱+별도 DB. 여기선 글 쓰는 Obsidian 노트 자체가 서지 DB라 한 곳에서 끝나고, AI 근거 검색이 기본 내장.</a:t>
+            </a:r>
+          </a:p>
+        </p:txBody>
+      </p:sp>
+      <p:sp>
+        <p:nvSpPr>
+          <p:cNvPr id="10" name="Rounded Rectangle 9"/>
+          <p:cNvSpPr/>
+          <p:nvPr/>
+        </p:nvSpPr>
+        <p:spPr>
+          <a:xfrm>
+            <a:off x="663122" y="3221736"/>
+            <a:ext cx="10876422" cy="1364498"/>
+          </a:xfrm>
+          <a:prstGeom prst="roundRect">
+            <a:avLst>
+              <a:gd name="adj" fmla="val 6000"/>
+            </a:avLst>
+          </a:prstGeom>
+          <a:noFill/>
+          <a:ln w="11430">
+            <a:solidFill>
+              <a:srgbClr val="D9D9D9"/>
+            </a:solidFill>
+          </a:ln>
+          <a:effectLst/>
+        </p:spPr>
+        <p:style>
+          <a:lnRef idx="1">
+            <a:schemeClr val="accent1"/>
+          </a:lnRef>
+          <a:fillRef idx="3">
+            <a:schemeClr val="accent1"/>
+          </a:fillRef>
+          <a:effectRef idx="2">
+            <a:schemeClr val="accent1"/>
+          </a:effectRef>
+          <a:fontRef idx="minor">
+            <a:schemeClr val="lt1"/>
+          </a:fontRef>
+        </p:style>
+        <p:txBody>
+          <a:bodyPr rtlCol="0" anchor="ctr"/>
+          <a:lstStyle/>
+          <a:p>
+            <a:pPr algn="ctr"/>
+          </a:p>
+        </p:txBody>
+      </p:sp>
+      <p:sp>
+        <p:nvSpPr>
+          <p:cNvPr id="11" name="TextBox 10"/>
+          <p:cNvSpPr txBox="1"/>
+          <p:nvPr/>
+        </p:nvSpPr>
+        <p:spPr>
+          <a:xfrm>
+            <a:off x="1028882" y="3221736"/>
+            <a:ext cx="10144902" cy="1364498"/>
+          </a:xfrm>
+          <a:prstGeom prst="rect">
+            <a:avLst/>
+          </a:prstGeom>
+          <a:noFill/>
+        </p:spPr>
+        <p:txBody>
+          <a:bodyPr wrap="square" anchor="ctr" lIns="0" rIns="0" tIns="0" bIns="0">
+            <a:spAutoFit/>
+          </a:bodyPr>
+          <a:lstStyle/>
+          <a:p>
+            <a:pPr algn="l">
+              <a:lnSpc>
+                <a:spcPts val="2000"/>
+              </a:lnSpc>
+            </a:pPr>
+            <a:r>
+              <a:rPr sz="1500" b="1" i="0" spc="-15">
+                <a:solidFill>
+                  <a:srgbClr val="006241"/>
+                </a:solidFill>
+                <a:latin typeface="Pretendard"/>
+                <a:ea typeface="Pretendard"/>
+                <a:cs typeface="Pretendard"/>
+              </a:rPr>
+              <a:t>Q.  </a:t>
+            </a:r>
+            <a:r>
+              <a:rPr sz="1500" b="1" i="0" spc="-15">
+                <a:solidFill>
+                  <a:srgbClr val="006241"/>
+                </a:solidFill>
+                <a:latin typeface="Pretendard"/>
+                <a:ea typeface="Pretendard"/>
+                <a:cs typeface="Pretendard"/>
+              </a:rPr>
+              <a:t>오프라인에서도 되나요?</a:t>
+            </a:r>
+          </a:p>
+          <a:p>
+            <a:pPr algn="l">
+              <a:lnSpc>
+                <a:spcPts val="1700"/>
+              </a:lnSpc>
+              <a:spcBef>
+                <a:spcPts val="600"/>
+              </a:spcBef>
+            </a:pPr>
+            <a:r>
+              <a:rPr sz="1250" b="1" i="0" spc="-12">
+                <a:solidFill>
+                  <a:srgbClr val="00754A"/>
+                </a:solidFill>
+                <a:latin typeface="Pretendard"/>
+                <a:ea typeface="Pretendard"/>
+                <a:cs typeface="Pretendard"/>
+              </a:rPr>
+              <a:t>A.  </a:t>
+            </a:r>
+            <a:r>
+              <a:rPr sz="1250" b="0" i="0" spc="-12">
+                <a:solidFill>
+                  <a:srgbClr val="1F1F1F"/>
+                </a:solidFill>
+                <a:latin typeface="Pretendard"/>
+                <a:ea typeface="Pretendard"/>
+                <a:cs typeface="Pretendard"/>
+              </a:rPr>
+              <a:t>검색·색인은 전부 로컬. 임베딩도 로컬(Ollama) 가능. 네트워크는 메타데이터 가져오기와 인용 그래프(OpenAlex)뿐.</a:t>
+            </a:r>
+          </a:p>
+        </p:txBody>
+      </p:sp>
+      <p:sp>
+        <p:nvSpPr>
+          <p:cNvPr id="12" name="Rounded Rectangle 11"/>
+          <p:cNvSpPr/>
+          <p:nvPr/>
+        </p:nvSpPr>
+        <p:spPr>
+          <a:xfrm>
+            <a:off x="663122" y="4787402"/>
+            <a:ext cx="10876422" cy="1364498"/>
+          </a:xfrm>
+          <a:prstGeom prst="roundRect">
+            <a:avLst>
+              <a:gd name="adj" fmla="val 6000"/>
+            </a:avLst>
+          </a:prstGeom>
+          <a:noFill/>
+          <a:ln w="11430">
+            <a:solidFill>
+              <a:srgbClr val="D9D9D9"/>
+            </a:solidFill>
+          </a:ln>
+          <a:effectLst/>
+        </p:spPr>
+        <p:style>
+          <a:lnRef idx="1">
+            <a:schemeClr val="accent1"/>
+          </a:lnRef>
+          <a:fillRef idx="3">
+            <a:schemeClr val="accent1"/>
+          </a:fillRef>
+          <a:effectRef idx="2">
+            <a:schemeClr val="accent1"/>
+          </a:effectRef>
+          <a:fontRef idx="minor">
+            <a:schemeClr val="lt1"/>
+          </a:fontRef>
+        </p:style>
+        <p:txBody>
+          <a:bodyPr rtlCol="0" anchor="ctr"/>
+          <a:lstStyle/>
+          <a:p>
+            <a:pPr algn="ctr"/>
+          </a:p>
+        </p:txBody>
+      </p:sp>
+      <p:sp>
+        <p:nvSpPr>
+          <p:cNvPr id="13" name="TextBox 12"/>
+          <p:cNvSpPr txBox="1"/>
+          <p:nvPr/>
+        </p:nvSpPr>
+        <p:spPr>
+          <a:xfrm>
+            <a:off x="1028882" y="4787402"/>
+            <a:ext cx="10144902" cy="1364498"/>
+          </a:xfrm>
+          <a:prstGeom prst="rect">
+            <a:avLst/>
+          </a:prstGeom>
+          <a:noFill/>
+        </p:spPr>
+        <p:txBody>
+          <a:bodyPr wrap="square" anchor="ctr" lIns="0" rIns="0" tIns="0" bIns="0">
+            <a:spAutoFit/>
+          </a:bodyPr>
+          <a:lstStyle/>
+          <a:p>
+            <a:pPr algn="l">
+              <a:lnSpc>
+                <a:spcPts val="2000"/>
+              </a:lnSpc>
+            </a:pPr>
+            <a:r>
+              <a:rPr sz="1500" b="1" i="0" spc="-15">
+                <a:solidFill>
+                  <a:srgbClr val="006241"/>
+                </a:solidFill>
+                <a:latin typeface="Pretendard"/>
+                <a:ea typeface="Pretendard"/>
+                <a:cs typeface="Pretendard"/>
+              </a:rPr>
+              <a:t>Q.  </a:t>
+            </a:r>
+            <a:r>
+              <a:rPr sz="1500" b="1" i="0" spc="-15">
+                <a:solidFill>
+                  <a:srgbClr val="006241"/>
+                </a:solidFill>
+                <a:latin typeface="Pretendard"/>
+                <a:ea typeface="Pretendard"/>
+                <a:cs typeface="Pretendard"/>
+              </a:rPr>
+              <a:t>내 데이터는 어디에 저장되나요?</a:t>
+            </a:r>
+          </a:p>
+          <a:p>
+            <a:pPr algn="l">
+              <a:lnSpc>
+                <a:spcPts val="1700"/>
+              </a:lnSpc>
+              <a:spcBef>
+                <a:spcPts val="600"/>
+              </a:spcBef>
+            </a:pPr>
+            <a:r>
+              <a:rPr sz="1250" b="1" i="0" spc="-12">
+                <a:solidFill>
+                  <a:srgbClr val="00754A"/>
+                </a:solidFill>
+                <a:latin typeface="Pretendard"/>
+                <a:ea typeface="Pretendard"/>
+                <a:cs typeface="Pretendard"/>
+              </a:rPr>
+              <a:t>A.  </a:t>
+            </a:r>
+            <a:r>
+              <a:rPr sz="1250" b="0" i="0" spc="-12">
+                <a:solidFill>
+                  <a:srgbClr val="1F1F1F"/>
+                </a:solidFill>
+                <a:latin typeface="Pretendard"/>
+                <a:ea typeface="Pretendard"/>
+                <a:cs typeface="Pretendard"/>
+              </a:rPr>
+              <a:t>전부 내 vault 안 평문 마크다운. 외부 서버 없음 — 내가 키를 넣은 LLM 호출만 예외.</a:t>
+            </a:r>
+          </a:p>
+        </p:txBody>
+      </p:sp>
+    </p:spTree>
+  </p:cSld>
+  <p:clrMapOvr>
+    <a:masterClrMapping/>
+  </p:clrMapOvr>
+</p:sld>
+</file>
+
 <file path=ppt/slides/slide2.xml><?xml version="1.0" encoding="utf-8"?>
 <p:sld xmlns:a="http://schemas.openxmlformats.org/drawingml/2006/main" xmlns:p="http://schemas.openxmlformats.org/presentationml/2006/main" xmlns:r="http://schemas.openxmlformats.org/officeDocument/2006/relationships">
   <p:cSld>
@@ -13116,6 +13664,646 @@
                 <a:cs typeface="Pretendard"/>
               </a:rPr>
               <a:t>AI에 물으면 그럴듯한 답 — 인용은 지어낸 것. 정작 내 서재는 뜻으로 못 뒤진다.</a:t>
+            </a:r>
+          </a:p>
+        </p:txBody>
+      </p:sp>
+    </p:spTree>
+  </p:cSld>
+  <p:clrMapOvr>
+    <a:masterClrMapping/>
+  </p:clrMapOvr>
+</p:sld>
+</file>
+
+<file path=ppt/slides/slide20.xml><?xml version="1.0" encoding="utf-8"?>
+<p:sld xmlns:a="http://schemas.openxmlformats.org/drawingml/2006/main" xmlns:p="http://schemas.openxmlformats.org/presentationml/2006/main" xmlns:r="http://schemas.openxmlformats.org/officeDocument/2006/relationships">
+  <p:cSld>
+    <p:spTree>
+      <p:nvGrpSpPr>
+        <p:cNvPr id="1" name=""/>
+        <p:cNvGrpSpPr/>
+        <p:nvPr/>
+      </p:nvGrpSpPr>
+      <p:grpSpPr/>
+      <p:sp>
+        <p:nvSpPr>
+          <p:cNvPr id="2" name="Rectangle 1"/>
+          <p:cNvSpPr/>
+          <p:nvPr/>
+        </p:nvSpPr>
+        <p:spPr>
+          <a:xfrm>
+            <a:off x="0" y="0"/>
+            <a:ext cx="12191695" cy="6858000"/>
+          </a:xfrm>
+          <a:prstGeom prst="rect">
+            <a:avLst/>
+          </a:prstGeom>
+          <a:solidFill>
+            <a:srgbClr val="F2F0EB"/>
+          </a:solidFill>
+          <a:ln>
+            <a:noFill/>
+          </a:ln>
+          <a:effectLst/>
+        </p:spPr>
+        <p:style>
+          <a:lnRef idx="1">
+            <a:schemeClr val="accent1"/>
+          </a:lnRef>
+          <a:fillRef idx="3">
+            <a:schemeClr val="accent1"/>
+          </a:fillRef>
+          <a:effectRef idx="2">
+            <a:schemeClr val="accent1"/>
+          </a:effectRef>
+          <a:fontRef idx="minor">
+            <a:schemeClr val="lt1"/>
+          </a:fontRef>
+        </p:style>
+        <p:txBody>
+          <a:bodyPr rtlCol="0" anchor="ctr"/>
+          <a:lstStyle/>
+          <a:p>
+            <a:pPr algn="ctr"/>
+          </a:p>
+        </p:txBody>
+      </p:sp>
+      <p:sp>
+        <p:nvSpPr>
+          <p:cNvPr id="3" name="TextBox 2"/>
+          <p:cNvSpPr txBox="1"/>
+          <p:nvPr/>
+        </p:nvSpPr>
+        <p:spPr>
+          <a:xfrm>
+            <a:off x="138257" y="123444"/>
+            <a:ext cx="5486400" cy="256032"/>
+          </a:xfrm>
+          <a:prstGeom prst="rect">
+            <a:avLst/>
+          </a:prstGeom>
+          <a:noFill/>
+        </p:spPr>
+        <p:txBody>
+          <a:bodyPr wrap="square" anchor="t" lIns="0" rIns="0" tIns="0" bIns="0">
+            <a:spAutoFit/>
+          </a:bodyPr>
+          <a:lstStyle/>
+          <a:p>
+            <a:pPr algn="l"/>
+            <a:r>
+              <a:rPr sz="1100" b="1" i="0" spc="-11">
+                <a:solidFill>
+                  <a:srgbClr val="8E8E93"/>
+                </a:solidFill>
+                <a:latin typeface="Pretendard"/>
+                <a:ea typeface="Pretendard"/>
+                <a:cs typeface="Pretendard"/>
+              </a:rPr>
+              <a:t>APPENDIX · Q&amp;A</a:t>
+            </a:r>
+          </a:p>
+        </p:txBody>
+      </p:sp>
+      <p:sp>
+        <p:nvSpPr>
+          <p:cNvPr id="4" name="TextBox 3"/>
+          <p:cNvSpPr txBox="1"/>
+          <p:nvPr/>
+        </p:nvSpPr>
+        <p:spPr>
+          <a:xfrm>
+            <a:off x="251642" y="436260"/>
+            <a:ext cx="10972800" cy="640080"/>
+          </a:xfrm>
+          <a:prstGeom prst="rect">
+            <a:avLst/>
+          </a:prstGeom>
+          <a:noFill/>
+        </p:spPr>
+        <p:txBody>
+          <a:bodyPr wrap="square" anchor="t" lIns="0" rIns="0" tIns="0" bIns="0">
+            <a:spAutoFit/>
+          </a:bodyPr>
+          <a:lstStyle/>
+          <a:p>
+            <a:pPr algn="l">
+              <a:lnSpc>
+                <a:spcPts val="3600"/>
+              </a:lnSpc>
+            </a:pPr>
+            <a:r>
+              <a:rPr sz="3000" b="1" i="0" spc="-30">
+                <a:solidFill>
+                  <a:srgbClr val="006241"/>
+                </a:solidFill>
+                <a:latin typeface="Pretendard"/>
+                <a:ea typeface="Pretendard"/>
+                <a:cs typeface="Pretendard"/>
+              </a:rPr>
+              <a:t>자주 나올 질문 ②</a:t>
+            </a:r>
+          </a:p>
+        </p:txBody>
+      </p:sp>
+      <p:pic>
+        <p:nvPicPr>
+          <p:cNvPr id="5" name="Picture 4" descr="logo.png"/>
+          <p:cNvPicPr>
+            <a:picLocks noChangeAspect="1"/>
+          </p:cNvPicPr>
+          <p:nvPr/>
+        </p:nvPicPr>
+        <p:blipFill>
+          <a:blip r:embed="rId2"/>
+          <a:srcRect l="3240" r="16360" t="21390" b="11330"/>
+          <a:stretch>
+            <a:fillRect/>
+          </a:stretch>
+        </p:blipFill>
+        <p:spPr>
+          <a:xfrm>
+            <a:off x="10748314" y="11978"/>
+            <a:ext cx="1443654" cy="798545"/>
+          </a:xfrm>
+          <a:prstGeom prst="rect">
+            <a:avLst/>
+          </a:prstGeom>
+        </p:spPr>
+      </p:pic>
+      <p:sp>
+        <p:nvSpPr>
+          <p:cNvPr id="6" name="Rounded Rectangle 5"/>
+          <p:cNvSpPr/>
+          <p:nvPr/>
+        </p:nvSpPr>
+        <p:spPr>
+          <a:xfrm>
+            <a:off x="251642" y="1290309"/>
+            <a:ext cx="11699382" cy="5227350"/>
+          </a:xfrm>
+          <a:prstGeom prst="roundRect">
+            <a:avLst>
+              <a:gd name="adj" fmla="val 3500"/>
+            </a:avLst>
+          </a:prstGeom>
+          <a:solidFill>
+            <a:srgbClr val="FFFFFF"/>
+          </a:solidFill>
+          <a:ln w="9525">
+            <a:solidFill>
+              <a:srgbClr val="D9D9D9"/>
+            </a:solidFill>
+          </a:ln>
+          <a:effectLst/>
+        </p:spPr>
+        <p:style>
+          <a:lnRef idx="1">
+            <a:schemeClr val="accent1"/>
+          </a:lnRef>
+          <a:fillRef idx="3">
+            <a:schemeClr val="accent1"/>
+          </a:fillRef>
+          <a:effectRef idx="2">
+            <a:schemeClr val="accent1"/>
+          </a:effectRef>
+          <a:fontRef idx="minor">
+            <a:schemeClr val="lt1"/>
+          </a:fontRef>
+        </p:style>
+        <p:txBody>
+          <a:bodyPr rtlCol="0" anchor="ctr"/>
+          <a:lstStyle/>
+          <a:p>
+            <a:pPr algn="ctr"/>
+          </a:p>
+        </p:txBody>
+      </p:sp>
+      <p:sp>
+        <p:nvSpPr>
+          <p:cNvPr id="7" name="TextBox 6"/>
+          <p:cNvSpPr txBox="1"/>
+          <p:nvPr/>
+        </p:nvSpPr>
+        <p:spPr>
+          <a:xfrm>
+            <a:off x="138257" y="6620256"/>
+            <a:ext cx="548640" cy="228600"/>
+          </a:xfrm>
+          <a:prstGeom prst="rect">
+            <a:avLst/>
+          </a:prstGeom>
+          <a:noFill/>
+        </p:spPr>
+        <p:txBody>
+          <a:bodyPr wrap="square" anchor="t" lIns="0" rIns="0" tIns="0" bIns="0">
+            <a:spAutoFit/>
+          </a:bodyPr>
+          <a:lstStyle/>
+          <a:p>
+            <a:pPr algn="l"/>
+            <a:r>
+              <a:rPr sz="900" b="0" i="0" spc="-9">
+                <a:solidFill>
+                  <a:srgbClr val="8E8E93"/>
+                </a:solidFill>
+                <a:latin typeface="Pretendard"/>
+                <a:ea typeface="Pretendard"/>
+                <a:cs typeface="Pretendard"/>
+              </a:rPr>
+              <a:t>20</a:t>
+            </a:r>
+          </a:p>
+        </p:txBody>
+      </p:sp>
+      <p:sp>
+        <p:nvSpPr>
+          <p:cNvPr id="8" name="Rounded Rectangle 7"/>
+          <p:cNvSpPr/>
+          <p:nvPr/>
+        </p:nvSpPr>
+        <p:spPr>
+          <a:xfrm>
+            <a:off x="663122" y="1656069"/>
+            <a:ext cx="10876422" cy="1364498"/>
+          </a:xfrm>
+          <a:prstGeom prst="roundRect">
+            <a:avLst>
+              <a:gd name="adj" fmla="val 6000"/>
+            </a:avLst>
+          </a:prstGeom>
+          <a:noFill/>
+          <a:ln w="11430">
+            <a:solidFill>
+              <a:srgbClr val="D9D9D9"/>
+            </a:solidFill>
+          </a:ln>
+          <a:effectLst/>
+        </p:spPr>
+        <p:style>
+          <a:lnRef idx="1">
+            <a:schemeClr val="accent1"/>
+          </a:lnRef>
+          <a:fillRef idx="3">
+            <a:schemeClr val="accent1"/>
+          </a:fillRef>
+          <a:effectRef idx="2">
+            <a:schemeClr val="accent1"/>
+          </a:effectRef>
+          <a:fontRef idx="minor">
+            <a:schemeClr val="lt1"/>
+          </a:fontRef>
+        </p:style>
+        <p:txBody>
+          <a:bodyPr rtlCol="0" anchor="ctr"/>
+          <a:lstStyle/>
+          <a:p>
+            <a:pPr algn="ctr"/>
+          </a:p>
+        </p:txBody>
+      </p:sp>
+      <p:sp>
+        <p:nvSpPr>
+          <p:cNvPr id="9" name="TextBox 8"/>
+          <p:cNvSpPr txBox="1"/>
+          <p:nvPr/>
+        </p:nvSpPr>
+        <p:spPr>
+          <a:xfrm>
+            <a:off x="1028882" y="1656069"/>
+            <a:ext cx="10144902" cy="1364498"/>
+          </a:xfrm>
+          <a:prstGeom prst="rect">
+            <a:avLst/>
+          </a:prstGeom>
+          <a:noFill/>
+        </p:spPr>
+        <p:txBody>
+          <a:bodyPr wrap="square" anchor="ctr" lIns="0" rIns="0" tIns="0" bIns="0">
+            <a:spAutoFit/>
+          </a:bodyPr>
+          <a:lstStyle/>
+          <a:p>
+            <a:pPr algn="l">
+              <a:lnSpc>
+                <a:spcPts val="2000"/>
+              </a:lnSpc>
+            </a:pPr>
+            <a:r>
+              <a:rPr sz="1500" b="1" i="0" spc="-15">
+                <a:solidFill>
+                  <a:srgbClr val="006241"/>
+                </a:solidFill>
+                <a:latin typeface="Pretendard"/>
+                <a:ea typeface="Pretendard"/>
+                <a:cs typeface="Pretendard"/>
+              </a:rPr>
+              <a:t>Q.  </a:t>
+            </a:r>
+            <a:r>
+              <a:rPr sz="1500" b="1" i="0" spc="-15">
+                <a:solidFill>
+                  <a:srgbClr val="006241"/>
+                </a:solidFill>
+                <a:latin typeface="Pretendard"/>
+                <a:ea typeface="Pretendard"/>
+                <a:cs typeface="Pretendard"/>
+              </a:rPr>
+              <a:t>SNOMED·MeSH 같은 의학 용어체계도 되나요?</a:t>
+            </a:r>
+          </a:p>
+          <a:p>
+            <a:pPr algn="l">
+              <a:lnSpc>
+                <a:spcPts val="1700"/>
+              </a:lnSpc>
+              <a:spcBef>
+                <a:spcPts val="600"/>
+              </a:spcBef>
+            </a:pPr>
+            <a:r>
+              <a:rPr sz="1250" b="1" i="0" spc="-12">
+                <a:solidFill>
+                  <a:srgbClr val="00754A"/>
+                </a:solidFill>
+                <a:latin typeface="Pretendard"/>
+                <a:ea typeface="Pretendard"/>
+                <a:cs typeface="Pretendard"/>
+              </a:rPr>
+              <a:t>A.  </a:t>
+            </a:r>
+            <a:r>
+              <a:rPr sz="1250" b="0" i="0" spc="-12">
+                <a:solidFill>
+                  <a:srgbClr val="1F1F1F"/>
+                </a:solidFill>
+                <a:latin typeface="Pretendard"/>
+                <a:ea typeface="Pretendard"/>
+                <a:cs typeface="Pretendard"/>
+              </a:rPr>
+              <a:t>온톨로지 팩(JSON)으로 장착. IS_A 계층·동의어 링크 지원. PubMed 추가 시 MeSH 태그는 기본.</a:t>
+            </a:r>
+          </a:p>
+        </p:txBody>
+      </p:sp>
+      <p:sp>
+        <p:nvSpPr>
+          <p:cNvPr id="10" name="Rounded Rectangle 9"/>
+          <p:cNvSpPr/>
+          <p:nvPr/>
+        </p:nvSpPr>
+        <p:spPr>
+          <a:xfrm>
+            <a:off x="663122" y="3221736"/>
+            <a:ext cx="10876422" cy="1364498"/>
+          </a:xfrm>
+          <a:prstGeom prst="roundRect">
+            <a:avLst>
+              <a:gd name="adj" fmla="val 6000"/>
+            </a:avLst>
+          </a:prstGeom>
+          <a:noFill/>
+          <a:ln w="11430">
+            <a:solidFill>
+              <a:srgbClr val="D9D9D9"/>
+            </a:solidFill>
+          </a:ln>
+          <a:effectLst/>
+        </p:spPr>
+        <p:style>
+          <a:lnRef idx="1">
+            <a:schemeClr val="accent1"/>
+          </a:lnRef>
+          <a:fillRef idx="3">
+            <a:schemeClr val="accent1"/>
+          </a:fillRef>
+          <a:effectRef idx="2">
+            <a:schemeClr val="accent1"/>
+          </a:effectRef>
+          <a:fontRef idx="minor">
+            <a:schemeClr val="lt1"/>
+          </a:fontRef>
+        </p:style>
+        <p:txBody>
+          <a:bodyPr rtlCol="0" anchor="ctr"/>
+          <a:lstStyle/>
+          <a:p>
+            <a:pPr algn="ctr"/>
+          </a:p>
+        </p:txBody>
+      </p:sp>
+      <p:sp>
+        <p:nvSpPr>
+          <p:cNvPr id="11" name="TextBox 10"/>
+          <p:cNvSpPr txBox="1"/>
+          <p:nvPr/>
+        </p:nvSpPr>
+        <p:spPr>
+          <a:xfrm>
+            <a:off x="1028882" y="3221736"/>
+            <a:ext cx="10144902" cy="1364498"/>
+          </a:xfrm>
+          <a:prstGeom prst="rect">
+            <a:avLst/>
+          </a:prstGeom>
+          <a:noFill/>
+        </p:spPr>
+        <p:txBody>
+          <a:bodyPr wrap="square" anchor="ctr" lIns="0" rIns="0" tIns="0" bIns="0">
+            <a:spAutoFit/>
+          </a:bodyPr>
+          <a:lstStyle/>
+          <a:p>
+            <a:pPr algn="l">
+              <a:lnSpc>
+                <a:spcPts val="2000"/>
+              </a:lnSpc>
+            </a:pPr>
+            <a:r>
+              <a:rPr sz="1500" b="1" i="0" spc="-15">
+                <a:solidFill>
+                  <a:srgbClr val="006241"/>
+                </a:solidFill>
+                <a:latin typeface="Pretendard"/>
+                <a:ea typeface="Pretendard"/>
+                <a:cs typeface="Pretendard"/>
+              </a:rPr>
+              <a:t>Q.  </a:t>
+            </a:r>
+            <a:r>
+              <a:rPr sz="1500" b="1" i="0" spc="-15">
+                <a:solidFill>
+                  <a:srgbClr val="006241"/>
+                </a:solidFill>
+                <a:latin typeface="Pretendard"/>
+                <a:ea typeface="Pretendard"/>
+                <a:cs typeface="Pretendard"/>
+              </a:rPr>
+              <a:t>수천 편짜리 큰 서재도 버티나요?</a:t>
+            </a:r>
+          </a:p>
+          <a:p>
+            <a:pPr algn="l">
+              <a:lnSpc>
+                <a:spcPts val="1700"/>
+              </a:lnSpc>
+              <a:spcBef>
+                <a:spcPts val="600"/>
+              </a:spcBef>
+            </a:pPr>
+            <a:r>
+              <a:rPr sz="1250" b="1" i="0" spc="-12">
+                <a:solidFill>
+                  <a:srgbClr val="00754A"/>
+                </a:solidFill>
+                <a:latin typeface="Pretendard"/>
+                <a:ea typeface="Pretendard"/>
+                <a:cs typeface="Pretendard"/>
+              </a:rPr>
+              <a:t>A.  </a:t>
+            </a:r>
+            <a:r>
+              <a:rPr sz="1250" b="0" i="0" spc="-12">
+                <a:solidFill>
+                  <a:srgbClr val="1F1F1F"/>
+                </a:solidFill>
+                <a:latin typeface="Pretendard"/>
+                <a:ea typeface="Pretendard"/>
+                <a:cs typeface="Pretendard"/>
+              </a:rPr>
+              <a:t>수백~수천 편 타깃. 색인이 인메모리라 아주 큰 vault는 추후 sqlite-vec 교체 예정.</a:t>
+            </a:r>
+          </a:p>
+        </p:txBody>
+      </p:sp>
+      <p:sp>
+        <p:nvSpPr>
+          <p:cNvPr id="12" name="Rounded Rectangle 11"/>
+          <p:cNvSpPr/>
+          <p:nvPr/>
+        </p:nvSpPr>
+        <p:spPr>
+          <a:xfrm>
+            <a:off x="663122" y="4787402"/>
+            <a:ext cx="10876422" cy="1364498"/>
+          </a:xfrm>
+          <a:prstGeom prst="roundRect">
+            <a:avLst>
+              <a:gd name="adj" fmla="val 6000"/>
+            </a:avLst>
+          </a:prstGeom>
+          <a:noFill/>
+          <a:ln w="11430">
+            <a:solidFill>
+              <a:srgbClr val="D9D9D9"/>
+            </a:solidFill>
+          </a:ln>
+          <a:effectLst/>
+        </p:spPr>
+        <p:style>
+          <a:lnRef idx="1">
+            <a:schemeClr val="accent1"/>
+          </a:lnRef>
+          <a:fillRef idx="3">
+            <a:schemeClr val="accent1"/>
+          </a:fillRef>
+          <a:effectRef idx="2">
+            <a:schemeClr val="accent1"/>
+          </a:effectRef>
+          <a:fontRef idx="minor">
+            <a:schemeClr val="lt1"/>
+          </a:fontRef>
+        </p:style>
+        <p:txBody>
+          <a:bodyPr rtlCol="0" anchor="ctr"/>
+          <a:lstStyle/>
+          <a:p>
+            <a:pPr algn="ctr"/>
+          </a:p>
+        </p:txBody>
+      </p:sp>
+      <p:sp>
+        <p:nvSpPr>
+          <p:cNvPr id="13" name="TextBox 12"/>
+          <p:cNvSpPr txBox="1"/>
+          <p:nvPr/>
+        </p:nvSpPr>
+        <p:spPr>
+          <a:xfrm>
+            <a:off x="1028882" y="4787402"/>
+            <a:ext cx="10144902" cy="1364498"/>
+          </a:xfrm>
+          <a:prstGeom prst="rect">
+            <a:avLst/>
+          </a:prstGeom>
+          <a:noFill/>
+        </p:spPr>
+        <p:txBody>
+          <a:bodyPr wrap="square" anchor="ctr" lIns="0" rIns="0" tIns="0" bIns="0">
+            <a:spAutoFit/>
+          </a:bodyPr>
+          <a:lstStyle/>
+          <a:p>
+            <a:pPr algn="l">
+              <a:lnSpc>
+                <a:spcPts val="2000"/>
+              </a:lnSpc>
+            </a:pPr>
+            <a:r>
+              <a:rPr sz="1500" b="1" i="0" spc="-15">
+                <a:solidFill>
+                  <a:srgbClr val="006241"/>
+                </a:solidFill>
+                <a:latin typeface="Pretendard"/>
+                <a:ea typeface="Pretendard"/>
+                <a:cs typeface="Pretendard"/>
+              </a:rPr>
+              <a:t>Q.  </a:t>
+            </a:r>
+            <a:r>
+              <a:rPr sz="1500" b="1" i="0" spc="-15">
+                <a:solidFill>
+                  <a:srgbClr val="006241"/>
+                </a:solidFill>
+                <a:latin typeface="Pretendard"/>
+                <a:ea typeface="Pretendard"/>
+                <a:cs typeface="Pretendard"/>
+              </a:rPr>
+              <a:t>가짜 인용(환각)은 정말 없나요?</a:t>
+            </a:r>
+          </a:p>
+          <a:p>
+            <a:pPr algn="l">
+              <a:lnSpc>
+                <a:spcPts val="1700"/>
+              </a:lnSpc>
+              <a:spcBef>
+                <a:spcPts val="600"/>
+              </a:spcBef>
+            </a:pPr>
+            <a:r>
+              <a:rPr sz="1250" b="1" i="0" spc="-12">
+                <a:solidFill>
+                  <a:srgbClr val="00754A"/>
+                </a:solidFill>
+                <a:latin typeface="Pretendard"/>
+                <a:ea typeface="Pretendard"/>
+                <a:cs typeface="Pretendard"/>
+              </a:rPr>
+              <a:t>A.  </a:t>
+            </a:r>
+            <a:r>
+              <a:rPr sz="1250" b="0" i="0" spc="-12">
+                <a:solidFill>
+                  <a:srgbClr val="1F1F1F"/>
+                </a:solidFill>
+                <a:latin typeface="Pretendard"/>
+                <a:ea typeface="Pretendard"/>
+                <a:cs typeface="Pretendard"/>
+              </a:rPr>
+              <a:t>답을 서재 구절에만 근거하게 강제하고 [n]은 실제 노트에 연결. 근거 없으면 "근거 없음"이라 답하게 설계.</a:t>
             </a:r>
           </a:p>
         </p:txBody>
@@ -13796,11 +14984,11 @@
               <a:gd name="adj" fmla="val 18000"/>
             </a:avLst>
           </a:prstGeom>
-          <a:solidFill>
-            <a:srgbClr val="1E3932"/>
-          </a:solidFill>
-          <a:ln>
-            <a:noFill/>
+          <a:noFill/>
+          <a:ln w="19050">
+            <a:solidFill>
+              <a:srgbClr val="00754A"/>
+            </a:solidFill>
           </a:ln>
           <a:effectLst/>
         </p:spPr>
@@ -13852,7 +15040,7 @@
             <a:r>
               <a:rPr sz="1400" b="1" i="0" spc="-14">
                 <a:solidFill>
-                  <a:srgbClr val="FFFFFF"/>
+                  <a:srgbClr val="006241"/>
                 </a:solidFill>
                 <a:latin typeface="Pretendard"/>
                 <a:ea typeface="Pretendard"/>
@@ -14883,11 +16071,11 @@
           <a:prstGeom prst="ellipse">
             <a:avLst/>
           </a:prstGeom>
-          <a:solidFill>
-            <a:srgbClr val="00754A"/>
-          </a:solidFill>
-          <a:ln>
-            <a:noFill/>
+          <a:noFill/>
+          <a:ln w="19050">
+            <a:solidFill>
+              <a:srgbClr val="00754A"/>
+            </a:solidFill>
           </a:ln>
           <a:effectLst/>
         </p:spPr>
@@ -14939,7 +16127,7 @@
             <a:r>
               <a:rPr sz="1600" b="1" i="0" spc="-16">
                 <a:solidFill>
-                  <a:srgbClr val="FFFFFF"/>
+                  <a:srgbClr val="00754A"/>
                 </a:solidFill>
                 <a:latin typeface="Pretendard"/>
                 <a:ea typeface="Pretendard"/>
@@ -15026,11 +16214,11 @@
           <a:prstGeom prst="ellipse">
             <a:avLst/>
           </a:prstGeom>
-          <a:solidFill>
-            <a:srgbClr val="00754A"/>
-          </a:solidFill>
-          <a:ln>
-            <a:noFill/>
+          <a:noFill/>
+          <a:ln w="19050">
+            <a:solidFill>
+              <a:srgbClr val="00754A"/>
+            </a:solidFill>
           </a:ln>
           <a:effectLst/>
         </p:spPr>
@@ -15082,7 +16270,7 @@
             <a:r>
               <a:rPr sz="1600" b="1" i="0" spc="-16">
                 <a:solidFill>
-                  <a:srgbClr val="FFFFFF"/>
+                  <a:srgbClr val="00754A"/>
                 </a:solidFill>
                 <a:latin typeface="Pretendard"/>
                 <a:ea typeface="Pretendard"/>
@@ -15169,11 +16357,11 @@
           <a:prstGeom prst="ellipse">
             <a:avLst/>
           </a:prstGeom>
-          <a:solidFill>
-            <a:srgbClr val="00754A"/>
-          </a:solidFill>
-          <a:ln>
-            <a:noFill/>
+          <a:noFill/>
+          <a:ln w="19050">
+            <a:solidFill>
+              <a:srgbClr val="00754A"/>
+            </a:solidFill>
           </a:ln>
           <a:effectLst/>
         </p:spPr>
@@ -15225,7 +16413,7 @@
             <a:r>
               <a:rPr sz="1600" b="1" i="0" spc="-16">
                 <a:solidFill>
-                  <a:srgbClr val="FFFFFF"/>
+                  <a:srgbClr val="00754A"/>
                 </a:solidFill>
                 <a:latin typeface="Pretendard"/>
                 <a:ea typeface="Pretendard"/>
@@ -15314,11 +16502,11 @@
               <a:gd name="adj" fmla="val 18000"/>
             </a:avLst>
           </a:prstGeom>
-          <a:solidFill>
-            <a:srgbClr val="1E3932"/>
-          </a:solidFill>
-          <a:ln>
-            <a:noFill/>
+          <a:noFill/>
+          <a:ln w="19050">
+            <a:solidFill>
+              <a:srgbClr val="00754A"/>
+            </a:solidFill>
           </a:ln>
           <a:effectLst/>
         </p:spPr>
@@ -15370,7 +16558,7 @@
             <a:r>
               <a:rPr sz="1400" b="1" i="0" spc="-14">
                 <a:solidFill>
-                  <a:srgbClr val="FFFFFF"/>
+                  <a:srgbClr val="006241"/>
                 </a:solidFill>
                 <a:latin typeface="Pretendard"/>
                 <a:ea typeface="Pretendard"/>
@@ -15730,11 +16918,11 @@
           <a:prstGeom prst="ellipse">
             <a:avLst/>
           </a:prstGeom>
-          <a:solidFill>
-            <a:srgbClr val="00754A"/>
-          </a:solidFill>
-          <a:ln>
-            <a:noFill/>
+          <a:noFill/>
+          <a:ln w="19050">
+            <a:solidFill>
+              <a:srgbClr val="00754A"/>
+            </a:solidFill>
           </a:ln>
           <a:effectLst/>
         </p:spPr>
@@ -15786,7 +16974,7 @@
             <a:r>
               <a:rPr sz="1800" b="1" i="0" spc="-18">
                 <a:solidFill>
-                  <a:srgbClr val="FFFFFF"/>
+                  <a:srgbClr val="00754A"/>
                 </a:solidFill>
                 <a:latin typeface="Pretendard"/>
                 <a:ea typeface="Pretendard"/>
@@ -15854,11 +17042,11 @@
               <a:gd name="adj" fmla="val 8000"/>
             </a:avLst>
           </a:prstGeom>
-          <a:solidFill>
-            <a:srgbClr val="F2F0EB"/>
-          </a:solidFill>
-          <a:ln>
-            <a:noFill/>
+          <a:noFill/>
+          <a:ln w="9525">
+            <a:solidFill>
+              <a:srgbClr val="D9D9D9"/>
+            </a:solidFill>
           </a:ln>
           <a:effectLst/>
         </p:spPr>
@@ -16024,11 +17212,11 @@
           <a:prstGeom prst="ellipse">
             <a:avLst/>
           </a:prstGeom>
-          <a:solidFill>
-            <a:srgbClr val="00754A"/>
-          </a:solidFill>
-          <a:ln>
-            <a:noFill/>
+          <a:noFill/>
+          <a:ln w="19050">
+            <a:solidFill>
+              <a:srgbClr val="00754A"/>
+            </a:solidFill>
           </a:ln>
           <a:effectLst/>
         </p:spPr>
@@ -16080,7 +17268,7 @@
             <a:r>
               <a:rPr sz="1800" b="1" i="0" spc="-18">
                 <a:solidFill>
-                  <a:srgbClr val="FFFFFF"/>
+                  <a:srgbClr val="00754A"/>
                 </a:solidFill>
                 <a:latin typeface="Pretendard"/>
                 <a:ea typeface="Pretendard"/>
@@ -16148,11 +17336,11 @@
               <a:gd name="adj" fmla="val 8000"/>
             </a:avLst>
           </a:prstGeom>
-          <a:solidFill>
-            <a:srgbClr val="F2F0EB"/>
-          </a:solidFill>
-          <a:ln>
-            <a:noFill/>
+          <a:noFill/>
+          <a:ln w="9525">
+            <a:solidFill>
+              <a:srgbClr val="D9D9D9"/>
+            </a:solidFill>
           </a:ln>
           <a:effectLst/>
         </p:spPr>
@@ -16227,7 +17415,7 @@
               </a:spcBef>
             </a:pPr>
             <a:r>
-              <a:rPr sz="1150" b="0" i="0" spc="-11">
+              <a:rPr sz="1150" b="0" i="0" spc="-12">
                 <a:solidFill>
                   <a:srgbClr val="6B6B6B"/>
                 </a:solidFill>
@@ -16339,11 +17527,11 @@
           <a:prstGeom prst="ellipse">
             <a:avLst/>
           </a:prstGeom>
-          <a:solidFill>
-            <a:srgbClr val="00754A"/>
-          </a:solidFill>
-          <a:ln>
-            <a:noFill/>
+          <a:noFill/>
+          <a:ln w="19050">
+            <a:solidFill>
+              <a:srgbClr val="00754A"/>
+            </a:solidFill>
           </a:ln>
           <a:effectLst/>
         </p:spPr>
@@ -16395,7 +17583,7 @@
             <a:r>
               <a:rPr sz="1800" b="1" i="0" spc="-18">
                 <a:solidFill>
-                  <a:srgbClr val="FFFFFF"/>
+                  <a:srgbClr val="00754A"/>
                 </a:solidFill>
                 <a:latin typeface="Pretendard"/>
                 <a:ea typeface="Pretendard"/>
@@ -16463,11 +17651,11 @@
               <a:gd name="adj" fmla="val 8000"/>
             </a:avLst>
           </a:prstGeom>
-          <a:solidFill>
-            <a:srgbClr val="F2F0EB"/>
-          </a:solidFill>
-          <a:ln>
-            <a:noFill/>
+          <a:noFill/>
+          <a:ln w="9525">
+            <a:solidFill>
+              <a:srgbClr val="D9D9D9"/>
+            </a:solidFill>
           </a:ln>
           <a:effectLst/>
         </p:spPr>
@@ -16654,11 +17842,11 @@
           <a:prstGeom prst="ellipse">
             <a:avLst/>
           </a:prstGeom>
-          <a:solidFill>
-            <a:srgbClr val="00754A"/>
-          </a:solidFill>
-          <a:ln>
-            <a:noFill/>
+          <a:noFill/>
+          <a:ln w="19050">
+            <a:solidFill>
+              <a:srgbClr val="00754A"/>
+            </a:solidFill>
           </a:ln>
           <a:effectLst/>
         </p:spPr>
@@ -16710,7 +17898,7 @@
             <a:r>
               <a:rPr sz="1800" b="1" i="0" spc="-18">
                 <a:solidFill>
-                  <a:srgbClr val="FFFFFF"/>
+                  <a:srgbClr val="00754A"/>
                 </a:solidFill>
                 <a:latin typeface="Pretendard"/>
                 <a:ea typeface="Pretendard"/>
@@ -16778,11 +17966,11 @@
               <a:gd name="adj" fmla="val 8000"/>
             </a:avLst>
           </a:prstGeom>
-          <a:solidFill>
-            <a:srgbClr val="F2F0EB"/>
-          </a:solidFill>
-          <a:ln>
-            <a:noFill/>
+          <a:noFill/>
+          <a:ln w="9525">
+            <a:solidFill>
+              <a:srgbClr val="D9D9D9"/>
+            </a:solidFill>
           </a:ln>
           <a:effectLst/>
         </p:spPr>
@@ -16878,7 +18066,7 @@
               </a:spcBef>
             </a:pPr>
             <a:r>
-              <a:rPr sz="1150" b="1" i="0" spc="-11">
+              <a:rPr sz="1150" b="1" i="0" spc="-12">
                 <a:solidFill>
                   <a:srgbClr val="00754A"/>
                 </a:solidFill>
@@ -16907,11 +18095,11 @@
               <a:gd name="adj" fmla="val 18000"/>
             </a:avLst>
           </a:prstGeom>
-          <a:solidFill>
-            <a:srgbClr val="1E3932"/>
-          </a:solidFill>
-          <a:ln>
-            <a:noFill/>
+          <a:noFill/>
+          <a:ln w="19050">
+            <a:solidFill>
+              <a:srgbClr val="00754A"/>
+            </a:solidFill>
           </a:ln>
           <a:effectLst/>
         </p:spPr>
@@ -16963,7 +18151,7 @@
             <a:r>
               <a:rPr sz="1400" b="1" i="0" spc="-14">
                 <a:solidFill>
-                  <a:srgbClr val="FFFFFF"/>
+                  <a:srgbClr val="006241"/>
                 </a:solidFill>
                 <a:latin typeface="Pretendard"/>
                 <a:ea typeface="Pretendard"/>
@@ -17274,23 +18462,25 @@
       </p:sp>
       <p:sp>
         <p:nvSpPr>
-          <p:cNvPr id="9" name="Rectangle 8"/>
+          <p:cNvPr id="9" name="Rounded Rectangle 8"/>
           <p:cNvSpPr/>
           <p:nvPr/>
         </p:nvSpPr>
         <p:spPr>
           <a:xfrm>
-            <a:off x="663122" y="1747509"/>
-            <a:ext cx="2568229" cy="64008"/>
-          </a:xfrm>
-          <a:prstGeom prst="rect">
-            <a:avLst/>
-          </a:prstGeom>
-          <a:solidFill>
-            <a:srgbClr val="00754A"/>
-          </a:solidFill>
-          <a:ln>
-            <a:noFill/>
+            <a:off x="1078557" y="2003541"/>
+            <a:ext cx="1737360" cy="310896"/>
+          </a:xfrm>
+          <a:prstGeom prst="roundRect">
+            <a:avLst>
+              <a:gd name="adj" fmla="val 50000"/>
+            </a:avLst>
+          </a:prstGeom>
+          <a:noFill/>
+          <a:ln w="15875">
+            <a:solidFill>
+              <a:srgbClr val="00754A"/>
+            </a:solidFill>
           </a:ln>
           <a:effectLst/>
         </p:spPr>
@@ -17318,8 +18508,8 @@
       </p:sp>
       <p:sp>
         <p:nvSpPr>
-          <p:cNvPr id="10" name="Rounded Rectangle 9"/>
-          <p:cNvSpPr/>
+          <p:cNvPr id="10" name="TextBox 9"/>
+          <p:cNvSpPr txBox="1"/>
           <p:nvPr/>
         </p:nvSpPr>
         <p:spPr>
@@ -17327,81 +18517,35 @@
             <a:off x="1078557" y="2003541"/>
             <a:ext cx="1737360" cy="310896"/>
           </a:xfrm>
-          <a:prstGeom prst="roundRect">
-            <a:avLst>
-              <a:gd name="adj" fmla="val 50000"/>
-            </a:avLst>
-          </a:prstGeom>
-          <a:solidFill>
-            <a:srgbClr val="00754A"/>
-          </a:solidFill>
-          <a:ln>
-            <a:noFill/>
-          </a:ln>
-          <a:effectLst/>
-        </p:spPr>
-        <p:style>
-          <a:lnRef idx="1">
-            <a:schemeClr val="accent1"/>
-          </a:lnRef>
-          <a:fillRef idx="3">
-            <a:schemeClr val="accent1"/>
-          </a:fillRef>
-          <a:effectRef idx="2">
-            <a:schemeClr val="accent1"/>
-          </a:effectRef>
-          <a:fontRef idx="minor">
-            <a:schemeClr val="lt1"/>
-          </a:fontRef>
-        </p:style>
-        <p:txBody>
-          <a:bodyPr rtlCol="0" anchor="ctr"/>
+          <a:prstGeom prst="rect">
+            <a:avLst/>
+          </a:prstGeom>
+          <a:noFill/>
+        </p:spPr>
+        <p:txBody>
+          <a:bodyPr wrap="square" anchor="ctr" lIns="0" rIns="0" tIns="0" bIns="0">
+            <a:spAutoFit/>
+          </a:bodyPr>
           <a:lstStyle/>
           <a:p>
             <a:pPr algn="ctr"/>
+            <a:r>
+              <a:rPr sz="1100" b="1" i="0" spc="-11">
+                <a:solidFill>
+                  <a:srgbClr val="00754A"/>
+                </a:solidFill>
+                <a:latin typeface="Pretendard"/>
+                <a:ea typeface="Pretendard"/>
+                <a:cs typeface="Pretendard"/>
+              </a:rPr>
+              <a:t>LIBRARY</a:t>
+            </a:r>
           </a:p>
         </p:txBody>
       </p:sp>
       <p:sp>
         <p:nvSpPr>
           <p:cNvPr id="11" name="TextBox 10"/>
-          <p:cNvSpPr txBox="1"/>
-          <p:nvPr/>
-        </p:nvSpPr>
-        <p:spPr>
-          <a:xfrm>
-            <a:off x="1078557" y="2003541"/>
-            <a:ext cx="1737360" cy="310896"/>
-          </a:xfrm>
-          <a:prstGeom prst="rect">
-            <a:avLst/>
-          </a:prstGeom>
-          <a:noFill/>
-        </p:spPr>
-        <p:txBody>
-          <a:bodyPr wrap="square" anchor="ctr" lIns="0" rIns="0" tIns="0" bIns="0">
-            <a:spAutoFit/>
-          </a:bodyPr>
-          <a:lstStyle/>
-          <a:p>
-            <a:pPr algn="ctr"/>
-            <a:r>
-              <a:rPr sz="1100" b="1" i="0" spc="-11">
-                <a:solidFill>
-                  <a:srgbClr val="FFFFFF"/>
-                </a:solidFill>
-                <a:latin typeface="Pretendard"/>
-                <a:ea typeface="Pretendard"/>
-                <a:cs typeface="Pretendard"/>
-              </a:rPr>
-              <a:t>LIBRARY</a:t>
-            </a:r>
-          </a:p>
-        </p:txBody>
-      </p:sp>
-      <p:sp>
-        <p:nvSpPr>
-          <p:cNvPr id="12" name="TextBox 11"/>
           <p:cNvSpPr txBox="1"/>
           <p:nvPr/>
         </p:nvSpPr>
@@ -17478,7 +18622,7 @@
       </p:sp>
       <p:sp>
         <p:nvSpPr>
-          <p:cNvPr id="13" name="Rounded Rectangle 12"/>
+          <p:cNvPr id="12" name="Rounded Rectangle 11"/>
           <p:cNvSpPr/>
           <p:nvPr/>
         </p:nvSpPr>
@@ -17526,23 +18670,25 @@
       </p:sp>
       <p:sp>
         <p:nvSpPr>
-          <p:cNvPr id="14" name="Rectangle 13"/>
+          <p:cNvPr id="13" name="Rounded Rectangle 12"/>
           <p:cNvSpPr/>
           <p:nvPr/>
         </p:nvSpPr>
         <p:spPr>
           <a:xfrm>
-            <a:off x="3432520" y="1747509"/>
-            <a:ext cx="2568229" cy="64008"/>
-          </a:xfrm>
-          <a:prstGeom prst="rect">
-            <a:avLst/>
-          </a:prstGeom>
-          <a:solidFill>
-            <a:srgbClr val="00754A"/>
-          </a:solidFill>
-          <a:ln>
-            <a:noFill/>
+            <a:off x="3847955" y="2003541"/>
+            <a:ext cx="1737360" cy="310896"/>
+          </a:xfrm>
+          <a:prstGeom prst="roundRect">
+            <a:avLst>
+              <a:gd name="adj" fmla="val 50000"/>
+            </a:avLst>
+          </a:prstGeom>
+          <a:noFill/>
+          <a:ln w="15875">
+            <a:solidFill>
+              <a:srgbClr val="00754A"/>
+            </a:solidFill>
           </a:ln>
           <a:effectLst/>
         </p:spPr>
@@ -17570,8 +18716,8 @@
       </p:sp>
       <p:sp>
         <p:nvSpPr>
-          <p:cNvPr id="15" name="Rounded Rectangle 14"/>
-          <p:cNvSpPr/>
+          <p:cNvPr id="14" name="TextBox 13"/>
+          <p:cNvSpPr txBox="1"/>
           <p:nvPr/>
         </p:nvSpPr>
         <p:spPr>
@@ -17579,68 +18725,22 @@
             <a:off x="3847955" y="2003541"/>
             <a:ext cx="1737360" cy="310896"/>
           </a:xfrm>
-          <a:prstGeom prst="roundRect">
-            <a:avLst>
-              <a:gd name="adj" fmla="val 50000"/>
-            </a:avLst>
-          </a:prstGeom>
-          <a:solidFill>
-            <a:srgbClr val="00754A"/>
-          </a:solidFill>
-          <a:ln>
-            <a:noFill/>
-          </a:ln>
-          <a:effectLst/>
-        </p:spPr>
-        <p:style>
-          <a:lnRef idx="1">
-            <a:schemeClr val="accent1"/>
-          </a:lnRef>
-          <a:fillRef idx="3">
-            <a:schemeClr val="accent1"/>
-          </a:fillRef>
-          <a:effectRef idx="2">
-            <a:schemeClr val="accent1"/>
-          </a:effectRef>
-          <a:fontRef idx="minor">
-            <a:schemeClr val="lt1"/>
-          </a:fontRef>
-        </p:style>
-        <p:txBody>
-          <a:bodyPr rtlCol="0" anchor="ctr"/>
+          <a:prstGeom prst="rect">
+            <a:avLst/>
+          </a:prstGeom>
+          <a:noFill/>
+        </p:spPr>
+        <p:txBody>
+          <a:bodyPr wrap="square" anchor="ctr" lIns="0" rIns="0" tIns="0" bIns="0">
+            <a:spAutoFit/>
+          </a:bodyPr>
           <a:lstStyle/>
           <a:p>
             <a:pPr algn="ctr"/>
-          </a:p>
-        </p:txBody>
-      </p:sp>
-      <p:sp>
-        <p:nvSpPr>
-          <p:cNvPr id="16" name="TextBox 15"/>
-          <p:cNvSpPr txBox="1"/>
-          <p:nvPr/>
-        </p:nvSpPr>
-        <p:spPr>
-          <a:xfrm>
-            <a:off x="3847955" y="2003541"/>
-            <a:ext cx="1737360" cy="310896"/>
-          </a:xfrm>
-          <a:prstGeom prst="rect">
-            <a:avLst/>
-          </a:prstGeom>
-          <a:noFill/>
-        </p:spPr>
-        <p:txBody>
-          <a:bodyPr wrap="square" anchor="ctr" lIns="0" rIns="0" tIns="0" bIns="0">
-            <a:spAutoFit/>
-          </a:bodyPr>
-          <a:lstStyle/>
-          <a:p>
-            <a:pPr algn="ctr"/>
             <a:r>
               <a:rPr sz="1100" b="1" i="0" spc="-11">
                 <a:solidFill>
-                  <a:srgbClr val="FFFFFF"/>
+                  <a:srgbClr val="00754A"/>
                 </a:solidFill>
                 <a:latin typeface="Pretendard"/>
                 <a:ea typeface="Pretendard"/>
@@ -17653,7 +18753,7 @@
       </p:sp>
       <p:sp>
         <p:nvSpPr>
-          <p:cNvPr id="17" name="TextBox 16"/>
+          <p:cNvPr id="15" name="TextBox 14"/>
           <p:cNvSpPr txBox="1"/>
           <p:nvPr/>
         </p:nvSpPr>
@@ -17730,7 +18830,7 @@
       </p:sp>
       <p:sp>
         <p:nvSpPr>
-          <p:cNvPr id="18" name="Rounded Rectangle 17"/>
+          <p:cNvPr id="16" name="Rounded Rectangle 15"/>
           <p:cNvSpPr/>
           <p:nvPr/>
         </p:nvSpPr>
@@ -17778,23 +18878,25 @@
       </p:sp>
       <p:sp>
         <p:nvSpPr>
-          <p:cNvPr id="19" name="Rectangle 18"/>
+          <p:cNvPr id="17" name="Rounded Rectangle 16"/>
           <p:cNvSpPr/>
           <p:nvPr/>
         </p:nvSpPr>
         <p:spPr>
           <a:xfrm>
-            <a:off x="6201918" y="1747509"/>
-            <a:ext cx="2568229" cy="64008"/>
-          </a:xfrm>
-          <a:prstGeom prst="rect">
-            <a:avLst/>
-          </a:prstGeom>
-          <a:solidFill>
-            <a:srgbClr val="00754A"/>
-          </a:solidFill>
-          <a:ln>
-            <a:noFill/>
+            <a:off x="6617352" y="2003541"/>
+            <a:ext cx="1737360" cy="310896"/>
+          </a:xfrm>
+          <a:prstGeom prst="roundRect">
+            <a:avLst>
+              <a:gd name="adj" fmla="val 50000"/>
+            </a:avLst>
+          </a:prstGeom>
+          <a:noFill/>
+          <a:ln w="15875">
+            <a:solidFill>
+              <a:srgbClr val="00754A"/>
+            </a:solidFill>
           </a:ln>
           <a:effectLst/>
         </p:spPr>
@@ -17822,8 +18924,8 @@
       </p:sp>
       <p:sp>
         <p:nvSpPr>
-          <p:cNvPr id="20" name="Rounded Rectangle 19"/>
-          <p:cNvSpPr/>
+          <p:cNvPr id="18" name="TextBox 17"/>
+          <p:cNvSpPr txBox="1"/>
           <p:nvPr/>
         </p:nvSpPr>
         <p:spPr>
@@ -17831,68 +18933,22 @@
             <a:off x="6617352" y="2003541"/>
             <a:ext cx="1737360" cy="310896"/>
           </a:xfrm>
-          <a:prstGeom prst="roundRect">
-            <a:avLst>
-              <a:gd name="adj" fmla="val 50000"/>
-            </a:avLst>
-          </a:prstGeom>
-          <a:solidFill>
-            <a:srgbClr val="00754A"/>
-          </a:solidFill>
-          <a:ln>
-            <a:noFill/>
-          </a:ln>
-          <a:effectLst/>
-        </p:spPr>
-        <p:style>
-          <a:lnRef idx="1">
-            <a:schemeClr val="accent1"/>
-          </a:lnRef>
-          <a:fillRef idx="3">
-            <a:schemeClr val="accent1"/>
-          </a:fillRef>
-          <a:effectRef idx="2">
-            <a:schemeClr val="accent1"/>
-          </a:effectRef>
-          <a:fontRef idx="minor">
-            <a:schemeClr val="lt1"/>
-          </a:fontRef>
-        </p:style>
-        <p:txBody>
-          <a:bodyPr rtlCol="0" anchor="ctr"/>
+          <a:prstGeom prst="rect">
+            <a:avLst/>
+          </a:prstGeom>
+          <a:noFill/>
+        </p:spPr>
+        <p:txBody>
+          <a:bodyPr wrap="square" anchor="ctr" lIns="0" rIns="0" tIns="0" bIns="0">
+            <a:spAutoFit/>
+          </a:bodyPr>
           <a:lstStyle/>
           <a:p>
             <a:pPr algn="ctr"/>
-          </a:p>
-        </p:txBody>
-      </p:sp>
-      <p:sp>
-        <p:nvSpPr>
-          <p:cNvPr id="21" name="TextBox 20"/>
-          <p:cNvSpPr txBox="1"/>
-          <p:nvPr/>
-        </p:nvSpPr>
-        <p:spPr>
-          <a:xfrm>
-            <a:off x="6617352" y="2003541"/>
-            <a:ext cx="1737360" cy="310896"/>
-          </a:xfrm>
-          <a:prstGeom prst="rect">
-            <a:avLst/>
-          </a:prstGeom>
-          <a:noFill/>
-        </p:spPr>
-        <p:txBody>
-          <a:bodyPr wrap="square" anchor="ctr" lIns="0" rIns="0" tIns="0" bIns="0">
-            <a:spAutoFit/>
-          </a:bodyPr>
-          <a:lstStyle/>
-          <a:p>
-            <a:pPr algn="ctr"/>
             <a:r>
               <a:rPr sz="1100" b="1" i="0" spc="-11">
                 <a:solidFill>
-                  <a:srgbClr val="FFFFFF"/>
+                  <a:srgbClr val="00754A"/>
                 </a:solidFill>
                 <a:latin typeface="Pretendard"/>
                 <a:ea typeface="Pretendard"/>
@@ -17905,7 +18961,7 @@
       </p:sp>
       <p:sp>
         <p:nvSpPr>
-          <p:cNvPr id="22" name="TextBox 21"/>
+          <p:cNvPr id="19" name="TextBox 18"/>
           <p:cNvSpPr txBox="1"/>
           <p:nvPr/>
         </p:nvSpPr>
@@ -17982,7 +19038,7 @@
       </p:sp>
       <p:sp>
         <p:nvSpPr>
-          <p:cNvPr id="23" name="Rounded Rectangle 22"/>
+          <p:cNvPr id="20" name="Rounded Rectangle 19"/>
           <p:cNvSpPr/>
           <p:nvPr/>
         </p:nvSpPr>
@@ -18030,23 +19086,25 @@
       </p:sp>
       <p:sp>
         <p:nvSpPr>
-          <p:cNvPr id="24" name="Rectangle 23"/>
+          <p:cNvPr id="21" name="Rounded Rectangle 20"/>
           <p:cNvSpPr/>
           <p:nvPr/>
         </p:nvSpPr>
         <p:spPr>
           <a:xfrm>
-            <a:off x="8971315" y="1747509"/>
-            <a:ext cx="2568229" cy="64008"/>
-          </a:xfrm>
-          <a:prstGeom prst="rect">
-            <a:avLst/>
-          </a:prstGeom>
-          <a:solidFill>
-            <a:srgbClr val="00754A"/>
-          </a:solidFill>
-          <a:ln>
-            <a:noFill/>
+            <a:off x="9386750" y="2003541"/>
+            <a:ext cx="1737360" cy="310896"/>
+          </a:xfrm>
+          <a:prstGeom prst="roundRect">
+            <a:avLst>
+              <a:gd name="adj" fmla="val 50000"/>
+            </a:avLst>
+          </a:prstGeom>
+          <a:noFill/>
+          <a:ln w="15875">
+            <a:solidFill>
+              <a:srgbClr val="00754A"/>
+            </a:solidFill>
           </a:ln>
           <a:effectLst/>
         </p:spPr>
@@ -18074,8 +19132,8 @@
       </p:sp>
       <p:sp>
         <p:nvSpPr>
-          <p:cNvPr id="25" name="Rounded Rectangle 24"/>
-          <p:cNvSpPr/>
+          <p:cNvPr id="22" name="TextBox 21"/>
+          <p:cNvSpPr txBox="1"/>
           <p:nvPr/>
         </p:nvSpPr>
         <p:spPr>
@@ -18083,68 +19141,22 @@
             <a:off x="9386750" y="2003541"/>
             <a:ext cx="1737360" cy="310896"/>
           </a:xfrm>
-          <a:prstGeom prst="roundRect">
-            <a:avLst>
-              <a:gd name="adj" fmla="val 50000"/>
-            </a:avLst>
-          </a:prstGeom>
-          <a:solidFill>
-            <a:srgbClr val="00754A"/>
-          </a:solidFill>
-          <a:ln>
-            <a:noFill/>
-          </a:ln>
-          <a:effectLst/>
-        </p:spPr>
-        <p:style>
-          <a:lnRef idx="1">
-            <a:schemeClr val="accent1"/>
-          </a:lnRef>
-          <a:fillRef idx="3">
-            <a:schemeClr val="accent1"/>
-          </a:fillRef>
-          <a:effectRef idx="2">
-            <a:schemeClr val="accent1"/>
-          </a:effectRef>
-          <a:fontRef idx="minor">
-            <a:schemeClr val="lt1"/>
-          </a:fontRef>
-        </p:style>
-        <p:txBody>
-          <a:bodyPr rtlCol="0" anchor="ctr"/>
+          <a:prstGeom prst="rect">
+            <a:avLst/>
+          </a:prstGeom>
+          <a:noFill/>
+        </p:spPr>
+        <p:txBody>
+          <a:bodyPr wrap="square" anchor="ctr" lIns="0" rIns="0" tIns="0" bIns="0">
+            <a:spAutoFit/>
+          </a:bodyPr>
           <a:lstStyle/>
           <a:p>
             <a:pPr algn="ctr"/>
-          </a:p>
-        </p:txBody>
-      </p:sp>
-      <p:sp>
-        <p:nvSpPr>
-          <p:cNvPr id="26" name="TextBox 25"/>
-          <p:cNvSpPr txBox="1"/>
-          <p:nvPr/>
-        </p:nvSpPr>
-        <p:spPr>
-          <a:xfrm>
-            <a:off x="9386750" y="2003541"/>
-            <a:ext cx="1737360" cy="310896"/>
-          </a:xfrm>
-          <a:prstGeom prst="rect">
-            <a:avLst/>
-          </a:prstGeom>
-          <a:noFill/>
-        </p:spPr>
-        <p:txBody>
-          <a:bodyPr wrap="square" anchor="ctr" lIns="0" rIns="0" tIns="0" bIns="0">
-            <a:spAutoFit/>
-          </a:bodyPr>
-          <a:lstStyle/>
-          <a:p>
-            <a:pPr algn="ctr"/>
             <a:r>
               <a:rPr sz="1100" b="1" i="0" spc="-11">
                 <a:solidFill>
-                  <a:srgbClr val="FFFFFF"/>
+                  <a:srgbClr val="00754A"/>
                 </a:solidFill>
                 <a:latin typeface="Pretendard"/>
                 <a:ea typeface="Pretendard"/>
@@ -18157,7 +19169,7 @@
       </p:sp>
       <p:sp>
         <p:nvSpPr>
-          <p:cNvPr id="27" name="TextBox 26"/>
+          <p:cNvPr id="23" name="TextBox 22"/>
           <p:cNvSpPr txBox="1"/>
           <p:nvPr/>
         </p:nvSpPr>
@@ -18234,7 +19246,7 @@
       </p:sp>
       <p:sp>
         <p:nvSpPr>
-          <p:cNvPr id="28" name="Rounded Rectangle 27"/>
+          <p:cNvPr id="24" name="Rounded Rectangle 23"/>
           <p:cNvSpPr/>
           <p:nvPr/>
         </p:nvSpPr>
@@ -18248,11 +19260,11 @@
               <a:gd name="adj" fmla="val 18000"/>
             </a:avLst>
           </a:prstGeom>
-          <a:solidFill>
-            <a:srgbClr val="1E3932"/>
-          </a:solidFill>
-          <a:ln>
-            <a:noFill/>
+          <a:noFill/>
+          <a:ln w="19050">
+            <a:solidFill>
+              <a:srgbClr val="00754A"/>
+            </a:solidFill>
           </a:ln>
           <a:effectLst/>
         </p:spPr>
@@ -18280,7 +19292,7 @@
       </p:sp>
       <p:sp>
         <p:nvSpPr>
-          <p:cNvPr id="29" name="TextBox 28"/>
+          <p:cNvPr id="25" name="TextBox 24"/>
           <p:cNvSpPr txBox="1"/>
           <p:nvPr/>
         </p:nvSpPr>
@@ -18304,7 +19316,7 @@
             <a:r>
               <a:rPr sz="1400" b="1" i="0" spc="-14">
                 <a:solidFill>
-                  <a:srgbClr val="FFFFFF"/>
+                  <a:srgbClr val="006241"/>
                 </a:solidFill>
                 <a:latin typeface="Pretendard"/>
                 <a:ea typeface="Pretendard"/>
@@ -18618,11 +19630,11 @@
               <a:gd name="adj" fmla="val 5000"/>
             </a:avLst>
           </a:prstGeom>
-          <a:solidFill>
-            <a:srgbClr val="1E3932"/>
-          </a:solidFill>
-          <a:ln>
-            <a:noFill/>
+          <a:noFill/>
+          <a:ln w="11430">
+            <a:solidFill>
+              <a:srgbClr val="D9D9D9"/>
+            </a:solidFill>
           </a:ln>
           <a:effectLst/>
         </p:spPr>
@@ -18674,7 +19686,7 @@
             <a:r>
               <a:rPr sz="1500" b="1" i="0" spc="-15">
                 <a:solidFill>
-                  <a:srgbClr val="FFFFFF"/>
+                  <a:srgbClr val="006241"/>
                 </a:solidFill>
                 <a:latin typeface="Pretendard"/>
                 <a:ea typeface="Pretendard"/>
@@ -18715,7 +19727,7 @@
             <a:r>
               <a:rPr sz="1500" b="0" i="0" spc="-15">
                 <a:solidFill>
-                  <a:srgbClr val="FFFFFF"/>
+                  <a:srgbClr val="1F1F1F"/>
                 </a:solidFill>
                 <a:latin typeface="Pretendard"/>
                 <a:ea typeface="Pretendard"/>
@@ -18742,10 +19754,8 @@
               <a:gd name="adj" fmla="val 5000"/>
             </a:avLst>
           </a:prstGeom>
-          <a:solidFill>
-            <a:srgbClr val="F2F0EB"/>
-          </a:solidFill>
-          <a:ln w="9525">
+          <a:noFill/>
+          <a:ln w="11430">
             <a:solidFill>
               <a:srgbClr val="D9D9D9"/>
             </a:solidFill>
@@ -18800,7 +19810,7 @@
             <a:r>
               <a:rPr sz="1500" b="1" i="0" spc="-15">
                 <a:solidFill>
-                  <a:srgbClr val="00754A"/>
+                  <a:srgbClr val="1F1F1F"/>
                 </a:solidFill>
                 <a:latin typeface="Pretendard"/>
                 <a:ea typeface="Pretendard"/>
@@ -18868,10 +19878,8 @@
               <a:gd name="adj" fmla="val 5000"/>
             </a:avLst>
           </a:prstGeom>
-          <a:solidFill>
-            <a:srgbClr val="D4E9E2"/>
-          </a:solidFill>
-          <a:ln w="9525">
+          <a:noFill/>
+          <a:ln w="11430">
             <a:solidFill>
               <a:srgbClr val="D9D9D9"/>
             </a:solidFill>
@@ -18994,11 +20002,11 @@
               <a:gd name="adj" fmla="val 18000"/>
             </a:avLst>
           </a:prstGeom>
-          <a:solidFill>
-            <a:srgbClr val="1E3932"/>
-          </a:solidFill>
-          <a:ln>
-            <a:noFill/>
+          <a:noFill/>
+          <a:ln w="19050">
+            <a:solidFill>
+              <a:srgbClr val="00754A"/>
+            </a:solidFill>
           </a:ln>
           <a:effectLst/>
         </p:spPr>
@@ -19050,7 +20058,7 @@
             <a:r>
               <a:rPr sz="1400" b="1" i="0" spc="-14">
                 <a:solidFill>
-                  <a:srgbClr val="FFFFFF"/>
+                  <a:srgbClr val="006241"/>
                 </a:solidFill>
                 <a:latin typeface="Pretendard"/>
                 <a:ea typeface="Pretendard"/>
@@ -19364,11 +20372,11 @@
               <a:gd name="adj" fmla="val 5000"/>
             </a:avLst>
           </a:prstGeom>
-          <a:solidFill>
-            <a:srgbClr val="1E3932"/>
-          </a:solidFill>
-          <a:ln>
-            <a:noFill/>
+          <a:noFill/>
+          <a:ln w="11430">
+            <a:solidFill>
+              <a:srgbClr val="D9D9D9"/>
+            </a:solidFill>
           </a:ln>
           <a:effectLst/>
         </p:spPr>
@@ -19420,7 +20428,7 @@
             <a:r>
               <a:rPr sz="1500" b="1" i="0" spc="-15">
                 <a:solidFill>
-                  <a:srgbClr val="FFFFFF"/>
+                  <a:srgbClr val="006241"/>
                 </a:solidFill>
                 <a:latin typeface="Pretendard"/>
                 <a:ea typeface="Pretendard"/>
@@ -19461,7 +20469,7 @@
             <a:r>
               <a:rPr sz="1500" b="0" i="0" spc="-15">
                 <a:solidFill>
-                  <a:srgbClr val="FFFFFF"/>
+                  <a:srgbClr val="1F1F1F"/>
                 </a:solidFill>
                 <a:latin typeface="Pretendard"/>
                 <a:ea typeface="Pretendard"/>
@@ -19488,10 +20496,8 @@
               <a:gd name="adj" fmla="val 5000"/>
             </a:avLst>
           </a:prstGeom>
-          <a:solidFill>
-            <a:srgbClr val="F2F0EB"/>
-          </a:solidFill>
-          <a:ln w="9525">
+          <a:noFill/>
+          <a:ln w="11430">
             <a:solidFill>
               <a:srgbClr val="D9D9D9"/>
             </a:solidFill>
@@ -19546,7 +20552,7 @@
             <a:r>
               <a:rPr sz="1500" b="1" i="0" spc="-15">
                 <a:solidFill>
-                  <a:srgbClr val="00754A"/>
+                  <a:srgbClr val="1F1F1F"/>
                 </a:solidFill>
                 <a:latin typeface="Pretendard"/>
                 <a:ea typeface="Pretendard"/>
@@ -19614,10 +20620,8 @@
               <a:gd name="adj" fmla="val 5000"/>
             </a:avLst>
           </a:prstGeom>
-          <a:solidFill>
-            <a:srgbClr val="D4E9E2"/>
-          </a:solidFill>
-          <a:ln w="9525">
+          <a:noFill/>
+          <a:ln w="11430">
             <a:solidFill>
               <a:srgbClr val="D9D9D9"/>
             </a:solidFill>
@@ -19740,11 +20744,11 @@
               <a:gd name="adj" fmla="val 18000"/>
             </a:avLst>
           </a:prstGeom>
-          <a:solidFill>
-            <a:srgbClr val="1E3932"/>
-          </a:solidFill>
-          <a:ln>
-            <a:noFill/>
+          <a:noFill/>
+          <a:ln w="19050">
+            <a:solidFill>
+              <a:srgbClr val="00754A"/>
+            </a:solidFill>
           </a:ln>
           <a:effectLst/>
         </p:spPr>
@@ -19796,7 +20800,7 @@
             <a:r>
               <a:rPr sz="1400" b="1" i="0" spc="-14">
                 <a:solidFill>
-                  <a:srgbClr val="FFFFFF"/>
+                  <a:srgbClr val="006241"/>
                 </a:solidFill>
                 <a:latin typeface="Pretendard"/>
                 <a:ea typeface="Pretendard"/>

--- a/presentation/rag_obsidian_deck.pptx
+++ b/presentation/rag_obsidian_deck.pptx
@@ -12613,9 +12613,87 @@
           </a:p>
         </p:txBody>
       </p:sp>
+      <p:sp>
+        <p:nvSpPr>
+          <p:cNvPr id="3" name="TextBox 2"/>
+          <p:cNvSpPr txBox="1"/>
+          <p:nvPr/>
+        </p:nvSpPr>
+        <p:spPr>
+          <a:xfrm>
+            <a:off x="138257" y="123444"/>
+            <a:ext cx="5486400" cy="256032"/>
+          </a:xfrm>
+          <a:prstGeom prst="rect">
+            <a:avLst/>
+          </a:prstGeom>
+          <a:noFill/>
+        </p:spPr>
+        <p:txBody>
+          <a:bodyPr wrap="square" anchor="t" lIns="0" rIns="0" tIns="0" bIns="0">
+            <a:spAutoFit/>
+          </a:bodyPr>
+          <a:lstStyle/>
+          <a:p>
+            <a:pPr algn="l"/>
+            <a:r>
+              <a:rPr sz="1100" b="1" i="0" spc="-11">
+                <a:solidFill>
+                  <a:srgbClr val="8E8E93"/>
+                </a:solidFill>
+                <a:latin typeface="Pretendard"/>
+                <a:ea typeface="Pretendard"/>
+                <a:cs typeface="Pretendard"/>
+              </a:rPr>
+              <a:t>APPENDIX · Q&amp;A</a:t>
+            </a:r>
+          </a:p>
+        </p:txBody>
+      </p:sp>
+      <p:sp>
+        <p:nvSpPr>
+          <p:cNvPr id="4" name="TextBox 3"/>
+          <p:cNvSpPr txBox="1"/>
+          <p:nvPr/>
+        </p:nvSpPr>
+        <p:spPr>
+          <a:xfrm>
+            <a:off x="251642" y="436260"/>
+            <a:ext cx="10972800" cy="640080"/>
+          </a:xfrm>
+          <a:prstGeom prst="rect">
+            <a:avLst/>
+          </a:prstGeom>
+          <a:noFill/>
+        </p:spPr>
+        <p:txBody>
+          <a:bodyPr wrap="square" anchor="t" lIns="0" rIns="0" tIns="0" bIns="0">
+            <a:spAutoFit/>
+          </a:bodyPr>
+          <a:lstStyle/>
+          <a:p>
+            <a:pPr algn="l">
+              <a:lnSpc>
+                <a:spcPts val="3600"/>
+              </a:lnSpc>
+            </a:pPr>
+            <a:r>
+              <a:rPr sz="3000" b="1" i="0" spc="-30">
+                <a:solidFill>
+                  <a:srgbClr val="006241"/>
+                </a:solidFill>
+                <a:latin typeface="Pretendard"/>
+                <a:ea typeface="Pretendard"/>
+                <a:cs typeface="Pretendard"/>
+              </a:rPr>
+              <a:t>자주 나올 질문 ①</a:t>
+            </a:r>
+          </a:p>
+        </p:txBody>
+      </p:sp>
       <p:pic>
         <p:nvPicPr>
-          <p:cNvPr id="3" name="Picture 2" descr="logo.png"/>
+          <p:cNvPr id="5" name="Picture 4" descr="logo.png"/>
           <p:cNvPicPr>
             <a:picLocks noChangeAspect="1"/>
           </p:cNvPicPr>
@@ -12640,14 +12718,145 @@
       </p:pic>
       <p:sp>
         <p:nvSpPr>
-          <p:cNvPr id="4" name="TextBox 3"/>
-          <p:cNvSpPr txBox="1"/>
-          <p:nvPr/>
-        </p:nvSpPr>
-        <p:spPr>
-          <a:xfrm>
-            <a:off x="548640" y="2377440"/>
-            <a:ext cx="11064240" cy="1280160"/>
+          <p:cNvPr id="6" name="Rounded Rectangle 5"/>
+          <p:cNvSpPr/>
+          <p:nvPr/>
+        </p:nvSpPr>
+        <p:spPr>
+          <a:xfrm>
+            <a:off x="251642" y="1290309"/>
+            <a:ext cx="11699382" cy="5227350"/>
+          </a:xfrm>
+          <a:prstGeom prst="roundRect">
+            <a:avLst>
+              <a:gd name="adj" fmla="val 3500"/>
+            </a:avLst>
+          </a:prstGeom>
+          <a:solidFill>
+            <a:srgbClr val="FFFFFF"/>
+          </a:solidFill>
+          <a:ln w="9525">
+            <a:solidFill>
+              <a:srgbClr val="D9D9D9"/>
+            </a:solidFill>
+          </a:ln>
+          <a:effectLst/>
+        </p:spPr>
+        <p:style>
+          <a:lnRef idx="1">
+            <a:schemeClr val="accent1"/>
+          </a:lnRef>
+          <a:fillRef idx="3">
+            <a:schemeClr val="accent1"/>
+          </a:fillRef>
+          <a:effectRef idx="2">
+            <a:schemeClr val="accent1"/>
+          </a:effectRef>
+          <a:fontRef idx="minor">
+            <a:schemeClr val="lt1"/>
+          </a:fontRef>
+        </p:style>
+        <p:txBody>
+          <a:bodyPr rtlCol="0" anchor="ctr"/>
+          <a:lstStyle/>
+          <a:p>
+            <a:pPr algn="ctr"/>
+          </a:p>
+        </p:txBody>
+      </p:sp>
+      <p:sp>
+        <p:nvSpPr>
+          <p:cNvPr id="7" name="TextBox 6"/>
+          <p:cNvSpPr txBox="1"/>
+          <p:nvPr/>
+        </p:nvSpPr>
+        <p:spPr>
+          <a:xfrm>
+            <a:off x="138257" y="6620256"/>
+            <a:ext cx="548640" cy="228600"/>
+          </a:xfrm>
+          <a:prstGeom prst="rect">
+            <a:avLst/>
+          </a:prstGeom>
+          <a:noFill/>
+        </p:spPr>
+        <p:txBody>
+          <a:bodyPr wrap="square" anchor="t" lIns="0" rIns="0" tIns="0" bIns="0">
+            <a:spAutoFit/>
+          </a:bodyPr>
+          <a:lstStyle/>
+          <a:p>
+            <a:pPr algn="l"/>
+            <a:r>
+              <a:rPr sz="900" b="0" i="0" spc="-9">
+                <a:solidFill>
+                  <a:srgbClr val="8E8E93"/>
+                </a:solidFill>
+                <a:latin typeface="Pretendard"/>
+                <a:ea typeface="Pretendard"/>
+                <a:cs typeface="Pretendard"/>
+              </a:rPr>
+              <a:t>18</a:t>
+            </a:r>
+          </a:p>
+        </p:txBody>
+      </p:sp>
+      <p:sp>
+        <p:nvSpPr>
+          <p:cNvPr id="8" name="Rounded Rectangle 7"/>
+          <p:cNvSpPr/>
+          <p:nvPr/>
+        </p:nvSpPr>
+        <p:spPr>
+          <a:xfrm>
+            <a:off x="663122" y="1656069"/>
+            <a:ext cx="10876422" cy="1364498"/>
+          </a:xfrm>
+          <a:prstGeom prst="roundRect">
+            <a:avLst>
+              <a:gd name="adj" fmla="val 6000"/>
+            </a:avLst>
+          </a:prstGeom>
+          <a:noFill/>
+          <a:ln w="11430">
+            <a:solidFill>
+              <a:srgbClr val="D9D9D9"/>
+            </a:solidFill>
+          </a:ln>
+          <a:effectLst/>
+        </p:spPr>
+        <p:style>
+          <a:lnRef idx="1">
+            <a:schemeClr val="accent1"/>
+          </a:lnRef>
+          <a:fillRef idx="3">
+            <a:schemeClr val="accent1"/>
+          </a:fillRef>
+          <a:effectRef idx="2">
+            <a:schemeClr val="accent1"/>
+          </a:effectRef>
+          <a:fontRef idx="minor">
+            <a:schemeClr val="lt1"/>
+          </a:fontRef>
+        </p:style>
+        <p:txBody>
+          <a:bodyPr rtlCol="0" anchor="ctr"/>
+          <a:lstStyle/>
+          <a:p>
+            <a:pPr algn="ctr"/>
+          </a:p>
+        </p:txBody>
+      </p:sp>
+      <p:sp>
+        <p:nvSpPr>
+          <p:cNvPr id="9" name="TextBox 8"/>
+          <p:cNvSpPr txBox="1"/>
+          <p:nvPr/>
+        </p:nvSpPr>
+        <p:spPr>
+          <a:xfrm>
+            <a:off x="1028882" y="1656069"/>
+            <a:ext cx="10144902" cy="1364498"/>
           </a:xfrm>
           <a:prstGeom prst="rect">
             <a:avLst/>
@@ -12660,9 +12869,13 @@
           </a:bodyPr>
           <a:lstStyle/>
           <a:p>
-            <a:pPr algn="ctr"/>
-            <a:r>
-              <a:rPr sz="5400" b="1" i="0" spc="-54">
+            <a:pPr algn="l">
+              <a:lnSpc>
+                <a:spcPts val="2000"/>
+              </a:lnSpc>
+            </a:pPr>
+            <a:r>
+              <a:rPr sz="1500" b="1" i="0" spc="-15">
                 <a:solidFill>
                   <a:srgbClr val="006241"/>
                 </a:solidFill>
@@ -12670,91 +12883,31 @@
                 <a:ea typeface="Pretendard"/>
                 <a:cs typeface="Pretendard"/>
               </a:rPr>
-              <a:t>Thank you</a:t>
-            </a:r>
-          </a:p>
-        </p:txBody>
-      </p:sp>
-      <p:sp>
-        <p:nvSpPr>
-          <p:cNvPr id="5" name="TextBox 4"/>
-          <p:cNvSpPr txBox="1"/>
-          <p:nvPr/>
-        </p:nvSpPr>
-        <p:spPr>
-          <a:xfrm>
-            <a:off x="548640" y="3749039"/>
-            <a:ext cx="11064240" cy="457200"/>
-          </a:xfrm>
-          <a:prstGeom prst="rect">
-            <a:avLst/>
-          </a:prstGeom>
-          <a:noFill/>
-        </p:spPr>
-        <p:txBody>
-          <a:bodyPr wrap="square" anchor="t" lIns="0" rIns="0" tIns="0" bIns="0">
-            <a:spAutoFit/>
-          </a:bodyPr>
-          <a:lstStyle/>
-          <a:p>
-            <a:pPr algn="ctr"/>
-            <a:r>
-              <a:rPr sz="1800" b="0" i="0" spc="-18">
-                <a:solidFill>
-                  <a:srgbClr val="6B6B6B"/>
-                </a:solidFill>
-                <a:latin typeface="Pretendard"/>
-                <a:ea typeface="Pretendard"/>
-                <a:cs typeface="Pretendard"/>
-              </a:rPr>
-              <a:t>Questions &amp; discussion</a:t>
-            </a:r>
-          </a:p>
-        </p:txBody>
-      </p:sp>
-      <p:sp>
-        <p:nvSpPr>
-          <p:cNvPr id="6" name="TextBox 5"/>
-          <p:cNvSpPr txBox="1"/>
-          <p:nvPr/>
-        </p:nvSpPr>
-        <p:spPr>
-          <a:xfrm>
-            <a:off x="548640" y="4937760"/>
-            <a:ext cx="11064240" cy="640080"/>
-          </a:xfrm>
-          <a:prstGeom prst="rect">
-            <a:avLst/>
-          </a:prstGeom>
-          <a:noFill/>
-        </p:spPr>
-        <p:txBody>
-          <a:bodyPr wrap="square" anchor="t" lIns="0" rIns="0" tIns="0" bIns="0">
-            <a:spAutoFit/>
-          </a:bodyPr>
-          <a:lstStyle/>
-          <a:p>
-            <a:pPr algn="ctr"/>
-            <a:r>
-              <a:rPr sz="1400" b="0" i="0" spc="-14">
-                <a:solidFill>
-                  <a:srgbClr val="6B6B6B"/>
-                </a:solidFill>
-                <a:latin typeface="Pretendard"/>
-                <a:ea typeface="Pretendard"/>
-                <a:cs typeface="Pretendard"/>
-              </a:rPr>
-              <a:t>박상민  ·  분당서울대학교병원 정형외과</a:t>
-            </a:r>
-          </a:p>
-          <a:p>
-            <a:pPr algn="ctr">
+              <a:t>Q.  </a:t>
+            </a:r>
+            <a:r>
+              <a:rPr sz="1500" b="1" i="0" spc="-15">
+                <a:solidFill>
+                  <a:srgbClr val="006241"/>
+                </a:solidFill>
+                <a:latin typeface="Pretendard"/>
+                <a:ea typeface="Pretendard"/>
+                <a:cs typeface="Pretendard"/>
+              </a:rPr>
+              <a:t>Zotero랑 뭐가 다른가요?</a:t>
+            </a:r>
+          </a:p>
+          <a:p>
+            <a:pPr algn="l">
+              <a:lnSpc>
+                <a:spcPts val="1700"/>
+              </a:lnSpc>
               <a:spcBef>
-                <a:spcPts val="500"/>
+                <a:spcPts val="600"/>
               </a:spcBef>
             </a:pPr>
             <a:r>
-              <a:rPr sz="1300" b="1" i="0" spc="-13">
+              <a:rPr sz="1250" b="1" i="0" spc="-12">
                 <a:solidFill>
                   <a:srgbClr val="00754A"/>
                 </a:solidFill>
@@ -12762,7 +12915,278 @@
                 <a:ea typeface="Pretendard"/>
                 <a:cs typeface="Pretendard"/>
               </a:rPr>
-              <a:t>github.com/grotyx/rag-obsidian</a:t>
+              <a:t>A.  </a:t>
+            </a:r>
+            <a:r>
+              <a:rPr sz="1250" b="0" i="0" spc="-12">
+                <a:solidFill>
+                  <a:srgbClr val="1F1F1F"/>
+                </a:solidFill>
+                <a:latin typeface="Pretendard"/>
+                <a:ea typeface="Pretendard"/>
+                <a:cs typeface="Pretendard"/>
+              </a:rPr>
+              <a:t>Zotero는 별도 앱+별도 DB. 여기선 글 쓰는 Obsidian 노트 자체가 서지 DB라 한 곳에서 끝나고, AI 근거 검색이 기본 내장.</a:t>
+            </a:r>
+          </a:p>
+        </p:txBody>
+      </p:sp>
+      <p:sp>
+        <p:nvSpPr>
+          <p:cNvPr id="10" name="Rounded Rectangle 9"/>
+          <p:cNvSpPr/>
+          <p:nvPr/>
+        </p:nvSpPr>
+        <p:spPr>
+          <a:xfrm>
+            <a:off x="663122" y="3221736"/>
+            <a:ext cx="10876422" cy="1364498"/>
+          </a:xfrm>
+          <a:prstGeom prst="roundRect">
+            <a:avLst>
+              <a:gd name="adj" fmla="val 6000"/>
+            </a:avLst>
+          </a:prstGeom>
+          <a:noFill/>
+          <a:ln w="11430">
+            <a:solidFill>
+              <a:srgbClr val="D9D9D9"/>
+            </a:solidFill>
+          </a:ln>
+          <a:effectLst/>
+        </p:spPr>
+        <p:style>
+          <a:lnRef idx="1">
+            <a:schemeClr val="accent1"/>
+          </a:lnRef>
+          <a:fillRef idx="3">
+            <a:schemeClr val="accent1"/>
+          </a:fillRef>
+          <a:effectRef idx="2">
+            <a:schemeClr val="accent1"/>
+          </a:effectRef>
+          <a:fontRef idx="minor">
+            <a:schemeClr val="lt1"/>
+          </a:fontRef>
+        </p:style>
+        <p:txBody>
+          <a:bodyPr rtlCol="0" anchor="ctr"/>
+          <a:lstStyle/>
+          <a:p>
+            <a:pPr algn="ctr"/>
+          </a:p>
+        </p:txBody>
+      </p:sp>
+      <p:sp>
+        <p:nvSpPr>
+          <p:cNvPr id="11" name="TextBox 10"/>
+          <p:cNvSpPr txBox="1"/>
+          <p:nvPr/>
+        </p:nvSpPr>
+        <p:spPr>
+          <a:xfrm>
+            <a:off x="1028882" y="3221736"/>
+            <a:ext cx="10144902" cy="1364498"/>
+          </a:xfrm>
+          <a:prstGeom prst="rect">
+            <a:avLst/>
+          </a:prstGeom>
+          <a:noFill/>
+        </p:spPr>
+        <p:txBody>
+          <a:bodyPr wrap="square" anchor="ctr" lIns="0" rIns="0" tIns="0" bIns="0">
+            <a:spAutoFit/>
+          </a:bodyPr>
+          <a:lstStyle/>
+          <a:p>
+            <a:pPr algn="l">
+              <a:lnSpc>
+                <a:spcPts val="2000"/>
+              </a:lnSpc>
+            </a:pPr>
+            <a:r>
+              <a:rPr sz="1500" b="1" i="0" spc="-15">
+                <a:solidFill>
+                  <a:srgbClr val="006241"/>
+                </a:solidFill>
+                <a:latin typeface="Pretendard"/>
+                <a:ea typeface="Pretendard"/>
+                <a:cs typeface="Pretendard"/>
+              </a:rPr>
+              <a:t>Q.  </a:t>
+            </a:r>
+            <a:r>
+              <a:rPr sz="1500" b="1" i="0" spc="-15">
+                <a:solidFill>
+                  <a:srgbClr val="006241"/>
+                </a:solidFill>
+                <a:latin typeface="Pretendard"/>
+                <a:ea typeface="Pretendard"/>
+                <a:cs typeface="Pretendard"/>
+              </a:rPr>
+              <a:t>오프라인에서도 되나요?</a:t>
+            </a:r>
+          </a:p>
+          <a:p>
+            <a:pPr algn="l">
+              <a:lnSpc>
+                <a:spcPts val="1700"/>
+              </a:lnSpc>
+              <a:spcBef>
+                <a:spcPts val="600"/>
+              </a:spcBef>
+            </a:pPr>
+            <a:r>
+              <a:rPr sz="1250" b="1" i="0" spc="-12">
+                <a:solidFill>
+                  <a:srgbClr val="00754A"/>
+                </a:solidFill>
+                <a:latin typeface="Pretendard"/>
+                <a:ea typeface="Pretendard"/>
+                <a:cs typeface="Pretendard"/>
+              </a:rPr>
+              <a:t>A.  </a:t>
+            </a:r>
+            <a:r>
+              <a:rPr sz="1250" b="0" i="0" spc="-12">
+                <a:solidFill>
+                  <a:srgbClr val="1F1F1F"/>
+                </a:solidFill>
+                <a:latin typeface="Pretendard"/>
+                <a:ea typeface="Pretendard"/>
+                <a:cs typeface="Pretendard"/>
+              </a:rPr>
+              <a:t>검색·색인은 전부 로컬. 임베딩도 로컬(Ollama) 가능. 네트워크는 메타데이터 가져오기와 인용 그래프(OpenAlex)뿐.</a:t>
+            </a:r>
+          </a:p>
+        </p:txBody>
+      </p:sp>
+      <p:sp>
+        <p:nvSpPr>
+          <p:cNvPr id="12" name="Rounded Rectangle 11"/>
+          <p:cNvSpPr/>
+          <p:nvPr/>
+        </p:nvSpPr>
+        <p:spPr>
+          <a:xfrm>
+            <a:off x="663122" y="4787402"/>
+            <a:ext cx="10876422" cy="1364498"/>
+          </a:xfrm>
+          <a:prstGeom prst="roundRect">
+            <a:avLst>
+              <a:gd name="adj" fmla="val 6000"/>
+            </a:avLst>
+          </a:prstGeom>
+          <a:noFill/>
+          <a:ln w="11430">
+            <a:solidFill>
+              <a:srgbClr val="D9D9D9"/>
+            </a:solidFill>
+          </a:ln>
+          <a:effectLst/>
+        </p:spPr>
+        <p:style>
+          <a:lnRef idx="1">
+            <a:schemeClr val="accent1"/>
+          </a:lnRef>
+          <a:fillRef idx="3">
+            <a:schemeClr val="accent1"/>
+          </a:fillRef>
+          <a:effectRef idx="2">
+            <a:schemeClr val="accent1"/>
+          </a:effectRef>
+          <a:fontRef idx="minor">
+            <a:schemeClr val="lt1"/>
+          </a:fontRef>
+        </p:style>
+        <p:txBody>
+          <a:bodyPr rtlCol="0" anchor="ctr"/>
+          <a:lstStyle/>
+          <a:p>
+            <a:pPr algn="ctr"/>
+          </a:p>
+        </p:txBody>
+      </p:sp>
+      <p:sp>
+        <p:nvSpPr>
+          <p:cNvPr id="13" name="TextBox 12"/>
+          <p:cNvSpPr txBox="1"/>
+          <p:nvPr/>
+        </p:nvSpPr>
+        <p:spPr>
+          <a:xfrm>
+            <a:off x="1028882" y="4787402"/>
+            <a:ext cx="10144902" cy="1364498"/>
+          </a:xfrm>
+          <a:prstGeom prst="rect">
+            <a:avLst/>
+          </a:prstGeom>
+          <a:noFill/>
+        </p:spPr>
+        <p:txBody>
+          <a:bodyPr wrap="square" anchor="ctr" lIns="0" rIns="0" tIns="0" bIns="0">
+            <a:spAutoFit/>
+          </a:bodyPr>
+          <a:lstStyle/>
+          <a:p>
+            <a:pPr algn="l">
+              <a:lnSpc>
+                <a:spcPts val="2000"/>
+              </a:lnSpc>
+            </a:pPr>
+            <a:r>
+              <a:rPr sz="1500" b="1" i="0" spc="-15">
+                <a:solidFill>
+                  <a:srgbClr val="006241"/>
+                </a:solidFill>
+                <a:latin typeface="Pretendard"/>
+                <a:ea typeface="Pretendard"/>
+                <a:cs typeface="Pretendard"/>
+              </a:rPr>
+              <a:t>Q.  </a:t>
+            </a:r>
+            <a:r>
+              <a:rPr sz="1500" b="1" i="0" spc="-15">
+                <a:solidFill>
+                  <a:srgbClr val="006241"/>
+                </a:solidFill>
+                <a:latin typeface="Pretendard"/>
+                <a:ea typeface="Pretendard"/>
+                <a:cs typeface="Pretendard"/>
+              </a:rPr>
+              <a:t>내 데이터는 어디에 저장되나요?</a:t>
+            </a:r>
+          </a:p>
+          <a:p>
+            <a:pPr algn="l">
+              <a:lnSpc>
+                <a:spcPts val="1700"/>
+              </a:lnSpc>
+              <a:spcBef>
+                <a:spcPts val="600"/>
+              </a:spcBef>
+            </a:pPr>
+            <a:r>
+              <a:rPr sz="1250" b="1" i="0" spc="-12">
+                <a:solidFill>
+                  <a:srgbClr val="00754A"/>
+                </a:solidFill>
+                <a:latin typeface="Pretendard"/>
+                <a:ea typeface="Pretendard"/>
+                <a:cs typeface="Pretendard"/>
+              </a:rPr>
+              <a:t>A.  </a:t>
+            </a:r>
+            <a:r>
+              <a:rPr sz="1250" b="0" i="0" spc="-12">
+                <a:solidFill>
+                  <a:srgbClr val="1F1F1F"/>
+                </a:solidFill>
+                <a:latin typeface="Pretendard"/>
+                <a:ea typeface="Pretendard"/>
+                <a:cs typeface="Pretendard"/>
+              </a:rPr>
+              <a:t>전부 내 vault 안 평문 마크다운. 외부 서버 없음 — 내가 키를 넣은 LLM 호출만 예외.</a:t>
             </a:r>
           </a:p>
         </p:txBody>
@@ -12902,7 +13326,7 @@
                 <a:ea typeface="Pretendard"/>
                 <a:cs typeface="Pretendard"/>
               </a:rPr>
-              <a:t>자주 나올 질문 ①</a:t>
+              <a:t>자주 나올 질문 ②</a:t>
             </a:r>
           </a:p>
         </p:txBody>
@@ -13110,7 +13534,7 @@
                 <a:ea typeface="Pretendard"/>
                 <a:cs typeface="Pretendard"/>
               </a:rPr>
-              <a:t>Zotero랑 뭐가 다른가요?</a:t>
+              <a:t>SNOMED·MeSH 같은 의학 용어체계도 되나요?</a:t>
             </a:r>
           </a:p>
           <a:p>
@@ -13142,7 +13566,7 @@
                 <a:ea typeface="Pretendard"/>
                 <a:cs typeface="Pretendard"/>
               </a:rPr>
-              <a:t>Zotero는 별도 앱+별도 DB. 여기선 글 쓰는 Obsidian 노트 자체가 서지 DB라 한 곳에서 끝나고, AI 근거 검색이 기본 내장.</a:t>
+              <a:t>온톨로지 팩(JSON)으로 장착. IS_A 계층·동의어 링크 지원. PubMed 추가 시 MeSH 태그는 기본.</a:t>
             </a:r>
           </a:p>
         </p:txBody>
@@ -13240,7 +13664,7 @@
                 <a:ea typeface="Pretendard"/>
                 <a:cs typeface="Pretendard"/>
               </a:rPr>
-              <a:t>오프라인에서도 되나요?</a:t>
+              <a:t>수천 편짜리 큰 서재도 버티나요?</a:t>
             </a:r>
           </a:p>
           <a:p>
@@ -13272,7 +13696,7 @@
                 <a:ea typeface="Pretendard"/>
                 <a:cs typeface="Pretendard"/>
               </a:rPr>
-              <a:t>검색·색인은 전부 로컬. 임베딩도 로컬(Ollama) 가능. 네트워크는 메타데이터 가져오기와 인용 그래프(OpenAlex)뿐.</a:t>
+              <a:t>수백~수천 편 타깃. 색인이 인메모리라 아주 큰 vault는 추후 sqlite-vec 교체 예정.</a:t>
             </a:r>
           </a:p>
         </p:txBody>
@@ -13370,7 +13794,7 @@
                 <a:ea typeface="Pretendard"/>
                 <a:cs typeface="Pretendard"/>
               </a:rPr>
-              <a:t>내 데이터는 어디에 저장되나요?</a:t>
+              <a:t>가짜 인용(환각)은 정말 없나요?</a:t>
             </a:r>
           </a:p>
           <a:p>
@@ -13402,7 +13826,7 @@
                 <a:ea typeface="Pretendard"/>
                 <a:cs typeface="Pretendard"/>
               </a:rPr>
-              <a:t>전부 내 vault 안 평문 마크다운. 외부 서버 없음 — 내가 키를 넣은 LLM 호출만 예외.</a:t>
+              <a:t>답을 서재 구절에만 근거하게 강제하고 [n]은 실제 노트에 연결. 근거 없으면 "근거 없음"이라 답하게 설계.</a:t>
             </a:r>
           </a:p>
         </p:txBody>
@@ -13730,87 +14154,9 @@
           </a:p>
         </p:txBody>
       </p:sp>
-      <p:sp>
-        <p:nvSpPr>
-          <p:cNvPr id="3" name="TextBox 2"/>
-          <p:cNvSpPr txBox="1"/>
-          <p:nvPr/>
-        </p:nvSpPr>
-        <p:spPr>
-          <a:xfrm>
-            <a:off x="138257" y="123444"/>
-            <a:ext cx="5486400" cy="256032"/>
-          </a:xfrm>
-          <a:prstGeom prst="rect">
-            <a:avLst/>
-          </a:prstGeom>
-          <a:noFill/>
-        </p:spPr>
-        <p:txBody>
-          <a:bodyPr wrap="square" anchor="t" lIns="0" rIns="0" tIns="0" bIns="0">
-            <a:spAutoFit/>
-          </a:bodyPr>
-          <a:lstStyle/>
-          <a:p>
-            <a:pPr algn="l"/>
-            <a:r>
-              <a:rPr sz="1100" b="1" i="0" spc="-11">
-                <a:solidFill>
-                  <a:srgbClr val="8E8E93"/>
-                </a:solidFill>
-                <a:latin typeface="Pretendard"/>
-                <a:ea typeface="Pretendard"/>
-                <a:cs typeface="Pretendard"/>
-              </a:rPr>
-              <a:t>APPENDIX · Q&amp;A</a:t>
-            </a:r>
-          </a:p>
-        </p:txBody>
-      </p:sp>
-      <p:sp>
-        <p:nvSpPr>
-          <p:cNvPr id="4" name="TextBox 3"/>
-          <p:cNvSpPr txBox="1"/>
-          <p:nvPr/>
-        </p:nvSpPr>
-        <p:spPr>
-          <a:xfrm>
-            <a:off x="251642" y="436260"/>
-            <a:ext cx="10972800" cy="640080"/>
-          </a:xfrm>
-          <a:prstGeom prst="rect">
-            <a:avLst/>
-          </a:prstGeom>
-          <a:noFill/>
-        </p:spPr>
-        <p:txBody>
-          <a:bodyPr wrap="square" anchor="t" lIns="0" rIns="0" tIns="0" bIns="0">
-            <a:spAutoFit/>
-          </a:bodyPr>
-          <a:lstStyle/>
-          <a:p>
-            <a:pPr algn="l">
-              <a:lnSpc>
-                <a:spcPts val="3600"/>
-              </a:lnSpc>
-            </a:pPr>
-            <a:r>
-              <a:rPr sz="3000" b="1" i="0" spc="-30">
-                <a:solidFill>
-                  <a:srgbClr val="006241"/>
-                </a:solidFill>
-                <a:latin typeface="Pretendard"/>
-                <a:ea typeface="Pretendard"/>
-                <a:cs typeface="Pretendard"/>
-              </a:rPr>
-              <a:t>자주 나올 질문 ②</a:t>
-            </a:r>
-          </a:p>
-        </p:txBody>
-      </p:sp>
       <p:pic>
         <p:nvPicPr>
-          <p:cNvPr id="5" name="Picture 4" descr="logo.png"/>
+          <p:cNvPr id="3" name="Picture 2" descr="logo.png"/>
           <p:cNvPicPr>
             <a:picLocks noChangeAspect="1"/>
           </p:cNvPicPr>
@@ -13835,62 +14181,51 @@
       </p:pic>
       <p:sp>
         <p:nvSpPr>
-          <p:cNvPr id="6" name="Rounded Rectangle 5"/>
-          <p:cNvSpPr/>
-          <p:nvPr/>
-        </p:nvSpPr>
-        <p:spPr>
-          <a:xfrm>
-            <a:off x="251642" y="1290309"/>
-            <a:ext cx="11699382" cy="5227350"/>
-          </a:xfrm>
-          <a:prstGeom prst="roundRect">
-            <a:avLst>
-              <a:gd name="adj" fmla="val 3500"/>
-            </a:avLst>
-          </a:prstGeom>
-          <a:solidFill>
-            <a:srgbClr val="FFFFFF"/>
-          </a:solidFill>
-          <a:ln w="9525">
-            <a:solidFill>
-              <a:srgbClr val="D9D9D9"/>
-            </a:solidFill>
-          </a:ln>
-          <a:effectLst/>
-        </p:spPr>
-        <p:style>
-          <a:lnRef idx="1">
-            <a:schemeClr val="accent1"/>
-          </a:lnRef>
-          <a:fillRef idx="3">
-            <a:schemeClr val="accent1"/>
-          </a:fillRef>
-          <a:effectRef idx="2">
-            <a:schemeClr val="accent1"/>
-          </a:effectRef>
-          <a:fontRef idx="minor">
-            <a:schemeClr val="lt1"/>
-          </a:fontRef>
-        </p:style>
-        <p:txBody>
-          <a:bodyPr rtlCol="0" anchor="ctr"/>
+          <p:cNvPr id="4" name="TextBox 3"/>
+          <p:cNvSpPr txBox="1"/>
+          <p:nvPr/>
+        </p:nvSpPr>
+        <p:spPr>
+          <a:xfrm>
+            <a:off x="548640" y="2377440"/>
+            <a:ext cx="11064240" cy="1280160"/>
+          </a:xfrm>
+          <a:prstGeom prst="rect">
+            <a:avLst/>
+          </a:prstGeom>
+          <a:noFill/>
+        </p:spPr>
+        <p:txBody>
+          <a:bodyPr wrap="square" anchor="ctr" lIns="0" rIns="0" tIns="0" bIns="0">
+            <a:spAutoFit/>
+          </a:bodyPr>
           <a:lstStyle/>
           <a:p>
             <a:pPr algn="ctr"/>
-          </a:p>
-        </p:txBody>
-      </p:sp>
-      <p:sp>
-        <p:nvSpPr>
-          <p:cNvPr id="7" name="TextBox 6"/>
-          <p:cNvSpPr txBox="1"/>
-          <p:nvPr/>
-        </p:nvSpPr>
-        <p:spPr>
-          <a:xfrm>
-            <a:off x="138257" y="6620256"/>
-            <a:ext cx="548640" cy="228600"/>
+            <a:r>
+              <a:rPr sz="5400" b="1" i="0" spc="-54">
+                <a:solidFill>
+                  <a:srgbClr val="006241"/>
+                </a:solidFill>
+                <a:latin typeface="Pretendard"/>
+                <a:ea typeface="Pretendard"/>
+                <a:cs typeface="Pretendard"/>
+              </a:rPr>
+              <a:t>Thank you</a:t>
+            </a:r>
+          </a:p>
+        </p:txBody>
+      </p:sp>
+      <p:sp>
+        <p:nvSpPr>
+          <p:cNvPr id="5" name="TextBox 4"/>
+          <p:cNvSpPr txBox="1"/>
+          <p:nvPr/>
+        </p:nvSpPr>
+        <p:spPr>
+          <a:xfrm>
+            <a:off x="548640" y="3749039"/>
+            <a:ext cx="11064240" cy="457200"/>
           </a:xfrm>
           <a:prstGeom prst="rect">
             <a:avLst/>
@@ -13903,128 +14238,64 @@
           </a:bodyPr>
           <a:lstStyle/>
           <a:p>
-            <a:pPr algn="l"/>
-            <a:r>
-              <a:rPr sz="900" b="0" i="0" spc="-9">
-                <a:solidFill>
-                  <a:srgbClr val="8E8E93"/>
-                </a:solidFill>
-                <a:latin typeface="Pretendard"/>
-                <a:ea typeface="Pretendard"/>
-                <a:cs typeface="Pretendard"/>
-              </a:rPr>
-              <a:t>20</a:t>
-            </a:r>
-          </a:p>
-        </p:txBody>
-      </p:sp>
-      <p:sp>
-        <p:nvSpPr>
-          <p:cNvPr id="8" name="Rounded Rectangle 7"/>
-          <p:cNvSpPr/>
-          <p:nvPr/>
-        </p:nvSpPr>
-        <p:spPr>
-          <a:xfrm>
-            <a:off x="663122" y="1656069"/>
-            <a:ext cx="10876422" cy="1364498"/>
-          </a:xfrm>
-          <a:prstGeom prst="roundRect">
-            <a:avLst>
-              <a:gd name="adj" fmla="val 6000"/>
-            </a:avLst>
-          </a:prstGeom>
-          <a:noFill/>
-          <a:ln w="11430">
-            <a:solidFill>
-              <a:srgbClr val="D9D9D9"/>
-            </a:solidFill>
-          </a:ln>
-          <a:effectLst/>
-        </p:spPr>
-        <p:style>
-          <a:lnRef idx="1">
-            <a:schemeClr val="accent1"/>
-          </a:lnRef>
-          <a:fillRef idx="3">
-            <a:schemeClr val="accent1"/>
-          </a:fillRef>
-          <a:effectRef idx="2">
-            <a:schemeClr val="accent1"/>
-          </a:effectRef>
-          <a:fontRef idx="minor">
-            <a:schemeClr val="lt1"/>
-          </a:fontRef>
-        </p:style>
-        <p:txBody>
-          <a:bodyPr rtlCol="0" anchor="ctr"/>
-          <a:lstStyle/>
-          <a:p>
             <a:pPr algn="ctr"/>
-          </a:p>
-        </p:txBody>
-      </p:sp>
-      <p:sp>
-        <p:nvSpPr>
-          <p:cNvPr id="9" name="TextBox 8"/>
-          <p:cNvSpPr txBox="1"/>
-          <p:nvPr/>
-        </p:nvSpPr>
-        <p:spPr>
-          <a:xfrm>
-            <a:off x="1028882" y="1656069"/>
-            <a:ext cx="10144902" cy="1364498"/>
-          </a:xfrm>
-          <a:prstGeom prst="rect">
-            <a:avLst/>
-          </a:prstGeom>
-          <a:noFill/>
-        </p:spPr>
-        <p:txBody>
-          <a:bodyPr wrap="square" anchor="ctr" lIns="0" rIns="0" tIns="0" bIns="0">
-            <a:spAutoFit/>
-          </a:bodyPr>
-          <a:lstStyle/>
-          <a:p>
-            <a:pPr algn="l">
-              <a:lnSpc>
-                <a:spcPts val="2000"/>
-              </a:lnSpc>
-            </a:pPr>
-            <a:r>
-              <a:rPr sz="1500" b="1" i="0" spc="-15">
-                <a:solidFill>
-                  <a:srgbClr val="006241"/>
-                </a:solidFill>
-                <a:latin typeface="Pretendard"/>
-                <a:ea typeface="Pretendard"/>
-                <a:cs typeface="Pretendard"/>
-              </a:rPr>
-              <a:t>Q.  </a:t>
-            </a:r>
-            <a:r>
-              <a:rPr sz="1500" b="1" i="0" spc="-15">
-                <a:solidFill>
-                  <a:srgbClr val="006241"/>
-                </a:solidFill>
-                <a:latin typeface="Pretendard"/>
-                <a:ea typeface="Pretendard"/>
-                <a:cs typeface="Pretendard"/>
-              </a:rPr>
-              <a:t>SNOMED·MeSH 같은 의학 용어체계도 되나요?</a:t>
-            </a:r>
-          </a:p>
-          <a:p>
-            <a:pPr algn="l">
-              <a:lnSpc>
-                <a:spcPts val="1700"/>
-              </a:lnSpc>
+            <a:r>
+              <a:rPr sz="1800" b="0" i="0" spc="-18">
+                <a:solidFill>
+                  <a:srgbClr val="6B6B6B"/>
+                </a:solidFill>
+                <a:latin typeface="Pretendard"/>
+                <a:ea typeface="Pretendard"/>
+                <a:cs typeface="Pretendard"/>
+              </a:rPr>
+              <a:t>Questions &amp; discussion</a:t>
+            </a:r>
+          </a:p>
+        </p:txBody>
+      </p:sp>
+      <p:sp>
+        <p:nvSpPr>
+          <p:cNvPr id="6" name="TextBox 5"/>
+          <p:cNvSpPr txBox="1"/>
+          <p:nvPr/>
+        </p:nvSpPr>
+        <p:spPr>
+          <a:xfrm>
+            <a:off x="548640" y="4937760"/>
+            <a:ext cx="11064240" cy="640080"/>
+          </a:xfrm>
+          <a:prstGeom prst="rect">
+            <a:avLst/>
+          </a:prstGeom>
+          <a:noFill/>
+        </p:spPr>
+        <p:txBody>
+          <a:bodyPr wrap="square" anchor="t" lIns="0" rIns="0" tIns="0" bIns="0">
+            <a:spAutoFit/>
+          </a:bodyPr>
+          <a:lstStyle/>
+          <a:p>
+            <a:pPr algn="ctr"/>
+            <a:r>
+              <a:rPr sz="1400" b="0" i="0" spc="-14">
+                <a:solidFill>
+                  <a:srgbClr val="6B6B6B"/>
+                </a:solidFill>
+                <a:latin typeface="Pretendard"/>
+                <a:ea typeface="Pretendard"/>
+                <a:cs typeface="Pretendard"/>
+              </a:rPr>
+              <a:t>박상민  ·  분당서울대학교병원 정형외과</a:t>
+            </a:r>
+          </a:p>
+          <a:p>
+            <a:pPr algn="ctr">
               <a:spcBef>
-                <a:spcPts val="600"/>
+                <a:spcPts val="500"/>
               </a:spcBef>
             </a:pPr>
             <a:r>
-              <a:rPr sz="1250" b="1" i="0" spc="-12">
+              <a:rPr sz="1300" b="1" i="0" spc="-13">
                 <a:solidFill>
                   <a:srgbClr val="00754A"/>
                 </a:solidFill>
@@ -14032,278 +14303,7 @@
                 <a:ea typeface="Pretendard"/>
                 <a:cs typeface="Pretendard"/>
               </a:rPr>
-              <a:t>A.  </a:t>
-            </a:r>
-            <a:r>
-              <a:rPr sz="1250" b="0" i="0" spc="-12">
-                <a:solidFill>
-                  <a:srgbClr val="1F1F1F"/>
-                </a:solidFill>
-                <a:latin typeface="Pretendard"/>
-                <a:ea typeface="Pretendard"/>
-                <a:cs typeface="Pretendard"/>
-              </a:rPr>
-              <a:t>온톨로지 팩(JSON)으로 장착. IS_A 계층·동의어 링크 지원. PubMed 추가 시 MeSH 태그는 기본.</a:t>
-            </a:r>
-          </a:p>
-        </p:txBody>
-      </p:sp>
-      <p:sp>
-        <p:nvSpPr>
-          <p:cNvPr id="10" name="Rounded Rectangle 9"/>
-          <p:cNvSpPr/>
-          <p:nvPr/>
-        </p:nvSpPr>
-        <p:spPr>
-          <a:xfrm>
-            <a:off x="663122" y="3221736"/>
-            <a:ext cx="10876422" cy="1364498"/>
-          </a:xfrm>
-          <a:prstGeom prst="roundRect">
-            <a:avLst>
-              <a:gd name="adj" fmla="val 6000"/>
-            </a:avLst>
-          </a:prstGeom>
-          <a:noFill/>
-          <a:ln w="11430">
-            <a:solidFill>
-              <a:srgbClr val="D9D9D9"/>
-            </a:solidFill>
-          </a:ln>
-          <a:effectLst/>
-        </p:spPr>
-        <p:style>
-          <a:lnRef idx="1">
-            <a:schemeClr val="accent1"/>
-          </a:lnRef>
-          <a:fillRef idx="3">
-            <a:schemeClr val="accent1"/>
-          </a:fillRef>
-          <a:effectRef idx="2">
-            <a:schemeClr val="accent1"/>
-          </a:effectRef>
-          <a:fontRef idx="minor">
-            <a:schemeClr val="lt1"/>
-          </a:fontRef>
-        </p:style>
-        <p:txBody>
-          <a:bodyPr rtlCol="0" anchor="ctr"/>
-          <a:lstStyle/>
-          <a:p>
-            <a:pPr algn="ctr"/>
-          </a:p>
-        </p:txBody>
-      </p:sp>
-      <p:sp>
-        <p:nvSpPr>
-          <p:cNvPr id="11" name="TextBox 10"/>
-          <p:cNvSpPr txBox="1"/>
-          <p:nvPr/>
-        </p:nvSpPr>
-        <p:spPr>
-          <a:xfrm>
-            <a:off x="1028882" y="3221736"/>
-            <a:ext cx="10144902" cy="1364498"/>
-          </a:xfrm>
-          <a:prstGeom prst="rect">
-            <a:avLst/>
-          </a:prstGeom>
-          <a:noFill/>
-        </p:spPr>
-        <p:txBody>
-          <a:bodyPr wrap="square" anchor="ctr" lIns="0" rIns="0" tIns="0" bIns="0">
-            <a:spAutoFit/>
-          </a:bodyPr>
-          <a:lstStyle/>
-          <a:p>
-            <a:pPr algn="l">
-              <a:lnSpc>
-                <a:spcPts val="2000"/>
-              </a:lnSpc>
-            </a:pPr>
-            <a:r>
-              <a:rPr sz="1500" b="1" i="0" spc="-15">
-                <a:solidFill>
-                  <a:srgbClr val="006241"/>
-                </a:solidFill>
-                <a:latin typeface="Pretendard"/>
-                <a:ea typeface="Pretendard"/>
-                <a:cs typeface="Pretendard"/>
-              </a:rPr>
-              <a:t>Q.  </a:t>
-            </a:r>
-            <a:r>
-              <a:rPr sz="1500" b="1" i="0" spc="-15">
-                <a:solidFill>
-                  <a:srgbClr val="006241"/>
-                </a:solidFill>
-                <a:latin typeface="Pretendard"/>
-                <a:ea typeface="Pretendard"/>
-                <a:cs typeface="Pretendard"/>
-              </a:rPr>
-              <a:t>수천 편짜리 큰 서재도 버티나요?</a:t>
-            </a:r>
-          </a:p>
-          <a:p>
-            <a:pPr algn="l">
-              <a:lnSpc>
-                <a:spcPts val="1700"/>
-              </a:lnSpc>
-              <a:spcBef>
-                <a:spcPts val="600"/>
-              </a:spcBef>
-            </a:pPr>
-            <a:r>
-              <a:rPr sz="1250" b="1" i="0" spc="-12">
-                <a:solidFill>
-                  <a:srgbClr val="00754A"/>
-                </a:solidFill>
-                <a:latin typeface="Pretendard"/>
-                <a:ea typeface="Pretendard"/>
-                <a:cs typeface="Pretendard"/>
-              </a:rPr>
-              <a:t>A.  </a:t>
-            </a:r>
-            <a:r>
-              <a:rPr sz="1250" b="0" i="0" spc="-12">
-                <a:solidFill>
-                  <a:srgbClr val="1F1F1F"/>
-                </a:solidFill>
-                <a:latin typeface="Pretendard"/>
-                <a:ea typeface="Pretendard"/>
-                <a:cs typeface="Pretendard"/>
-              </a:rPr>
-              <a:t>수백~수천 편 타깃. 색인이 인메모리라 아주 큰 vault는 추후 sqlite-vec 교체 예정.</a:t>
-            </a:r>
-          </a:p>
-        </p:txBody>
-      </p:sp>
-      <p:sp>
-        <p:nvSpPr>
-          <p:cNvPr id="12" name="Rounded Rectangle 11"/>
-          <p:cNvSpPr/>
-          <p:nvPr/>
-        </p:nvSpPr>
-        <p:spPr>
-          <a:xfrm>
-            <a:off x="663122" y="4787402"/>
-            <a:ext cx="10876422" cy="1364498"/>
-          </a:xfrm>
-          <a:prstGeom prst="roundRect">
-            <a:avLst>
-              <a:gd name="adj" fmla="val 6000"/>
-            </a:avLst>
-          </a:prstGeom>
-          <a:noFill/>
-          <a:ln w="11430">
-            <a:solidFill>
-              <a:srgbClr val="D9D9D9"/>
-            </a:solidFill>
-          </a:ln>
-          <a:effectLst/>
-        </p:spPr>
-        <p:style>
-          <a:lnRef idx="1">
-            <a:schemeClr val="accent1"/>
-          </a:lnRef>
-          <a:fillRef idx="3">
-            <a:schemeClr val="accent1"/>
-          </a:fillRef>
-          <a:effectRef idx="2">
-            <a:schemeClr val="accent1"/>
-          </a:effectRef>
-          <a:fontRef idx="minor">
-            <a:schemeClr val="lt1"/>
-          </a:fontRef>
-        </p:style>
-        <p:txBody>
-          <a:bodyPr rtlCol="0" anchor="ctr"/>
-          <a:lstStyle/>
-          <a:p>
-            <a:pPr algn="ctr"/>
-          </a:p>
-        </p:txBody>
-      </p:sp>
-      <p:sp>
-        <p:nvSpPr>
-          <p:cNvPr id="13" name="TextBox 12"/>
-          <p:cNvSpPr txBox="1"/>
-          <p:nvPr/>
-        </p:nvSpPr>
-        <p:spPr>
-          <a:xfrm>
-            <a:off x="1028882" y="4787402"/>
-            <a:ext cx="10144902" cy="1364498"/>
-          </a:xfrm>
-          <a:prstGeom prst="rect">
-            <a:avLst/>
-          </a:prstGeom>
-          <a:noFill/>
-        </p:spPr>
-        <p:txBody>
-          <a:bodyPr wrap="square" anchor="ctr" lIns="0" rIns="0" tIns="0" bIns="0">
-            <a:spAutoFit/>
-          </a:bodyPr>
-          <a:lstStyle/>
-          <a:p>
-            <a:pPr algn="l">
-              <a:lnSpc>
-                <a:spcPts val="2000"/>
-              </a:lnSpc>
-            </a:pPr>
-            <a:r>
-              <a:rPr sz="1500" b="1" i="0" spc="-15">
-                <a:solidFill>
-                  <a:srgbClr val="006241"/>
-                </a:solidFill>
-                <a:latin typeface="Pretendard"/>
-                <a:ea typeface="Pretendard"/>
-                <a:cs typeface="Pretendard"/>
-              </a:rPr>
-              <a:t>Q.  </a:t>
-            </a:r>
-            <a:r>
-              <a:rPr sz="1500" b="1" i="0" spc="-15">
-                <a:solidFill>
-                  <a:srgbClr val="006241"/>
-                </a:solidFill>
-                <a:latin typeface="Pretendard"/>
-                <a:ea typeface="Pretendard"/>
-                <a:cs typeface="Pretendard"/>
-              </a:rPr>
-              <a:t>가짜 인용(환각)은 정말 없나요?</a:t>
-            </a:r>
-          </a:p>
-          <a:p>
-            <a:pPr algn="l">
-              <a:lnSpc>
-                <a:spcPts val="1700"/>
-              </a:lnSpc>
-              <a:spcBef>
-                <a:spcPts val="600"/>
-              </a:spcBef>
-            </a:pPr>
-            <a:r>
-              <a:rPr sz="1250" b="1" i="0" spc="-12">
-                <a:solidFill>
-                  <a:srgbClr val="00754A"/>
-                </a:solidFill>
-                <a:latin typeface="Pretendard"/>
-                <a:ea typeface="Pretendard"/>
-                <a:cs typeface="Pretendard"/>
-              </a:rPr>
-              <a:t>A.  </a:t>
-            </a:r>
-            <a:r>
-              <a:rPr sz="1250" b="0" i="0" spc="-12">
-                <a:solidFill>
-                  <a:srgbClr val="1F1F1F"/>
-                </a:solidFill>
-                <a:latin typeface="Pretendard"/>
-                <a:ea typeface="Pretendard"/>
-                <a:cs typeface="Pretendard"/>
-              </a:rPr>
-              <a:t>답을 서재 구절에만 근거하게 강제하고 [n]은 실제 노트에 연결. 근거 없으면 "근거 없음"이라 답하게 설계.</a:t>
+              <a:t>github.com/grotyx/rag-obsidian</a:t>
             </a:r>
           </a:p>
         </p:txBody>

--- a/presentation/rag_obsidian_deck.pptx
+++ b/presentation/rag_obsidian_deck.pptx
@@ -3283,11 +3283,11 @@
           <a:p>
             <a:pPr algn="l">
               <a:lnSpc>
-                <a:spcPts val="6000"/>
+                <a:spcPts val="4800"/>
               </a:lnSpc>
             </a:pPr>
             <a:r>
-              <a:rPr sz="5400" b="1" i="0" spc="-54">
+              <a:rPr sz="4000" b="1" i="0" spc="-40">
                 <a:solidFill>
                   <a:srgbClr val="006241"/>
                 </a:solidFill>
@@ -3295,7 +3295,25 @@
                 <a:ea typeface="Pretendard"/>
                 <a:cs typeface="Pretendard"/>
               </a:rPr>
-              <a:t>RAG Obsidian</a:t>
+              <a:t>Academic Paper Obsidian</a:t>
+            </a:r>
+          </a:p>
+          <a:p>
+            <a:pPr algn="l">
+              <a:lnSpc>
+                <a:spcPts val="4800"/>
+              </a:lnSpc>
+            </a:pPr>
+            <a:r>
+              <a:rPr sz="4000" b="1" i="0" spc="-40">
+                <a:solidFill>
+                  <a:srgbClr val="006241"/>
+                </a:solidFill>
+                <a:latin typeface="Pretendard"/>
+                <a:ea typeface="Pretendard"/>
+                <a:cs typeface="Pretendard"/>
+              </a:rPr>
+              <a:t>Citation Manager</a:t>
             </a:r>
           </a:p>
         </p:txBody>

--- a/presentation/rag_obsidian_deck.pptx
+++ b/presentation/rag_obsidian_deck.pptx
@@ -13584,7 +13584,7 @@
                 <a:ea typeface="Pretendard"/>
                 <a:cs typeface="Pretendard"/>
               </a:rPr>
-              <a:t>온톨로지 팩(JSON)으로 장착. IS_A 계층·동의어 링크 지원. PubMed 추가 시 MeSH 태그는 기본.</a:t>
+              <a:t>MeSH 태그는 PubMed 추가 시 자동. SNOMED 등은 라이선스상 직접 JSON 팩으로 변환해 장착(노트 태깅·IS_A·동의어). 검색 확장 연동은 로드맵.</a:t>
             </a:r>
           </a:p>
         </p:txBody>

--- a/presentation/rag_obsidian_deck.pptx
+++ b/presentation/rag_obsidian_deck.pptx
@@ -6284,7 +6284,7 @@
                 <a:ea typeface="Pretendard"/>
                 <a:cs typeface="Pretendard"/>
               </a:rPr>
-              <a:t>향후: 풀 CSL(citeproc) 스타일 · 온톨로지 검색확장 · 모바일 QA</a:t>
+              <a:t>향후: 온톨로지 검색확장 · 모바일 QA · 대용량 색인 엔진</a:t>
             </a:r>
           </a:p>
         </p:txBody>
@@ -8035,7 +8035,7 @@
                 <a:ea typeface="Pretendard"/>
                 <a:cs typeface="Pretendard"/>
               </a:rPr>
-              <a:t>옵션: LLM 자동 요약(OA는 전문 기반) + MeSH 태그</a:t>
+              <a:t>MeSH 태그 자동 · 옵션: LLM 요약(PMC 전문 기반)</a:t>
             </a:r>
           </a:p>
         </p:txBody>
@@ -11106,7 +11106,7 @@
                 <a:cs typeface="Pretendard"/>
               </a:rPr>
               <a:t>추가 시 자동 요약·MeSH
-(OA는 전문 기반)</a:t>
+(PMC 전문 기반)</a:t>
             </a:r>
           </a:p>
         </p:txBody>
@@ -11522,7 +11522,7 @@
                 <a:ea typeface="Pretendard"/>
                 <a:cs typeface="Pretendard"/>
               </a:rPr>
-              <a:t>철회 경고 · 중복 정리
+              <a:t>철회 확인 · 중복 정리
 읽기 큐 · OA PDF 다운로드
 PDF 하이라이트 추출</a:t>
             </a:r>
@@ -13074,7 +13074,7 @@
                 <a:ea typeface="Pretendard"/>
                 <a:cs typeface="Pretendard"/>
               </a:rPr>
-              <a:t>검색·색인은 전부 로컬. 임베딩도 로컬(Ollama) 가능. 네트워크는 메타데이터 가져오기와 인용 그래프(OpenAlex)뿐.</a:t>
+              <a:t>검색·색인은 전부 로컬. 임베딩도 로컬(Ollama) 가능. 네트워크는 외부 조회(메타데이터·PubMed·OpenAlex·CSL 스타일)와 클라우드 LLM·임베딩 호출뿐.</a:t>
             </a:r>
           </a:p>
         </p:txBody>
@@ -20082,7 +20082,7 @@
                 <a:ea typeface="Pretendard"/>
                 <a:cs typeface="Pretendard"/>
               </a:rPr>
-              <a:t>단어 + 뜻 + 메타데이터를 한 번에 — 전부 로컬·무료. 필요하면 인용 그래프로 확장.</a:t>
+              <a:t>단어 + 뜻 + 메타데이터를 한 번에 — Ollama면 전부 로컬·무료. 필요하면 인용 그래프로 확장.</a:t>
             </a:r>
           </a:p>
         </p:txBody>

--- a/presentation/rag_obsidian_deck.pptx
+++ b/presentation/rag_obsidian_deck.pptx
@@ -5408,7 +5408,7 @@
                 <a:ea typeface="Pretendard"/>
                 <a:cs typeface="Pretendard"/>
               </a:rPr>
-              <a:t>v0.4.0 · github.com/grotyx/rag-obsidian</a:t>
+              <a:t>v0.4.1 · github.com/grotyx/rag-obsidian</a:t>
             </a:r>
           </a:p>
         </p:txBody>
@@ -7027,7 +7027,7 @@
                 <a:ea typeface="Pretendard"/>
                 <a:cs typeface="Pretendard"/>
               </a:rPr>
-              <a:t>현재 v0.4.0 · 개발 빌드로 사용 중 · 공개 배포 예정</a:t>
+              <a:t>현재 v0.4.1 · 개발 빌드로 사용 중 · 공개 배포 예정</a:t>
             </a:r>
           </a:p>
         </p:txBody>

--- a/presentation/rag_obsidian_deck.pptx
+++ b/presentation/rag_obsidian_deck.pptx
@@ -5408,7 +5408,7 @@
                 <a:ea typeface="Pretendard"/>
                 <a:cs typeface="Pretendard"/>
               </a:rPr>
-              <a:t>v0.4.1 · github.com/grotyx/rag-obsidian</a:t>
+              <a:t>v0.4.2 · github.com/grotyx/rag-obsidian</a:t>
             </a:r>
           </a:p>
         </p:txBody>
@@ -7027,7 +7027,7 @@
                 <a:ea typeface="Pretendard"/>
                 <a:cs typeface="Pretendard"/>
               </a:rPr>
-              <a:t>현재 v0.4.1 · 개발 빌드로 사용 중 · 공개 배포 예정</a:t>
+              <a:t>현재 v0.4.2 · 개발 빌드로 사용 중 · 공개 배포 예정</a:t>
             </a:r>
           </a:p>
         </p:txBody>

--- a/presentation/rag_obsidian_deck.pptx
+++ b/presentation/rag_obsidian_deck.pptx
@@ -10689,7 +10689,7 @@
                 <a:ea typeface="Pretendard"/>
                 <a:cs typeface="Pretendard"/>
               </a:rPr>
-              <a:t>명령 30개 · 전부 Cmd+P</a:t>
+              <a:t>명령 33개 · 전부 Cmd+P</a:t>
             </a:r>
           </a:p>
         </p:txBody>

--- a/presentation/rag_obsidian_deck.pptx
+++ b/presentation/rag_obsidian_deck.pptx
@@ -5408,7 +5408,7 @@
                 <a:ea typeface="Pretendard"/>
                 <a:cs typeface="Pretendard"/>
               </a:rPr>
-              <a:t>v0.4.2 · github.com/grotyx/rag-obsidian</a:t>
+              <a:t>v0.4.3 · github.com/grotyx/rag-obsidian</a:t>
             </a:r>
           </a:p>
         </p:txBody>
@@ -7027,7 +7027,7 @@
                 <a:ea typeface="Pretendard"/>
                 <a:cs typeface="Pretendard"/>
               </a:rPr>
-              <a:t>현재 v0.4.2 · 개발 빌드로 사용 중 · 공개 배포 예정</a:t>
+              <a:t>현재 v0.4.3 · 개발 빌드로 사용 중 · 공개 배포 예정</a:t>
             </a:r>
           </a:p>
         </p:txBody>

--- a/presentation/rag_obsidian_deck.pptx
+++ b/presentation/rag_obsidian_deck.pptx
@@ -3295,7 +3295,7 @@
                 <a:ea typeface="Pretendard"/>
                 <a:cs typeface="Pretendard"/>
               </a:rPr>
-              <a:t>Academic Paper Obsidian</a:t>
+              <a:t>Academic Paper</a:t>
             </a:r>
           </a:p>
           <a:p>
@@ -5408,7 +5408,7 @@
                 <a:ea typeface="Pretendard"/>
                 <a:cs typeface="Pretendard"/>
               </a:rPr>
-              <a:t>v0.4.3 · github.com/grotyx/rag-obsidian</a:t>
+              <a:t>v0.4.4 · github.com/grotyx/rag-obsidian</a:t>
             </a:r>
           </a:p>
         </p:txBody>
@@ -7027,7 +7027,7 @@
                 <a:ea typeface="Pretendard"/>
                 <a:cs typeface="Pretendard"/>
               </a:rPr>
-              <a:t>현재 v0.4.3 · 개발 빌드로 사용 중 · 공개 배포 예정</a:t>
+              <a:t>현재 v0.4.4 · 개발 빌드로 사용 중 · 공개 배포 예정</a:t>
             </a:r>
           </a:p>
         </p:txBody>

--- a/presentation/rag_obsidian_deck.pptx
+++ b/presentation/rag_obsidian_deck.pptx
@@ -5408,7 +5408,7 @@
                 <a:ea typeface="Pretendard"/>
                 <a:cs typeface="Pretendard"/>
               </a:rPr>
-              <a:t>v0.4.4 · github.com/grotyx/rag-obsidian</a:t>
+              <a:t>v0.4.5 · github.com/grotyx/rag-obsidian</a:t>
             </a:r>
           </a:p>
         </p:txBody>
@@ -7027,7 +7027,7 @@
                 <a:ea typeface="Pretendard"/>
                 <a:cs typeface="Pretendard"/>
               </a:rPr>
-              <a:t>현재 v0.4.4 · 개발 빌드로 사용 중 · 공개 배포 예정</a:t>
+              <a:t>현재 v0.4.5 · 개발 빌드로 사용 중 · 공개 배포 예정</a:t>
             </a:r>
           </a:p>
         </p:txBody>

--- a/presentation/rag_obsidian_deck.pptx
+++ b/presentation/rag_obsidian_deck.pptx
@@ -5408,7 +5408,7 @@
                 <a:ea typeface="Pretendard"/>
                 <a:cs typeface="Pretendard"/>
               </a:rPr>
-              <a:t>v0.4.5 · github.com/grotyx/rag-obsidian</a:t>
+              <a:t>v0.4.6 · github.com/grotyx/rag-obsidian</a:t>
             </a:r>
           </a:p>
         </p:txBody>
@@ -7027,7 +7027,7 @@
                 <a:ea typeface="Pretendard"/>
                 <a:cs typeface="Pretendard"/>
               </a:rPr>
-              <a:t>현재 v0.4.5 · 개발 빌드로 사용 중 · 공개 배포 예정</a:t>
+              <a:t>현재 v0.4.6 · 개발 빌드로 사용 중 · 공개 배포 예정</a:t>
             </a:r>
           </a:p>
         </p:txBody>

--- a/presentation/rag_obsidian_deck.pptx
+++ b/presentation/rag_obsidian_deck.pptx
@@ -5408,7 +5408,7 @@
                 <a:ea typeface="Pretendard"/>
                 <a:cs typeface="Pretendard"/>
               </a:rPr>
-              <a:t>v0.4.6 · github.com/grotyx/rag-obsidian</a:t>
+              <a:t>v0.4.7 · github.com/grotyx/rag-obsidian</a:t>
             </a:r>
           </a:p>
         </p:txBody>
@@ -7027,7 +7027,7 @@
                 <a:ea typeface="Pretendard"/>
                 <a:cs typeface="Pretendard"/>
               </a:rPr>
-              <a:t>현재 v0.4.6 · 개발 빌드로 사용 중 · 공개 배포 예정</a:t>
+              <a:t>현재 v0.4.7 · 개발 빌드로 사용 중 · 공개 배포 예정</a:t>
             </a:r>
           </a:p>
         </p:txBody>

--- a/presentation/rag_obsidian_deck.pptx
+++ b/presentation/rag_obsidian_deck.pptx
@@ -5408,7 +5408,7 @@
                 <a:ea typeface="Pretendard"/>
                 <a:cs typeface="Pretendard"/>
               </a:rPr>
-              <a:t>v0.4.7 · github.com/grotyx/rag-obsidian</a:t>
+              <a:t>v0.4.8 · github.com/grotyx/rag-obsidian</a:t>
             </a:r>
           </a:p>
         </p:txBody>
@@ -7027,7 +7027,7 @@
                 <a:ea typeface="Pretendard"/>
                 <a:cs typeface="Pretendard"/>
               </a:rPr>
-              <a:t>현재 v0.4.7 · 개발 빌드로 사용 중 · 공개 배포 예정</a:t>
+              <a:t>현재 v0.4.8 · 개발 빌드로 사용 중 · 공개 배포 예정</a:t>
             </a:r>
           </a:p>
         </p:txBody>

--- a/presentation/rag_obsidian_deck.pptx
+++ b/presentation/rag_obsidian_deck.pptx
@@ -5408,7 +5408,7 @@
                 <a:ea typeface="Pretendard"/>
                 <a:cs typeface="Pretendard"/>
               </a:rPr>
-              <a:t>v0.4.8 · github.com/grotyx/rag-obsidian</a:t>
+              <a:t>v0.4.9 · github.com/grotyx/rag-obsidian</a:t>
             </a:r>
           </a:p>
         </p:txBody>
@@ -7027,7 +7027,7 @@
                 <a:ea typeface="Pretendard"/>
                 <a:cs typeface="Pretendard"/>
               </a:rPr>
-              <a:t>현재 v0.4.8 · 개발 빌드로 사용 중 · 공개 배포 예정</a:t>
+              <a:t>현재 v0.4.9 · 개발 빌드로 사용 중 · 공개 배포 예정</a:t>
             </a:r>
           </a:p>
         </p:txBody>

--- a/presentation/rag_obsidian_deck.pptx
+++ b/presentation/rag_obsidian_deck.pptx
@@ -5408,7 +5408,7 @@
                 <a:ea typeface="Pretendard"/>
                 <a:cs typeface="Pretendard"/>
               </a:rPr>
-              <a:t>v0.4.9 · github.com/grotyx/rag-obsidian</a:t>
+              <a:t>v0.4.10 · github.com/grotyx/rag-obsidian</a:t>
             </a:r>
           </a:p>
         </p:txBody>
@@ -7027,7 +7027,7 @@
                 <a:ea typeface="Pretendard"/>
                 <a:cs typeface="Pretendard"/>
               </a:rPr>
-              <a:t>현재 v0.4.9 · 개발 빌드로 사용 중 · 공개 배포 예정</a:t>
+              <a:t>현재 v0.4.10 · 개발 빌드로 사용 중 · 공개 배포 예정</a:t>
             </a:r>
           </a:p>
         </p:txBody>

--- a/presentation/rag_obsidian_deck.pptx
+++ b/presentation/rag_obsidian_deck.pptx
@@ -5408,7 +5408,7 @@
                 <a:ea typeface="Pretendard"/>
                 <a:cs typeface="Pretendard"/>
               </a:rPr>
-              <a:t>v0.4.10 · github.com/grotyx/rag-obsidian</a:t>
+              <a:t>v0.4.11 · github.com/grotyx/rag-obsidian</a:t>
             </a:r>
           </a:p>
         </p:txBody>
@@ -7027,7 +7027,7 @@
                 <a:ea typeface="Pretendard"/>
                 <a:cs typeface="Pretendard"/>
               </a:rPr>
-              <a:t>현재 v0.4.10 · 개발 빌드로 사용 중 · 공개 배포 예정</a:t>
+              <a:t>현재 v0.4.11 · 개발 빌드로 사용 중 · 공개 배포 예정</a:t>
             </a:r>
           </a:p>
         </p:txBody>

--- a/presentation/rag_obsidian_deck.pptx
+++ b/presentation/rag_obsidian_deck.pptx
@@ -5408,7 +5408,7 @@
                 <a:ea typeface="Pretendard"/>
                 <a:cs typeface="Pretendard"/>
               </a:rPr>
-              <a:t>v0.4.11 · github.com/grotyx/rag-obsidian</a:t>
+              <a:t>v0.4.12 · github.com/grotyx/rag-obsidian</a:t>
             </a:r>
           </a:p>
         </p:txBody>
@@ -7027,7 +7027,7 @@
                 <a:ea typeface="Pretendard"/>
                 <a:cs typeface="Pretendard"/>
               </a:rPr>
-              <a:t>현재 v0.4.11 · 개발 빌드로 사용 중 · 공개 배포 예정</a:t>
+              <a:t>현재 v0.4.12 · 개발 빌드로 사용 중 · 공개 배포 예정</a:t>
             </a:r>
           </a:p>
         </p:txBody>
